--- a/production/ACT_4.pptx
+++ b/production/ACT_4.pptx
@@ -2,30 +2,30 @@
 <file path=ppt/presentation.xml><?xml version="1.0" encoding="utf-8"?>
 <p:presentation xmlns:p="http://schemas.openxmlformats.org/presentationml/2006/main">
   <p:sldMasterIdLst>
-    <p:sldMasterId xmlns:r="http://schemas.openxmlformats.org/officeDocument/2006/relationships" id="2147483648" r:id="Rca15fb5863314fd2"/>
+    <p:sldMasterId xmlns:r="http://schemas.openxmlformats.org/officeDocument/2006/relationships" id="2147483648" r:id="R6b40b168f1d244a5"/>
   </p:sldMasterIdLst>
   <p:notesMasterIdLst>
-    <p:notesMasterId xmlns:r="http://schemas.openxmlformats.org/officeDocument/2006/relationships" r:id="Ra9828921ed3f4933"/>
+    <p:notesMasterId xmlns:r="http://schemas.openxmlformats.org/officeDocument/2006/relationships" r:id="R7786023421954f7c"/>
   </p:notesMasterIdLst>
   <p:sldIdLst>
-    <p:sldId xmlns:r="http://schemas.openxmlformats.org/officeDocument/2006/relationships" id="256" r:id="R8aaf4aaddd9b421a"/>
-    <p:sldId xmlns:r="http://schemas.openxmlformats.org/officeDocument/2006/relationships" id="257" r:id="R173aca6819184344"/>
-    <p:sldId xmlns:r="http://schemas.openxmlformats.org/officeDocument/2006/relationships" id="258" r:id="R591de2d6a9c64c0d"/>
-    <p:sldId xmlns:r="http://schemas.openxmlformats.org/officeDocument/2006/relationships" id="259" r:id="R0db2a86e00334f02"/>
-    <p:sldId xmlns:r="http://schemas.openxmlformats.org/officeDocument/2006/relationships" id="260" r:id="R76e0471a1ee54f58"/>
-    <p:sldId xmlns:r="http://schemas.openxmlformats.org/officeDocument/2006/relationships" id="261" r:id="Rb9e420b188c64517"/>
-    <p:sldId xmlns:r="http://schemas.openxmlformats.org/officeDocument/2006/relationships" id="262" r:id="R4ebf1ae9a2544266"/>
-    <p:sldId xmlns:r="http://schemas.openxmlformats.org/officeDocument/2006/relationships" id="263" r:id="Rc22785d42b754617"/>
-    <p:sldId xmlns:r="http://schemas.openxmlformats.org/officeDocument/2006/relationships" id="264" r:id="R908d93f863e3419e"/>
-    <p:sldId xmlns:r="http://schemas.openxmlformats.org/officeDocument/2006/relationships" id="265" r:id="Raab159d86e7f4143"/>
-    <p:sldId xmlns:r="http://schemas.openxmlformats.org/officeDocument/2006/relationships" id="266" r:id="R31b1a161cc724938"/>
-    <p:sldId xmlns:r="http://schemas.openxmlformats.org/officeDocument/2006/relationships" id="267" r:id="R6797367874bb4ca3"/>
-    <p:sldId xmlns:r="http://schemas.openxmlformats.org/officeDocument/2006/relationships" id="268" r:id="R4d74cc7e879a488b"/>
-    <p:sldId xmlns:r="http://schemas.openxmlformats.org/officeDocument/2006/relationships" id="269" r:id="Rf2cceb5a16c9463c"/>
-    <p:sldId xmlns:r="http://schemas.openxmlformats.org/officeDocument/2006/relationships" id="270" r:id="Re7ab8c1a87c24d5a"/>
-    <p:sldId xmlns:r="http://schemas.openxmlformats.org/officeDocument/2006/relationships" id="271" r:id="Raf5a67c2896f4bd0"/>
-    <p:sldId xmlns:r="http://schemas.openxmlformats.org/officeDocument/2006/relationships" id="272" r:id="R0fe241e8e8cb4a8d"/>
-    <p:sldId xmlns:r="http://schemas.openxmlformats.org/officeDocument/2006/relationships" id="273" r:id="Racec1e859c7f41af"/>
+    <p:sldId xmlns:r="http://schemas.openxmlformats.org/officeDocument/2006/relationships" id="256" r:id="R3257151a61304768"/>
+    <p:sldId xmlns:r="http://schemas.openxmlformats.org/officeDocument/2006/relationships" id="257" r:id="R7de5ec5bba8b4b34"/>
+    <p:sldId xmlns:r="http://schemas.openxmlformats.org/officeDocument/2006/relationships" id="258" r:id="R3bda84a2a7bb4fa5"/>
+    <p:sldId xmlns:r="http://schemas.openxmlformats.org/officeDocument/2006/relationships" id="259" r:id="Ra35db27ebbd049a4"/>
+    <p:sldId xmlns:r="http://schemas.openxmlformats.org/officeDocument/2006/relationships" id="260" r:id="R18c98f908aa34fbd"/>
+    <p:sldId xmlns:r="http://schemas.openxmlformats.org/officeDocument/2006/relationships" id="261" r:id="R39d7109830a14fdd"/>
+    <p:sldId xmlns:r="http://schemas.openxmlformats.org/officeDocument/2006/relationships" id="262" r:id="R102b592e9f334c43"/>
+    <p:sldId xmlns:r="http://schemas.openxmlformats.org/officeDocument/2006/relationships" id="263" r:id="R1d9183dfd25a4744"/>
+    <p:sldId xmlns:r="http://schemas.openxmlformats.org/officeDocument/2006/relationships" id="264" r:id="R4df2321c64954a84"/>
+    <p:sldId xmlns:r="http://schemas.openxmlformats.org/officeDocument/2006/relationships" id="265" r:id="R9f2aaced60dd47ec"/>
+    <p:sldId xmlns:r="http://schemas.openxmlformats.org/officeDocument/2006/relationships" id="266" r:id="Rb08faee737fe4e60"/>
+    <p:sldId xmlns:r="http://schemas.openxmlformats.org/officeDocument/2006/relationships" id="267" r:id="R15380c17f7cc4ff4"/>
+    <p:sldId xmlns:r="http://schemas.openxmlformats.org/officeDocument/2006/relationships" id="268" r:id="Rbc6fae68dba547dc"/>
+    <p:sldId xmlns:r="http://schemas.openxmlformats.org/officeDocument/2006/relationships" id="269" r:id="R1a3bba41101c42e7"/>
+    <p:sldId xmlns:r="http://schemas.openxmlformats.org/officeDocument/2006/relationships" id="270" r:id="R5731dfa887ce44d7"/>
+    <p:sldId xmlns:r="http://schemas.openxmlformats.org/officeDocument/2006/relationships" id="271" r:id="R1616a3561bdb4ecf"/>
+    <p:sldId xmlns:r="http://schemas.openxmlformats.org/officeDocument/2006/relationships" id="272" r:id="R06b134e51800473c"/>
+    <p:sldId xmlns:r="http://schemas.openxmlformats.org/officeDocument/2006/relationships" id="273" r:id="Rd13b1a9bb84a4466"/>
   </p:sldIdLst>
   <p:sldSz cx="12192000" cy="6858000"/>
   <p:notesSz cx="6858000" cy="9144000"/>
@@ -3774,12 +3774,7 @@
           </a:p>
           <a:p xmlns:a="http://schemas.openxmlformats.org/drawingml/2006/main">
             <a:r>
-              <a:t>**Slide ID:**</a:t>
-            </a:r>
-          </a:p>
-          <a:p xmlns:a="http://schemas.openxmlformats.org/drawingml/2006/main">
-            <a:r>
-              <a:t>S72</a:t>
+              <a:t>Slide ID: S72</a:t>
             </a:r>
           </a:p>
           <a:p xmlns:a="http://schemas.openxmlformats.org/drawingml/2006/main">
@@ -3789,12 +3784,7 @@
           </a:p>
           <a:p xmlns:a="http://schemas.openxmlformats.org/drawingml/2006/main">
             <a:r>
-              <a:t>**Working Title:**</a:t>
-            </a:r>
-          </a:p>
-          <a:p xmlns:a="http://schemas.openxmlformats.org/drawingml/2006/main">
-            <a:r>
-              <a:t>Project와 환경이 바뀌면 검증도 다시 본다</a:t>
+              <a:t>Working Title: Project와 환경이 바뀌면 검증도 다시 본다</a:t>
             </a:r>
           </a:p>
           <a:p xmlns:a="http://schemas.openxmlformats.org/drawingml/2006/main">
@@ -3804,12 +3794,7 @@
           </a:p>
           <a:p xmlns:a="http://schemas.openxmlformats.org/drawingml/2006/main">
             <a:r>
-              <a:t>**ACT / Section:**</a:t>
-            </a:r>
-          </a:p>
-          <a:p xmlns:a="http://schemas.openxmlformats.org/drawingml/2006/main">
-            <a:r>
-              <a:t>ACT 4 / 4G  C++ VISION TRANSFER  /  4H DISCUSSION &amp; TRANSITION</a:t>
+              <a:t>ACT / Section: ACT 4 / 4G  C++ VISION TRANSFER  /  4H DISCUSSION &amp; TRANSITION</a:t>
             </a:r>
           </a:p>
           <a:p xmlns:a="http://schemas.openxmlformats.org/drawingml/2006/main">
@@ -3819,12 +3804,7 @@
           </a:p>
           <a:p xmlns:a="http://schemas.openxmlformats.org/drawingml/2006/main">
             <a:r>
-              <a:t>**Allocated Time:**</a:t>
-            </a:r>
-          </a:p>
-          <a:p xmlns:a="http://schemas.openxmlformats.org/drawingml/2006/main">
-            <a:r>
-              <a:t>20 minutes</a:t>
+              <a:t>Allocated Time: 20 minutes</a:t>
             </a:r>
           </a:p>
           <a:p xmlns:a="http://schemas.openxmlformats.org/drawingml/2006/main">
@@ -3834,12 +3814,7 @@
           </a:p>
           <a:p xmlns:a="http://schemas.openxmlformats.org/drawingml/2006/main">
             <a:r>
-              <a:t>**Mode Split:**</a:t>
-            </a:r>
-          </a:p>
-          <a:p xmlns:a="http://schemas.openxmlformats.org/drawingml/2006/main">
-            <a:r>
-              <a:t>Case 7분 + Reflection 2분 + Q&amp;A 7분 + Transition 4분</a:t>
+              <a:t>Mode Split: Case 7분 + Reflection 2분 + Q&amp;A 7분 + Transition 4분</a:t>
             </a:r>
           </a:p>
           <a:p xmlns:a="http://schemas.openxmlformats.org/drawingml/2006/main">
@@ -3849,12 +3824,7 @@
           </a:p>
           <a:p xmlns:a="http://schemas.openxmlformats.org/drawingml/2006/main">
             <a:r>
-              <a:t>**Primary Message:**</a:t>
-            </a:r>
-          </a:p>
-          <a:p xmlns:a="http://schemas.openxmlformats.org/drawingml/2006/main">
-            <a:r>
-              <a:t>Project나 환경이 바뀌면 기존 performance 가정과 verification 절차가 여전히 맞는지 다시 확인한다. 반복되는 마찰은 관찰하고 원인을 찾아 관련 layer를 바꾼 뒤 benchmark와 regression으로 확인한다.</a:t>
+              <a:t>Primary Message: Project나 환경이 바뀌면 기존 performance 가정과 verification 절차가 여전히 맞는지 다시 확인한다. 반복되는 마찰은 관찰하고 원인을 찾아 관련 layer를 바꾼 뒤 benchmark와 regression으로 확인한다.</a:t>
             </a:r>
           </a:p>
           <a:p xmlns:a="http://schemas.openxmlformats.org/drawingml/2006/main">
@@ -3864,12 +3834,7 @@
           </a:p>
           <a:p xmlns:a="http://schemas.openxmlformats.org/drawingml/2006/main">
             <a:r>
-              <a:t>**Opening Question:**</a:t>
-            </a:r>
-          </a:p>
-          <a:p xmlns:a="http://schemas.openxmlformats.org/drawingml/2006/main">
-            <a:r>
-              <a:t>“같은 문제가 두 번째로 생기면 다시 Prompt를 고칠까, System을 살펴볼까?”</a:t>
+              <a:t>Opening Question: “같은 문제가 두 번째로 생기면 다시 Prompt를 고칠까, System을 살펴볼까?”</a:t>
             </a:r>
           </a:p>
           <a:p xmlns:a="http://schemas.openxmlformats.org/drawingml/2006/main">
@@ -3879,7 +3844,12 @@
           </a:p>
           <a:p xmlns:a="http://schemas.openxmlformats.org/drawingml/2006/main">
             <a:r>
-              <a:t>**Speaker Flow:**</a:t>
+              <a:t>Speaker Flow:</a:t>
+            </a:r>
+          </a:p>
+          <a:p xmlns:a="http://schemas.openxmlformats.org/drawingml/2006/main">
+            <a:r>
+              <a:t/>
             </a:r>
           </a:p>
           <a:p xmlns:a="http://schemas.openxmlformats.org/drawingml/2006/main">
@@ -3889,12 +3859,12 @@
           </a:p>
           <a:p xmlns:a="http://schemas.openxmlformats.org/drawingml/2006/main">
             <a:r>
-              <a:t>2. (2:00–4:30 / Case) 첫 두 행을 가리킨다. 기존 판단이 어떤 조건에서 맞았는지, 입력과 실행 조건이 비교 가능한지 묻는다. 관찰된 성능 저하나 숫자를 만들지 않는다.</a:t>
-            </a:r>
-          </a:p>
-          <a:p xmlns:a="http://schemas.openxmlformats.org/drawingml/2006/main">
-            <a:r>
-              <a:t>3. (4:30–7:00 / Case) 기능 계약 행에서 성능과 함께 다시 확인할 동작 범위를 살핀다. 반복 신호→원인 Layer 조사→관련 시스템 변경→Benchmark/Regression 재확인으로 연결한다.</a:t>
+              <a:t>2. (2:00–4:30 / Case) 그림의 입력·코드·장치와 기존 가정·측정 조건 질문을 가리킨다. 기존 판단이 어떤 조건에서 맞았는지, 입력과 실행 조건이 비교 가능한지 묻는다. 관찰된 성능 저하나 숫자를 만들지 않는다.</a:t>
+            </a:r>
+          </a:p>
+          <a:p xmlns:a="http://schemas.openxmlformats.org/drawingml/2006/main">
+            <a:r>
+              <a:t>3. (4:30–7:00 / Case) 출력 그림과 기능 계약 질문에서 성능과 함께 다시 확인할 동작 범위를 살핀다. 반복 신호→원인 Layer 조사→관련 시스템 변경→Benchmark/Regression 재확인으로 연결한다.</a:t>
             </a:r>
           </a:p>
           <a:p xmlns:a="http://schemas.openxmlformats.org/drawingml/2006/main">
@@ -3909,7 +3879,7 @@
           </a:p>
           <a:p xmlns:a="http://schemas.openxmlformats.org/drawingml/2006/main">
             <a:r>
-              <a:t>6. (16:00–20:00 / Transition) 16분에 질문을 마감한다. 가정→측정 조건→기능 계약 세 행을 전체 Story의 Context→Harness→Loop와 연결하고 S73의 여정 회수로 이동한다.</a:t>
+              <a:t>6. (16:00–20:00 / Transition) 16분에 질문을 마감한다. 가정→측정 조건→기능 계약 세 질문을 전체 Story의 Context→Harness→Loop와 연결하고 S73의 여정 회수로 이동한다.</a:t>
             </a:r>
           </a:p>
           <a:p xmlns:a="http://schemas.openxmlformats.org/drawingml/2006/main">
@@ -3919,12 +3889,7 @@
           </a:p>
           <a:p xmlns:a="http://schemas.openxmlformats.org/drawingml/2006/main">
             <a:r>
-              <a:t>**Evidence / Source:**</a:t>
-            </a:r>
-          </a:p>
-          <a:p xmlns:a="http://schemas.openxmlformats.org/drawingml/2006/main">
-            <a:r>
-              <a:t>BEAT-059 / TRANS-012  ·  teaching transfer, not observed C++ incident</a:t>
+              <a:t>Evidence / Source: BEAT-059 / TRANS-012  ·  teaching transfer, not observed C++ incident 삽화 출처: prototype/image-illustration-pilot/assets/S72.png, built-in image_gen, 2026-10-18. 생성 프롬프트: prototype/image-illustration-pilot/PROMPTS.md. 실제 화면·현장 사진·관찰 자료가 아니다.</a:t>
             </a:r>
           </a:p>
           <a:p xmlns:a="http://schemas.openxmlformats.org/drawingml/2006/main">
@@ -3934,12 +3899,7 @@
           </a:p>
           <a:p xmlns:a="http://schemas.openxmlformats.org/drawingml/2006/main">
             <a:r>
-              <a:t>**Claim Boundary:**</a:t>
-            </a:r>
-          </a:p>
-          <a:p xmlns:a="http://schemas.openxmlformats.org/drawingml/2006/main">
-            <a:r>
-              <a:t>COURSE MODEL / C++ VISION TRANSFER. Toolchain, CUDA/GPU architecture, build/benchmark configuration은 hypothetical teaching context이며 실제 Demo history가 아니다. 구체적인 Windows/shell/IDE/hardware setup을 주장하지 않는다.</a:t>
+              <a:t>Claim Boundary: COURSE MODEL / C++ VISION TRANSFER. Toolchain, CUDA/GPU architecture, build/benchmark configuration은 hypothetical teaching context이며 실제 Demo history가 아니다. 구체적인 Windows/shell/IDE/hardware setup을 주장하지 않는다.</a:t>
             </a:r>
           </a:p>
           <a:p xmlns:a="http://schemas.openxmlformats.org/drawingml/2006/main">
@@ -3949,12 +3909,7 @@
           </a:p>
           <a:p xmlns:a="http://schemas.openxmlformats.org/drawingml/2006/main">
             <a:r>
-              <a:t>**Beginner Explanation:**</a:t>
-            </a:r>
-          </a:p>
-          <a:p xmlns:a="http://schemas.openxmlformats.org/drawingml/2006/main">
-            <a:r>
-              <a:t>같은 문제가 반복되면 Prompt 외에도 Project와 workflow를 살핀다.</a:t>
+              <a:t>Beginner Explanation: 같은 문제가 반복되면 Prompt 외에도 Project와 workflow를 살핀다.</a:t>
             </a:r>
           </a:p>
           <a:p xmlns:a="http://schemas.openxmlformats.org/drawingml/2006/main">
@@ -3964,12 +3919,7 @@
           </a:p>
           <a:p xmlns:a="http://schemas.openxmlformats.org/drawingml/2006/main">
             <a:r>
-              <a:t>**Advanced Insight:**</a:t>
-            </a:r>
-          </a:p>
-          <a:p xmlns:a="http://schemas.openxmlformats.org/drawingml/2006/main">
-            <a:r>
-              <a:t>Project/environment 변화가 verification assumptions에 미치는 영향을 평가한다.</a:t>
+              <a:t>Advanced Insight: Project/environment 변화가 verification assumptions에 미치는 영향을 평가한다.</a:t>
             </a:r>
           </a:p>
           <a:p xmlns:a="http://schemas.openxmlformats.org/drawingml/2006/main">
@@ -3979,12 +3929,7 @@
           </a:p>
           <a:p xmlns:a="http://schemas.openxmlformats.org/drawingml/2006/main">
             <a:r>
-              <a:t>**C++ Vision Bridge:**</a:t>
-            </a:r>
-          </a:p>
-          <a:p xmlns:a="http://schemas.openxmlformats.org/drawingml/2006/main">
-            <a:r>
-              <a:t>Primary bridge. 변화한 조건에서 기존 tuning 가정과 benchmark/regression 조건을 다시 확인하는 engineering pattern만 전한다.</a:t>
+              <a:t>C++ Vision Bridge: Primary bridge. 변화한 조건에서 기존 tuning 가정과 benchmark/regression 조건을 다시 확인하는 engineering pattern만 전한다.</a:t>
             </a:r>
           </a:p>
           <a:p xmlns:a="http://schemas.openxmlformats.org/drawingml/2006/main">
@@ -3994,12 +3939,7 @@
           </a:p>
           <a:p xmlns:a="http://schemas.openxmlformats.org/drawingml/2006/main">
             <a:r>
-              <a:t>**Demo Operation:**</a:t>
-            </a:r>
-          </a:p>
-          <a:p xmlns:a="http://schemas.openxmlformats.org/drawingml/2006/main">
-            <a:r>
-              <a:t>정적 화면과 speaker-led highlighting을 사용한다. 화면에는 세 확인 대상과 성찰 질문을 두고, 20분 운영표는 Notes에만 둔다. Live 프로젝트·제품 실행·애니메이션 의존 없음.</a:t>
+              <a:t>Demo Operation: 정적 화면과 speaker-led highlighting을 사용한다. 화면에는 세 확인 대상과 성찰 질문을 두고, 20분 운영표는 Notes에만 둔다. Live 프로젝트·제품 실행·애니메이션 의존 없음. 정적 삽화의 입력→처리 코드→실행 장치→출력을 차례로 가리킨다. 황색 장치·설정 표시는 검토할 조건의 변화이며 실패 원인이 확정됐다는 뜻이 아니다.</a:t>
             </a:r>
           </a:p>
           <a:p xmlns:a="http://schemas.openxmlformats.org/drawingml/2006/main">
@@ -4009,12 +3949,7 @@
           </a:p>
           <a:p xmlns:a="http://schemas.openxmlformats.org/drawingml/2006/main">
             <a:r>
-              <a:t>**Audience Interaction:**</a:t>
-            </a:r>
-          </a:p>
-          <a:p xmlns:a="http://schemas.openxmlformats.org/drawingml/2006/main">
-            <a:r>
-              <a:t>7–9분 개인 Reflection은 답변·공유 없이 진행한다. 9–16분 Q&amp;A에서는 실제 회사 환경의 검증되지 않은 해결책을 단정하지 않고 어떤 조건을 확인해야 하는지로 답한다.</a:t>
+              <a:t>Audience Interaction: 7–9분 개인 Reflection은 답변·공유 없이 진행한다. 9–16분 Q&amp;A에서는 실제 회사 환경의 검증되지 않은 해결책을 단정하지 않고 어떤 조건을 확인해야 하는지로 답한다.</a:t>
             </a:r>
           </a:p>
           <a:p xmlns:a="http://schemas.openxmlformats.org/drawingml/2006/main">
@@ -4024,12 +3959,7 @@
           </a:p>
           <a:p xmlns:a="http://schemas.openxmlformats.org/drawingml/2006/main">
             <a:r>
-              <a:t>**Transition:**</a:t>
-            </a:r>
-          </a:p>
-          <a:p xmlns:a="http://schemas.openxmlformats.org/drawingml/2006/main">
-            <a:r>
-              <a:t>“이제 기능이 아니라, 처음의 문제에서 Loop까지 이어진 Story를 다시 연결해 보겠습니다.” ACT 5 S73으로 넘긴다.</a:t>
+              <a:t>Transition: “이제 기능이 아니라, 처음의 문제에서 Loop까지 이어진 Story를 다시 연결해 보겠습니다.” ACT 5 S73으로 넘긴다.</a:t>
             </a:r>
           </a:p>
           <a:p xmlns:a="http://schemas.openxmlformats.org/drawingml/2006/main">
@@ -4039,12 +3969,7 @@
           </a:p>
           <a:p xmlns:a="http://schemas.openxmlformats.org/drawingml/2006/main">
             <a:r>
-              <a:t>**Time Management:**</a:t>
-            </a:r>
-          </a:p>
-          <a:p xmlns:a="http://schemas.openxmlformats.org/drawingml/2006/main">
-            <a:r>
-              <a:t>0–7 Case 7분, 7–9 Reflection 2분, 9–16 Q&amp;A 7분, 16–20 Transition 4분으로 20분을 유지한다. Cutoff cue: “이 질문은 여기까지 정리하고, 이제 처음 문제부터 지금의 Loop까지 연결해 보겠습니다.” 실제 20분 리허설은 수행하지 않았다.</a:t>
+              <a:t>Time Management: 0–7 Case 7분, 7–9 Reflection 2분, 9–16 Q&amp;A 7분, 16–20 Transition 4분으로 20분을 유지한다. Cutoff cue: “이 질문은 여기까지 정리하고, 이제 처음 문제부터 지금의 Loop까지 연결해 보겠습니다.” 실제 20분 리허설은 수행하지 않았다. 0–2분 전체 그림/변경 표식, 2–4:30분 입력·코드·장치의 가정과 비교 조건, 4:30–7분 출력·기능 계약을 설명한다. 이후 7–9분 Reflection, 9–16분 Q&amp;A, 16–20분 Transition을 유지한다.</a:t>
             </a:r>
           </a:p>
           <a:p xmlns:a="http://schemas.openxmlformats.org/drawingml/2006/main">
@@ -4054,12 +3979,7 @@
           </a:p>
           <a:p xmlns:a="http://schemas.openxmlformats.org/drawingml/2006/main">
             <a:r>
-              <a:t>**Fallback:**</a:t>
-            </a:r>
-          </a:p>
-          <a:p xmlns:a="http://schemas.openxmlformats.org/drawingml/2006/main">
-            <a:r>
-              <a:t>정적 PPT/PNG를 기본 경로로 사용한다. Q&amp;A가 없으면 ①“예전 Benchmark와 비교하기 전에 어떤 조건을 맞춰야 할까요?” ②“성능이 달라졌을 때 기능 계약은 무엇으로 다시 확인할까요?” ③“두 번째로 같은 문제가 생기면 Prompt 외에 무엇을 살펴볼까요?” 중 하나씩 선택한다. 응답을 요구하지 않고 기존 세 행의 질문 안에서 강사가 짧게 해설한다.</a:t>
+              <a:t>Fallback: 정적 PPT/PNG를 기본 경로로 사용한다. Q&amp;A가 없으면 ①“예전 Benchmark와 비교하기 전에 어떤 조건을 맞춰야 할까요?” ②“성능이 달라졌을 때 기능 계약은 무엇으로 다시 확인할까요?” ③“두 번째로 같은 문제가 생기면 Prompt 외에 무엇을 살펴볼까요?” 중 하나씩 선택한다. 응답을 요구하지 않고 기존 세 질문의 범위에서 강사가 짧게 해설한다. 정적 파일: production/preview/act4/S72.png 및 production/preview/full/S72.png.</a:t>
             </a:r>
           </a:p>
           <a:p xmlns:a="http://schemas.openxmlformats.org/drawingml/2006/main">
@@ -4069,12 +3989,7 @@
           </a:p>
           <a:p xmlns:a="http://schemas.openxmlformats.org/drawingml/2006/main">
             <a:r>
-              <a:t>**Validation Status:**</a:t>
-            </a:r>
-          </a:p>
-          <a:p xmlns:a="http://schemas.openxmlformats.org/drawingml/2006/main">
-            <a:r>
-              <a:t>REVIEWED — 원문·Claim 경계, 화면의 설명 순서와 운영 지침을 대조했다. 최종 PPT/Notes/PNG 대조 결과는 production/evaluation/FULL_DECK_PRESENTATION_REVISION.md에 기록한다. Windows PowerPoint, 발표 PC 글꼴, 교육장 투사, 실제 시간 리허설은 UNVERIFIED.</a:t>
+              <a:t>Validation Status: REVIEWED — 사용자 승인 삽화를 전체 제작본에 반영했다. PPT/Notes/PNG 대조와 S72 잘림 재검토 결과는 production/evaluation/FULL_DECK_IMAGE_INTEGRATION.md에 기록한다. Windows PowerPoint, 발표 PC 글꼴, 교육장 투사, 실제 시간 리허설은 UNVERIFIED.</a:t>
             </a:r>
           </a:p>
         </p:txBody>
@@ -7041,7 +6956,7 @@
           <p:cNvPr id="3" name="Title">
             <a:extLst xmlns:a="http://schemas.openxmlformats.org/drawingml/2006/main">
               <a:ext uri="{FF2B5EF4-FFF2-40B4-BE49-F238E27FC236}">
-                <a16:creationId xmlns:a16="http://schemas.microsoft.com/office/drawing/2014/main" id="{A62E43BD-18DA-4D95-B5BA-9932A4243917}"/>
+                <a16:creationId xmlns:a16="http://schemas.microsoft.com/office/drawing/2014/main" id="{3DA29F06-16A8-4C26-8A72-6FB275823F07}"/>
               </a:ext>
             </a:extLst>
           </p:cNvPr>
@@ -7270,7 +7185,7 @@
           <p:cNvPr id="2" name="Subtitle">
             <a:extLst xmlns:a="http://schemas.openxmlformats.org/drawingml/2006/main">
               <a:ext uri="{FF2B5EF4-FFF2-40B4-BE49-F238E27FC236}">
-                <a16:creationId xmlns:a16="http://schemas.microsoft.com/office/drawing/2014/main" id="{E0D624ED-4002-40D3-B755-500D92A30898}"/>
+                <a16:creationId xmlns:a16="http://schemas.microsoft.com/office/drawing/2014/main" id="{811CBD8C-5B75-4055-9766-36ABD2D42F89}"/>
               </a:ext>
             </a:extLst>
           </p:cNvPr>
@@ -7516,7 +7431,7 @@
           <p:cNvPr id="2" name="Section title">
             <a:extLst xmlns:a="http://schemas.openxmlformats.org/drawingml/2006/main">
               <a:ext uri="{FF2B5EF4-FFF2-40B4-BE49-F238E27FC236}">
-                <a16:creationId xmlns:a16="http://schemas.microsoft.com/office/drawing/2014/main" id="{61C4AD2B-9686-42BF-A4CE-C652FFDFB953}"/>
+                <a16:creationId xmlns:a16="http://schemas.microsoft.com/office/drawing/2014/main" id="{EBBBF5AC-FA87-4F8E-9392-781D6B98D142}"/>
               </a:ext>
             </a:extLst>
           </p:cNvPr>
@@ -7762,7 +7677,7 @@
           <p:cNvPr id="3" name="Title">
             <a:extLst xmlns:a="http://schemas.openxmlformats.org/drawingml/2006/main">
               <a:ext uri="{FF2B5EF4-FFF2-40B4-BE49-F238E27FC236}">
-                <a16:creationId xmlns:a16="http://schemas.microsoft.com/office/drawing/2014/main" id="{2C7803C0-7783-4FCE-85BB-1C2368257BED}"/>
+                <a16:creationId xmlns:a16="http://schemas.microsoft.com/office/drawing/2014/main" id="{FB0836DD-B2DB-413B-BCA7-8B6DAFFCA2A4}"/>
               </a:ext>
             </a:extLst>
           </p:cNvPr>
@@ -7991,7 +7906,7 @@
           <p:cNvPr id="2" name="Body">
             <a:extLst xmlns:a="http://schemas.openxmlformats.org/drawingml/2006/main">
               <a:ext uri="{FF2B5EF4-FFF2-40B4-BE49-F238E27FC236}">
-                <a16:creationId xmlns:a16="http://schemas.microsoft.com/office/drawing/2014/main" id="{B3F19A7B-4688-4AB5-AB94-8DBCC76C1C65}"/>
+                <a16:creationId xmlns:a16="http://schemas.microsoft.com/office/drawing/2014/main" id="{49F05725-1F20-4704-844F-6B9BC5CB6FD9}"/>
               </a:ext>
             </a:extLst>
           </p:cNvPr>
@@ -8237,7 +8152,7 @@
           <p:cNvPr id="4" name="Title">
             <a:extLst xmlns:a="http://schemas.openxmlformats.org/drawingml/2006/main">
               <a:ext uri="{FF2B5EF4-FFF2-40B4-BE49-F238E27FC236}">
-                <a16:creationId xmlns:a16="http://schemas.microsoft.com/office/drawing/2014/main" id="{CF6EFC26-93CF-43C8-8396-3EDD8876CB7A}"/>
+                <a16:creationId xmlns:a16="http://schemas.microsoft.com/office/drawing/2014/main" id="{B0F53006-C28E-4EC2-8AD7-2E86E1D68F6A}"/>
               </a:ext>
             </a:extLst>
           </p:cNvPr>
@@ -8466,7 +8381,7 @@
           <p:cNvPr id="2" name="Left column">
             <a:extLst xmlns:a="http://schemas.openxmlformats.org/drawingml/2006/main">
               <a:ext uri="{FF2B5EF4-FFF2-40B4-BE49-F238E27FC236}">
-                <a16:creationId xmlns:a16="http://schemas.microsoft.com/office/drawing/2014/main" id="{8432808E-B277-4BC6-A59B-34FBEA7885E2}"/>
+                <a16:creationId xmlns:a16="http://schemas.microsoft.com/office/drawing/2014/main" id="{EF07158B-4FD2-45EC-ADF9-112DC1728E4C}"/>
               </a:ext>
             </a:extLst>
           </p:cNvPr>
@@ -8695,7 +8610,7 @@
           <p:cNvPr id="3" name="Right column">
             <a:extLst xmlns:a="http://schemas.openxmlformats.org/drawingml/2006/main">
               <a:ext uri="{FF2B5EF4-FFF2-40B4-BE49-F238E27FC236}">
-                <a16:creationId xmlns:a16="http://schemas.microsoft.com/office/drawing/2014/main" id="{11F2609D-1033-45CE-B8D3-47719CF22C79}"/>
+                <a16:creationId xmlns:a16="http://schemas.microsoft.com/office/drawing/2014/main" id="{6DC33407-8D5B-44C3-80E8-0FEC8021BB34}"/>
               </a:ext>
             </a:extLst>
           </p:cNvPr>
@@ -8941,7 +8856,7 @@
           <p:cNvPr id="3" name="Title">
             <a:extLst xmlns:a="http://schemas.openxmlformats.org/drawingml/2006/main">
               <a:ext uri="{FF2B5EF4-FFF2-40B4-BE49-F238E27FC236}">
-                <a16:creationId xmlns:a16="http://schemas.microsoft.com/office/drawing/2014/main" id="{B925C36F-D4AB-40A0-99E0-8C369F4999E5}"/>
+                <a16:creationId xmlns:a16="http://schemas.microsoft.com/office/drawing/2014/main" id="{925651EB-1531-4FD3-BEFD-D77B253934D3}"/>
               </a:ext>
             </a:extLst>
           </p:cNvPr>
@@ -9170,7 +9085,7 @@
           <p:cNvPr id="2" name="Left column">
             <a:extLst xmlns:a="http://schemas.openxmlformats.org/drawingml/2006/main">
               <a:ext uri="{FF2B5EF4-FFF2-40B4-BE49-F238E27FC236}">
-                <a16:creationId xmlns:a16="http://schemas.microsoft.com/office/drawing/2014/main" id="{8EB6B7E6-001D-4159-880C-0C37C3A5D9C8}"/>
+                <a16:creationId xmlns:a16="http://schemas.microsoft.com/office/drawing/2014/main" id="{27BF8E69-3CFA-471A-B02A-55CE468297D2}"/>
               </a:ext>
             </a:extLst>
           </p:cNvPr>
@@ -9437,12 +9352,12 @@
   </p:cSld>
   <p:clrMap bg1="lt1" tx1="dk1" bg2="lt2" tx2="dk2" accent1="accent1" accent2="accent2" accent3="accent3" accent4="accent4" accent5="accent5" accent6="accent6" hlink="hlink" folHlink="folHlink"/>
   <p:sldLayoutIdLst>
-    <p:sldLayoutId xmlns:r="http://schemas.openxmlformats.org/officeDocument/2006/relationships" id="2147483649" r:id="Rf1890fcc7e8c4b9d"/>
-    <p:sldLayoutId xmlns:r="http://schemas.openxmlformats.org/officeDocument/2006/relationships" id="2147483650" r:id="Rf9c0e978194e4f0f"/>
-    <p:sldLayoutId xmlns:r="http://schemas.openxmlformats.org/officeDocument/2006/relationships" id="2147483651" r:id="Ra0b7f9801cf4425a"/>
-    <p:sldLayoutId xmlns:r="http://schemas.openxmlformats.org/officeDocument/2006/relationships" id="2147483652" r:id="R1a6ea3911ad04eca"/>
-    <p:sldLayoutId xmlns:r="http://schemas.openxmlformats.org/officeDocument/2006/relationships" id="2147483653" r:id="R9f1752eb64c940fb"/>
-    <p:sldLayoutId xmlns:r="http://schemas.openxmlformats.org/officeDocument/2006/relationships" id="2147483654" r:id="R5acc0198a80f46d0"/>
+    <p:sldLayoutId xmlns:r="http://schemas.openxmlformats.org/officeDocument/2006/relationships" id="2147483649" r:id="R32b62ff314154f62"/>
+    <p:sldLayoutId xmlns:r="http://schemas.openxmlformats.org/officeDocument/2006/relationships" id="2147483650" r:id="R3e80f07d47fd4ba3"/>
+    <p:sldLayoutId xmlns:r="http://schemas.openxmlformats.org/officeDocument/2006/relationships" id="2147483651" r:id="R130f9241913f4099"/>
+    <p:sldLayoutId xmlns:r="http://schemas.openxmlformats.org/officeDocument/2006/relationships" id="2147483652" r:id="R7f4ca49c3193454d"/>
+    <p:sldLayoutId xmlns:r="http://schemas.openxmlformats.org/officeDocument/2006/relationships" id="2147483653" r:id="R3b25adcb62924d67"/>
+    <p:sldLayoutId xmlns:r="http://schemas.openxmlformats.org/officeDocument/2006/relationships" id="2147483654" r:id="R2069ab5e617b44c2"/>
   </p:sldLayoutIdLst>
   <p:txStyles>
     <p:titleStyle>
@@ -9993,7 +9908,7 @@
           <p:cNvPr id="18" name="ACT 4 · 확인된 제품 결과">
             <a:extLst xmlns:a="http://schemas.openxmlformats.org/drawingml/2006/main">
               <a:ext uri="{FF2B5EF4-FFF2-40B4-BE49-F238E27FC236}">
-                <a16:creationId xmlns:a16="http://schemas.microsoft.com/office/drawing/2014/main" id="{648D9969-B05D-471D-9696-38BFA6C8124B}"/>
+                <a16:creationId xmlns:a16="http://schemas.microsoft.com/office/drawing/2014/main" id="{10512AB2-B22E-4D6B-8DBD-9FB4DF36CE67}"/>
               </a:ext>
             </a:extLst>
           </p:cNvPr>
@@ -10151,7 +10066,7 @@
           <p:cNvPr id="2" name="S55">
             <a:extLst xmlns:a="http://schemas.openxmlformats.org/drawingml/2006/main">
               <a:ext uri="{FF2B5EF4-FFF2-40B4-BE49-F238E27FC236}">
-                <a16:creationId xmlns:a16="http://schemas.microsoft.com/office/drawing/2014/main" id="{6DAD2D45-0BA1-434D-964B-C3BEC2EE04AE}"/>
+                <a16:creationId xmlns:a16="http://schemas.microsoft.com/office/drawing/2014/main" id="{D8C10507-41AA-49D8-8E77-5A5D8E956720}"/>
               </a:ext>
             </a:extLst>
           </p:cNvPr>
@@ -10309,7 +10224,7 @@
           <p:cNvPr id="3" name="여기까지는 잘 동작했다">
             <a:extLst xmlns:a="http://schemas.openxmlformats.org/drawingml/2006/main">
               <a:ext uri="{FF2B5EF4-FFF2-40B4-BE49-F238E27FC236}">
-                <a16:creationId xmlns:a16="http://schemas.microsoft.com/office/drawing/2014/main" id="{FD767F44-4004-4962-94C3-D3DE44501EA7}"/>
+                <a16:creationId xmlns:a16="http://schemas.microsoft.com/office/drawing/2014/main" id="{8C5E13DA-7776-4868-8807-6FC7D08C33EC}"/>
               </a:ext>
             </a:extLst>
           </p:cNvPr>
@@ -10467,7 +10382,7 @@
           <p:cNvPr id="4" name="">
             <a:extLst xmlns:a="http://schemas.openxmlformats.org/drawingml/2006/main">
               <a:ext uri="{FF2B5EF4-FFF2-40B4-BE49-F238E27FC236}">
-                <a16:creationId xmlns:a16="http://schemas.microsoft.com/office/drawing/2014/main" id="{B575F3FE-14EA-497B-85D5-F41B2405EA54}"/>
+                <a16:creationId xmlns:a16="http://schemas.microsoft.com/office/drawing/2014/main" id="{EB3113C2-DFD2-461B-8471-B6C7FEC6C79F}"/>
               </a:ext>
             </a:extLst>
           </p:cNvPr>
@@ -10498,7 +10413,7 @@
           <p:cNvPr id="5" name="STATE-04-PERF · image_statistics · 실제 기록 요약">
             <a:extLst xmlns:a="http://schemas.openxmlformats.org/drawingml/2006/main">
               <a:ext uri="{FF2B5EF4-FFF2-40B4-BE49-F238E27FC236}">
-                <a16:creationId xmlns:a16="http://schemas.microsoft.com/office/drawing/2014/main" id="{4F2D167B-B11E-47AD-BC2B-D19E54B2B594}"/>
+                <a16:creationId xmlns:a16="http://schemas.microsoft.com/office/drawing/2014/main" id="{E695BEFE-286C-4E1E-BD65-B8079557DD54}"/>
               </a:ext>
             </a:extLst>
           </p:cNvPr>
@@ -10656,7 +10571,7 @@
           <p:cNvPr id="6" name="기록된 입력·코드·환경의 결과이며, 뒤의 가상 사례와 별개다.">
             <a:extLst xmlns:a="http://schemas.openxmlformats.org/drawingml/2006/main">
               <a:ext uri="{FF2B5EF4-FFF2-40B4-BE49-F238E27FC236}">
-                <a16:creationId xmlns:a16="http://schemas.microsoft.com/office/drawing/2014/main" id="{956C27BD-9C7C-4302-BF9C-8141ECC27964}"/>
+                <a16:creationId xmlns:a16="http://schemas.microsoft.com/office/drawing/2014/main" id="{A201454B-CFED-497D-9855-F1858A534F9B}"/>
               </a:ext>
             </a:extLst>
           </p:cNvPr>
@@ -10814,7 +10729,7 @@
           <p:cNvPr id="7" name="작업을 맡기고, 결과를 확인할 수 있었다">
             <a:extLst xmlns:a="http://schemas.openxmlformats.org/drawingml/2006/main">
               <a:ext uri="{FF2B5EF4-FFF2-40B4-BE49-F238E27FC236}">
-                <a16:creationId xmlns:a16="http://schemas.microsoft.com/office/drawing/2014/main" id="{20AD0F4E-628E-476E-A973-BCD2A92BEFB2}"/>
+                <a16:creationId xmlns:a16="http://schemas.microsoft.com/office/drawing/2014/main" id="{2066FE73-AD2F-42C1-872A-64F7582BF0B3}"/>
               </a:ext>
             </a:extLst>
           </p:cNvPr>
@@ -10972,7 +10887,7 @@
           <p:cNvPr id="8" name="">
             <a:extLst xmlns:a="http://schemas.openxmlformats.org/drawingml/2006/main">
               <a:ext uri="{FF2B5EF4-FFF2-40B4-BE49-F238E27FC236}">
-                <a16:creationId xmlns:a16="http://schemas.microsoft.com/office/drawing/2014/main" id="{D019C776-5B57-48A1-897E-B793F21680A3}"/>
+                <a16:creationId xmlns:a16="http://schemas.microsoft.com/office/drawing/2014/main" id="{D0FF5BC8-CA1E-47BC-9F91-2F6033664E2C}"/>
               </a:ext>
             </a:extLst>
           </p:cNvPr>
@@ -11003,7 +10918,7 @@
           <p:cNvPr id="9" name="동작 계약">
             <a:extLst xmlns:a="http://schemas.openxmlformats.org/drawingml/2006/main">
               <a:ext uri="{FF2B5EF4-FFF2-40B4-BE49-F238E27FC236}">
-                <a16:creationId xmlns:a16="http://schemas.microsoft.com/office/drawing/2014/main" id="{7D78F9DA-3093-428C-9ED5-6EC4601D2F38}"/>
+                <a16:creationId xmlns:a16="http://schemas.microsoft.com/office/drawing/2014/main" id="{037DF208-7C3C-483D-86F3-ECAB26C76A96}"/>
               </a:ext>
             </a:extLst>
           </p:cNvPr>
@@ -11161,7 +11076,7 @@
           <p:cNvPr id="10" name="">
             <a:extLst xmlns:a="http://schemas.openxmlformats.org/drawingml/2006/main">
               <a:ext uri="{FF2B5EF4-FFF2-40B4-BE49-F238E27FC236}">
-                <a16:creationId xmlns:a16="http://schemas.microsoft.com/office/drawing/2014/main" id="{F8C8ED0F-E631-4C31-9146-50BF4361A455}"/>
+                <a16:creationId xmlns:a16="http://schemas.microsoft.com/office/drawing/2014/main" id="{A3129E03-0BED-4A8D-B895-9A3B5F3926F1}"/>
               </a:ext>
             </a:extLst>
           </p:cNvPr>
@@ -11192,7 +11107,7 @@
           <p:cNvPr id="11" name="테스트">
             <a:extLst xmlns:a="http://schemas.openxmlformats.org/drawingml/2006/main">
               <a:ext uri="{FF2B5EF4-FFF2-40B4-BE49-F238E27FC236}">
-                <a16:creationId xmlns:a16="http://schemas.microsoft.com/office/drawing/2014/main" id="{80FE4B73-3D94-429C-BC64-8125A7B43341}"/>
+                <a16:creationId xmlns:a16="http://schemas.microsoft.com/office/drawing/2014/main" id="{9120D229-C77E-49DF-9FDA-8BC1D7A08D01}"/>
               </a:ext>
             </a:extLst>
           </p:cNvPr>
@@ -11350,7 +11265,7 @@
           <p:cNvPr id="12" name="">
             <a:extLst xmlns:a="http://schemas.openxmlformats.org/drawingml/2006/main">
               <a:ext uri="{FF2B5EF4-FFF2-40B4-BE49-F238E27FC236}">
-                <a16:creationId xmlns:a16="http://schemas.microsoft.com/office/drawing/2014/main" id="{0326837B-650A-40F8-86AC-8CAAAFE8C34F}"/>
+                <a16:creationId xmlns:a16="http://schemas.microsoft.com/office/drawing/2014/main" id="{D3CF36B5-B726-485D-B554-450D21603A16}"/>
               </a:ext>
             </a:extLst>
           </p:cNvPr>
@@ -11381,7 +11296,7 @@
           <p:cNvPr id="13" name="성능 측정">
             <a:extLst xmlns:a="http://schemas.openxmlformats.org/drawingml/2006/main">
               <a:ext uri="{FF2B5EF4-FFF2-40B4-BE49-F238E27FC236}">
-                <a16:creationId xmlns:a16="http://schemas.microsoft.com/office/drawing/2014/main" id="{41B24816-F86D-46F8-8E10-42E99CE6D9FB}"/>
+                <a16:creationId xmlns:a16="http://schemas.microsoft.com/office/drawing/2014/main" id="{0CFE0925-8930-4DAF-9E3C-72FCBFAEBA8D}"/>
               </a:ext>
             </a:extLst>
           </p:cNvPr>
@@ -11539,7 +11454,7 @@
           <p:cNvPr id="14" name="입력·출력 조건 확인">
             <a:extLst xmlns:a="http://schemas.openxmlformats.org/drawingml/2006/main">
               <a:ext uri="{FF2B5EF4-FFF2-40B4-BE49-F238E27FC236}">
-                <a16:creationId xmlns:a16="http://schemas.microsoft.com/office/drawing/2014/main" id="{A327DC8D-3AC0-44C2-9BB2-931C84200D0A}"/>
+                <a16:creationId xmlns:a16="http://schemas.microsoft.com/office/drawing/2014/main" id="{06E26F30-CAA0-407D-9D41-4279955B47E6}"/>
               </a:ext>
             </a:extLst>
           </p:cNvPr>
@@ -11697,7 +11612,7 @@
           <p:cNvPr id="15" name="전체 테스트 11/11">
             <a:extLst xmlns:a="http://schemas.openxmlformats.org/drawingml/2006/main">
               <a:ext uri="{FF2B5EF4-FFF2-40B4-BE49-F238E27FC236}">
-                <a16:creationId xmlns:a16="http://schemas.microsoft.com/office/drawing/2014/main" id="{259CC5BB-F872-4C3C-96AD-F05F6E71A2B1}"/>
+                <a16:creationId xmlns:a16="http://schemas.microsoft.com/office/drawing/2014/main" id="{2A06A389-05CE-4C2A-93E5-19343000BB8D}"/>
               </a:ext>
             </a:extLst>
           </p:cNvPr>
@@ -11855,7 +11770,7 @@
           <p:cNvPr id="16" name="Benchmark guard 확인">
             <a:extLst xmlns:a="http://schemas.openxmlformats.org/drawingml/2006/main">
               <a:ext uri="{FF2B5EF4-FFF2-40B4-BE49-F238E27FC236}">
-                <a16:creationId xmlns:a16="http://schemas.microsoft.com/office/drawing/2014/main" id="{16EF3D86-E233-4365-BCCD-C20375152C87}"/>
+                <a16:creationId xmlns:a16="http://schemas.microsoft.com/office/drawing/2014/main" id="{0AE9C591-CD90-4CB4-AF7A-A76F11B90B9B}"/>
               </a:ext>
             </a:extLst>
           </p:cNvPr>
@@ -12013,7 +11928,7 @@
           <p:cNvPr id="17" name="그렇다면 프로젝트가 바뀐 뒤에도 맞을까?">
             <a:extLst xmlns:a="http://schemas.openxmlformats.org/drawingml/2006/main">
               <a:ext uri="{FF2B5EF4-FFF2-40B4-BE49-F238E27FC236}">
-                <a16:creationId xmlns:a16="http://schemas.microsoft.com/office/drawing/2014/main" id="{08EDEEF9-8809-44C1-85BC-B99D656C9FCC}"/>
+                <a16:creationId xmlns:a16="http://schemas.microsoft.com/office/drawing/2014/main" id="{BF166DC9-52FE-4DDC-9853-C3D40F4C09E0}"/>
               </a:ext>
             </a:extLst>
           </p:cNvPr>
@@ -12169,7 +12084,7 @@
     </p:spTree>
     <p:extLst>
       <p:ext uri="{BB962C8B-B14F-4D97-AF65-F5344CB8AC3E}">
-        <p14:creationId xmlns:p14="http://schemas.microsoft.com/office/powerpoint/2010/main" val="2036461706"/>
+        <p14:creationId xmlns:p14="http://schemas.microsoft.com/office/powerpoint/2010/main" val="440390482"/>
       </p:ext>
     </p:extLst>
   </p:cSld>
@@ -12200,7 +12115,7 @@
           <p:cNvPr id="24" name="ACT 4 · CONCEPTUAL / 평가 설계">
             <a:extLst xmlns:a="http://schemas.openxmlformats.org/drawingml/2006/main">
               <a:ext uri="{FF2B5EF4-FFF2-40B4-BE49-F238E27FC236}">
-                <a16:creationId xmlns:a16="http://schemas.microsoft.com/office/drawing/2014/main" id="{2E2EBBAC-CC79-450C-A522-ECABF2BAC8FB}"/>
+                <a16:creationId xmlns:a16="http://schemas.microsoft.com/office/drawing/2014/main" id="{521BA115-72AE-41EB-8562-8FA7FF53FD35}"/>
               </a:ext>
             </a:extLst>
           </p:cNvPr>
@@ -12358,7 +12273,7 @@
           <p:cNvPr id="2" name="S64">
             <a:extLst xmlns:a="http://schemas.openxmlformats.org/drawingml/2006/main">
               <a:ext uri="{FF2B5EF4-FFF2-40B4-BE49-F238E27FC236}">
-                <a16:creationId xmlns:a16="http://schemas.microsoft.com/office/drawing/2014/main" id="{D99F168B-68C8-48E0-B42C-85CF5D5E4A87}"/>
+                <a16:creationId xmlns:a16="http://schemas.microsoft.com/office/drawing/2014/main" id="{A529F723-0778-4C00-B07C-4AD51E806DAF}"/>
               </a:ext>
             </a:extLst>
           </p:cNvPr>
@@ -12516,7 +12431,7 @@
           <p:cNvPr id="3" name="대표 작업으로 변경 범위를 확인하기">
             <a:extLst xmlns:a="http://schemas.openxmlformats.org/drawingml/2006/main">
               <a:ext uri="{FF2B5EF4-FFF2-40B4-BE49-F238E27FC236}">
-                <a16:creationId xmlns:a16="http://schemas.microsoft.com/office/drawing/2014/main" id="{C1CB8134-F5D7-4388-BD37-F87366DBD6DC}"/>
+                <a16:creationId xmlns:a16="http://schemas.microsoft.com/office/drawing/2014/main" id="{42E265A0-55A7-4622-AD33-868E53975C5C}"/>
               </a:ext>
             </a:extLst>
           </p:cNvPr>
@@ -12674,7 +12589,7 @@
           <p:cNvPr id="4" name="">
             <a:extLst xmlns:a="http://schemas.openxmlformats.org/drawingml/2006/main">
               <a:ext uri="{FF2B5EF4-FFF2-40B4-BE49-F238E27FC236}">
-                <a16:creationId xmlns:a16="http://schemas.microsoft.com/office/drawing/2014/main" id="{7644792B-93DA-4B96-987D-20C8A31941CB}"/>
+                <a16:creationId xmlns:a16="http://schemas.microsoft.com/office/drawing/2014/main" id="{E9CC5D72-4ED4-45EF-A2EF-77A2697A89B8}"/>
               </a:ext>
             </a:extLst>
           </p:cNvPr>
@@ -12705,7 +12620,7 @@
           <p:cNvPr id="5" name="DEMO-10 · 네 작업 모두 이 Workflow 변경 후의 평가 결과는 없음">
             <a:extLst xmlns:a="http://schemas.openxmlformats.org/drawingml/2006/main">
               <a:ext uri="{FF2B5EF4-FFF2-40B4-BE49-F238E27FC236}">
-                <a16:creationId xmlns:a16="http://schemas.microsoft.com/office/drawing/2014/main" id="{A2F8F152-8383-4BC6-844D-10CC8B68985C}"/>
+                <a16:creationId xmlns:a16="http://schemas.microsoft.com/office/drawing/2014/main" id="{BE28947E-BEB3-4362-8A3A-30E860C87BE3}"/>
               </a:ext>
             </a:extLst>
           </p:cNvPr>
@@ -12863,7 +12778,7 @@
           <p:cNvPr id="6" name="EVAL-01/02: 별도 과거 관찰 참고 · EVAL-03/04: 설계만 있음 · 새 실행·PASS/FAI">
             <a:extLst xmlns:a="http://schemas.openxmlformats.org/drawingml/2006/main">
               <a:ext uri="{FF2B5EF4-FFF2-40B4-BE49-F238E27FC236}">
-                <a16:creationId xmlns:a16="http://schemas.microsoft.com/office/drawing/2014/main" id="{9B1D94A1-212A-4D36-A5FC-6C654AC5AE5D}"/>
+                <a16:creationId xmlns:a16="http://schemas.microsoft.com/office/drawing/2014/main" id="{9F620136-A858-4FB5-B2A7-320FB46D1CFB}"/>
               </a:ext>
             </a:extLst>
           </p:cNvPr>
@@ -13021,7 +12936,7 @@
           <p:cNvPr id="7" name="작업 수보다, 서로 다른 위험을 덮는가?">
             <a:extLst xmlns:a="http://schemas.openxmlformats.org/drawingml/2006/main">
               <a:ext uri="{FF2B5EF4-FFF2-40B4-BE49-F238E27FC236}">
-                <a16:creationId xmlns:a16="http://schemas.microsoft.com/office/drawing/2014/main" id="{780F8DBA-3838-4A0F-8AE5-B9A16271DCE8}"/>
+                <a16:creationId xmlns:a16="http://schemas.microsoft.com/office/drawing/2014/main" id="{B58397DE-6B00-4E2C-978A-FF2830BFA614}"/>
               </a:ext>
             </a:extLst>
           </p:cNvPr>
@@ -13179,7 +13094,7 @@
           <p:cNvPr id="8" name="">
             <a:extLst xmlns:a="http://schemas.openxmlformats.org/drawingml/2006/main">
               <a:ext uri="{FF2B5EF4-FFF2-40B4-BE49-F238E27FC236}">
-                <a16:creationId xmlns:a16="http://schemas.microsoft.com/office/drawing/2014/main" id="{E1FE43D4-8664-4AA5-A793-58959BC7EAB1}"/>
+                <a16:creationId xmlns:a16="http://schemas.microsoft.com/office/drawing/2014/main" id="{23AE5492-C823-4AEC-A516-1D341E6D56B7}"/>
               </a:ext>
             </a:extLst>
           </p:cNvPr>
@@ -13210,7 +13125,7 @@
           <p:cNvPr id="9" name="버그 수정">
             <a:extLst xmlns:a="http://schemas.openxmlformats.org/drawingml/2006/main">
               <a:ext uri="{FF2B5EF4-FFF2-40B4-BE49-F238E27FC236}">
-                <a16:creationId xmlns:a16="http://schemas.microsoft.com/office/drawing/2014/main" id="{7D641503-61FC-430B-AAB3-4C8AECA38474}"/>
+                <a16:creationId xmlns:a16="http://schemas.microsoft.com/office/drawing/2014/main" id="{F0FC2C39-3C2D-4631-AE0C-2271D31076BF}"/>
               </a:ext>
             </a:extLst>
           </p:cNvPr>
@@ -13368,7 +13283,7 @@
           <p:cNvPr id="10" name="동작 계약을 확인하는가?">
             <a:extLst xmlns:a="http://schemas.openxmlformats.org/drawingml/2006/main">
               <a:ext uri="{FF2B5EF4-FFF2-40B4-BE49-F238E27FC236}">
-                <a16:creationId xmlns:a16="http://schemas.microsoft.com/office/drawing/2014/main" id="{E56B5CE6-82F4-494E-9066-DD3F60E36787}"/>
+                <a16:creationId xmlns:a16="http://schemas.microsoft.com/office/drawing/2014/main" id="{B23B9C96-5774-48BC-9C81-7AC21D621C24}"/>
               </a:ext>
             </a:extLst>
           </p:cNvPr>
@@ -13526,7 +13441,7 @@
           <p:cNvPr id="11" name="EVAL-01 · TRIAL-002">
             <a:extLst xmlns:a="http://schemas.openxmlformats.org/drawingml/2006/main">
               <a:ext uri="{FF2B5EF4-FFF2-40B4-BE49-F238E27FC236}">
-                <a16:creationId xmlns:a16="http://schemas.microsoft.com/office/drawing/2014/main" id="{106C43C7-1792-470D-900F-5B526ABBD813}"/>
+                <a16:creationId xmlns:a16="http://schemas.microsoft.com/office/drawing/2014/main" id="{4F6C3599-5DF5-4BFD-BC1F-9D0EC47293AC}"/>
               </a:ext>
             </a:extLst>
           </p:cNvPr>
@@ -13684,7 +13599,7 @@
           <p:cNvPr id="12" name="">
             <a:extLst xmlns:a="http://schemas.openxmlformats.org/drawingml/2006/main">
               <a:ext uri="{FF2B5EF4-FFF2-40B4-BE49-F238E27FC236}">
-                <a16:creationId xmlns:a16="http://schemas.microsoft.com/office/drawing/2014/main" id="{8A49AE8F-2547-402E-9636-06E5CABD5355}"/>
+                <a16:creationId xmlns:a16="http://schemas.microsoft.com/office/drawing/2014/main" id="{C77C089B-B558-4D85-AB98-AEC7AE624C52}"/>
               </a:ext>
             </a:extLst>
           </p:cNvPr>
@@ -13715,7 +13630,7 @@
           <p:cNvPr id="13" name="성능 변경">
             <a:extLst xmlns:a="http://schemas.openxmlformats.org/drawingml/2006/main">
               <a:ext uri="{FF2B5EF4-FFF2-40B4-BE49-F238E27FC236}">
-                <a16:creationId xmlns:a16="http://schemas.microsoft.com/office/drawing/2014/main" id="{0C15C4DF-B771-4F3B-9969-D2C08A032E2E}"/>
+                <a16:creationId xmlns:a16="http://schemas.microsoft.com/office/drawing/2014/main" id="{92070087-0FD8-4988-B9BE-58647F4F9040}"/>
               </a:ext>
             </a:extLst>
           </p:cNvPr>
@@ -13873,7 +13788,7 @@
           <p:cNvPr id="14" name="측정과 검증 범위를 유지하는가?">
             <a:extLst xmlns:a="http://schemas.openxmlformats.org/drawingml/2006/main">
               <a:ext uri="{FF2B5EF4-FFF2-40B4-BE49-F238E27FC236}">
-                <a16:creationId xmlns:a16="http://schemas.microsoft.com/office/drawing/2014/main" id="{6748DFEC-B6ED-4C44-9221-DF2C7D4EBEF2}"/>
+                <a16:creationId xmlns:a16="http://schemas.microsoft.com/office/drawing/2014/main" id="{15AEF85C-FA07-4110-A10A-DEBF949CD50F}"/>
               </a:ext>
             </a:extLst>
           </p:cNvPr>
@@ -14031,7 +13946,7 @@
           <p:cNvPr id="15" name="EVAL-02 · STATE-04-PERF">
             <a:extLst xmlns:a="http://schemas.openxmlformats.org/drawingml/2006/main">
               <a:ext uri="{FF2B5EF4-FFF2-40B4-BE49-F238E27FC236}">
-                <a16:creationId xmlns:a16="http://schemas.microsoft.com/office/drawing/2014/main" id="{0D2F104B-99BF-4AB6-9482-8938FD5F0C49}"/>
+                <a16:creationId xmlns:a16="http://schemas.microsoft.com/office/drawing/2014/main" id="{390DA5AE-E7DB-4827-9E7C-3F392F681B59}"/>
               </a:ext>
             </a:extLst>
           </p:cNvPr>
@@ -14189,7 +14104,7 @@
           <p:cNvPr id="16" name="">
             <a:extLst xmlns:a="http://schemas.openxmlformats.org/drawingml/2006/main">
               <a:ext uri="{FF2B5EF4-FFF2-40B4-BE49-F238E27FC236}">
-                <a16:creationId xmlns:a16="http://schemas.microsoft.com/office/drawing/2014/main" id="{6F33C0BC-5BCA-4591-9ECA-3E1799BDEF5A}"/>
+                <a16:creationId xmlns:a16="http://schemas.microsoft.com/office/drawing/2014/main" id="{115D6FB4-3B36-46E9-A62C-BD6476E3E313}"/>
               </a:ext>
             </a:extLst>
           </p:cNvPr>
@@ -14220,7 +14135,7 @@
           <p:cNvPr id="17" name="문서만 수정">
             <a:extLst xmlns:a="http://schemas.openxmlformats.org/drawingml/2006/main">
               <a:ext uri="{FF2B5EF4-FFF2-40B4-BE49-F238E27FC236}">
-                <a16:creationId xmlns:a16="http://schemas.microsoft.com/office/drawing/2014/main" id="{84A1C688-0307-4198-9319-D635F6845E61}"/>
+                <a16:creationId xmlns:a16="http://schemas.microsoft.com/office/drawing/2014/main" id="{5815BF84-0E1F-4563-8B7D-3A24B56BFD31}"/>
               </a:ext>
             </a:extLst>
           </p:cNvPr>
@@ -14378,7 +14293,7 @@
           <p:cNvPr id="18" name="불필요한 절차를 강요하지 않는가?">
             <a:extLst xmlns:a="http://schemas.openxmlformats.org/drawingml/2006/main">
               <a:ext uri="{FF2B5EF4-FFF2-40B4-BE49-F238E27FC236}">
-                <a16:creationId xmlns:a16="http://schemas.microsoft.com/office/drawing/2014/main" id="{51E1E6E6-E79B-4D1B-A04B-BC3FA0608D7E}"/>
+                <a16:creationId xmlns:a16="http://schemas.microsoft.com/office/drawing/2014/main" id="{5541F133-1794-4CC3-A667-6393A9E17E48}"/>
               </a:ext>
             </a:extLst>
           </p:cNvPr>
@@ -14536,7 +14451,7 @@
           <p:cNvPr id="19" name="EVAL-03 · 설계 사례">
             <a:extLst xmlns:a="http://schemas.openxmlformats.org/drawingml/2006/main">
               <a:ext uri="{FF2B5EF4-FFF2-40B4-BE49-F238E27FC236}">
-                <a16:creationId xmlns:a16="http://schemas.microsoft.com/office/drawing/2014/main" id="{C129B16B-2268-4B2E-99E8-9823C564C9F8}"/>
+                <a16:creationId xmlns:a16="http://schemas.microsoft.com/office/drawing/2014/main" id="{0AC92FAB-AF3A-4317-86C3-308B35724A1A}"/>
               </a:ext>
             </a:extLst>
           </p:cNvPr>
@@ -14694,7 +14609,7 @@
           <p:cNvPr id="20" name="">
             <a:extLst xmlns:a="http://schemas.openxmlformats.org/drawingml/2006/main">
               <a:ext uri="{FF2B5EF4-FFF2-40B4-BE49-F238E27FC236}">
-                <a16:creationId xmlns:a16="http://schemas.microsoft.com/office/drawing/2014/main" id="{1E7FA769-A0E5-4683-8F16-7B2ABCB1C245}"/>
+                <a16:creationId xmlns:a16="http://schemas.microsoft.com/office/drawing/2014/main" id="{62025F28-FDD9-49B0-AC84-CA8C8FE7D2AB}"/>
               </a:ext>
             </a:extLst>
           </p:cNvPr>
@@ -14725,7 +14640,7 @@
           <p:cNvPr id="21" name="작은 리팩터링">
             <a:extLst xmlns:a="http://schemas.openxmlformats.org/drawingml/2006/main">
               <a:ext uri="{FF2B5EF4-FFF2-40B4-BE49-F238E27FC236}">
-                <a16:creationId xmlns:a16="http://schemas.microsoft.com/office/drawing/2014/main" id="{C7E1043D-3260-4A04-924E-F52E1706AFFE}"/>
+                <a16:creationId xmlns:a16="http://schemas.microsoft.com/office/drawing/2014/main" id="{DF42F7F6-F969-46B5-9C58-C2905B3E1CC3}"/>
               </a:ext>
             </a:extLst>
           </p:cNvPr>
@@ -14883,7 +14798,7 @@
           <p:cNvPr id="22" name="다른 유효한 작업을 방해하지 않는가?">
             <a:extLst xmlns:a="http://schemas.openxmlformats.org/drawingml/2006/main">
               <a:ext uri="{FF2B5EF4-FFF2-40B4-BE49-F238E27FC236}">
-                <a16:creationId xmlns:a16="http://schemas.microsoft.com/office/drawing/2014/main" id="{210AEBA6-8103-42BC-BBB3-D4DF80CAC706}"/>
+                <a16:creationId xmlns:a16="http://schemas.microsoft.com/office/drawing/2014/main" id="{4E1A1CBA-4B43-4A08-B4E4-8E36264E4170}"/>
               </a:ext>
             </a:extLst>
           </p:cNvPr>
@@ -15041,7 +14956,7 @@
           <p:cNvPr id="23" name="EVAL-04 · 설계 사례">
             <a:extLst xmlns:a="http://schemas.openxmlformats.org/drawingml/2006/main">
               <a:ext uri="{FF2B5EF4-FFF2-40B4-BE49-F238E27FC236}">
-                <a16:creationId xmlns:a16="http://schemas.microsoft.com/office/drawing/2014/main" id="{A7F1B3D2-DEE1-42EB-ACFB-50B6D452559F}"/>
+                <a16:creationId xmlns:a16="http://schemas.microsoft.com/office/drawing/2014/main" id="{C3DAFCCD-1C42-4E4C-90B5-C01689CC5A3D}"/>
               </a:ext>
             </a:extLst>
           </p:cNvPr>
@@ -15197,7 +15112,7 @@
     </p:spTree>
     <p:extLst>
       <p:ext uri="{BB962C8B-B14F-4D97-AF65-F5344CB8AC3E}">
-        <p14:creationId xmlns:p14="http://schemas.microsoft.com/office/powerpoint/2010/main" val="147037559"/>
+        <p14:creationId xmlns:p14="http://schemas.microsoft.com/office/powerpoint/2010/main" val="1514878397"/>
       </p:ext>
     </p:extLst>
   </p:cSld>
@@ -15228,7 +15143,7 @@
           <p:cNvPr id="18" name="ACT 4 · CONCEPTUAL / 규칙 유지보수">
             <a:extLst xmlns:a="http://schemas.openxmlformats.org/drawingml/2006/main">
               <a:ext uri="{FF2B5EF4-FFF2-40B4-BE49-F238E27FC236}">
-                <a16:creationId xmlns:a16="http://schemas.microsoft.com/office/drawing/2014/main" id="{2E3CBE60-D222-4874-B046-16CD5E25417C}"/>
+                <a16:creationId xmlns:a16="http://schemas.microsoft.com/office/drawing/2014/main" id="{6C6403F4-86BB-4174-8B70-200B93530C84}"/>
               </a:ext>
             </a:extLst>
           </p:cNvPr>
@@ -15386,7 +15301,7 @@
           <p:cNvPr id="2" name="S65">
             <a:extLst xmlns:a="http://schemas.openxmlformats.org/drawingml/2006/main">
               <a:ext uri="{FF2B5EF4-FFF2-40B4-BE49-F238E27FC236}">
-                <a16:creationId xmlns:a16="http://schemas.microsoft.com/office/drawing/2014/main" id="{5005AF6E-851B-4402-B372-90307BDFA55F}"/>
+                <a16:creationId xmlns:a16="http://schemas.microsoft.com/office/drawing/2014/main" id="{1661A8E1-6E6A-4E94-88A4-D0313006BE94}"/>
               </a:ext>
             </a:extLst>
           </p:cNvPr>
@@ -15544,7 +15459,7 @@
           <p:cNvPr id="3" name="Harness도 특정 실패에 맞춰&#10;과적합될 수 있다">
             <a:extLst xmlns:a="http://schemas.openxmlformats.org/drawingml/2006/main">
               <a:ext uri="{FF2B5EF4-FFF2-40B4-BE49-F238E27FC236}">
-                <a16:creationId xmlns:a16="http://schemas.microsoft.com/office/drawing/2014/main" id="{FD61EF23-B883-40E8-A9C9-42D0F7591DDE}"/>
+                <a16:creationId xmlns:a16="http://schemas.microsoft.com/office/drawing/2014/main" id="{4D9FD633-406B-42C9-A322-579E584527D6}"/>
               </a:ext>
             </a:extLst>
           </p:cNvPr>
@@ -15725,7 +15640,7 @@
           <p:cNvPr id="4" name="">
             <a:extLst xmlns:a="http://schemas.openxmlformats.org/drawingml/2006/main">
               <a:ext uri="{FF2B5EF4-FFF2-40B4-BE49-F238E27FC236}">
-                <a16:creationId xmlns:a16="http://schemas.microsoft.com/office/drawing/2014/main" id="{791C7C04-827A-4DC6-B25C-3493D2B7BFD4}"/>
+                <a16:creationId xmlns:a16="http://schemas.microsoft.com/office/drawing/2014/main" id="{3A8BA5AE-F984-4591-900E-9D8C82E8E322}"/>
               </a:ext>
             </a:extLst>
           </p:cNvPr>
@@ -15756,7 +15671,7 @@
           <p:cNvPr id="5" name="DEMO-04A · 과적합은 이 교육의 비유">
             <a:extLst xmlns:a="http://schemas.openxmlformats.org/drawingml/2006/main">
               <a:ext uri="{FF2B5EF4-FFF2-40B4-BE49-F238E27FC236}">
-                <a16:creationId xmlns:a16="http://schemas.microsoft.com/office/drawing/2014/main" id="{00102B28-47A9-4C8C-BC9A-F5D9E040A2DA}"/>
+                <a16:creationId xmlns:a16="http://schemas.microsoft.com/office/drawing/2014/main" id="{DFC9C21E-7F9E-41CA-A921-DE43F34117C5}"/>
               </a:ext>
             </a:extLst>
           </p:cNvPr>
@@ -15914,7 +15829,7 @@
           <p:cNvPr id="6" name="Machine Learning의 통계적 과적합과 같은 현상이라는 주장이 아니다.">
             <a:extLst xmlns:a="http://schemas.openxmlformats.org/drawingml/2006/main">
               <a:ext uri="{FF2B5EF4-FFF2-40B4-BE49-F238E27FC236}">
-                <a16:creationId xmlns:a16="http://schemas.microsoft.com/office/drawing/2014/main" id="{E170E497-0E51-4C02-AD57-42AB2E117E66}"/>
+                <a16:creationId xmlns:a16="http://schemas.microsoft.com/office/drawing/2014/main" id="{F449BF96-129A-48F3-8991-D67BB8ECFE14}"/>
               </a:ext>
             </a:extLst>
           </p:cNvPr>
@@ -16072,7 +15987,7 @@
           <p:cNvPr id="7" name="실패할 때마다 규칙을 하나씩 더하면">
             <a:extLst xmlns:a="http://schemas.openxmlformats.org/drawingml/2006/main">
               <a:ext uri="{FF2B5EF4-FFF2-40B4-BE49-F238E27FC236}">
-                <a16:creationId xmlns:a16="http://schemas.microsoft.com/office/drawing/2014/main" id="{8E3236D9-DA63-43B0-BFD7-DA08C4A87876}"/>
+                <a16:creationId xmlns:a16="http://schemas.microsoft.com/office/drawing/2014/main" id="{2405BE74-2EE3-4229-BC2D-E418A49D3AA8}"/>
               </a:ext>
             </a:extLst>
           </p:cNvPr>
@@ -16230,7 +16145,7 @@
           <p:cNvPr id="8" name="">
             <a:extLst xmlns:a="http://schemas.openxmlformats.org/drawingml/2006/main">
               <a:ext uri="{FF2B5EF4-FFF2-40B4-BE49-F238E27FC236}">
-                <a16:creationId xmlns:a16="http://schemas.microsoft.com/office/drawing/2014/main" id="{CEE5244E-99C9-4531-B7BD-94D05E63719A}"/>
+                <a16:creationId xmlns:a16="http://schemas.microsoft.com/office/drawing/2014/main" id="{F487DD37-BD9F-4241-853B-EF275F1EE7D3}"/>
               </a:ext>
             </a:extLst>
           </p:cNvPr>
@@ -16261,7 +16176,7 @@
           <p:cNvPr id="9" name="규칙 누적">
             <a:extLst xmlns:a="http://schemas.openxmlformats.org/drawingml/2006/main">
               <a:ext uri="{FF2B5EF4-FFF2-40B4-BE49-F238E27FC236}">
-                <a16:creationId xmlns:a16="http://schemas.microsoft.com/office/drawing/2014/main" id="{32E2B431-E868-411E-A1B5-B863E8028D5F}"/>
+                <a16:creationId xmlns:a16="http://schemas.microsoft.com/office/drawing/2014/main" id="{A17865EA-BFAF-4B8F-BA0D-A949F1A7BB39}"/>
               </a:ext>
             </a:extLst>
           </p:cNvPr>
@@ -16419,7 +16334,7 @@
           <p:cNvPr id="10" name="읽고 유지할 내용이 커짐">
             <a:extLst xmlns:a="http://schemas.openxmlformats.org/drawingml/2006/main">
               <a:ext uri="{FF2B5EF4-FFF2-40B4-BE49-F238E27FC236}">
-                <a16:creationId xmlns:a16="http://schemas.microsoft.com/office/drawing/2014/main" id="{95FB2958-7454-4E30-9FDE-4EA22D3AE828}"/>
+                <a16:creationId xmlns:a16="http://schemas.microsoft.com/office/drawing/2014/main" id="{52A8AABF-6925-45B6-B914-9B9D0E368E4A}"/>
               </a:ext>
             </a:extLst>
           </p:cNvPr>
@@ -16577,7 +16492,7 @@
           <p:cNvPr id="11" name="">
             <a:extLst xmlns:a="http://schemas.openxmlformats.org/drawingml/2006/main">
               <a:ext uri="{FF2B5EF4-FFF2-40B4-BE49-F238E27FC236}">
-                <a16:creationId xmlns:a16="http://schemas.microsoft.com/office/drawing/2014/main" id="{9887E2A9-784B-40C3-A598-2B9346B4E9F2}"/>
+                <a16:creationId xmlns:a16="http://schemas.microsoft.com/office/drawing/2014/main" id="{DD6EDFD8-378B-4F91-9EC8-064D35E9E191}"/>
               </a:ext>
             </a:extLst>
           </p:cNvPr>
@@ -16608,7 +16523,7 @@
           <p:cNvPr id="12" name="규칙 충돌">
             <a:extLst xmlns:a="http://schemas.openxmlformats.org/drawingml/2006/main">
               <a:ext uri="{FF2B5EF4-FFF2-40B4-BE49-F238E27FC236}">
-                <a16:creationId xmlns:a16="http://schemas.microsoft.com/office/drawing/2014/main" id="{CF1A45AE-9747-4FC8-8390-7B5CB582D73B}"/>
+                <a16:creationId xmlns:a16="http://schemas.microsoft.com/office/drawing/2014/main" id="{852A51CF-4A39-4D0B-A858-040ED3027628}"/>
               </a:ext>
             </a:extLst>
           </p:cNvPr>
@@ -16766,7 +16681,7 @@
           <p:cNvPr id="13" name="서로 다른 지시가 섞임">
             <a:extLst xmlns:a="http://schemas.openxmlformats.org/drawingml/2006/main">
               <a:ext uri="{FF2B5EF4-FFF2-40B4-BE49-F238E27FC236}">
-                <a16:creationId xmlns:a16="http://schemas.microsoft.com/office/drawing/2014/main" id="{6228540E-2CA0-4BB8-82A5-E0178C689877}"/>
+                <a16:creationId xmlns:a16="http://schemas.microsoft.com/office/drawing/2014/main" id="{BF4CC26A-830C-46F2-B85A-2CFFDFD9E499}"/>
               </a:ext>
             </a:extLst>
           </p:cNvPr>
@@ -16924,7 +16839,7 @@
           <p:cNvPr id="14" name="">
             <a:extLst xmlns:a="http://schemas.openxmlformats.org/drawingml/2006/main">
               <a:ext uri="{FF2B5EF4-FFF2-40B4-BE49-F238E27FC236}">
-                <a16:creationId xmlns:a16="http://schemas.microsoft.com/office/drawing/2014/main" id="{670B2600-9F78-4C76-9B99-10EFF341EF18}"/>
+                <a16:creationId xmlns:a16="http://schemas.microsoft.com/office/drawing/2014/main" id="{B29CED2E-ED70-4E34-9301-3AF771142B87}"/>
               </a:ext>
             </a:extLst>
           </p:cNvPr>
@@ -16955,7 +16870,7 @@
           <p:cNvPr id="15" name="특정 작업에만 맞춤">
             <a:extLst xmlns:a="http://schemas.openxmlformats.org/drawingml/2006/main">
               <a:ext uri="{FF2B5EF4-FFF2-40B4-BE49-F238E27FC236}">
-                <a16:creationId xmlns:a16="http://schemas.microsoft.com/office/drawing/2014/main" id="{A847D44F-4F70-496E-B398-EC243C61A8E4}"/>
+                <a16:creationId xmlns:a16="http://schemas.microsoft.com/office/drawing/2014/main" id="{92FD355D-FFF3-41C6-84A7-A8B9B66BC860}"/>
               </a:ext>
             </a:extLst>
           </p:cNvPr>
@@ -17113,7 +17028,7 @@
           <p:cNvPr id="16" name="다른 작업에서 적합성 미확인">
             <a:extLst xmlns:a="http://schemas.openxmlformats.org/drawingml/2006/main">
               <a:ext uri="{FF2B5EF4-FFF2-40B4-BE49-F238E27FC236}">
-                <a16:creationId xmlns:a16="http://schemas.microsoft.com/office/drawing/2014/main" id="{B7D089D7-DAAB-4671-BBC6-3F9233C251A4}"/>
+                <a16:creationId xmlns:a16="http://schemas.microsoft.com/office/drawing/2014/main" id="{6E3C59B7-C706-48FA-A122-5290B6050F98}"/>
               </a:ext>
             </a:extLst>
           </p:cNvPr>
@@ -17271,7 +17186,7 @@
           <p:cNvPr id="17" name="원인을 확인하고, 대표 작업으로 평가하고, 불필요한 규칙을 정리한다.">
             <a:extLst xmlns:a="http://schemas.openxmlformats.org/drawingml/2006/main">
               <a:ext uri="{FF2B5EF4-FFF2-40B4-BE49-F238E27FC236}">
-                <a16:creationId xmlns:a16="http://schemas.microsoft.com/office/drawing/2014/main" id="{F210648D-F041-47ED-BB4E-04EAAAAFCCC5}"/>
+                <a16:creationId xmlns:a16="http://schemas.microsoft.com/office/drawing/2014/main" id="{96C0D491-F150-45E9-9AB9-67C3A8BEEE67}"/>
               </a:ext>
             </a:extLst>
           </p:cNvPr>
@@ -17427,7 +17342,7 @@
     </p:spTree>
     <p:extLst>
       <p:ext uri="{BB962C8B-B14F-4D97-AF65-F5344CB8AC3E}">
-        <p14:creationId xmlns:p14="http://schemas.microsoft.com/office/powerpoint/2010/main" val="1710191667"/>
+        <p14:creationId xmlns:p14="http://schemas.microsoft.com/office/powerpoint/2010/main" val="1376911830"/>
       </p:ext>
     </p:extLst>
   </p:cSld>
@@ -17458,7 +17373,7 @@
           <p:cNvPr id="27" name="ACT 4 · 이 교육의 Loop 모델">
             <a:extLst xmlns:a="http://schemas.openxmlformats.org/drawingml/2006/main">
               <a:ext uri="{FF2B5EF4-FFF2-40B4-BE49-F238E27FC236}">
-                <a16:creationId xmlns:a16="http://schemas.microsoft.com/office/drawing/2014/main" id="{174B4B29-3188-475F-AFC4-1D53D4E25ED7}"/>
+                <a16:creationId xmlns:a16="http://schemas.microsoft.com/office/drawing/2014/main" id="{4AC7A60D-7743-4816-A8D8-30F52BA9BEC0}"/>
               </a:ext>
             </a:extLst>
           </p:cNvPr>
@@ -17616,7 +17531,7 @@
           <p:cNvPr id="2" name="S66">
             <a:extLst xmlns:a="http://schemas.openxmlformats.org/drawingml/2006/main">
               <a:ext uri="{FF2B5EF4-FFF2-40B4-BE49-F238E27FC236}">
-                <a16:creationId xmlns:a16="http://schemas.microsoft.com/office/drawing/2014/main" id="{E015A7F3-445B-4337-91B4-1FF3FBE35EBF}"/>
+                <a16:creationId xmlns:a16="http://schemas.microsoft.com/office/drawing/2014/main" id="{9BBAF0A2-ACA8-4841-A2F1-D5D0D31E3BA4}"/>
               </a:ext>
             </a:extLst>
           </p:cNvPr>
@@ -17774,7 +17689,7 @@
           <p:cNvPr id="3" name="Feedback을 System Change와&#10;Evaluation으로 잇기">
             <a:extLst xmlns:a="http://schemas.openxmlformats.org/drawingml/2006/main">
               <a:ext uri="{FF2B5EF4-FFF2-40B4-BE49-F238E27FC236}">
-                <a16:creationId xmlns:a16="http://schemas.microsoft.com/office/drawing/2014/main" id="{B72D5B76-C99D-495B-952D-E68E8F4ECE32}"/>
+                <a16:creationId xmlns:a16="http://schemas.microsoft.com/office/drawing/2014/main" id="{38ECF955-410E-4B89-BC16-DB7A5218FEC6}"/>
               </a:ext>
             </a:extLst>
           </p:cNvPr>
@@ -17955,7 +17870,7 @@
           <p:cNvPr id="4" name="">
             <a:extLst xmlns:a="http://schemas.openxmlformats.org/drawingml/2006/main">
               <a:ext uri="{FF2B5EF4-FFF2-40B4-BE49-F238E27FC236}">
-                <a16:creationId xmlns:a16="http://schemas.microsoft.com/office/drawing/2014/main" id="{ACD3E2B1-9A81-408A-97A1-B5E28898C43B}"/>
+                <a16:creationId xmlns:a16="http://schemas.microsoft.com/office/drawing/2014/main" id="{72416D82-7FCE-4EF2-AF71-66E2CBC81651}"/>
               </a:ext>
             </a:extLst>
           </p:cNvPr>
@@ -17986,7 +17901,7 @@
           <p:cNvPr id="5" name="DEC-0023 · 교육용 운영 모델">
             <a:extLst xmlns:a="http://schemas.openxmlformats.org/drawingml/2006/main">
               <a:ext uri="{FF2B5EF4-FFF2-40B4-BE49-F238E27FC236}">
-                <a16:creationId xmlns:a16="http://schemas.microsoft.com/office/drawing/2014/main" id="{D5D54766-DD98-4882-A765-54AB3C844F56}"/>
+                <a16:creationId xmlns:a16="http://schemas.microsoft.com/office/drawing/2014/main" id="{72AE6BF8-2D62-4C92-9E60-7F3E07F79A6C}"/>
               </a:ext>
             </a:extLst>
           </p:cNvPr>
@@ -18144,7 +18059,7 @@
           <p:cNvPr id="6" name="모델의 자동 학습이나 실제 Product Loop를 관찰했다는 뜻은 아니다.">
             <a:extLst xmlns:a="http://schemas.openxmlformats.org/drawingml/2006/main">
               <a:ext uri="{FF2B5EF4-FFF2-40B4-BE49-F238E27FC236}">
-                <a16:creationId xmlns:a16="http://schemas.microsoft.com/office/drawing/2014/main" id="{0C5217D2-E99A-4348-8F8E-DF25F2C38E62}"/>
+                <a16:creationId xmlns:a16="http://schemas.microsoft.com/office/drawing/2014/main" id="{E4592E80-D6AF-4D1B-91BD-3A95C49E926C}"/>
               </a:ext>
             </a:extLst>
           </p:cNvPr>
@@ -18302,7 +18217,7 @@
           <p:cNvPr id="7" name="">
             <a:extLst xmlns:a="http://schemas.openxmlformats.org/drawingml/2006/main">
               <a:ext uri="{FF2B5EF4-FFF2-40B4-BE49-F238E27FC236}">
-                <a16:creationId xmlns:a16="http://schemas.microsoft.com/office/drawing/2014/main" id="{EC6490C8-B994-4C96-9D6C-BAB81741CB98}"/>
+                <a16:creationId xmlns:a16="http://schemas.microsoft.com/office/drawing/2014/main" id="{FC012FBF-0203-45F5-BE8D-7FB86B859AA9}"/>
               </a:ext>
             </a:extLst>
           </p:cNvPr>
@@ -18333,7 +18248,7 @@
           <p:cNvPr id="8" name="실행">
             <a:extLst xmlns:a="http://schemas.openxmlformats.org/drawingml/2006/main">
               <a:ext uri="{FF2B5EF4-FFF2-40B4-BE49-F238E27FC236}">
-                <a16:creationId xmlns:a16="http://schemas.microsoft.com/office/drawing/2014/main" id="{AFE4825D-7B34-4023-A4F8-AB712C799A2E}"/>
+                <a16:creationId xmlns:a16="http://schemas.microsoft.com/office/drawing/2014/main" id="{F9A6C9C4-67A3-4F23-B95E-B228CDF62DBB}"/>
               </a:ext>
             </a:extLst>
           </p:cNvPr>
@@ -18491,7 +18406,7 @@
           <p:cNvPr id="9" name="무엇을 했나?">
             <a:extLst xmlns:a="http://schemas.openxmlformats.org/drawingml/2006/main">
               <a:ext uri="{FF2B5EF4-FFF2-40B4-BE49-F238E27FC236}">
-                <a16:creationId xmlns:a16="http://schemas.microsoft.com/office/drawing/2014/main" id="{809019D7-0D20-4C9F-AA4D-80407981931F}"/>
+                <a16:creationId xmlns:a16="http://schemas.microsoft.com/office/drawing/2014/main" id="{0353336C-E896-4360-89F3-1AA31EFD530B}"/>
               </a:ext>
             </a:extLst>
           </p:cNvPr>
@@ -18649,7 +18564,7 @@
           <p:cNvPr id="10" name="">
             <a:extLst xmlns:a="http://schemas.openxmlformats.org/drawingml/2006/main">
               <a:ext uri="{FF2B5EF4-FFF2-40B4-BE49-F238E27FC236}">
-                <a16:creationId xmlns:a16="http://schemas.microsoft.com/office/drawing/2014/main" id="{DA34D4A2-5FFE-4148-A314-5A539EFBBE36}"/>
+                <a16:creationId xmlns:a16="http://schemas.microsoft.com/office/drawing/2014/main" id="{6825CE2F-1451-4BED-9AE1-8E8CB93B219F}"/>
               </a:ext>
             </a:extLst>
           </p:cNvPr>
@@ -18679,7 +18594,7 @@
           <p:cNvPr id="11" name="">
             <a:extLst xmlns:a="http://schemas.openxmlformats.org/drawingml/2006/main">
               <a:ext uri="{FF2B5EF4-FFF2-40B4-BE49-F238E27FC236}">
-                <a16:creationId xmlns:a16="http://schemas.microsoft.com/office/drawing/2014/main" id="{6338D074-B66B-41B1-853B-CEFD58EF64E9}"/>
+                <a16:creationId xmlns:a16="http://schemas.microsoft.com/office/drawing/2014/main" id="{8B96FC77-D79A-40B2-B760-B1CFA3A27EB5}"/>
               </a:ext>
             </a:extLst>
           </p:cNvPr>
@@ -18710,7 +18625,7 @@
           <p:cNvPr id="12" name="관찰">
             <a:extLst xmlns:a="http://schemas.openxmlformats.org/drawingml/2006/main">
               <a:ext uri="{FF2B5EF4-FFF2-40B4-BE49-F238E27FC236}">
-                <a16:creationId xmlns:a16="http://schemas.microsoft.com/office/drawing/2014/main" id="{FE26214A-53AF-4211-BF22-7B1D9FB51B25}"/>
+                <a16:creationId xmlns:a16="http://schemas.microsoft.com/office/drawing/2014/main" id="{9D055271-8BFC-4A9A-997E-5BF3DF9E2B84}"/>
               </a:ext>
             </a:extLst>
           </p:cNvPr>
@@ -18868,7 +18783,7 @@
           <p:cNvPr id="13" name="무엇이 보였나?">
             <a:extLst xmlns:a="http://schemas.openxmlformats.org/drawingml/2006/main">
               <a:ext uri="{FF2B5EF4-FFF2-40B4-BE49-F238E27FC236}">
-                <a16:creationId xmlns:a16="http://schemas.microsoft.com/office/drawing/2014/main" id="{4C923258-7C85-4976-8CC0-99A2F9F02952}"/>
+                <a16:creationId xmlns:a16="http://schemas.microsoft.com/office/drawing/2014/main" id="{C28B0FA2-0D1B-4386-A532-9C22146A6BCD}"/>
               </a:ext>
             </a:extLst>
           </p:cNvPr>
@@ -19026,7 +18941,7 @@
           <p:cNvPr id="14" name="">
             <a:extLst xmlns:a="http://schemas.openxmlformats.org/drawingml/2006/main">
               <a:ext uri="{FF2B5EF4-FFF2-40B4-BE49-F238E27FC236}">
-                <a16:creationId xmlns:a16="http://schemas.microsoft.com/office/drawing/2014/main" id="{3AC14490-7235-40D9-B66B-8A9F264F9663}"/>
+                <a16:creationId xmlns:a16="http://schemas.microsoft.com/office/drawing/2014/main" id="{A35AAEAB-9181-4EB6-9B0E-A7D69435571A}"/>
               </a:ext>
             </a:extLst>
           </p:cNvPr>
@@ -19056,7 +18971,7 @@
           <p:cNvPr id="15" name="">
             <a:extLst xmlns:a="http://schemas.openxmlformats.org/drawingml/2006/main">
               <a:ext uri="{FF2B5EF4-FFF2-40B4-BE49-F238E27FC236}">
-                <a16:creationId xmlns:a16="http://schemas.microsoft.com/office/drawing/2014/main" id="{CC2FC39C-4589-49E1-A5EF-89421103FF2F}"/>
+                <a16:creationId xmlns:a16="http://schemas.microsoft.com/office/drawing/2014/main" id="{AAF5974A-480B-4062-AF79-6DEFF5B51654}"/>
               </a:ext>
             </a:extLst>
           </p:cNvPr>
@@ -19087,7 +19002,7 @@
           <p:cNvPr id="16" name="원인 판단">
             <a:extLst xmlns:a="http://schemas.openxmlformats.org/drawingml/2006/main">
               <a:ext uri="{FF2B5EF4-FFF2-40B4-BE49-F238E27FC236}">
-                <a16:creationId xmlns:a16="http://schemas.microsoft.com/office/drawing/2014/main" id="{FD85AFCF-89FB-4F7E-ADF3-1438993BD604}"/>
+                <a16:creationId xmlns:a16="http://schemas.microsoft.com/office/drawing/2014/main" id="{D351AE02-DD1F-4824-9B1F-B530A8518584}"/>
               </a:ext>
             </a:extLst>
           </p:cNvPr>
@@ -19245,7 +19160,7 @@
           <p:cNvPr id="17" name="왜 생겼나?">
             <a:extLst xmlns:a="http://schemas.openxmlformats.org/drawingml/2006/main">
               <a:ext uri="{FF2B5EF4-FFF2-40B4-BE49-F238E27FC236}">
-                <a16:creationId xmlns:a16="http://schemas.microsoft.com/office/drawing/2014/main" id="{34344EA2-6E4B-4412-B4BB-778DF81744F9}"/>
+                <a16:creationId xmlns:a16="http://schemas.microsoft.com/office/drawing/2014/main" id="{4013DF60-9069-4548-B73D-6E669D2B2707}"/>
               </a:ext>
             </a:extLst>
           </p:cNvPr>
@@ -19403,7 +19318,7 @@
           <p:cNvPr id="18" name="">
             <a:extLst xmlns:a="http://schemas.openxmlformats.org/drawingml/2006/main">
               <a:ext uri="{FF2B5EF4-FFF2-40B4-BE49-F238E27FC236}">
-                <a16:creationId xmlns:a16="http://schemas.microsoft.com/office/drawing/2014/main" id="{9C940387-C8BE-426E-8DE8-7CD89312BDD7}"/>
+                <a16:creationId xmlns:a16="http://schemas.microsoft.com/office/drawing/2014/main" id="{C8A88043-AFF7-4881-BCC2-F1DC3468807D}"/>
               </a:ext>
             </a:extLst>
           </p:cNvPr>
@@ -19433,7 +19348,7 @@
           <p:cNvPr id="19" name="">
             <a:extLst xmlns:a="http://schemas.openxmlformats.org/drawingml/2006/main">
               <a:ext uri="{FF2B5EF4-FFF2-40B4-BE49-F238E27FC236}">
-                <a16:creationId xmlns:a16="http://schemas.microsoft.com/office/drawing/2014/main" id="{E3D59749-7AF5-4C9B-83C3-89B3F6581BDC}"/>
+                <a16:creationId xmlns:a16="http://schemas.microsoft.com/office/drawing/2014/main" id="{B3AF5045-A84D-44F8-85B0-D53B67333153}"/>
               </a:ext>
             </a:extLst>
           </p:cNvPr>
@@ -19464,7 +19379,7 @@
           <p:cNvPr id="20" name="시스템 변경">
             <a:extLst xmlns:a="http://schemas.openxmlformats.org/drawingml/2006/main">
               <a:ext uri="{FF2B5EF4-FFF2-40B4-BE49-F238E27FC236}">
-                <a16:creationId xmlns:a16="http://schemas.microsoft.com/office/drawing/2014/main" id="{1F4B3201-1966-4F1C-9EFF-4089A2DB7259}"/>
+                <a16:creationId xmlns:a16="http://schemas.microsoft.com/office/drawing/2014/main" id="{60E78876-7CDA-435E-B337-E8302E2DF0E6}"/>
               </a:ext>
             </a:extLst>
           </p:cNvPr>
@@ -19622,7 +19537,7 @@
           <p:cNvPr id="21" name="어디를 바꾸나?">
             <a:extLst xmlns:a="http://schemas.openxmlformats.org/drawingml/2006/main">
               <a:ext uri="{FF2B5EF4-FFF2-40B4-BE49-F238E27FC236}">
-                <a16:creationId xmlns:a16="http://schemas.microsoft.com/office/drawing/2014/main" id="{CE956425-6916-403D-A8B7-1559992508DD}"/>
+                <a16:creationId xmlns:a16="http://schemas.microsoft.com/office/drawing/2014/main" id="{439C2378-BA69-4CB5-8CF8-1BEA33CE83C7}"/>
               </a:ext>
             </a:extLst>
           </p:cNvPr>
@@ -19780,7 +19695,7 @@
           <p:cNvPr id="22" name="">
             <a:extLst xmlns:a="http://schemas.openxmlformats.org/drawingml/2006/main">
               <a:ext uri="{FF2B5EF4-FFF2-40B4-BE49-F238E27FC236}">
-                <a16:creationId xmlns:a16="http://schemas.microsoft.com/office/drawing/2014/main" id="{BE81BA1B-4E97-4881-9BEE-36C4DC965F4C}"/>
+                <a16:creationId xmlns:a16="http://schemas.microsoft.com/office/drawing/2014/main" id="{35E3EC34-B43C-4C18-B929-12982EC543AA}"/>
               </a:ext>
             </a:extLst>
           </p:cNvPr>
@@ -19810,7 +19725,7 @@
           <p:cNvPr id="23" name="">
             <a:extLst xmlns:a="http://schemas.openxmlformats.org/drawingml/2006/main">
               <a:ext uri="{FF2B5EF4-FFF2-40B4-BE49-F238E27FC236}">
-                <a16:creationId xmlns:a16="http://schemas.microsoft.com/office/drawing/2014/main" id="{E59CC4E2-DA8C-449E-AAF2-AA56767A44A9}"/>
+                <a16:creationId xmlns:a16="http://schemas.microsoft.com/office/drawing/2014/main" id="{1DD629F5-B75D-4A10-B50A-A9BECF438396}"/>
               </a:ext>
             </a:extLst>
           </p:cNvPr>
@@ -19841,7 +19756,7 @@
           <p:cNvPr id="24" name="재평가">
             <a:extLst xmlns:a="http://schemas.openxmlformats.org/drawingml/2006/main">
               <a:ext uri="{FF2B5EF4-FFF2-40B4-BE49-F238E27FC236}">
-                <a16:creationId xmlns:a16="http://schemas.microsoft.com/office/drawing/2014/main" id="{B9C93590-A8B1-4AA2-B6EE-C0CC6CE10502}"/>
+                <a16:creationId xmlns:a16="http://schemas.microsoft.com/office/drawing/2014/main" id="{7CB9A1BE-D0C3-4861-87FC-87B41DAFBA6A}"/>
               </a:ext>
             </a:extLst>
           </p:cNvPr>
@@ -19999,7 +19914,7 @@
           <p:cNvPr id="25" name="다른 작업도&#10;괜찮은가?">
             <a:extLst xmlns:a="http://schemas.openxmlformats.org/drawingml/2006/main">
               <a:ext uri="{FF2B5EF4-FFF2-40B4-BE49-F238E27FC236}">
-                <a16:creationId xmlns:a16="http://schemas.microsoft.com/office/drawing/2014/main" id="{413DC45A-DDB9-4789-9853-471ACFA327A5}"/>
+                <a16:creationId xmlns:a16="http://schemas.microsoft.com/office/drawing/2014/main" id="{DF8FCA0F-7BC5-412D-B77C-0FB1D68EFA51}"/>
               </a:ext>
             </a:extLst>
           </p:cNvPr>
@@ -20180,7 +20095,7 @@
           <p:cNvPr id="26" name="다음 작업에도 영향을 주는 변경으로 연결한다.">
             <a:extLst xmlns:a="http://schemas.openxmlformats.org/drawingml/2006/main">
               <a:ext uri="{FF2B5EF4-FFF2-40B4-BE49-F238E27FC236}">
-                <a16:creationId xmlns:a16="http://schemas.microsoft.com/office/drawing/2014/main" id="{3C0E9980-524E-4080-B506-2DB31EBBD9C7}"/>
+                <a16:creationId xmlns:a16="http://schemas.microsoft.com/office/drawing/2014/main" id="{49D1AFD8-CCF4-4E6F-8978-F8E7CA9C41AF}"/>
               </a:ext>
             </a:extLst>
           </p:cNvPr>
@@ -20336,7 +20251,7 @@
     </p:spTree>
     <p:extLst>
       <p:ext uri="{BB962C8B-B14F-4D97-AF65-F5344CB8AC3E}">
-        <p14:creationId xmlns:p14="http://schemas.microsoft.com/office/powerpoint/2010/main" val="1005138861"/>
+        <p14:creationId xmlns:p14="http://schemas.microsoft.com/office/powerpoint/2010/main" val="1855194572"/>
       </p:ext>
     </p:extLst>
   </p:cSld>
@@ -20367,7 +20282,7 @@
           <p:cNvPr id="21" name="ACT 4 · OBSERVED META / 교육자료 제작 기록">
             <a:extLst xmlns:a="http://schemas.openxmlformats.org/drawingml/2006/main">
               <a:ext uri="{FF2B5EF4-FFF2-40B4-BE49-F238E27FC236}">
-                <a16:creationId xmlns:a16="http://schemas.microsoft.com/office/drawing/2014/main" id="{43729D65-ED37-4B50-9AE1-9B64E1C381EB}"/>
+                <a16:creationId xmlns:a16="http://schemas.microsoft.com/office/drawing/2014/main" id="{AA97E08D-2833-42B2-9FEA-FA66B1091F8B}"/>
               </a:ext>
             </a:extLst>
           </p:cNvPr>
@@ -20525,7 +20440,7 @@
           <p:cNvPr id="2" name="S67">
             <a:extLst xmlns:a="http://schemas.openxmlformats.org/drawingml/2006/main">
               <a:ext uri="{FF2B5EF4-FFF2-40B4-BE49-F238E27FC236}">
-                <a16:creationId xmlns:a16="http://schemas.microsoft.com/office/drawing/2014/main" id="{3F73ACAD-4FD8-4B56-BFFF-14482E56A469}"/>
+                <a16:creationId xmlns:a16="http://schemas.microsoft.com/office/drawing/2014/main" id="{5846EFAC-4D9D-40CF-90D0-E1CBDCD5BDCB}"/>
               </a:ext>
             </a:extLst>
           </p:cNvPr>
@@ -20683,7 +20598,7 @@
           <p:cNvPr id="3" name="실제 제작 기록: TRIAL-006">
             <a:extLst xmlns:a="http://schemas.openxmlformats.org/drawingml/2006/main">
               <a:ext uri="{FF2B5EF4-FFF2-40B4-BE49-F238E27FC236}">
-                <a16:creationId xmlns:a16="http://schemas.microsoft.com/office/drawing/2014/main" id="{89F53962-B67F-4953-8C08-CDCD7CDBD000}"/>
+                <a16:creationId xmlns:a16="http://schemas.microsoft.com/office/drawing/2014/main" id="{2C758813-D5E7-4E34-BA05-4AA39B97A5F8}"/>
               </a:ext>
             </a:extLst>
           </p:cNvPr>
@@ -20841,7 +20756,7 @@
           <p:cNvPr id="4" name="">
             <a:extLst xmlns:a="http://schemas.openxmlformats.org/drawingml/2006/main">
               <a:ext uri="{FF2B5EF4-FFF2-40B4-BE49-F238E27FC236}">
-                <a16:creationId xmlns:a16="http://schemas.microsoft.com/office/drawing/2014/main" id="{241A14CC-A99D-492D-8F70-2F6A473BE2C1}"/>
+                <a16:creationId xmlns:a16="http://schemas.microsoft.com/office/drawing/2014/main" id="{9D3DC047-AAD7-471E-BB52-F489E7A85CCF}"/>
               </a:ext>
             </a:extLst>
           </p:cNvPr>
@@ -20872,7 +20787,7 @@
           <p:cNvPr id="5" name="">
             <a:extLst xmlns:a="http://schemas.openxmlformats.org/drawingml/2006/main">
               <a:ext uri="{FF2B5EF4-FFF2-40B4-BE49-F238E27FC236}">
-                <a16:creationId xmlns:a16="http://schemas.microsoft.com/office/drawing/2014/main" id="{9E9B9165-67C7-41B0-899B-C134424978EC}"/>
+                <a16:creationId xmlns:a16="http://schemas.microsoft.com/office/drawing/2014/main" id="{EF66AD9F-B2EF-4409-9136-B50D6B987847}"/>
               </a:ext>
             </a:extLst>
           </p:cNvPr>
@@ -20903,7 +20818,7 @@
           <p:cNvPr id="6" name="TRIAL-006 · 과거 Codex CLI 조사 기록의 재구성">
             <a:extLst xmlns:a="http://schemas.openxmlformats.org/drawingml/2006/main">
               <a:ext uri="{FF2B5EF4-FFF2-40B4-BE49-F238E27FC236}">
-                <a16:creationId xmlns:a16="http://schemas.microsoft.com/office/drawing/2014/main" id="{59A88ECD-B1A4-4D55-B748-8B2328C59A86}"/>
+                <a16:creationId xmlns:a16="http://schemas.microsoft.com/office/drawing/2014/main" id="{3CC54441-9DE7-4D9C-BAEE-734348E6B477}"/>
               </a:ext>
             </a:extLst>
           </p:cNvPr>
@@ -21061,7 +20976,7 @@
           <p:cNvPr id="7" name="앞의 가상 Workflow와 별개 사건이다. 제품 코드·Demo Skill의 수정 사례가 아니다.">
             <a:extLst xmlns:a="http://schemas.openxmlformats.org/drawingml/2006/main">
               <a:ext uri="{FF2B5EF4-FFF2-40B4-BE49-F238E27FC236}">
-                <a16:creationId xmlns:a16="http://schemas.microsoft.com/office/drawing/2014/main" id="{2578D1F8-5111-40D0-85B9-AB05B7F683F6}"/>
+                <a16:creationId xmlns:a16="http://schemas.microsoft.com/office/drawing/2014/main" id="{838A4BCB-429A-4AFF-94E9-E6014A22B647}"/>
               </a:ext>
             </a:extLst>
           </p:cNvPr>
@@ -21219,7 +21134,7 @@
           <p:cNvPr id="8" name="성능 조사에 Prompt 밖의 환경도 함께 관여했다.">
             <a:extLst xmlns:a="http://schemas.openxmlformats.org/drawingml/2006/main">
               <a:ext uri="{FF2B5EF4-FFF2-40B4-BE49-F238E27FC236}">
-                <a16:creationId xmlns:a16="http://schemas.microsoft.com/office/drawing/2014/main" id="{02B23C31-C8DE-4FD7-901A-A5785E05EFD9}"/>
+                <a16:creationId xmlns:a16="http://schemas.microsoft.com/office/drawing/2014/main" id="{DAC019B1-2FFD-41E5-BCF8-12383CC3C08F}"/>
               </a:ext>
             </a:extLst>
           </p:cNvPr>
@@ -21377,7 +21292,7 @@
           <p:cNvPr id="9" name="작업 요청">
             <a:extLst xmlns:a="http://schemas.openxmlformats.org/drawingml/2006/main">
               <a:ext uri="{FF2B5EF4-FFF2-40B4-BE49-F238E27FC236}">
-                <a16:creationId xmlns:a16="http://schemas.microsoft.com/office/drawing/2014/main" id="{5C5C483A-06D8-4EF6-85D5-1C0C5FDBC3CB}"/>
+                <a16:creationId xmlns:a16="http://schemas.microsoft.com/office/drawing/2014/main" id="{B59B6369-95DF-42AD-87D3-CF81B5FB925D}"/>
               </a:ext>
             </a:extLst>
           </p:cNvPr>
@@ -21535,7 +21450,7 @@
           <p:cNvPr id="10" name="실행 환경">
             <a:extLst xmlns:a="http://schemas.openxmlformats.org/drawingml/2006/main">
               <a:ext uri="{FF2B5EF4-FFF2-40B4-BE49-F238E27FC236}">
-                <a16:creationId xmlns:a16="http://schemas.microsoft.com/office/drawing/2014/main" id="{2DC5E321-7026-46C0-B262-872D80059AE7}"/>
+                <a16:creationId xmlns:a16="http://schemas.microsoft.com/office/drawing/2014/main" id="{713B655C-0AE9-412C-AE75-5CF7187D6B74}"/>
               </a:ext>
             </a:extLst>
           </p:cNvPr>
@@ -21693,7 +21608,7 @@
           <p:cNvPr id="11" name="결과 해석">
             <a:extLst xmlns:a="http://schemas.openxmlformats.org/drawingml/2006/main">
               <a:ext uri="{FF2B5EF4-FFF2-40B4-BE49-F238E27FC236}">
-                <a16:creationId xmlns:a16="http://schemas.microsoft.com/office/drawing/2014/main" id="{44283E54-D597-4C28-8F66-2CB3BC4903D2}"/>
+                <a16:creationId xmlns:a16="http://schemas.microsoft.com/office/drawing/2014/main" id="{9BCDCAFC-F1DA-43A4-A2ED-1E7821BB5C01}"/>
               </a:ext>
             </a:extLst>
           </p:cNvPr>
@@ -21851,7 +21766,7 @@
           <p:cNvPr id="12" name="">
             <a:extLst xmlns:a="http://schemas.openxmlformats.org/drawingml/2006/main">
               <a:ext uri="{FF2B5EF4-FFF2-40B4-BE49-F238E27FC236}">
-                <a16:creationId xmlns:a16="http://schemas.microsoft.com/office/drawing/2014/main" id="{BA06BEBA-1193-4B11-8FE2-A31397FE11F9}"/>
+                <a16:creationId xmlns:a16="http://schemas.microsoft.com/office/drawing/2014/main" id="{C113443F-354F-4432-8B0A-AF73A3A71B18}"/>
               </a:ext>
             </a:extLst>
           </p:cNvPr>
@@ -21882,7 +21797,7 @@
           <p:cNvPr id="13" name="">
             <a:extLst xmlns:a="http://schemas.openxmlformats.org/drawingml/2006/main">
               <a:ext uri="{FF2B5EF4-FFF2-40B4-BE49-F238E27FC236}">
-                <a16:creationId xmlns:a16="http://schemas.microsoft.com/office/drawing/2014/main" id="{F279D4F6-42DA-49D6-9C6E-502CC884DFA3}"/>
+                <a16:creationId xmlns:a16="http://schemas.microsoft.com/office/drawing/2014/main" id="{ADBFC15A-E19D-4283-A676-D523CC15FB04}"/>
               </a:ext>
             </a:extLst>
           </p:cNvPr>
@@ -21913,7 +21828,7 @@
           <p:cNvPr id="14" name="">
             <a:extLst xmlns:a="http://schemas.openxmlformats.org/drawingml/2006/main">
               <a:ext uri="{FF2B5EF4-FFF2-40B4-BE49-F238E27FC236}">
-                <a16:creationId xmlns:a16="http://schemas.microsoft.com/office/drawing/2014/main" id="{711FB3FB-ABBE-4BC1-A2C8-B2D503CECF60}"/>
+                <a16:creationId xmlns:a16="http://schemas.microsoft.com/office/drawing/2014/main" id="{393F7F35-D92A-422B-AA69-C6A0F8E470C4}"/>
               </a:ext>
             </a:extLst>
           </p:cNvPr>
@@ -21944,7 +21859,7 @@
           <p:cNvPr id="15" name="">
             <a:extLst xmlns:a="http://schemas.openxmlformats.org/drawingml/2006/main">
               <a:ext uri="{FF2B5EF4-FFF2-40B4-BE49-F238E27FC236}">
-                <a16:creationId xmlns:a16="http://schemas.microsoft.com/office/drawing/2014/main" id="{9AE0922C-C47B-40AB-A6CD-DFA4E63C75F2}"/>
+                <a16:creationId xmlns:a16="http://schemas.microsoft.com/office/drawing/2014/main" id="{DCFDBBF1-7FC5-4B4D-A6A1-C687B78261ED}"/>
               </a:ext>
             </a:extLst>
           </p:cNvPr>
@@ -21974,7 +21889,7 @@
           <p:cNvPr id="16" name="">
             <a:extLst xmlns:a="http://schemas.openxmlformats.org/drawingml/2006/main">
               <a:ext uri="{FF2B5EF4-FFF2-40B4-BE49-F238E27FC236}">
-                <a16:creationId xmlns:a16="http://schemas.microsoft.com/office/drawing/2014/main" id="{FD518D6C-24AE-418B-93EA-2F8A35F0B662}"/>
+                <a16:creationId xmlns:a16="http://schemas.microsoft.com/office/drawing/2014/main" id="{5725C919-5792-49BF-82A5-84E7A3381273}"/>
               </a:ext>
             </a:extLst>
           </p:cNvPr>
@@ -22004,7 +21919,7 @@
           <p:cNvPr id="17" name="성능 개선 작업">
             <a:extLst xmlns:a="http://schemas.openxmlformats.org/drawingml/2006/main">
               <a:ext uri="{FF2B5EF4-FFF2-40B4-BE49-F238E27FC236}">
-                <a16:creationId xmlns:a16="http://schemas.microsoft.com/office/drawing/2014/main" id="{840A8DC6-20CA-4132-B0FA-BA46B00C29DE}"/>
+                <a16:creationId xmlns:a16="http://schemas.microsoft.com/office/drawing/2014/main" id="{24E594FC-85D3-482A-9D21-8708DAD5DCBC}"/>
               </a:ext>
             </a:extLst>
           </p:cNvPr>
@@ -22162,7 +22077,7 @@
           <p:cNvPr id="18" name="Global Skill 관여&#10;시작 경고도 기록">
             <a:extLst xmlns:a="http://schemas.openxmlformats.org/drawingml/2006/main">
               <a:ext uri="{FF2B5EF4-FFF2-40B4-BE49-F238E27FC236}">
-                <a16:creationId xmlns:a16="http://schemas.microsoft.com/office/drawing/2014/main" id="{E069631A-76BB-4755-B42C-23D80F80C3F4}"/>
+                <a16:creationId xmlns:a16="http://schemas.microsoft.com/office/drawing/2014/main" id="{9701FB4A-348D-4CCF-B200-28A4A84ADB07}"/>
               </a:ext>
             </a:extLst>
           </p:cNvPr>
@@ -22343,7 +22258,7 @@
           <p:cNvPr id="19" name="Prompt만의 효과?&#10;귀속은 PARTIAL">
             <a:extLst xmlns:a="http://schemas.openxmlformats.org/drawingml/2006/main">
               <a:ext uri="{FF2B5EF4-FFF2-40B4-BE49-F238E27FC236}">
-                <a16:creationId xmlns:a16="http://schemas.microsoft.com/office/drawing/2014/main" id="{DF06AC05-A4DB-499D-B90F-7885C71E9A11}"/>
+                <a16:creationId xmlns:a16="http://schemas.microsoft.com/office/drawing/2014/main" id="{AD8FC58D-8BFF-43BF-9A70-2A2AF1A6A140}"/>
               </a:ext>
             </a:extLst>
           </p:cNvPr>
@@ -22524,7 +22439,7 @@
           <p:cNvPr id="20" name="좋은 결과가 있다는 것과 원인을 안다는 것은 별개다.">
             <a:extLst xmlns:a="http://schemas.openxmlformats.org/drawingml/2006/main">
               <a:ext uri="{FF2B5EF4-FFF2-40B4-BE49-F238E27FC236}">
-                <a16:creationId xmlns:a16="http://schemas.microsoft.com/office/drawing/2014/main" id="{60ED7058-A520-4988-A618-EDAD353241AB}"/>
+                <a16:creationId xmlns:a16="http://schemas.microsoft.com/office/drawing/2014/main" id="{ACBED411-DAAA-4B5D-B450-148EC09C30DF}"/>
               </a:ext>
             </a:extLst>
           </p:cNvPr>
@@ -22680,7 +22595,7 @@
     </p:spTree>
     <p:extLst>
       <p:ext uri="{BB962C8B-B14F-4D97-AF65-F5344CB8AC3E}">
-        <p14:creationId xmlns:p14="http://schemas.microsoft.com/office/powerpoint/2010/main" val="2035245389"/>
+        <p14:creationId xmlns:p14="http://schemas.microsoft.com/office/powerpoint/2010/main" val="2078261901"/>
       </p:ext>
     </p:extLst>
   </p:cSld>
@@ -22711,7 +22626,7 @@
           <p:cNvPr id="17" name="ACT 4 · OBSERVED META / 두 가지 검증 질문">
             <a:extLst xmlns:a="http://schemas.openxmlformats.org/drawingml/2006/main">
               <a:ext uri="{FF2B5EF4-FFF2-40B4-BE49-F238E27FC236}">
-                <a16:creationId xmlns:a16="http://schemas.microsoft.com/office/drawing/2014/main" id="{CA631221-C9E4-4318-B06F-68000C8872C4}"/>
+                <a16:creationId xmlns:a16="http://schemas.microsoft.com/office/drawing/2014/main" id="{68E5A435-25C7-4D7A-A26B-8B1EE118AD75}"/>
               </a:ext>
             </a:extLst>
           </p:cNvPr>
@@ -22869,7 +22784,7 @@
           <p:cNvPr id="2" name="S68">
             <a:extLst xmlns:a="http://schemas.openxmlformats.org/drawingml/2006/main">
               <a:ext uri="{FF2B5EF4-FFF2-40B4-BE49-F238E27FC236}">
-                <a16:creationId xmlns:a16="http://schemas.microsoft.com/office/drawing/2014/main" id="{16C4B5C3-A60F-4788-A73A-9398DE349C6F}"/>
+                <a16:creationId xmlns:a16="http://schemas.microsoft.com/office/drawing/2014/main" id="{7D3C8ECD-1E4A-4E87-BABC-D7192843AE45}"/>
               </a:ext>
             </a:extLst>
           </p:cNvPr>
@@ -23027,7 +22942,7 @@
           <p:cNvPr id="3" name="결과의 타당성과 원인 귀속은 별개다">
             <a:extLst xmlns:a="http://schemas.openxmlformats.org/drawingml/2006/main">
               <a:ext uri="{FF2B5EF4-FFF2-40B4-BE49-F238E27FC236}">
-                <a16:creationId xmlns:a16="http://schemas.microsoft.com/office/drawing/2014/main" id="{8FA2FDC4-6845-4EC4-B2C0-09BD329CDFE7}"/>
+                <a16:creationId xmlns:a16="http://schemas.microsoft.com/office/drawing/2014/main" id="{DA0FB156-6E04-4264-8EBE-4797156D8E5A}"/>
               </a:ext>
             </a:extLst>
           </p:cNvPr>
@@ -23185,7 +23100,7 @@
           <p:cNvPr id="4" name="">
             <a:extLst xmlns:a="http://schemas.openxmlformats.org/drawingml/2006/main">
               <a:ext uri="{FF2B5EF4-FFF2-40B4-BE49-F238E27FC236}">
-                <a16:creationId xmlns:a16="http://schemas.microsoft.com/office/drawing/2014/main" id="{65E90577-7C13-4BAF-8D85-FB3B612DB618}"/>
+                <a16:creationId xmlns:a16="http://schemas.microsoft.com/office/drawing/2014/main" id="{0B8B9FF9-457C-4DE7-BF83-93783EDF66D2}"/>
               </a:ext>
             </a:extLst>
           </p:cNvPr>
@@ -23216,7 +23131,7 @@
           <p:cNvPr id="5" name="">
             <a:extLst xmlns:a="http://schemas.openxmlformats.org/drawingml/2006/main">
               <a:ext uri="{FF2B5EF4-FFF2-40B4-BE49-F238E27FC236}">
-                <a16:creationId xmlns:a16="http://schemas.microsoft.com/office/drawing/2014/main" id="{0B31401B-A12C-4D08-B7E0-0855CA20FCEE}"/>
+                <a16:creationId xmlns:a16="http://schemas.microsoft.com/office/drawing/2014/main" id="{B7737A82-D858-4FD1-B9F3-111DE09B4738}"/>
               </a:ext>
             </a:extLst>
           </p:cNvPr>
@@ -23247,7 +23162,7 @@
           <p:cNvPr id="6" name="TRIAL-006 · resize_nearest · 7 one-call samples · 기록 재구성">
             <a:extLst xmlns:a="http://schemas.openxmlformats.org/drawingml/2006/main">
               <a:ext uri="{FF2B5EF4-FFF2-40B4-BE49-F238E27FC236}">
-                <a16:creationId xmlns:a16="http://schemas.microsoft.com/office/drawing/2014/main" id="{4E925212-7AC5-421B-8FFF-B92218A74439}"/>
+                <a16:creationId xmlns:a16="http://schemas.microsoft.com/office/drawing/2014/main" id="{FFD4C4D8-2D57-4A93-9926-CECB2624DF32}"/>
               </a:ext>
             </a:extLst>
           </p:cNvPr>
@@ -23405,7 +23320,7 @@
           <p:cNvPr id="7" name="기록된 합성 입력·CPython 3.9.6·macOS arm64의 결과. 현재 Desktop 또는 일반 효과">
             <a:extLst xmlns:a="http://schemas.openxmlformats.org/drawingml/2006/main">
               <a:ext uri="{FF2B5EF4-FFF2-40B4-BE49-F238E27FC236}">
-                <a16:creationId xmlns:a16="http://schemas.microsoft.com/office/drawing/2014/main" id="{FDFC4A02-47A8-46FA-A3E7-6B1BEE199BA3}"/>
+                <a16:creationId xmlns:a16="http://schemas.microsoft.com/office/drawing/2014/main" id="{FA118364-7103-4C20-AF4F-54AB4C57B43F}"/>
               </a:ext>
             </a:extLst>
           </p:cNvPr>
@@ -23563,7 +23478,7 @@
           <p:cNvPr id="8" name="측정 결과는 유효한가?">
             <a:extLst xmlns:a="http://schemas.openxmlformats.org/drawingml/2006/main">
               <a:ext uri="{FF2B5EF4-FFF2-40B4-BE49-F238E27FC236}">
-                <a16:creationId xmlns:a16="http://schemas.microsoft.com/office/drawing/2014/main" id="{175B1367-ECE9-4BBB-8356-9CF40DB1F21B}"/>
+                <a16:creationId xmlns:a16="http://schemas.microsoft.com/office/drawing/2014/main" id="{698BFDDF-DE33-435E-86A0-C8BE50C276CA}"/>
               </a:ext>
             </a:extLst>
           </p:cNvPr>
@@ -23721,7 +23636,7 @@
           <p:cNvPr id="9" name="무엇이 결과를 만들었나?">
             <a:extLst xmlns:a="http://schemas.openxmlformats.org/drawingml/2006/main">
               <a:ext uri="{FF2B5EF4-FFF2-40B4-BE49-F238E27FC236}">
-                <a16:creationId xmlns:a16="http://schemas.microsoft.com/office/drawing/2014/main" id="{4B6FC52B-301C-4253-9A96-2F021E94B605}"/>
+                <a16:creationId xmlns:a16="http://schemas.microsoft.com/office/drawing/2014/main" id="{261AA955-3F94-46A0-9E6E-3ACADF6A8C0A}"/>
               </a:ext>
             </a:extLst>
           </p:cNvPr>
@@ -23879,7 +23794,7 @@
           <p:cNvPr id="10" name="">
             <a:extLst xmlns:a="http://schemas.openxmlformats.org/drawingml/2006/main">
               <a:ext uri="{FF2B5EF4-FFF2-40B4-BE49-F238E27FC236}">
-                <a16:creationId xmlns:a16="http://schemas.microsoft.com/office/drawing/2014/main" id="{4FED0F9A-70E4-455A-ACFE-BE5AA8BA40C5}"/>
+                <a16:creationId xmlns:a16="http://schemas.microsoft.com/office/drawing/2014/main" id="{F718E473-CA13-4F3D-AAE1-D7A877412CDA}"/>
               </a:ext>
             </a:extLst>
           </p:cNvPr>
@@ -23910,7 +23825,7 @@
           <p:cNvPr id="11" name="">
             <a:extLst xmlns:a="http://schemas.openxmlformats.org/drawingml/2006/main">
               <a:ext uri="{FF2B5EF4-FFF2-40B4-BE49-F238E27FC236}">
-                <a16:creationId xmlns:a16="http://schemas.microsoft.com/office/drawing/2014/main" id="{A1E92788-E0E2-4EBE-94D7-6E976EF7BC85}"/>
+                <a16:creationId xmlns:a16="http://schemas.microsoft.com/office/drawing/2014/main" id="{5B79AE91-17ED-4439-98AC-C0A64460B925}"/>
               </a:ext>
             </a:extLst>
           </p:cNvPr>
@@ -23941,7 +23856,7 @@
           <p:cNvPr id="12" name="입력·출력 hash 일치&#10;같은 조건의 측정 기록">
             <a:extLst xmlns:a="http://schemas.openxmlformats.org/drawingml/2006/main">
               <a:ext uri="{FF2B5EF4-FFF2-40B4-BE49-F238E27FC236}">
-                <a16:creationId xmlns:a16="http://schemas.microsoft.com/office/drawing/2014/main" id="{EB56A210-1412-4033-8286-C0A2DF65B46C}"/>
+                <a16:creationId xmlns:a16="http://schemas.microsoft.com/office/drawing/2014/main" id="{EFC48608-3649-4B72-BBB9-A15BF8469F63}"/>
               </a:ext>
             </a:extLst>
           </p:cNvPr>
@@ -24122,7 +24037,7 @@
           <p:cNvPr id="13" name="Global Skill이 평가 절차에 관여&#10;Prompt만의 효과는 분리 못함">
             <a:extLst xmlns:a="http://schemas.openxmlformats.org/drawingml/2006/main">
               <a:ext uri="{FF2B5EF4-FFF2-40B4-BE49-F238E27FC236}">
-                <a16:creationId xmlns:a16="http://schemas.microsoft.com/office/drawing/2014/main" id="{CC10522F-9311-460B-A86B-1D8334E50C77}"/>
+                <a16:creationId xmlns:a16="http://schemas.microsoft.com/office/drawing/2014/main" id="{7C3E8C05-9C39-43B9-B058-FAA60E1AA128}"/>
               </a:ext>
             </a:extLst>
           </p:cNvPr>
@@ -24303,7 +24218,7 @@
           <p:cNvPr id="14" name="144.2 → 33.5 ms/call median">
             <a:extLst xmlns:a="http://schemas.openxmlformats.org/drawingml/2006/main">
               <a:ext uri="{FF2B5EF4-FFF2-40B4-BE49-F238E27FC236}">
-                <a16:creationId xmlns:a16="http://schemas.microsoft.com/office/drawing/2014/main" id="{167A7964-5DB6-46AE-8151-25E1884E1E89}"/>
+                <a16:creationId xmlns:a16="http://schemas.microsoft.com/office/drawing/2014/main" id="{3DA83C9E-124F-4DE8-94DC-EC79F95E0F47}"/>
               </a:ext>
             </a:extLst>
           </p:cNvPr>
@@ -24461,7 +24376,7 @@
           <p:cNvPr id="15" name="인과 해석: PARTIAL">
             <a:extLst xmlns:a="http://schemas.openxmlformats.org/drawingml/2006/main">
               <a:ext uri="{FF2B5EF4-FFF2-40B4-BE49-F238E27FC236}">
-                <a16:creationId xmlns:a16="http://schemas.microsoft.com/office/drawing/2014/main" id="{06E9E8DD-8EC9-4071-82F8-A1FABF8548EF}"/>
+                <a16:creationId xmlns:a16="http://schemas.microsoft.com/office/drawing/2014/main" id="{D74FEB70-88BC-469B-99D3-9CC54C7630E7}"/>
               </a:ext>
             </a:extLst>
           </p:cNvPr>
@@ -24619,7 +24534,7 @@
           <p:cNvPr id="16" name="측정된 변화와, 그 변화의 원인에 대한 확신을 따로 기록한다.">
             <a:extLst xmlns:a="http://schemas.openxmlformats.org/drawingml/2006/main">
               <a:ext uri="{FF2B5EF4-FFF2-40B4-BE49-F238E27FC236}">
-                <a16:creationId xmlns:a16="http://schemas.microsoft.com/office/drawing/2014/main" id="{4D35F5EA-99D7-4B17-9616-AE06EF7D43CC}"/>
+                <a16:creationId xmlns:a16="http://schemas.microsoft.com/office/drawing/2014/main" id="{1FCDA963-8655-46F9-9A6E-F78F88FF9EDC}"/>
               </a:ext>
             </a:extLst>
           </p:cNvPr>
@@ -24775,7 +24690,7 @@
     </p:spTree>
     <p:extLst>
       <p:ext uri="{BB962C8B-B14F-4D97-AF65-F5344CB8AC3E}">
-        <p14:creationId xmlns:p14="http://schemas.microsoft.com/office/powerpoint/2010/main" val="312258976"/>
+        <p14:creationId xmlns:p14="http://schemas.microsoft.com/office/powerpoint/2010/main" val="1856095990"/>
       </p:ext>
     </p:extLst>
   </p:cSld>
@@ -24806,7 +24721,7 @@
           <p:cNvPr id="16" name="ACT 4 · OBSERVED META / 실제 기록 방식 변경">
             <a:extLst xmlns:a="http://schemas.openxmlformats.org/drawingml/2006/main">
               <a:ext uri="{FF2B5EF4-FFF2-40B4-BE49-F238E27FC236}">
-                <a16:creationId xmlns:a16="http://schemas.microsoft.com/office/drawing/2014/main" id="{E2A5E7E9-CC58-4112-85B5-ACC062008D84}"/>
+                <a16:creationId xmlns:a16="http://schemas.microsoft.com/office/drawing/2014/main" id="{6A97102A-B46E-47C4-9996-344984C857F2}"/>
               </a:ext>
             </a:extLst>
           </p:cNvPr>
@@ -24964,7 +24879,7 @@
           <p:cNvPr id="2" name="S69">
             <a:extLst xmlns:a="http://schemas.openxmlformats.org/drawingml/2006/main">
               <a:ext uri="{FF2B5EF4-FFF2-40B4-BE49-F238E27FC236}">
-                <a16:creationId xmlns:a16="http://schemas.microsoft.com/office/drawing/2014/main" id="{D9A2F4A4-E70B-4CAA-9CD1-AA998E68C0E3}"/>
+                <a16:creationId xmlns:a16="http://schemas.microsoft.com/office/drawing/2014/main" id="{6CB08126-B296-4B6E-8E13-1D102ED95067}"/>
               </a:ext>
             </a:extLst>
           </p:cNvPr>
@@ -25122,7 +25037,7 @@
           <p:cNvPr id="3" name="평가와 보고 규칙을 Evidence에 맞추다">
             <a:extLst xmlns:a="http://schemas.openxmlformats.org/drawingml/2006/main">
               <a:ext uri="{FF2B5EF4-FFF2-40B4-BE49-F238E27FC236}">
-                <a16:creationId xmlns:a16="http://schemas.microsoft.com/office/drawing/2014/main" id="{A55D64B2-08F8-4E4A-BDFA-F33C2C83A74C}"/>
+                <a16:creationId xmlns:a16="http://schemas.microsoft.com/office/drawing/2014/main" id="{D93CC28B-277D-403C-BE69-7665F6DA33D6}"/>
               </a:ext>
             </a:extLst>
           </p:cNvPr>
@@ -25280,7 +25195,7 @@
           <p:cNvPr id="4" name="">
             <a:extLst xmlns:a="http://schemas.openxmlformats.org/drawingml/2006/main">
               <a:ext uri="{FF2B5EF4-FFF2-40B4-BE49-F238E27FC236}">
-                <a16:creationId xmlns:a16="http://schemas.microsoft.com/office/drawing/2014/main" id="{B5C20267-1512-481E-99FB-167477871F02}"/>
+                <a16:creationId xmlns:a16="http://schemas.microsoft.com/office/drawing/2014/main" id="{1633F006-802C-429B-B08A-97D40559C989}"/>
               </a:ext>
             </a:extLst>
           </p:cNvPr>
@@ -25311,7 +25226,7 @@
           <p:cNvPr id="5" name="">
             <a:extLst xmlns:a="http://schemas.openxmlformats.org/drawingml/2006/main">
               <a:ext uri="{FF2B5EF4-FFF2-40B4-BE49-F238E27FC236}">
-                <a16:creationId xmlns:a16="http://schemas.microsoft.com/office/drawing/2014/main" id="{2E563648-F729-4341-913D-FC664B9A8412}"/>
+                <a16:creationId xmlns:a16="http://schemas.microsoft.com/office/drawing/2014/main" id="{8DC8BC04-443A-48C7-BA4F-32B32B79E4FF}"/>
               </a:ext>
             </a:extLst>
           </p:cNvPr>
@@ -25342,7 +25257,7 @@
           <p:cNvPr id="6" name="TRIAL-006 → DEC-0016 · 평가·보고 기준을 요약한 도식">
             <a:extLst xmlns:a="http://schemas.openxmlformats.org/drawingml/2006/main">
               <a:ext uri="{FF2B5EF4-FFF2-40B4-BE49-F238E27FC236}">
-                <a16:creationId xmlns:a16="http://schemas.microsoft.com/office/drawing/2014/main" id="{A191AECC-13D7-4429-9609-BBDD057D4701}"/>
+                <a16:creationId xmlns:a16="http://schemas.microsoft.com/office/drawing/2014/main" id="{AE022E24-AE37-48F1-B1B1-4CA65FDE42A9}"/>
               </a:ext>
             </a:extLst>
           </p:cNvPr>
@@ -25500,7 +25415,7 @@
           <p:cNvPr id="7" name="제품 코드·Demo Skill 수정이 아니며, 격리 환경에서 Prompt 효과를 검증한 것도 아니다.">
             <a:extLst xmlns:a="http://schemas.openxmlformats.org/drawingml/2006/main">
               <a:ext uri="{FF2B5EF4-FFF2-40B4-BE49-F238E27FC236}">
-                <a16:creationId xmlns:a16="http://schemas.microsoft.com/office/drawing/2014/main" id="{7DE2CFCD-9246-4FDE-8C7A-C1ADB2E0E674}"/>
+                <a16:creationId xmlns:a16="http://schemas.microsoft.com/office/drawing/2014/main" id="{A60ACFB4-950B-45A3-87A8-5A4F68F99EAD}"/>
               </a:ext>
             </a:extLst>
           </p:cNvPr>
@@ -25658,7 +25573,7 @@
           <p:cNvPr id="8" name="이후 Trial에는 관찰된 환경 영향도 기록한다.">
             <a:extLst xmlns:a="http://schemas.openxmlformats.org/drawingml/2006/main">
               <a:ext uri="{FF2B5EF4-FFF2-40B4-BE49-F238E27FC236}">
-                <a16:creationId xmlns:a16="http://schemas.microsoft.com/office/drawing/2014/main" id="{099E4586-F5D3-4B59-A456-9FE5EF8D7845}"/>
+                <a16:creationId xmlns:a16="http://schemas.microsoft.com/office/drawing/2014/main" id="{5475D457-E748-41B0-97A1-7CA1CA20B731}"/>
               </a:ext>
             </a:extLst>
           </p:cNvPr>
@@ -25816,7 +25731,7 @@
           <p:cNvPr id="9" name="기존 평가의 빈틈">
             <a:extLst xmlns:a="http://schemas.openxmlformats.org/drawingml/2006/main">
               <a:ext uri="{FF2B5EF4-FFF2-40B4-BE49-F238E27FC236}">
-                <a16:creationId xmlns:a16="http://schemas.microsoft.com/office/drawing/2014/main" id="{447103F9-6662-443C-877B-C52B139F1A7A}"/>
+                <a16:creationId xmlns:a16="http://schemas.microsoft.com/office/drawing/2014/main" id="{20B4C0BB-4DE4-4FEB-8559-7C16134A34C7}"/>
               </a:ext>
             </a:extLst>
           </p:cNvPr>
@@ -25974,7 +25889,7 @@
           <p:cNvPr id="10" name="후속 기록 기준">
             <a:extLst xmlns:a="http://schemas.openxmlformats.org/drawingml/2006/main">
               <a:ext uri="{FF2B5EF4-FFF2-40B4-BE49-F238E27FC236}">
-                <a16:creationId xmlns:a16="http://schemas.microsoft.com/office/drawing/2014/main" id="{6A1B1911-F522-4BA1-A6B7-7959697B05BC}"/>
+                <a16:creationId xmlns:a16="http://schemas.microsoft.com/office/drawing/2014/main" id="{9561D7E7-24DA-48FA-8675-332332A8256C}"/>
               </a:ext>
             </a:extLst>
           </p:cNvPr>
@@ -26132,7 +26047,7 @@
           <p:cNvPr id="11" name="">
             <a:extLst xmlns:a="http://schemas.openxmlformats.org/drawingml/2006/main">
               <a:ext uri="{FF2B5EF4-FFF2-40B4-BE49-F238E27FC236}">
-                <a16:creationId xmlns:a16="http://schemas.microsoft.com/office/drawing/2014/main" id="{1F97E0ED-1646-4AA6-9700-9749ACBF3290}"/>
+                <a16:creationId xmlns:a16="http://schemas.microsoft.com/office/drawing/2014/main" id="{B63FAA3F-261D-42E6-84D2-A32B7B9CBD55}"/>
               </a:ext>
             </a:extLst>
           </p:cNvPr>
@@ -26163,7 +26078,7 @@
           <p:cNvPr id="12" name="">
             <a:extLst xmlns:a="http://schemas.openxmlformats.org/drawingml/2006/main">
               <a:ext uri="{FF2B5EF4-FFF2-40B4-BE49-F238E27FC236}">
-                <a16:creationId xmlns:a16="http://schemas.microsoft.com/office/drawing/2014/main" id="{2D94941A-00BD-4AD1-8F5D-83257911D6C1}"/>
+                <a16:creationId xmlns:a16="http://schemas.microsoft.com/office/drawing/2014/main" id="{40582636-AAE4-4FD3-8DC6-4CB4FB390D97}"/>
               </a:ext>
             </a:extLst>
           </p:cNvPr>
@@ -26194,7 +26109,7 @@
           <p:cNvPr id="13" name="작업과 Repository 중심&#10;주변 Harness 영향 설명 부족">
             <a:extLst xmlns:a="http://schemas.openxmlformats.org/drawingml/2006/main">
               <a:ext uri="{FF2B5EF4-FFF2-40B4-BE49-F238E27FC236}">
-                <a16:creationId xmlns:a16="http://schemas.microsoft.com/office/drawing/2014/main" id="{C69DE1CC-E9B2-4A76-BF1A-B52D77C185D9}"/>
+                <a16:creationId xmlns:a16="http://schemas.microsoft.com/office/drawing/2014/main" id="{68465672-B30B-4359-B106-66D139A48472}"/>
               </a:ext>
             </a:extLst>
           </p:cNvPr>
@@ -26375,7 +26290,7 @@
           <p:cNvPr id="14" name="관찰된 Skills · 경고 · 사용 여부&#10;결과를 설명할 수 있는 범위">
             <a:extLst xmlns:a="http://schemas.openxmlformats.org/drawingml/2006/main">
               <a:ext uri="{FF2B5EF4-FFF2-40B4-BE49-F238E27FC236}">
-                <a16:creationId xmlns:a16="http://schemas.microsoft.com/office/drawing/2014/main" id="{F19F3C12-7DB4-4727-B275-8E5448B55431}"/>
+                <a16:creationId xmlns:a16="http://schemas.microsoft.com/office/drawing/2014/main" id="{594A2E66-6CC9-4506-B35B-F004E0C91D77}"/>
               </a:ext>
             </a:extLst>
           </p:cNvPr>
@@ -26556,7 +26471,7 @@
           <p:cNvPr id="15" name="기존 결과는 PARTIAL로 보존하고, 관찰된 조건을 함께 남긴다.">
             <a:extLst xmlns:a="http://schemas.openxmlformats.org/drawingml/2006/main">
               <a:ext uri="{FF2B5EF4-FFF2-40B4-BE49-F238E27FC236}">
-                <a16:creationId xmlns:a16="http://schemas.microsoft.com/office/drawing/2014/main" id="{2718FEC3-3FD4-4A34-965B-E8025D19B9DC}"/>
+                <a16:creationId xmlns:a16="http://schemas.microsoft.com/office/drawing/2014/main" id="{A679BAC3-9D45-4420-A9FB-B4492C4043A0}"/>
               </a:ext>
             </a:extLst>
           </p:cNvPr>
@@ -26712,7 +26627,7 @@
     </p:spTree>
     <p:extLst>
       <p:ext uri="{BB962C8B-B14F-4D97-AF65-F5344CB8AC3E}">
-        <p14:creationId xmlns:p14="http://schemas.microsoft.com/office/powerpoint/2010/main" val="1875793927"/>
+        <p14:creationId xmlns:p14="http://schemas.microsoft.com/office/powerpoint/2010/main" val="1286640307"/>
       </p:ext>
     </p:extLst>
   </p:cSld>
@@ -26743,7 +26658,7 @@
           <p:cNvPr id="17" name="ACT 4 · OBSERVED META / 후속 기록 대조">
             <a:extLst xmlns:a="http://schemas.openxmlformats.org/drawingml/2006/main">
               <a:ext uri="{FF2B5EF4-FFF2-40B4-BE49-F238E27FC236}">
-                <a16:creationId xmlns:a16="http://schemas.microsoft.com/office/drawing/2014/main" id="{AAC29AE5-A3FB-4874-AABD-6F4C3BA766B4}"/>
+                <a16:creationId xmlns:a16="http://schemas.microsoft.com/office/drawing/2014/main" id="{EA577319-3397-49FE-A026-6D6EE4C1FF2F}"/>
               </a:ext>
             </a:extLst>
           </p:cNvPr>
@@ -26901,7 +26816,7 @@
           <p:cNvPr id="2" name="S70">
             <a:extLst xmlns:a="http://schemas.openxmlformats.org/drawingml/2006/main">
               <a:ext uri="{FF2B5EF4-FFF2-40B4-BE49-F238E27FC236}">
-                <a16:creationId xmlns:a16="http://schemas.microsoft.com/office/drawing/2014/main" id="{E68D149D-40BF-4513-B7CE-6F2AEF26E2C6}"/>
+                <a16:creationId xmlns:a16="http://schemas.microsoft.com/office/drawing/2014/main" id="{BA8A5B51-DAA9-4AF1-9A47-6540B4690010}"/>
               </a:ext>
             </a:extLst>
           </p:cNvPr>
@@ -27059,7 +26974,7 @@
           <p:cNvPr id="3" name="후속 기록은 개선됐지만 완전하지 않았다">
             <a:extLst xmlns:a="http://schemas.openxmlformats.org/drawingml/2006/main">
               <a:ext uri="{FF2B5EF4-FFF2-40B4-BE49-F238E27FC236}">
-                <a16:creationId xmlns:a16="http://schemas.microsoft.com/office/drawing/2014/main" id="{771FE8D8-6F8E-4328-A7A9-4B44098E551C}"/>
+                <a16:creationId xmlns:a16="http://schemas.microsoft.com/office/drawing/2014/main" id="{3E7AC213-F545-4272-AA64-399458AA703D}"/>
               </a:ext>
             </a:extLst>
           </p:cNvPr>
@@ -27217,7 +27132,7 @@
           <p:cNvPr id="4" name="">
             <a:extLst xmlns:a="http://schemas.openxmlformats.org/drawingml/2006/main">
               <a:ext uri="{FF2B5EF4-FFF2-40B4-BE49-F238E27FC236}">
-                <a16:creationId xmlns:a16="http://schemas.microsoft.com/office/drawing/2014/main" id="{BCD05586-43E8-45F6-BBCB-615E8783F2DF}"/>
+                <a16:creationId xmlns:a16="http://schemas.microsoft.com/office/drawing/2014/main" id="{31EAE675-0E37-49E1-A354-EBA0C4BCE87A}"/>
               </a:ext>
             </a:extLst>
           </p:cNvPr>
@@ -27248,7 +27163,7 @@
           <p:cNvPr id="5" name="">
             <a:extLst xmlns:a="http://schemas.openxmlformats.org/drawingml/2006/main">
               <a:ext uri="{FF2B5EF4-FFF2-40B4-BE49-F238E27FC236}">
-                <a16:creationId xmlns:a16="http://schemas.microsoft.com/office/drawing/2014/main" id="{14D2DA11-DE63-4405-A6DE-6E9D6AD88CFF}"/>
+                <a16:creationId xmlns:a16="http://schemas.microsoft.com/office/drawing/2014/main" id="{6B1176DB-264B-46E6-97F2-09CC72904EDF}"/>
               </a:ext>
             </a:extLst>
           </p:cNvPr>
@@ -27279,7 +27194,7 @@
           <p:cNvPr id="6" name="TRIAL-007/008 · DEC-0016 · 원문 기록의 의미를 요약한 도식">
             <a:extLst xmlns:a="http://schemas.openxmlformats.org/drawingml/2006/main">
               <a:ext uri="{FF2B5EF4-FFF2-40B4-BE49-F238E27FC236}">
-                <a16:creationId xmlns:a16="http://schemas.microsoft.com/office/drawing/2014/main" id="{26DC3AEF-4817-4A76-8D48-96843C428209}"/>
+                <a16:creationId xmlns:a16="http://schemas.microsoft.com/office/drawing/2014/main" id="{D68F8FF8-0C1E-4415-9792-44A3E5E6D5AF}"/>
               </a:ext>
             </a:extLst>
           </p:cNvPr>
@@ -27437,7 +27352,7 @@
           <p:cNvPr id="7" name="MCP 작업 결과는 없음. 완전한 환경 목록이나 측정된 품질 향상을 뜻하지 않는다.">
             <a:extLst xmlns:a="http://schemas.openxmlformats.org/drawingml/2006/main">
               <a:ext uri="{FF2B5EF4-FFF2-40B4-BE49-F238E27FC236}">
-                <a16:creationId xmlns:a16="http://schemas.microsoft.com/office/drawing/2014/main" id="{290E7745-C69C-4AB0-A184-42C1E655E823}"/>
+                <a16:creationId xmlns:a16="http://schemas.microsoft.com/office/drawing/2014/main" id="{FA866DDD-2E21-414D-9236-6B032227C364}"/>
               </a:ext>
             </a:extLst>
           </p:cNvPr>
@@ -27595,7 +27510,7 @@
           <p:cNvPr id="8" name="TRIAL-007 · 보고와 기록의 불일치">
             <a:extLst xmlns:a="http://schemas.openxmlformats.org/drawingml/2006/main">
               <a:ext uri="{FF2B5EF4-FFF2-40B4-BE49-F238E27FC236}">
-                <a16:creationId xmlns:a16="http://schemas.microsoft.com/office/drawing/2014/main" id="{BE030472-7544-4031-91B0-DEF359AD71B0}"/>
+                <a16:creationId xmlns:a16="http://schemas.microsoft.com/office/drawing/2014/main" id="{A21918AF-C7A9-4A91-BA0F-7EAF9CDB4E1C}"/>
               </a:ext>
             </a:extLst>
           </p:cNvPr>
@@ -27753,7 +27668,7 @@
           <p:cNvPr id="9" name="">
             <a:extLst xmlns:a="http://schemas.openxmlformats.org/drawingml/2006/main">
               <a:ext uri="{FF2B5EF4-FFF2-40B4-BE49-F238E27FC236}">
-                <a16:creationId xmlns:a16="http://schemas.microsoft.com/office/drawing/2014/main" id="{C8262EE6-800A-4D33-B28A-883142F64341}"/>
+                <a16:creationId xmlns:a16="http://schemas.microsoft.com/office/drawing/2014/main" id="{B4C31F4C-C334-4427-AB4F-AA8D8DDA4DDA}"/>
               </a:ext>
             </a:extLst>
           </p:cNvPr>
@@ -27784,7 +27699,7 @@
           <p:cNvPr id="10" name="최종 보고">
             <a:extLst xmlns:a="http://schemas.openxmlformats.org/drawingml/2006/main">
               <a:ext uri="{FF2B5EF4-FFF2-40B4-BE49-F238E27FC236}">
-                <a16:creationId xmlns:a16="http://schemas.microsoft.com/office/drawing/2014/main" id="{83FCA940-326D-4292-96FE-E3D54774E3D7}"/>
+                <a16:creationId xmlns:a16="http://schemas.microsoft.com/office/drawing/2014/main" id="{7E196E57-2BA4-4D6E-BF1E-9AF03BF62108}"/>
               </a:ext>
             </a:extLst>
           </p:cNvPr>
@@ -27942,7 +27857,7 @@
           <p:cNvPr id="11" name="MCP 경고 없음">
             <a:extLst xmlns:a="http://schemas.openxmlformats.org/drawingml/2006/main">
               <a:ext uri="{FF2B5EF4-FFF2-40B4-BE49-F238E27FC236}">
-                <a16:creationId xmlns:a16="http://schemas.microsoft.com/office/drawing/2014/main" id="{6933A7D3-A57F-4681-BAD3-F9C578801C9D}"/>
+                <a16:creationId xmlns:a16="http://schemas.microsoft.com/office/drawing/2014/main" id="{4341B99C-6BD5-4E45-886B-DFC53D6DE461}"/>
               </a:ext>
             </a:extLst>
           </p:cNvPr>
@@ -28100,7 +28015,7 @@
           <p:cNvPr id="12" name="보존된 stderr">
             <a:extLst xmlns:a="http://schemas.openxmlformats.org/drawingml/2006/main">
               <a:ext uri="{FF2B5EF4-FFF2-40B4-BE49-F238E27FC236}">
-                <a16:creationId xmlns:a16="http://schemas.microsoft.com/office/drawing/2014/main" id="{503A4D34-148B-4AF9-8441-90ADC08D0451}"/>
+                <a16:creationId xmlns:a16="http://schemas.microsoft.com/office/drawing/2014/main" id="{AE40716E-FBD5-4BF9-9997-8F54C023AEA9}"/>
               </a:ext>
             </a:extLst>
           </p:cNvPr>
@@ -28258,7 +28173,7 @@
           <p:cNvPr id="13" name="Nimble AuthRequired">
             <a:extLst xmlns:a="http://schemas.openxmlformats.org/drawingml/2006/main">
               <a:ext uri="{FF2B5EF4-FFF2-40B4-BE49-F238E27FC236}">
-                <a16:creationId xmlns:a16="http://schemas.microsoft.com/office/drawing/2014/main" id="{5C72C996-52DD-4D7D-B7A5-EFCFEE605C9B}"/>
+                <a16:creationId xmlns:a16="http://schemas.microsoft.com/office/drawing/2014/main" id="{9D43A7C9-448F-4F1D-BA72-078789058820}"/>
               </a:ext>
             </a:extLst>
           </p:cNvPr>
@@ -28416,7 +28331,7 @@
           <p:cNvPr id="14" name="">
             <a:extLst xmlns:a="http://schemas.openxmlformats.org/drawingml/2006/main">
               <a:ext uri="{FF2B5EF4-FFF2-40B4-BE49-F238E27FC236}">
-                <a16:creationId xmlns:a16="http://schemas.microsoft.com/office/drawing/2014/main" id="{39D96E30-227A-4F0C-91F7-2731C46B4A72}"/>
+                <a16:creationId xmlns:a16="http://schemas.microsoft.com/office/drawing/2014/main" id="{199C3319-8505-4C40-A6A8-3C6B6B85B6E1}"/>
               </a:ext>
             </a:extLst>
           </p:cNvPr>
@@ -28447,7 +28362,7 @@
           <p:cNvPr id="15" name="TRIAL-008">
             <a:extLst xmlns:a="http://schemas.openxmlformats.org/drawingml/2006/main">
               <a:ext uri="{FF2B5EF4-FFF2-40B4-BE49-F238E27FC236}">
-                <a16:creationId xmlns:a16="http://schemas.microsoft.com/office/drawing/2014/main" id="{D4218BB9-8A59-4D50-A0C1-0315D6B5D29B}"/>
+                <a16:creationId xmlns:a16="http://schemas.microsoft.com/office/drawing/2014/main" id="{D38B781A-7A28-4AC8-8798-ABD3B68BB58F}"/>
               </a:ext>
             </a:extLst>
           </p:cNvPr>
@@ -28605,7 +28520,7 @@
           <p:cNvPr id="16" name="Repository Skill 호출과 Global influence를 별도 기록">
             <a:extLst xmlns:a="http://schemas.openxmlformats.org/drawingml/2006/main">
               <a:ext uri="{FF2B5EF4-FFF2-40B4-BE49-F238E27FC236}">
-                <a16:creationId xmlns:a16="http://schemas.microsoft.com/office/drawing/2014/main" id="{C93983C7-1043-4348-AFBC-6BCFD62A9C1A}"/>
+                <a16:creationId xmlns:a16="http://schemas.microsoft.com/office/drawing/2014/main" id="{ABE631B6-B9D1-4778-AF5D-BCB0CE50C191}"/>
               </a:ext>
             </a:extLst>
           </p:cNvPr>
@@ -28761,7 +28676,7 @@
     </p:spTree>
     <p:extLst>
       <p:ext uri="{BB962C8B-B14F-4D97-AF65-F5344CB8AC3E}">
-        <p14:creationId xmlns:p14="http://schemas.microsoft.com/office/powerpoint/2010/main" val="681649579"/>
+        <p14:creationId xmlns:p14="http://schemas.microsoft.com/office/powerpoint/2010/main" val="1860392857"/>
       </p:ext>
     </p:extLst>
   </p:cSld>
@@ -28792,7 +28707,7 @@
           <p:cNvPr id="15" name="ACT 4 · OBSERVED META / 사례 회수">
             <a:extLst xmlns:a="http://schemas.openxmlformats.org/drawingml/2006/main">
               <a:ext uri="{FF2B5EF4-FFF2-40B4-BE49-F238E27FC236}">
-                <a16:creationId xmlns:a16="http://schemas.microsoft.com/office/drawing/2014/main" id="{8F659773-8D32-40BB-B7DC-19B5E93BDF49}"/>
+                <a16:creationId xmlns:a16="http://schemas.microsoft.com/office/drawing/2014/main" id="{523EE41F-BD49-4A7F-BBE7-D41150E6E635}"/>
               </a:ext>
             </a:extLst>
           </p:cNvPr>
@@ -28950,7 +28865,7 @@
           <p:cNvPr id="2" name="S71">
             <a:extLst xmlns:a="http://schemas.openxmlformats.org/drawingml/2006/main">
               <a:ext uri="{FF2B5EF4-FFF2-40B4-BE49-F238E27FC236}">
-                <a16:creationId xmlns:a16="http://schemas.microsoft.com/office/drawing/2014/main" id="{D127873E-06B5-43AE-9F02-418E55146532}"/>
+                <a16:creationId xmlns:a16="http://schemas.microsoft.com/office/drawing/2014/main" id="{3E69173D-D9D1-4E31-A85E-2EB1C42E2595}"/>
               </a:ext>
             </a:extLst>
           </p:cNvPr>
@@ -29108,7 +29023,7 @@
           <p:cNvPr id="3" name="실제 Meta Loop에서 바뀐 것">
             <a:extLst xmlns:a="http://schemas.openxmlformats.org/drawingml/2006/main">
               <a:ext uri="{FF2B5EF4-FFF2-40B4-BE49-F238E27FC236}">
-                <a16:creationId xmlns:a16="http://schemas.microsoft.com/office/drawing/2014/main" id="{215F3A2B-7F42-4656-AA1B-B0A7F701197A}"/>
+                <a16:creationId xmlns:a16="http://schemas.microsoft.com/office/drawing/2014/main" id="{D81E77FB-5E53-46ED-8795-3F4B1BA0A76C}"/>
               </a:ext>
             </a:extLst>
           </p:cNvPr>
@@ -29266,7 +29181,7 @@
           <p:cNvPr id="4" name="">
             <a:extLst xmlns:a="http://schemas.openxmlformats.org/drawingml/2006/main">
               <a:ext uri="{FF2B5EF4-FFF2-40B4-BE49-F238E27FC236}">
-                <a16:creationId xmlns:a16="http://schemas.microsoft.com/office/drawing/2014/main" id="{429EBB5C-D329-41AD-BBF2-30BCC0FEBF21}"/>
+                <a16:creationId xmlns:a16="http://schemas.microsoft.com/office/drawing/2014/main" id="{C74AC8DB-4696-4A07-88C0-5C02FAB8A44D}"/>
               </a:ext>
             </a:extLst>
           </p:cNvPr>
@@ -29297,7 +29212,7 @@
           <p:cNvPr id="5" name="">
             <a:extLst xmlns:a="http://schemas.openxmlformats.org/drawingml/2006/main">
               <a:ext uri="{FF2B5EF4-FFF2-40B4-BE49-F238E27FC236}">
-                <a16:creationId xmlns:a16="http://schemas.microsoft.com/office/drawing/2014/main" id="{5EEA1938-73BA-4B0B-B77B-4CEB6A445572}"/>
+                <a16:creationId xmlns:a16="http://schemas.microsoft.com/office/drawing/2014/main" id="{1D6B268E-2A3C-4918-8273-71FC77E80EA7}"/>
               </a:ext>
             </a:extLst>
           </p:cNvPr>
@@ -29328,7 +29243,7 @@
           <p:cNvPr id="6" name="TRIAL-006 → DEC-0016 → TRIAL-007/008 · 실제 제작 기록">
             <a:extLst xmlns:a="http://schemas.openxmlformats.org/drawingml/2006/main">
               <a:ext uri="{FF2B5EF4-FFF2-40B4-BE49-F238E27FC236}">
-                <a16:creationId xmlns:a16="http://schemas.microsoft.com/office/drawing/2014/main" id="{A9BD9954-BCB2-4382-B304-0656B5B76E10}"/>
+                <a16:creationId xmlns:a16="http://schemas.microsoft.com/office/drawing/2014/main" id="{7143C2F2-6909-4ED4-82E8-332050190227}"/>
               </a:ext>
             </a:extLst>
           </p:cNvPr>
@@ -29486,7 +29401,7 @@
           <p:cNvPr id="7" name="제품 코드의 개선이나 가상 stale Workflow의 복구 이력이 아니다.">
             <a:extLst xmlns:a="http://schemas.openxmlformats.org/drawingml/2006/main">
               <a:ext uri="{FF2B5EF4-FFF2-40B4-BE49-F238E27FC236}">
-                <a16:creationId xmlns:a16="http://schemas.microsoft.com/office/drawing/2014/main" id="{BCBC5A6E-161E-412B-8E10-FE573A9903C0}"/>
+                <a16:creationId xmlns:a16="http://schemas.microsoft.com/office/drawing/2014/main" id="{DC181D3C-8D43-47A3-A493-4834F32E4F3B}"/>
               </a:ext>
             </a:extLst>
           </p:cNvPr>
@@ -29644,7 +29559,7 @@
           <p:cNvPr id="8" name="실제로 바뀐 것">
             <a:extLst xmlns:a="http://schemas.openxmlformats.org/drawingml/2006/main">
               <a:ext uri="{FF2B5EF4-FFF2-40B4-BE49-F238E27FC236}">
-                <a16:creationId xmlns:a16="http://schemas.microsoft.com/office/drawing/2014/main" id="{04BFFC73-FFC4-4BDC-9859-08858690C1DE}"/>
+                <a16:creationId xmlns:a16="http://schemas.microsoft.com/office/drawing/2014/main" id="{A80C5529-871F-419C-ADBE-FF26A8959480}"/>
               </a:ext>
             </a:extLst>
           </p:cNvPr>
@@ -29802,7 +29717,7 @@
           <p:cNvPr id="9" name="아직 확인하지 못한 것">
             <a:extLst xmlns:a="http://schemas.openxmlformats.org/drawingml/2006/main">
               <a:ext uri="{FF2B5EF4-FFF2-40B4-BE49-F238E27FC236}">
-                <a16:creationId xmlns:a16="http://schemas.microsoft.com/office/drawing/2014/main" id="{6B86E27A-0E27-4D6B-9A64-FD41F490E961}"/>
+                <a16:creationId xmlns:a16="http://schemas.microsoft.com/office/drawing/2014/main" id="{F961EFB6-FFA8-435A-A5F9-9A86ABCB70CA}"/>
               </a:ext>
             </a:extLst>
           </p:cNvPr>
@@ -29960,7 +29875,7 @@
           <p:cNvPr id="10" name="">
             <a:extLst xmlns:a="http://schemas.openxmlformats.org/drawingml/2006/main">
               <a:ext uri="{FF2B5EF4-FFF2-40B4-BE49-F238E27FC236}">
-                <a16:creationId xmlns:a16="http://schemas.microsoft.com/office/drawing/2014/main" id="{2FCCB542-35DB-405F-BF12-887E4A42E0CF}"/>
+                <a16:creationId xmlns:a16="http://schemas.microsoft.com/office/drawing/2014/main" id="{D3E608EB-12CC-45D7-8E3E-B09A2AB48369}"/>
               </a:ext>
             </a:extLst>
           </p:cNvPr>
@@ -29991,7 +29906,7 @@
           <p:cNvPr id="11" name="">
             <a:extLst xmlns:a="http://schemas.openxmlformats.org/drawingml/2006/main">
               <a:ext uri="{FF2B5EF4-FFF2-40B4-BE49-F238E27FC236}">
-                <a16:creationId xmlns:a16="http://schemas.microsoft.com/office/drawing/2014/main" id="{9C666C91-4CCC-45D6-AE42-F2098AB16984}"/>
+                <a16:creationId xmlns:a16="http://schemas.microsoft.com/office/drawing/2014/main" id="{178A5403-951B-4DCC-8948-8E8C080C5193}"/>
               </a:ext>
             </a:extLst>
           </p:cNvPr>
@@ -30022,7 +29937,7 @@
           <p:cNvPr id="12" name="Trial을 평가하고&#10;보고하는 기준">
             <a:extLst xmlns:a="http://schemas.openxmlformats.org/drawingml/2006/main">
               <a:ext uri="{FF2B5EF4-FFF2-40B4-BE49-F238E27FC236}">
-                <a16:creationId xmlns:a16="http://schemas.microsoft.com/office/drawing/2014/main" id="{F486071D-0AA7-49F5-8506-59DB4BAAEACB}"/>
+                <a16:creationId xmlns:a16="http://schemas.microsoft.com/office/drawing/2014/main" id="{945ED69A-DC32-4C08-ABB8-B4E956B9A482}"/>
               </a:ext>
             </a:extLst>
           </p:cNvPr>
@@ -30203,7 +30118,7 @@
           <p:cNvPr id="13" name="원인별 효과&#10;환경 목록의 완전성&#10;Trial 품질의 향상">
             <a:extLst xmlns:a="http://schemas.openxmlformats.org/drawingml/2006/main">
               <a:ext uri="{FF2B5EF4-FFF2-40B4-BE49-F238E27FC236}">
-                <a16:creationId xmlns:a16="http://schemas.microsoft.com/office/drawing/2014/main" id="{C52C15A2-D6AB-4C84-A5BA-9D7544272F91}"/>
+                <a16:creationId xmlns:a16="http://schemas.microsoft.com/office/drawing/2014/main" id="{4D94EBBD-0FA0-4E03-AA25-2185E689BFF7}"/>
               </a:ext>
             </a:extLst>
           </p:cNvPr>
@@ -30407,7 +30322,7 @@
           <p:cNvPr id="14" name="Feedback은 평가 체계도 바꿀 수 있다. 변경 뒤의 결과는 다시 확인한다.">
             <a:extLst xmlns:a="http://schemas.openxmlformats.org/drawingml/2006/main">
               <a:ext uri="{FF2B5EF4-FFF2-40B4-BE49-F238E27FC236}">
-                <a16:creationId xmlns:a16="http://schemas.microsoft.com/office/drawing/2014/main" id="{2B38EA8E-84FA-4053-AE93-8A09DFD599A3}"/>
+                <a16:creationId xmlns:a16="http://schemas.microsoft.com/office/drawing/2014/main" id="{624FAB22-CF39-4B7D-A3A4-89F5E39A56B3}"/>
               </a:ext>
             </a:extLst>
           </p:cNvPr>
@@ -30563,7 +30478,7 @@
     </p:spTree>
     <p:extLst>
       <p:ext uri="{BB962C8B-B14F-4D97-AF65-F5344CB8AC3E}">
-        <p14:creationId xmlns:p14="http://schemas.microsoft.com/office/powerpoint/2010/main" val="81515143"/>
+        <p14:creationId xmlns:p14="http://schemas.microsoft.com/office/powerpoint/2010/main" val="110884425"/>
       </p:ext>
     </p:extLst>
   </p:cSld>
@@ -30591,10 +30506,10 @@
       </p:grpSpPr>
       <p:sp>
         <p:nvSpPr>
-          <p:cNvPr id="18" name="ACT 4 · C++ VISION / 적용을 위한 가상 질문">
+          <p:cNvPr id="20" name="ACT 4 · C++ VISION / 적용을 위한 가상 질문">
             <a:extLst xmlns:a="http://schemas.openxmlformats.org/drawingml/2006/main">
               <a:ext uri="{FF2B5EF4-FFF2-40B4-BE49-F238E27FC236}">
-                <a16:creationId xmlns:a16="http://schemas.microsoft.com/office/drawing/2014/main" id="{60DEA2EE-DD3D-479F-8E38-62D078E69100}"/>
+                <a16:creationId xmlns:a16="http://schemas.microsoft.com/office/drawing/2014/main" id="{2EDA1614-BD2D-4467-856D-688E69BC9B72}"/>
               </a:ext>
             </a:extLst>
           </p:cNvPr>
@@ -30752,7 +30667,7 @@
           <p:cNvPr id="2" name="S72">
             <a:extLst xmlns:a="http://schemas.openxmlformats.org/drawingml/2006/main">
               <a:ext uri="{FF2B5EF4-FFF2-40B4-BE49-F238E27FC236}">
-                <a16:creationId xmlns:a16="http://schemas.microsoft.com/office/drawing/2014/main" id="{1910CC26-E2A1-433D-A818-1352D4999FFA}"/>
+                <a16:creationId xmlns:a16="http://schemas.microsoft.com/office/drawing/2014/main" id="{4F9DD32C-C014-42D0-A6CB-01A9377E6AA1}"/>
               </a:ext>
             </a:extLst>
           </p:cNvPr>
@@ -30910,7 +30825,7 @@
           <p:cNvPr id="3" name="Project와 환경이 바뀌면&#10;검증도 다시 본다">
             <a:extLst xmlns:a="http://schemas.openxmlformats.org/drawingml/2006/main">
               <a:ext uri="{FF2B5EF4-FFF2-40B4-BE49-F238E27FC236}">
-                <a16:creationId xmlns:a16="http://schemas.microsoft.com/office/drawing/2014/main" id="{05F92355-54B0-4FC5-9933-5B3FE086668F}"/>
+                <a16:creationId xmlns:a16="http://schemas.microsoft.com/office/drawing/2014/main" id="{5F0DDB28-1447-4C38-9508-CDCC2A79BE13}"/>
               </a:ext>
             </a:extLst>
           </p:cNvPr>
@@ -31091,7 +31006,7 @@
           <p:cNvPr id="4" name="">
             <a:extLst xmlns:a="http://schemas.openxmlformats.org/drawingml/2006/main">
               <a:ext uri="{FF2B5EF4-FFF2-40B4-BE49-F238E27FC236}">
-                <a16:creationId xmlns:a16="http://schemas.microsoft.com/office/drawing/2014/main" id="{8C823FC2-AE37-4EA8-8E10-50B749F61D52}"/>
+                <a16:creationId xmlns:a16="http://schemas.microsoft.com/office/drawing/2014/main" id="{75475D5D-63BF-4DD0-8BAB-274FFC1261A8}"/>
               </a:ext>
             </a:extLst>
           </p:cNvPr>
@@ -31119,10 +31034,10 @@
       </p:sp>
       <p:sp>
         <p:nvSpPr>
-          <p:cNvPr id="5" name="BEAT-059 · TRANS-012 · 교육용 전이 모델">
+          <p:cNvPr id="5" name="BEAT-059 · TRANS-012 · 교육용 전이 모델 · AI 생성 설명용 삽화">
             <a:extLst xmlns:a="http://schemas.openxmlformats.org/drawingml/2006/main">
               <a:ext uri="{FF2B5EF4-FFF2-40B4-BE49-F238E27FC236}">
-                <a16:creationId xmlns:a16="http://schemas.microsoft.com/office/drawing/2014/main" id="{A6544C3E-D884-4B3B-AE53-69A4646DC668}"/>
+                <a16:creationId xmlns:a16="http://schemas.microsoft.com/office/drawing/2014/main" id="{66C8E194-EB7D-44EB-87C8-3503BC71491F}"/>
               </a:ext>
             </a:extLst>
           </p:cNvPr>
@@ -31270,17 +31185,17 @@
                 <a:ea typeface="Malgun Gothic"/>
                 <a:cs typeface="Malgun Gothic"/>
               </a:rPr>
-              <a:t>BEAT-059 · TRANS-012 · 교육용 전이 모델</a:t>
+              <a:t>BEAT-059 · TRANS-012 · 교육용 전이 모델 · AI 생성 설명용 삽화</a:t>
             </a:r>
           </a:p>
         </p:txBody>
       </p:sp>
       <p:sp>
         <p:nvSpPr>
-          <p:cNvPr id="6" name="실제 C++ 사건·성능 결과·특정 도구 사용법을 검증한 사례가 아니다.">
+          <p:cNvPr id="6" name="실제 C++ 사건·성능 결과가 아닙니다. 변경 표시는 확인할 조건을 뜻하며 원인이나 결과를 단정하지 않습니다">
             <a:extLst xmlns:a="http://schemas.openxmlformats.org/drawingml/2006/main">
               <a:ext uri="{FF2B5EF4-FFF2-40B4-BE49-F238E27FC236}">
-                <a16:creationId xmlns:a16="http://schemas.microsoft.com/office/drawing/2014/main" id="{8DF85C5A-E572-4A7E-BBFC-7F04E67AA6C4}"/>
+                <a16:creationId xmlns:a16="http://schemas.microsoft.com/office/drawing/2014/main" id="{9D73B60A-3CD1-4378-9B20-085532915ECA}"/>
               </a:ext>
             </a:extLst>
           </p:cNvPr>
@@ -31292,7 +31207,7 @@
         <p:spPr>
           <a:xfrm xmlns:a="http://schemas.openxmlformats.org/drawingml/2006/main">
             <a:off x="609600" y="6191250"/>
-            <a:ext cx="10972800" cy="209550"/>
+            <a:ext cx="10972800" cy="285750"/>
           </a:xfrm>
           <a:prstGeom xmlns:a="http://schemas.openxmlformats.org/drawingml/2006/main" prst="rect">
             <a:avLst/>
@@ -31428,7 +31343,7 @@
                 <a:ea typeface="Malgun Gothic"/>
                 <a:cs typeface="Malgun Gothic"/>
               </a:rPr>
-              <a:t>실제 C++ 사건·성능 결과·특정 도구 사용법을 검증한 사례가 아니다.</a:t>
+              <a:t>실제 C++ 사건·성능 결과가 아닙니다. 변경 표시는 확인할 조건을 뜻하며 원인이나 결과를 단정하지 않습니다.</a:t>
             </a:r>
           </a:p>
         </p:txBody>
@@ -31438,7 +31353,7 @@
           <p:cNvPr id="7" name="GPU · 빌드 · 측정 조건이 달라졌다면?">
             <a:extLst xmlns:a="http://schemas.openxmlformats.org/drawingml/2006/main">
               <a:ext uri="{FF2B5EF4-FFF2-40B4-BE49-F238E27FC236}">
-                <a16:creationId xmlns:a16="http://schemas.microsoft.com/office/drawing/2014/main" id="{BB40F80B-3DEC-49A8-9AFD-9E3D79EFB7BF}"/>
+                <a16:creationId xmlns:a16="http://schemas.microsoft.com/office/drawing/2014/main" id="{0ED53F02-B58E-4FEF-9EDF-C1967579A569}"/>
               </a:ext>
             </a:extLst>
           </p:cNvPr>
@@ -31449,8 +31364,8 @@
         </p:nvSpPr>
         <p:spPr>
           <a:xfrm xmlns:a="http://schemas.openxmlformats.org/drawingml/2006/main">
-            <a:off x="609600" y="2133600"/>
-            <a:ext cx="10972800" cy="476250"/>
+            <a:off x="609600" y="1971675"/>
+            <a:ext cx="10972800" cy="323850"/>
           </a:xfrm>
           <a:prstGeom xmlns:a="http://schemas.openxmlformats.org/drawingml/2006/main" prst="rect">
             <a:avLst/>
@@ -31466,7 +31381,7 @@
           </a:bodyPr>
           <a:lstStyle xmlns:a="http://schemas.openxmlformats.org/drawingml/2006/main">
             <a:defPPr algn="l">
-              <a:defRPr sz="2625" b="1">
+              <a:defRPr sz="2100" b="1">
                 <a:solidFill>
                   <a:srgbClr val="0B6172"/>
                 </a:solidFill>
@@ -31476,7 +31391,7 @@
               </a:defRPr>
             </a:defPPr>
             <a:lvl1pPr algn="l">
-              <a:defRPr sz="2625" b="1">
+              <a:defRPr sz="2100" b="1">
                 <a:solidFill>
                   <a:srgbClr val="0B6172"/>
                 </a:solidFill>
@@ -31486,7 +31401,7 @@
               </a:defRPr>
             </a:lvl1pPr>
             <a:lvl2pPr algn="l">
-              <a:defRPr sz="2625" b="1">
+              <a:defRPr sz="2100" b="1">
                 <a:solidFill>
                   <a:srgbClr val="0B6172"/>
                 </a:solidFill>
@@ -31496,7 +31411,7 @@
               </a:defRPr>
             </a:lvl2pPr>
             <a:lvl3pPr algn="l">
-              <a:defRPr sz="2625" b="1">
+              <a:defRPr sz="2100" b="1">
                 <a:solidFill>
                   <a:srgbClr val="0B6172"/>
                 </a:solidFill>
@@ -31506,7 +31421,7 @@
               </a:defRPr>
             </a:lvl3pPr>
             <a:lvl4pPr algn="l">
-              <a:defRPr sz="2625" b="1">
+              <a:defRPr sz="2100" b="1">
                 <a:solidFill>
                   <a:srgbClr val="0B6172"/>
                 </a:solidFill>
@@ -31516,7 +31431,7 @@
               </a:defRPr>
             </a:lvl4pPr>
             <a:lvl5pPr algn="l">
-              <a:defRPr sz="2625" b="1">
+              <a:defRPr sz="2100" b="1">
                 <a:solidFill>
                   <a:srgbClr val="0B6172"/>
                 </a:solidFill>
@@ -31526,7 +31441,7 @@
               </a:defRPr>
             </a:lvl5pPr>
             <a:lvl6pPr algn="l">
-              <a:defRPr sz="2625" b="1">
+              <a:defRPr sz="2100" b="1">
                 <a:solidFill>
                   <a:srgbClr val="0B6172"/>
                 </a:solidFill>
@@ -31536,7 +31451,7 @@
               </a:defRPr>
             </a:lvl6pPr>
             <a:lvl7pPr algn="l">
-              <a:defRPr sz="2625" b="1">
+              <a:defRPr sz="2100" b="1">
                 <a:solidFill>
                   <a:srgbClr val="0B6172"/>
                 </a:solidFill>
@@ -31546,7 +31461,7 @@
               </a:defRPr>
             </a:lvl7pPr>
             <a:lvl8pPr algn="l">
-              <a:defRPr sz="2625" b="1">
+              <a:defRPr sz="2100" b="1">
                 <a:solidFill>
                   <a:srgbClr val="0B6172"/>
                 </a:solidFill>
@@ -31556,7 +31471,7 @@
               </a:defRPr>
             </a:lvl8pPr>
             <a:lvl9pPr algn="l">
-              <a:defRPr sz="2625" b="1">
+              <a:defRPr sz="2100" b="1">
                 <a:solidFill>
                   <a:srgbClr val="0B6172"/>
                 </a:solidFill>
@@ -31568,7 +31483,7 @@
           </a:lstStyle>
           <a:p xmlns:a="http://schemas.openxmlformats.org/drawingml/2006/main">
             <a:pPr algn="l">
-              <a:defRPr sz="2625" b="1">
+              <a:defRPr sz="2100" b="1">
                 <a:solidFill>
                   <a:srgbClr val="0B6172"/>
                 </a:solidFill>
@@ -31578,7 +31493,7 @@
               </a:defRPr>
             </a:pPr>
             <a:r>
-              <a:rPr sz="2625" b="1">
+              <a:rPr sz="2100" b="1">
                 <a:solidFill>
                   <a:srgbClr val="0B6172"/>
                 </a:solidFill>
@@ -31591,12 +31506,41 @@
           </a:p>
         </p:txBody>
       </p:sp>
-      <p:sp>
-        <p:nvSpPr>
+      <p:pic>
+        <p:nvPicPr>
           <p:cNvPr id="8" name="">
             <a:extLst xmlns:a="http://schemas.openxmlformats.org/drawingml/2006/main">
               <a:ext uri="{FF2B5EF4-FFF2-40B4-BE49-F238E27FC236}">
-                <a16:creationId xmlns:a16="http://schemas.microsoft.com/office/drawing/2014/main" id="{891EB74C-7B9C-4082-996D-6A6A7F3AA291}"/>
+                <a16:creationId xmlns:a16="http://schemas.microsoft.com/office/drawing/2014/main" id="{D3979662-EA90-4F1C-B1AA-2EEFEF133FD2}"/>
+              </a:ext>
+            </a:extLst>
+          </p:cNvPr>
+          <p:cNvPicPr>
+            <a:picLocks xmlns:a="http://schemas.openxmlformats.org/drawingml/2006/main" noChangeAspect="1"/>
+          </p:cNvPicPr>
+          <p:nvPr/>
+        </p:nvPicPr>
+        <p:blipFill>
+          <a:blip xmlns:r="http://schemas.openxmlformats.org/officeDocument/2006/relationships" xmlns:a="http://schemas.openxmlformats.org/drawingml/2006/main" r:embed="Reba6bbfb74d74f02"/>
+          <a:srcRect xmlns:a="http://schemas.openxmlformats.org/drawingml/2006/main" l="0" t="6000" r="0" b="10000"/>
+          <a:stretch xmlns:a="http://schemas.openxmlformats.org/drawingml/2006/main"/>
+        </p:blipFill>
+        <p:spPr>
+          <a:xfrm xmlns:a="http://schemas.openxmlformats.org/drawingml/2006/main">
+            <a:off x="1928813" y="2238375"/>
+            <a:ext cx="8334375" cy="2333625"/>
+          </a:xfrm>
+          <a:prstGeom xmlns:a="http://schemas.openxmlformats.org/drawingml/2006/main" prst="rect">
+            <a:avLst/>
+          </a:prstGeom>
+        </p:spPr>
+      </p:pic>
+      <p:sp>
+        <p:nvSpPr>
+          <p:cNvPr id="9" name="입력">
+            <a:extLst xmlns:a="http://schemas.openxmlformats.org/drawingml/2006/main">
+              <a:ext uri="{FF2B5EF4-FFF2-40B4-BE49-F238E27FC236}">
+                <a16:creationId xmlns:a16="http://schemas.microsoft.com/office/drawing/2014/main" id="{7697BDCA-1E14-45E1-B29E-2A90535756C2}"/>
               </a:ext>
             </a:extLst>
           </p:cNvPr>
@@ -31607,39 +31551,8 @@
         </p:nvSpPr>
         <p:spPr>
           <a:xfrm xmlns:a="http://schemas.openxmlformats.org/drawingml/2006/main">
-            <a:off x="609600" y="2952750"/>
-            <a:ext cx="10972800" cy="0"/>
-          </a:xfrm>
-          <a:prstGeom xmlns:a="http://schemas.openxmlformats.org/drawingml/2006/main" prst="line">
-            <a:avLst/>
-          </a:prstGeom>
-          <a:noFill xmlns:a="http://schemas.openxmlformats.org/drawingml/2006/main"/>
-          <a:ln xmlns:a="http://schemas.openxmlformats.org/drawingml/2006/main" w="9525">
-            <a:solidFill>
-              <a:srgbClr val="C7D0DA"/>
-            </a:solidFill>
-            <a:prstDash val="solid"/>
-          </a:ln>
-        </p:spPr>
-      </p:sp>
-      <p:sp>
-        <p:nvSpPr>
-          <p:cNvPr id="9" name="기존 가정">
-            <a:extLst xmlns:a="http://schemas.openxmlformats.org/drawingml/2006/main">
-              <a:ext uri="{FF2B5EF4-FFF2-40B4-BE49-F238E27FC236}">
-                <a16:creationId xmlns:a16="http://schemas.microsoft.com/office/drawing/2014/main" id="{80F7990F-6652-4258-980F-A4A9385528EF}"/>
-              </a:ext>
-            </a:extLst>
-          </p:cNvPr>
-          <p:cNvSpPr>
-            <a:spLocks xmlns:a="http://schemas.openxmlformats.org/drawingml/2006/main" noGrp="1"/>
-          </p:cNvSpPr>
-          <p:nvPr/>
-        </p:nvSpPr>
-        <p:spPr>
-          <a:xfrm xmlns:a="http://schemas.openxmlformats.org/drawingml/2006/main">
-            <a:off x="609600" y="3067050"/>
-            <a:ext cx="2419350" cy="485775"/>
+            <a:off x="2190750" y="4533900"/>
+            <a:ext cx="2476500" cy="257175"/>
           </a:xfrm>
           <a:prstGeom xmlns:a="http://schemas.openxmlformats.org/drawingml/2006/main" prst="rect">
             <a:avLst/>
@@ -31655,9 +31568,9 @@
           </a:bodyPr>
           <a:lstStyle xmlns:a="http://schemas.openxmlformats.org/drawingml/2006/main">
             <a:defPPr algn="l">
-              <a:defRPr sz="2175" b="1">
-                <a:solidFill>
-                  <a:srgbClr val="0B6172"/>
+              <a:defRPr sz="1575" b="1">
+                <a:solidFill>
+                  <a:srgbClr val="4D5A68"/>
                 </a:solidFill>
                 <a:latin typeface="Malgun Gothic"/>
                 <a:ea typeface="Malgun Gothic"/>
@@ -31665,9 +31578,9 @@
               </a:defRPr>
             </a:defPPr>
             <a:lvl1pPr algn="l">
-              <a:defRPr sz="2175" b="1">
-                <a:solidFill>
-                  <a:srgbClr val="0B6172"/>
+              <a:defRPr sz="1575" b="1">
+                <a:solidFill>
+                  <a:srgbClr val="4D5A68"/>
                 </a:solidFill>
                 <a:latin typeface="Malgun Gothic"/>
                 <a:ea typeface="Malgun Gothic"/>
@@ -31675,9 +31588,9 @@
               </a:defRPr>
             </a:lvl1pPr>
             <a:lvl2pPr algn="l">
-              <a:defRPr sz="2175" b="1">
-                <a:solidFill>
-                  <a:srgbClr val="0B6172"/>
+              <a:defRPr sz="1575" b="1">
+                <a:solidFill>
+                  <a:srgbClr val="4D5A68"/>
                 </a:solidFill>
                 <a:latin typeface="Malgun Gothic"/>
                 <a:ea typeface="Malgun Gothic"/>
@@ -31685,9 +31598,9 @@
               </a:defRPr>
             </a:lvl2pPr>
             <a:lvl3pPr algn="l">
-              <a:defRPr sz="2175" b="1">
-                <a:solidFill>
-                  <a:srgbClr val="0B6172"/>
+              <a:defRPr sz="1575" b="1">
+                <a:solidFill>
+                  <a:srgbClr val="4D5A68"/>
                 </a:solidFill>
                 <a:latin typeface="Malgun Gothic"/>
                 <a:ea typeface="Malgun Gothic"/>
@@ -31695,9 +31608,9 @@
               </a:defRPr>
             </a:lvl3pPr>
             <a:lvl4pPr algn="l">
-              <a:defRPr sz="2175" b="1">
-                <a:solidFill>
-                  <a:srgbClr val="0B6172"/>
+              <a:defRPr sz="1575" b="1">
+                <a:solidFill>
+                  <a:srgbClr val="4D5A68"/>
                 </a:solidFill>
                 <a:latin typeface="Malgun Gothic"/>
                 <a:ea typeface="Malgun Gothic"/>
@@ -31705,9 +31618,9 @@
               </a:defRPr>
             </a:lvl4pPr>
             <a:lvl5pPr algn="l">
-              <a:defRPr sz="2175" b="1">
-                <a:solidFill>
-                  <a:srgbClr val="0B6172"/>
+              <a:defRPr sz="1575" b="1">
+                <a:solidFill>
+                  <a:srgbClr val="4D5A68"/>
                 </a:solidFill>
                 <a:latin typeface="Malgun Gothic"/>
                 <a:ea typeface="Malgun Gothic"/>
@@ -31715,9 +31628,9 @@
               </a:defRPr>
             </a:lvl5pPr>
             <a:lvl6pPr algn="l">
-              <a:defRPr sz="2175" b="1">
-                <a:solidFill>
-                  <a:srgbClr val="0B6172"/>
+              <a:defRPr sz="1575" b="1">
+                <a:solidFill>
+                  <a:srgbClr val="4D5A68"/>
                 </a:solidFill>
                 <a:latin typeface="Malgun Gothic"/>
                 <a:ea typeface="Malgun Gothic"/>
@@ -31725,9 +31638,9 @@
               </a:defRPr>
             </a:lvl6pPr>
             <a:lvl7pPr algn="l">
-              <a:defRPr sz="2175" b="1">
-                <a:solidFill>
-                  <a:srgbClr val="0B6172"/>
+              <a:defRPr sz="1575" b="1">
+                <a:solidFill>
+                  <a:srgbClr val="4D5A68"/>
                 </a:solidFill>
                 <a:latin typeface="Malgun Gothic"/>
                 <a:ea typeface="Malgun Gothic"/>
@@ -31735,9 +31648,9 @@
               </a:defRPr>
             </a:lvl7pPr>
             <a:lvl8pPr algn="l">
-              <a:defRPr sz="2175" b="1">
-                <a:solidFill>
-                  <a:srgbClr val="0B6172"/>
+              <a:defRPr sz="1575" b="1">
+                <a:solidFill>
+                  <a:srgbClr val="4D5A68"/>
                 </a:solidFill>
                 <a:latin typeface="Malgun Gothic"/>
                 <a:ea typeface="Malgun Gothic"/>
@@ -31745,9 +31658,9 @@
               </a:defRPr>
             </a:lvl8pPr>
             <a:lvl9pPr algn="l">
-              <a:defRPr sz="2175" b="1">
-                <a:solidFill>
-                  <a:srgbClr val="0B6172"/>
+              <a:defRPr sz="1575" b="1">
+                <a:solidFill>
+                  <a:srgbClr val="4D5A68"/>
                 </a:solidFill>
                 <a:latin typeface="Malgun Gothic"/>
                 <a:ea typeface="Malgun Gothic"/>
@@ -31757,9 +31670,9 @@
           </a:lstStyle>
           <a:p xmlns:a="http://schemas.openxmlformats.org/drawingml/2006/main">
             <a:pPr algn="l">
-              <a:defRPr sz="2175" b="1">
-                <a:solidFill>
-                  <a:srgbClr val="0B6172"/>
+              <a:defRPr sz="1575" b="1">
+                <a:solidFill>
+                  <a:srgbClr val="4D5A68"/>
                 </a:solidFill>
                 <a:latin typeface="Malgun Gothic"/>
                 <a:ea typeface="Malgun Gothic"/>
@@ -31767,25 +31680,25 @@
               </a:defRPr>
             </a:pPr>
             <a:r>
-              <a:rPr sz="2175" b="1">
-                <a:solidFill>
-                  <a:srgbClr val="0B6172"/>
+              <a:rPr sz="1575" b="1">
+                <a:solidFill>
+                  <a:srgbClr val="4D5A68"/>
                 </a:solidFill>
                 <a:latin typeface="Malgun Gothic"/>
                 <a:ea typeface="Malgun Gothic"/>
                 <a:cs typeface="Malgun Gothic"/>
               </a:rPr>
-              <a:t>기존 가정</a:t>
+              <a:t>입력</a:t>
             </a:r>
           </a:p>
         </p:txBody>
       </p:sp>
       <p:sp>
         <p:nvSpPr>
-          <p:cNvPr id="10" name="어떤 조건에서 맞던 판단인가?">
+          <p:cNvPr id="10" name="처리 코드">
             <a:extLst xmlns:a="http://schemas.openxmlformats.org/drawingml/2006/main">
               <a:ext uri="{FF2B5EF4-FFF2-40B4-BE49-F238E27FC236}">
-                <a16:creationId xmlns:a16="http://schemas.microsoft.com/office/drawing/2014/main" id="{CF6FDA6E-D69A-4A7B-8BB4-FA6022AC2378}"/>
+                <a16:creationId xmlns:a16="http://schemas.microsoft.com/office/drawing/2014/main" id="{A01F4959-84B7-40EF-BF6D-DC7223067F00}"/>
               </a:ext>
             </a:extLst>
           </p:cNvPr>
@@ -31796,8 +31709,8 @@
         </p:nvSpPr>
         <p:spPr>
           <a:xfrm xmlns:a="http://schemas.openxmlformats.org/drawingml/2006/main">
-            <a:off x="3257550" y="3067050"/>
-            <a:ext cx="8324850" cy="485775"/>
+            <a:off x="4333875" y="4533900"/>
+            <a:ext cx="2476500" cy="257175"/>
           </a:xfrm>
           <a:prstGeom xmlns:a="http://schemas.openxmlformats.org/drawingml/2006/main" prst="rect">
             <a:avLst/>
@@ -31813,9 +31726,9 @@
           </a:bodyPr>
           <a:lstStyle xmlns:a="http://schemas.openxmlformats.org/drawingml/2006/main">
             <a:defPPr algn="l">
-              <a:defRPr sz="2175" b="0">
-                <a:solidFill>
-                  <a:srgbClr val="17212B"/>
+              <a:defRPr sz="1575" b="1">
+                <a:solidFill>
+                  <a:srgbClr val="4D5A68"/>
                 </a:solidFill>
                 <a:latin typeface="Malgun Gothic"/>
                 <a:ea typeface="Malgun Gothic"/>
@@ -31823,9 +31736,9 @@
               </a:defRPr>
             </a:defPPr>
             <a:lvl1pPr algn="l">
-              <a:defRPr sz="2175" b="0">
-                <a:solidFill>
-                  <a:srgbClr val="17212B"/>
+              <a:defRPr sz="1575" b="1">
+                <a:solidFill>
+                  <a:srgbClr val="4D5A68"/>
                 </a:solidFill>
                 <a:latin typeface="Malgun Gothic"/>
                 <a:ea typeface="Malgun Gothic"/>
@@ -31833,9 +31746,9 @@
               </a:defRPr>
             </a:lvl1pPr>
             <a:lvl2pPr algn="l">
-              <a:defRPr sz="2175" b="0">
-                <a:solidFill>
-                  <a:srgbClr val="17212B"/>
+              <a:defRPr sz="1575" b="1">
+                <a:solidFill>
+                  <a:srgbClr val="4D5A68"/>
                 </a:solidFill>
                 <a:latin typeface="Malgun Gothic"/>
                 <a:ea typeface="Malgun Gothic"/>
@@ -31843,9 +31756,9 @@
               </a:defRPr>
             </a:lvl2pPr>
             <a:lvl3pPr algn="l">
-              <a:defRPr sz="2175" b="0">
-                <a:solidFill>
-                  <a:srgbClr val="17212B"/>
+              <a:defRPr sz="1575" b="1">
+                <a:solidFill>
+                  <a:srgbClr val="4D5A68"/>
                 </a:solidFill>
                 <a:latin typeface="Malgun Gothic"/>
                 <a:ea typeface="Malgun Gothic"/>
@@ -31853,9 +31766,9 @@
               </a:defRPr>
             </a:lvl3pPr>
             <a:lvl4pPr algn="l">
-              <a:defRPr sz="2175" b="0">
-                <a:solidFill>
-                  <a:srgbClr val="17212B"/>
+              <a:defRPr sz="1575" b="1">
+                <a:solidFill>
+                  <a:srgbClr val="4D5A68"/>
                 </a:solidFill>
                 <a:latin typeface="Malgun Gothic"/>
                 <a:ea typeface="Malgun Gothic"/>
@@ -31863,9 +31776,9 @@
               </a:defRPr>
             </a:lvl4pPr>
             <a:lvl5pPr algn="l">
-              <a:defRPr sz="2175" b="0">
-                <a:solidFill>
-                  <a:srgbClr val="17212B"/>
+              <a:defRPr sz="1575" b="1">
+                <a:solidFill>
+                  <a:srgbClr val="4D5A68"/>
                 </a:solidFill>
                 <a:latin typeface="Malgun Gothic"/>
                 <a:ea typeface="Malgun Gothic"/>
@@ -31873,9 +31786,9 @@
               </a:defRPr>
             </a:lvl5pPr>
             <a:lvl6pPr algn="l">
-              <a:defRPr sz="2175" b="0">
-                <a:solidFill>
-                  <a:srgbClr val="17212B"/>
+              <a:defRPr sz="1575" b="1">
+                <a:solidFill>
+                  <a:srgbClr val="4D5A68"/>
                 </a:solidFill>
                 <a:latin typeface="Malgun Gothic"/>
                 <a:ea typeface="Malgun Gothic"/>
@@ -31883,9 +31796,9 @@
               </a:defRPr>
             </a:lvl6pPr>
             <a:lvl7pPr algn="l">
-              <a:defRPr sz="2175" b="0">
-                <a:solidFill>
-                  <a:srgbClr val="17212B"/>
+              <a:defRPr sz="1575" b="1">
+                <a:solidFill>
+                  <a:srgbClr val="4D5A68"/>
                 </a:solidFill>
                 <a:latin typeface="Malgun Gothic"/>
                 <a:ea typeface="Malgun Gothic"/>
@@ -31893,9 +31806,9 @@
               </a:defRPr>
             </a:lvl7pPr>
             <a:lvl8pPr algn="l">
-              <a:defRPr sz="2175" b="0">
-                <a:solidFill>
-                  <a:srgbClr val="17212B"/>
+              <a:defRPr sz="1575" b="1">
+                <a:solidFill>
+                  <a:srgbClr val="4D5A68"/>
                 </a:solidFill>
                 <a:latin typeface="Malgun Gothic"/>
                 <a:ea typeface="Malgun Gothic"/>
@@ -31903,9 +31816,9 @@
               </a:defRPr>
             </a:lvl8pPr>
             <a:lvl9pPr algn="l">
-              <a:defRPr sz="2175" b="0">
-                <a:solidFill>
-                  <a:srgbClr val="17212B"/>
+              <a:defRPr sz="1575" b="1">
+                <a:solidFill>
+                  <a:srgbClr val="4D5A68"/>
                 </a:solidFill>
                 <a:latin typeface="Malgun Gothic"/>
                 <a:ea typeface="Malgun Gothic"/>
@@ -31915,9 +31828,9 @@
           </a:lstStyle>
           <a:p xmlns:a="http://schemas.openxmlformats.org/drawingml/2006/main">
             <a:pPr algn="l">
-              <a:defRPr sz="2175" b="0">
-                <a:solidFill>
-                  <a:srgbClr val="17212B"/>
+              <a:defRPr sz="1575" b="1">
+                <a:solidFill>
+                  <a:srgbClr val="4D5A68"/>
                 </a:solidFill>
                 <a:latin typeface="Malgun Gothic"/>
                 <a:ea typeface="Malgun Gothic"/>
@@ -31925,25 +31838,25 @@
               </a:defRPr>
             </a:pPr>
             <a:r>
-              <a:rPr sz="2175" b="0">
-                <a:solidFill>
-                  <a:srgbClr val="17212B"/>
+              <a:rPr sz="1575" b="1">
+                <a:solidFill>
+                  <a:srgbClr val="4D5A68"/>
                 </a:solidFill>
                 <a:latin typeface="Malgun Gothic"/>
                 <a:ea typeface="Malgun Gothic"/>
                 <a:cs typeface="Malgun Gothic"/>
               </a:rPr>
-              <a:t>어떤 조건에서 맞던 판단인가?</a:t>
+              <a:t>처리 코드</a:t>
             </a:r>
           </a:p>
         </p:txBody>
       </p:sp>
       <p:sp>
         <p:nvSpPr>
-          <p:cNvPr id="11" name="">
+          <p:cNvPr id="11" name="실행 장치 · 변경 조건">
             <a:extLst xmlns:a="http://schemas.openxmlformats.org/drawingml/2006/main">
               <a:ext uri="{FF2B5EF4-FFF2-40B4-BE49-F238E27FC236}">
-                <a16:creationId xmlns:a16="http://schemas.microsoft.com/office/drawing/2014/main" id="{DFB5A332-A425-4E46-A855-72BA3EAB3357}"/>
+                <a16:creationId xmlns:a16="http://schemas.microsoft.com/office/drawing/2014/main" id="{FC965941-F714-43EF-90F9-F378D066CBA3}"/>
               </a:ext>
             </a:extLst>
           </p:cNvPr>
@@ -31954,39 +31867,8 @@
         </p:nvSpPr>
         <p:spPr>
           <a:xfrm xmlns:a="http://schemas.openxmlformats.org/drawingml/2006/main">
-            <a:off x="609600" y="3648075"/>
-            <a:ext cx="10972800" cy="0"/>
-          </a:xfrm>
-          <a:prstGeom xmlns:a="http://schemas.openxmlformats.org/drawingml/2006/main" prst="line">
-            <a:avLst/>
-          </a:prstGeom>
-          <a:noFill xmlns:a="http://schemas.openxmlformats.org/drawingml/2006/main"/>
-          <a:ln xmlns:a="http://schemas.openxmlformats.org/drawingml/2006/main" w="9525">
-            <a:solidFill>
-              <a:srgbClr val="C7D0DA"/>
-            </a:solidFill>
-            <a:prstDash val="solid"/>
-          </a:ln>
-        </p:spPr>
-      </p:sp>
-      <p:sp>
-        <p:nvSpPr>
-          <p:cNvPr id="12" name="측정 조건">
-            <a:extLst xmlns:a="http://schemas.openxmlformats.org/drawingml/2006/main">
-              <a:ext uri="{FF2B5EF4-FFF2-40B4-BE49-F238E27FC236}">
-                <a16:creationId xmlns:a16="http://schemas.microsoft.com/office/drawing/2014/main" id="{6654DC15-01DC-48CD-8D7E-0F224B875080}"/>
-              </a:ext>
-            </a:extLst>
-          </p:cNvPr>
-          <p:cNvSpPr>
-            <a:spLocks xmlns:a="http://schemas.openxmlformats.org/drawingml/2006/main" noGrp="1"/>
-          </p:cNvSpPr>
-          <p:nvPr/>
-        </p:nvSpPr>
-        <p:spPr>
-          <a:xfrm xmlns:a="http://schemas.openxmlformats.org/drawingml/2006/main">
-            <a:off x="609600" y="3762375"/>
-            <a:ext cx="2419350" cy="485775"/>
+            <a:off x="6238875" y="4533900"/>
+            <a:ext cx="2476500" cy="257175"/>
           </a:xfrm>
           <a:prstGeom xmlns:a="http://schemas.openxmlformats.org/drawingml/2006/main" prst="rect">
             <a:avLst/>
@@ -32002,9 +31884,9 @@
           </a:bodyPr>
           <a:lstStyle xmlns:a="http://schemas.openxmlformats.org/drawingml/2006/main">
             <a:defPPr algn="l">
-              <a:defRPr sz="2175" b="1">
-                <a:solidFill>
-                  <a:srgbClr val="0B6172"/>
+              <a:defRPr sz="1575" b="1">
+                <a:solidFill>
+                  <a:srgbClr val="4D5A68"/>
                 </a:solidFill>
                 <a:latin typeface="Malgun Gothic"/>
                 <a:ea typeface="Malgun Gothic"/>
@@ -32012,9 +31894,9 @@
               </a:defRPr>
             </a:defPPr>
             <a:lvl1pPr algn="l">
-              <a:defRPr sz="2175" b="1">
-                <a:solidFill>
-                  <a:srgbClr val="0B6172"/>
+              <a:defRPr sz="1575" b="1">
+                <a:solidFill>
+                  <a:srgbClr val="4D5A68"/>
                 </a:solidFill>
                 <a:latin typeface="Malgun Gothic"/>
                 <a:ea typeface="Malgun Gothic"/>
@@ -32022,9 +31904,9 @@
               </a:defRPr>
             </a:lvl1pPr>
             <a:lvl2pPr algn="l">
-              <a:defRPr sz="2175" b="1">
-                <a:solidFill>
-                  <a:srgbClr val="0B6172"/>
+              <a:defRPr sz="1575" b="1">
+                <a:solidFill>
+                  <a:srgbClr val="4D5A68"/>
                 </a:solidFill>
                 <a:latin typeface="Malgun Gothic"/>
                 <a:ea typeface="Malgun Gothic"/>
@@ -32032,9 +31914,9 @@
               </a:defRPr>
             </a:lvl2pPr>
             <a:lvl3pPr algn="l">
-              <a:defRPr sz="2175" b="1">
-                <a:solidFill>
-                  <a:srgbClr val="0B6172"/>
+              <a:defRPr sz="1575" b="1">
+                <a:solidFill>
+                  <a:srgbClr val="4D5A68"/>
                 </a:solidFill>
                 <a:latin typeface="Malgun Gothic"/>
                 <a:ea typeface="Malgun Gothic"/>
@@ -32042,9 +31924,9 @@
               </a:defRPr>
             </a:lvl3pPr>
             <a:lvl4pPr algn="l">
-              <a:defRPr sz="2175" b="1">
-                <a:solidFill>
-                  <a:srgbClr val="0B6172"/>
+              <a:defRPr sz="1575" b="1">
+                <a:solidFill>
+                  <a:srgbClr val="4D5A68"/>
                 </a:solidFill>
                 <a:latin typeface="Malgun Gothic"/>
                 <a:ea typeface="Malgun Gothic"/>
@@ -32052,9 +31934,9 @@
               </a:defRPr>
             </a:lvl4pPr>
             <a:lvl5pPr algn="l">
-              <a:defRPr sz="2175" b="1">
-                <a:solidFill>
-                  <a:srgbClr val="0B6172"/>
+              <a:defRPr sz="1575" b="1">
+                <a:solidFill>
+                  <a:srgbClr val="4D5A68"/>
                 </a:solidFill>
                 <a:latin typeface="Malgun Gothic"/>
                 <a:ea typeface="Malgun Gothic"/>
@@ -32062,9 +31944,9 @@
               </a:defRPr>
             </a:lvl5pPr>
             <a:lvl6pPr algn="l">
-              <a:defRPr sz="2175" b="1">
-                <a:solidFill>
-                  <a:srgbClr val="0B6172"/>
+              <a:defRPr sz="1575" b="1">
+                <a:solidFill>
+                  <a:srgbClr val="4D5A68"/>
                 </a:solidFill>
                 <a:latin typeface="Malgun Gothic"/>
                 <a:ea typeface="Malgun Gothic"/>
@@ -32072,9 +31954,9 @@
               </a:defRPr>
             </a:lvl6pPr>
             <a:lvl7pPr algn="l">
-              <a:defRPr sz="2175" b="1">
-                <a:solidFill>
-                  <a:srgbClr val="0B6172"/>
+              <a:defRPr sz="1575" b="1">
+                <a:solidFill>
+                  <a:srgbClr val="4D5A68"/>
                 </a:solidFill>
                 <a:latin typeface="Malgun Gothic"/>
                 <a:ea typeface="Malgun Gothic"/>
@@ -32082,9 +31964,9 @@
               </a:defRPr>
             </a:lvl7pPr>
             <a:lvl8pPr algn="l">
-              <a:defRPr sz="2175" b="1">
-                <a:solidFill>
-                  <a:srgbClr val="0B6172"/>
+              <a:defRPr sz="1575" b="1">
+                <a:solidFill>
+                  <a:srgbClr val="4D5A68"/>
                 </a:solidFill>
                 <a:latin typeface="Malgun Gothic"/>
                 <a:ea typeface="Malgun Gothic"/>
@@ -32092,9 +31974,9 @@
               </a:defRPr>
             </a:lvl8pPr>
             <a:lvl9pPr algn="l">
-              <a:defRPr sz="2175" b="1">
-                <a:solidFill>
-                  <a:srgbClr val="0B6172"/>
+              <a:defRPr sz="1575" b="1">
+                <a:solidFill>
+                  <a:srgbClr val="4D5A68"/>
                 </a:solidFill>
                 <a:latin typeface="Malgun Gothic"/>
                 <a:ea typeface="Malgun Gothic"/>
@@ -32104,9 +31986,9 @@
           </a:lstStyle>
           <a:p xmlns:a="http://schemas.openxmlformats.org/drawingml/2006/main">
             <a:pPr algn="l">
-              <a:defRPr sz="2175" b="1">
-                <a:solidFill>
-                  <a:srgbClr val="0B6172"/>
+              <a:defRPr sz="1575" b="1">
+                <a:solidFill>
+                  <a:srgbClr val="4D5A68"/>
                 </a:solidFill>
                 <a:latin typeface="Malgun Gothic"/>
                 <a:ea typeface="Malgun Gothic"/>
@@ -32114,25 +31996,25 @@
               </a:defRPr>
             </a:pPr>
             <a:r>
-              <a:rPr sz="2175" b="1">
-                <a:solidFill>
-                  <a:srgbClr val="0B6172"/>
+              <a:rPr sz="1575" b="1">
+                <a:solidFill>
+                  <a:srgbClr val="4D5A68"/>
                 </a:solidFill>
                 <a:latin typeface="Malgun Gothic"/>
                 <a:ea typeface="Malgun Gothic"/>
                 <a:cs typeface="Malgun Gothic"/>
               </a:rPr>
-              <a:t>측정 조건</a:t>
+              <a:t>실행 장치 · 변경 조건</a:t>
             </a:r>
           </a:p>
         </p:txBody>
       </p:sp>
       <p:sp>
         <p:nvSpPr>
-          <p:cNvPr id="13" name="입력과 실행 조건은 비교 가능한가?">
+          <p:cNvPr id="12" name="출력">
             <a:extLst xmlns:a="http://schemas.openxmlformats.org/drawingml/2006/main">
               <a:ext uri="{FF2B5EF4-FFF2-40B4-BE49-F238E27FC236}">
-                <a16:creationId xmlns:a16="http://schemas.microsoft.com/office/drawing/2014/main" id="{FC5B6F07-096A-4294-8DC4-A3E3CFCDBFFE}"/>
+                <a16:creationId xmlns:a16="http://schemas.microsoft.com/office/drawing/2014/main" id="{499815AC-1007-403D-8A69-699E3C14053B}"/>
               </a:ext>
             </a:extLst>
           </p:cNvPr>
@@ -32143,8 +32025,8 @@
         </p:nvSpPr>
         <p:spPr>
           <a:xfrm xmlns:a="http://schemas.openxmlformats.org/drawingml/2006/main">
-            <a:off x="3257550" y="3762375"/>
-            <a:ext cx="8324850" cy="485775"/>
+            <a:off x="9239250" y="4533900"/>
+            <a:ext cx="2476500" cy="257175"/>
           </a:xfrm>
           <a:prstGeom xmlns:a="http://schemas.openxmlformats.org/drawingml/2006/main" prst="rect">
             <a:avLst/>
@@ -32160,9 +32042,9 @@
           </a:bodyPr>
           <a:lstStyle xmlns:a="http://schemas.openxmlformats.org/drawingml/2006/main">
             <a:defPPr algn="l">
-              <a:defRPr sz="2175" b="0">
-                <a:solidFill>
-                  <a:srgbClr val="17212B"/>
+              <a:defRPr sz="1575" b="1">
+                <a:solidFill>
+                  <a:srgbClr val="4D5A68"/>
                 </a:solidFill>
                 <a:latin typeface="Malgun Gothic"/>
                 <a:ea typeface="Malgun Gothic"/>
@@ -32170,9 +32052,9 @@
               </a:defRPr>
             </a:defPPr>
             <a:lvl1pPr algn="l">
-              <a:defRPr sz="2175" b="0">
-                <a:solidFill>
-                  <a:srgbClr val="17212B"/>
+              <a:defRPr sz="1575" b="1">
+                <a:solidFill>
+                  <a:srgbClr val="4D5A68"/>
                 </a:solidFill>
                 <a:latin typeface="Malgun Gothic"/>
                 <a:ea typeface="Malgun Gothic"/>
@@ -32180,9 +32062,9 @@
               </a:defRPr>
             </a:lvl1pPr>
             <a:lvl2pPr algn="l">
-              <a:defRPr sz="2175" b="0">
-                <a:solidFill>
-                  <a:srgbClr val="17212B"/>
+              <a:defRPr sz="1575" b="1">
+                <a:solidFill>
+                  <a:srgbClr val="4D5A68"/>
                 </a:solidFill>
                 <a:latin typeface="Malgun Gothic"/>
                 <a:ea typeface="Malgun Gothic"/>
@@ -32190,9 +32072,9 @@
               </a:defRPr>
             </a:lvl2pPr>
             <a:lvl3pPr algn="l">
-              <a:defRPr sz="2175" b="0">
-                <a:solidFill>
-                  <a:srgbClr val="17212B"/>
+              <a:defRPr sz="1575" b="1">
+                <a:solidFill>
+                  <a:srgbClr val="4D5A68"/>
                 </a:solidFill>
                 <a:latin typeface="Malgun Gothic"/>
                 <a:ea typeface="Malgun Gothic"/>
@@ -32200,9 +32082,9 @@
               </a:defRPr>
             </a:lvl3pPr>
             <a:lvl4pPr algn="l">
-              <a:defRPr sz="2175" b="0">
-                <a:solidFill>
-                  <a:srgbClr val="17212B"/>
+              <a:defRPr sz="1575" b="1">
+                <a:solidFill>
+                  <a:srgbClr val="4D5A68"/>
                 </a:solidFill>
                 <a:latin typeface="Malgun Gothic"/>
                 <a:ea typeface="Malgun Gothic"/>
@@ -32210,9 +32092,9 @@
               </a:defRPr>
             </a:lvl4pPr>
             <a:lvl5pPr algn="l">
-              <a:defRPr sz="2175" b="0">
-                <a:solidFill>
-                  <a:srgbClr val="17212B"/>
+              <a:defRPr sz="1575" b="1">
+                <a:solidFill>
+                  <a:srgbClr val="4D5A68"/>
                 </a:solidFill>
                 <a:latin typeface="Malgun Gothic"/>
                 <a:ea typeface="Malgun Gothic"/>
@@ -32220,9 +32102,9 @@
               </a:defRPr>
             </a:lvl5pPr>
             <a:lvl6pPr algn="l">
-              <a:defRPr sz="2175" b="0">
-                <a:solidFill>
-                  <a:srgbClr val="17212B"/>
+              <a:defRPr sz="1575" b="1">
+                <a:solidFill>
+                  <a:srgbClr val="4D5A68"/>
                 </a:solidFill>
                 <a:latin typeface="Malgun Gothic"/>
                 <a:ea typeface="Malgun Gothic"/>
@@ -32230,9 +32112,9 @@
               </a:defRPr>
             </a:lvl6pPr>
             <a:lvl7pPr algn="l">
-              <a:defRPr sz="2175" b="0">
-                <a:solidFill>
-                  <a:srgbClr val="17212B"/>
+              <a:defRPr sz="1575" b="1">
+                <a:solidFill>
+                  <a:srgbClr val="4D5A68"/>
                 </a:solidFill>
                 <a:latin typeface="Malgun Gothic"/>
                 <a:ea typeface="Malgun Gothic"/>
@@ -32240,9 +32122,9 @@
               </a:defRPr>
             </a:lvl7pPr>
             <a:lvl8pPr algn="l">
-              <a:defRPr sz="2175" b="0">
-                <a:solidFill>
-                  <a:srgbClr val="17212B"/>
+              <a:defRPr sz="1575" b="1">
+                <a:solidFill>
+                  <a:srgbClr val="4D5A68"/>
                 </a:solidFill>
                 <a:latin typeface="Malgun Gothic"/>
                 <a:ea typeface="Malgun Gothic"/>
@@ -32250,9 +32132,9 @@
               </a:defRPr>
             </a:lvl8pPr>
             <a:lvl9pPr algn="l">
-              <a:defRPr sz="2175" b="0">
-                <a:solidFill>
-                  <a:srgbClr val="17212B"/>
+              <a:defRPr sz="1575" b="1">
+                <a:solidFill>
+                  <a:srgbClr val="4D5A68"/>
                 </a:solidFill>
                 <a:latin typeface="Malgun Gothic"/>
                 <a:ea typeface="Malgun Gothic"/>
@@ -32262,9 +32144,9 @@
           </a:lstStyle>
           <a:p xmlns:a="http://schemas.openxmlformats.org/drawingml/2006/main">
             <a:pPr algn="l">
-              <a:defRPr sz="2175" b="0">
-                <a:solidFill>
-                  <a:srgbClr val="17212B"/>
+              <a:defRPr sz="1575" b="1">
+                <a:solidFill>
+                  <a:srgbClr val="4D5A68"/>
                 </a:solidFill>
                 <a:latin typeface="Malgun Gothic"/>
                 <a:ea typeface="Malgun Gothic"/>
@@ -32272,25 +32154,25 @@
               </a:defRPr>
             </a:pPr>
             <a:r>
-              <a:rPr sz="2175" b="0">
-                <a:solidFill>
-                  <a:srgbClr val="17212B"/>
+              <a:rPr sz="1575" b="1">
+                <a:solidFill>
+                  <a:srgbClr val="4D5A68"/>
                 </a:solidFill>
                 <a:latin typeface="Malgun Gothic"/>
                 <a:ea typeface="Malgun Gothic"/>
                 <a:cs typeface="Malgun Gothic"/>
               </a:rPr>
-              <a:t>입력과 실행 조건은 비교 가능한가?</a:t>
+              <a:t>출력</a:t>
             </a:r>
           </a:p>
         </p:txBody>
       </p:sp>
       <p:sp>
         <p:nvSpPr>
-          <p:cNvPr id="14" name="">
+          <p:cNvPr id="13" name="기존 가정">
             <a:extLst xmlns:a="http://schemas.openxmlformats.org/drawingml/2006/main">
               <a:ext uri="{FF2B5EF4-FFF2-40B4-BE49-F238E27FC236}">
-                <a16:creationId xmlns:a16="http://schemas.microsoft.com/office/drawing/2014/main" id="{63CEA127-999A-46B5-8583-29044FE27230}"/>
+                <a16:creationId xmlns:a16="http://schemas.microsoft.com/office/drawing/2014/main" id="{584F74BD-9ED9-4903-BA06-C250435FCD9A}"/>
               </a:ext>
             </a:extLst>
           </p:cNvPr>
@@ -32301,39 +32183,8 @@
         </p:nvSpPr>
         <p:spPr>
           <a:xfrm xmlns:a="http://schemas.openxmlformats.org/drawingml/2006/main">
-            <a:off x="609600" y="4343400"/>
-            <a:ext cx="10972800" cy="0"/>
-          </a:xfrm>
-          <a:prstGeom xmlns:a="http://schemas.openxmlformats.org/drawingml/2006/main" prst="line">
-            <a:avLst/>
-          </a:prstGeom>
-          <a:noFill xmlns:a="http://schemas.openxmlformats.org/drawingml/2006/main"/>
-          <a:ln xmlns:a="http://schemas.openxmlformats.org/drawingml/2006/main" w="9525">
-            <a:solidFill>
-              <a:srgbClr val="C7D0DA"/>
-            </a:solidFill>
-            <a:prstDash val="solid"/>
-          </a:ln>
-        </p:spPr>
-      </p:sp>
-      <p:sp>
-        <p:nvSpPr>
-          <p:cNvPr id="15" name="기능 계약">
-            <a:extLst xmlns:a="http://schemas.openxmlformats.org/drawingml/2006/main">
-              <a:ext uri="{FF2B5EF4-FFF2-40B4-BE49-F238E27FC236}">
-                <a16:creationId xmlns:a16="http://schemas.microsoft.com/office/drawing/2014/main" id="{BD587FDE-FBA8-408B-AF0B-570330309628}"/>
-              </a:ext>
-            </a:extLst>
-          </p:cNvPr>
-          <p:cNvSpPr>
-            <a:spLocks xmlns:a="http://schemas.openxmlformats.org/drawingml/2006/main" noGrp="1"/>
-          </p:cNvSpPr>
-          <p:nvPr/>
-        </p:nvSpPr>
-        <p:spPr>
-          <a:xfrm xmlns:a="http://schemas.openxmlformats.org/drawingml/2006/main">
-            <a:off x="609600" y="4457700"/>
-            <a:ext cx="2419350" cy="485775"/>
+            <a:off x="609600" y="4762500"/>
+            <a:ext cx="3505200" cy="323850"/>
           </a:xfrm>
           <a:prstGeom xmlns:a="http://schemas.openxmlformats.org/drawingml/2006/main" prst="rect">
             <a:avLst/>
@@ -32349,7 +32200,7 @@
           </a:bodyPr>
           <a:lstStyle xmlns:a="http://schemas.openxmlformats.org/drawingml/2006/main">
             <a:defPPr algn="l">
-              <a:defRPr sz="2175" b="1">
+              <a:defRPr sz="1875" b="1">
                 <a:solidFill>
                   <a:srgbClr val="0B6172"/>
                 </a:solidFill>
@@ -32359,7 +32210,7 @@
               </a:defRPr>
             </a:defPPr>
             <a:lvl1pPr algn="l">
-              <a:defRPr sz="2175" b="1">
+              <a:defRPr sz="1875" b="1">
                 <a:solidFill>
                   <a:srgbClr val="0B6172"/>
                 </a:solidFill>
@@ -32369,7 +32220,7 @@
               </a:defRPr>
             </a:lvl1pPr>
             <a:lvl2pPr algn="l">
-              <a:defRPr sz="2175" b="1">
+              <a:defRPr sz="1875" b="1">
                 <a:solidFill>
                   <a:srgbClr val="0B6172"/>
                 </a:solidFill>
@@ -32379,7 +32230,7 @@
               </a:defRPr>
             </a:lvl2pPr>
             <a:lvl3pPr algn="l">
-              <a:defRPr sz="2175" b="1">
+              <a:defRPr sz="1875" b="1">
                 <a:solidFill>
                   <a:srgbClr val="0B6172"/>
                 </a:solidFill>
@@ -32389,7 +32240,7 @@
               </a:defRPr>
             </a:lvl3pPr>
             <a:lvl4pPr algn="l">
-              <a:defRPr sz="2175" b="1">
+              <a:defRPr sz="1875" b="1">
                 <a:solidFill>
                   <a:srgbClr val="0B6172"/>
                 </a:solidFill>
@@ -32399,7 +32250,7 @@
               </a:defRPr>
             </a:lvl4pPr>
             <a:lvl5pPr algn="l">
-              <a:defRPr sz="2175" b="1">
+              <a:defRPr sz="1875" b="1">
                 <a:solidFill>
                   <a:srgbClr val="0B6172"/>
                 </a:solidFill>
@@ -32409,7 +32260,7 @@
               </a:defRPr>
             </a:lvl5pPr>
             <a:lvl6pPr algn="l">
-              <a:defRPr sz="2175" b="1">
+              <a:defRPr sz="1875" b="1">
                 <a:solidFill>
                   <a:srgbClr val="0B6172"/>
                 </a:solidFill>
@@ -32419,7 +32270,7 @@
               </a:defRPr>
             </a:lvl6pPr>
             <a:lvl7pPr algn="l">
-              <a:defRPr sz="2175" b="1">
+              <a:defRPr sz="1875" b="1">
                 <a:solidFill>
                   <a:srgbClr val="0B6172"/>
                 </a:solidFill>
@@ -32429,7 +32280,7 @@
               </a:defRPr>
             </a:lvl7pPr>
             <a:lvl8pPr algn="l">
-              <a:defRPr sz="2175" b="1">
+              <a:defRPr sz="1875" b="1">
                 <a:solidFill>
                   <a:srgbClr val="0B6172"/>
                 </a:solidFill>
@@ -32439,7 +32290,7 @@
               </a:defRPr>
             </a:lvl8pPr>
             <a:lvl9pPr algn="l">
-              <a:defRPr sz="2175" b="1">
+              <a:defRPr sz="1875" b="1">
                 <a:solidFill>
                   <a:srgbClr val="0B6172"/>
                 </a:solidFill>
@@ -32451,7 +32302,7 @@
           </a:lstStyle>
           <a:p xmlns:a="http://schemas.openxmlformats.org/drawingml/2006/main">
             <a:pPr algn="l">
-              <a:defRPr sz="2175" b="1">
+              <a:defRPr sz="1875" b="1">
                 <a:solidFill>
                   <a:srgbClr val="0B6172"/>
                 </a:solidFill>
@@ -32461,7 +32312,7 @@
               </a:defRPr>
             </a:pPr>
             <a:r>
-              <a:rPr sz="2175" b="1">
+              <a:rPr sz="1875" b="1">
                 <a:solidFill>
                   <a:srgbClr val="0B6172"/>
                 </a:solidFill>
@@ -32469,17 +32320,17 @@
                 <a:ea typeface="Malgun Gothic"/>
                 <a:cs typeface="Malgun Gothic"/>
               </a:rPr>
-              <a:t>기능 계약</a:t>
+              <a:t>기존 가정</a:t>
             </a:r>
           </a:p>
         </p:txBody>
       </p:sp>
       <p:sp>
         <p:nvSpPr>
-          <p:cNvPr id="16" name="성능 변화와 함께 다시 확인할 동작은?">
+          <p:cNvPr id="14" name="어떤 조건에서 맞던 판단인가?">
             <a:extLst xmlns:a="http://schemas.openxmlformats.org/drawingml/2006/main">
               <a:ext uri="{FF2B5EF4-FFF2-40B4-BE49-F238E27FC236}">
-                <a16:creationId xmlns:a16="http://schemas.microsoft.com/office/drawing/2014/main" id="{64417E16-D8F0-46C6-A910-E77F8FD99614}"/>
+                <a16:creationId xmlns:a16="http://schemas.microsoft.com/office/drawing/2014/main" id="{FCFCD6D9-03E9-427C-A815-FDA3BE795615}"/>
               </a:ext>
             </a:extLst>
           </p:cNvPr>
@@ -32490,8 +32341,8 @@
         </p:nvSpPr>
         <p:spPr>
           <a:xfrm xmlns:a="http://schemas.openxmlformats.org/drawingml/2006/main">
-            <a:off x="3257550" y="4457700"/>
-            <a:ext cx="8324850" cy="485775"/>
+            <a:off x="609600" y="5086350"/>
+            <a:ext cx="3505200" cy="323850"/>
           </a:xfrm>
           <a:prstGeom xmlns:a="http://schemas.openxmlformats.org/drawingml/2006/main" prst="rect">
             <a:avLst/>
@@ -32507,9 +32358,9 @@
           </a:bodyPr>
           <a:lstStyle xmlns:a="http://schemas.openxmlformats.org/drawingml/2006/main">
             <a:defPPr algn="l">
-              <a:defRPr sz="2175" b="0">
-                <a:solidFill>
-                  <a:srgbClr val="17212B"/>
+              <a:defRPr sz="1650" b="0">
+                <a:solidFill>
+                  <a:srgbClr val="4D5A68"/>
                 </a:solidFill>
                 <a:latin typeface="Malgun Gothic"/>
                 <a:ea typeface="Malgun Gothic"/>
@@ -32517,9 +32368,9 @@
               </a:defRPr>
             </a:defPPr>
             <a:lvl1pPr algn="l">
-              <a:defRPr sz="2175" b="0">
-                <a:solidFill>
-                  <a:srgbClr val="17212B"/>
+              <a:defRPr sz="1650" b="0">
+                <a:solidFill>
+                  <a:srgbClr val="4D5A68"/>
                 </a:solidFill>
                 <a:latin typeface="Malgun Gothic"/>
                 <a:ea typeface="Malgun Gothic"/>
@@ -32527,9 +32378,9 @@
               </a:defRPr>
             </a:lvl1pPr>
             <a:lvl2pPr algn="l">
-              <a:defRPr sz="2175" b="0">
-                <a:solidFill>
-                  <a:srgbClr val="17212B"/>
+              <a:defRPr sz="1650" b="0">
+                <a:solidFill>
+                  <a:srgbClr val="4D5A68"/>
                 </a:solidFill>
                 <a:latin typeface="Malgun Gothic"/>
                 <a:ea typeface="Malgun Gothic"/>
@@ -32537,9 +32388,9 @@
               </a:defRPr>
             </a:lvl2pPr>
             <a:lvl3pPr algn="l">
-              <a:defRPr sz="2175" b="0">
-                <a:solidFill>
-                  <a:srgbClr val="17212B"/>
+              <a:defRPr sz="1650" b="0">
+                <a:solidFill>
+                  <a:srgbClr val="4D5A68"/>
                 </a:solidFill>
                 <a:latin typeface="Malgun Gothic"/>
                 <a:ea typeface="Malgun Gothic"/>
@@ -32547,9 +32398,9 @@
               </a:defRPr>
             </a:lvl3pPr>
             <a:lvl4pPr algn="l">
-              <a:defRPr sz="2175" b="0">
-                <a:solidFill>
-                  <a:srgbClr val="17212B"/>
+              <a:defRPr sz="1650" b="0">
+                <a:solidFill>
+                  <a:srgbClr val="4D5A68"/>
                 </a:solidFill>
                 <a:latin typeface="Malgun Gothic"/>
                 <a:ea typeface="Malgun Gothic"/>
@@ -32557,9 +32408,9 @@
               </a:defRPr>
             </a:lvl4pPr>
             <a:lvl5pPr algn="l">
-              <a:defRPr sz="2175" b="0">
-                <a:solidFill>
-                  <a:srgbClr val="17212B"/>
+              <a:defRPr sz="1650" b="0">
+                <a:solidFill>
+                  <a:srgbClr val="4D5A68"/>
                 </a:solidFill>
                 <a:latin typeface="Malgun Gothic"/>
                 <a:ea typeface="Malgun Gothic"/>
@@ -32567,9 +32418,9 @@
               </a:defRPr>
             </a:lvl5pPr>
             <a:lvl6pPr algn="l">
-              <a:defRPr sz="2175" b="0">
-                <a:solidFill>
-                  <a:srgbClr val="17212B"/>
+              <a:defRPr sz="1650" b="0">
+                <a:solidFill>
+                  <a:srgbClr val="4D5A68"/>
                 </a:solidFill>
                 <a:latin typeface="Malgun Gothic"/>
                 <a:ea typeface="Malgun Gothic"/>
@@ -32577,9 +32428,9 @@
               </a:defRPr>
             </a:lvl6pPr>
             <a:lvl7pPr algn="l">
-              <a:defRPr sz="2175" b="0">
-                <a:solidFill>
-                  <a:srgbClr val="17212B"/>
+              <a:defRPr sz="1650" b="0">
+                <a:solidFill>
+                  <a:srgbClr val="4D5A68"/>
                 </a:solidFill>
                 <a:latin typeface="Malgun Gothic"/>
                 <a:ea typeface="Malgun Gothic"/>
@@ -32587,9 +32438,9 @@
               </a:defRPr>
             </a:lvl7pPr>
             <a:lvl8pPr algn="l">
-              <a:defRPr sz="2175" b="0">
-                <a:solidFill>
-                  <a:srgbClr val="17212B"/>
+              <a:defRPr sz="1650" b="0">
+                <a:solidFill>
+                  <a:srgbClr val="4D5A68"/>
                 </a:solidFill>
                 <a:latin typeface="Malgun Gothic"/>
                 <a:ea typeface="Malgun Gothic"/>
@@ -32597,9 +32448,9 @@
               </a:defRPr>
             </a:lvl8pPr>
             <a:lvl9pPr algn="l">
-              <a:defRPr sz="2175" b="0">
-                <a:solidFill>
-                  <a:srgbClr val="17212B"/>
+              <a:defRPr sz="1650" b="0">
+                <a:solidFill>
+                  <a:srgbClr val="4D5A68"/>
                 </a:solidFill>
                 <a:latin typeface="Malgun Gothic"/>
                 <a:ea typeface="Malgun Gothic"/>
@@ -32609,9 +32460,9 @@
           </a:lstStyle>
           <a:p xmlns:a="http://schemas.openxmlformats.org/drawingml/2006/main">
             <a:pPr algn="l">
-              <a:defRPr sz="2175" b="0">
-                <a:solidFill>
-                  <a:srgbClr val="17212B"/>
+              <a:defRPr sz="1650" b="0">
+                <a:solidFill>
+                  <a:srgbClr val="4D5A68"/>
                 </a:solidFill>
                 <a:latin typeface="Malgun Gothic"/>
                 <a:ea typeface="Malgun Gothic"/>
@@ -32619,25 +32470,25 @@
               </a:defRPr>
             </a:pPr>
             <a:r>
-              <a:rPr sz="2175" b="0">
-                <a:solidFill>
-                  <a:srgbClr val="17212B"/>
+              <a:rPr sz="1650" b="0">
+                <a:solidFill>
+                  <a:srgbClr val="4D5A68"/>
                 </a:solidFill>
                 <a:latin typeface="Malgun Gothic"/>
                 <a:ea typeface="Malgun Gothic"/>
                 <a:cs typeface="Malgun Gothic"/>
               </a:rPr>
-              <a:t>성능 변화와 함께 다시 확인할 동작은?</a:t>
+              <a:t>어떤 조건에서 맞던 판단인가?</a:t>
             </a:r>
           </a:p>
         </p:txBody>
       </p:sp>
       <p:sp>
         <p:nvSpPr>
-          <p:cNvPr id="17" name="같은 문제가 반복될 때, 어느 Layer를 먼저 살펴볼까?">
+          <p:cNvPr id="15" name="측정 조건">
             <a:extLst xmlns:a="http://schemas.openxmlformats.org/drawingml/2006/main">
               <a:ext uri="{FF2B5EF4-FFF2-40B4-BE49-F238E27FC236}">
-                <a16:creationId xmlns:a16="http://schemas.microsoft.com/office/drawing/2014/main" id="{F953EFB9-3638-4760-AE31-327596CA309A}"/>
+                <a16:creationId xmlns:a16="http://schemas.microsoft.com/office/drawing/2014/main" id="{6EE3C243-44BB-44D9-9F90-18E409EC2FDD}"/>
               </a:ext>
             </a:extLst>
           </p:cNvPr>
@@ -32648,7 +32499,639 @@
         </p:nvSpPr>
         <p:spPr>
           <a:xfrm xmlns:a="http://schemas.openxmlformats.org/drawingml/2006/main">
-            <a:off x="609600" y="5238750"/>
+            <a:off x="4343400" y="4762500"/>
+            <a:ext cx="3505200" cy="323850"/>
+          </a:xfrm>
+          <a:prstGeom xmlns:a="http://schemas.openxmlformats.org/drawingml/2006/main" prst="rect">
+            <a:avLst/>
+          </a:prstGeom>
+          <a:noFill xmlns:a="http://schemas.openxmlformats.org/drawingml/2006/main"/>
+          <a:ln xmlns:a="http://schemas.openxmlformats.org/drawingml/2006/main" w="0">
+            <a:noFill/>
+          </a:ln>
+        </p:spPr>
+        <p:txBody>
+          <a:bodyPr xmlns:a="http://schemas.openxmlformats.org/drawingml/2006/main" wrap="none" lIns="0" tIns="0" rIns="0" bIns="0" anchor="ctr">
+            <a:noAutofit/>
+          </a:bodyPr>
+          <a:lstStyle xmlns:a="http://schemas.openxmlformats.org/drawingml/2006/main">
+            <a:defPPr algn="l">
+              <a:defRPr sz="1875" b="1">
+                <a:solidFill>
+                  <a:srgbClr val="0B6172"/>
+                </a:solidFill>
+                <a:latin typeface="Malgun Gothic"/>
+                <a:ea typeface="Malgun Gothic"/>
+                <a:cs typeface="Malgun Gothic"/>
+              </a:defRPr>
+            </a:defPPr>
+            <a:lvl1pPr algn="l">
+              <a:defRPr sz="1875" b="1">
+                <a:solidFill>
+                  <a:srgbClr val="0B6172"/>
+                </a:solidFill>
+                <a:latin typeface="Malgun Gothic"/>
+                <a:ea typeface="Malgun Gothic"/>
+                <a:cs typeface="Malgun Gothic"/>
+              </a:defRPr>
+            </a:lvl1pPr>
+            <a:lvl2pPr algn="l">
+              <a:defRPr sz="1875" b="1">
+                <a:solidFill>
+                  <a:srgbClr val="0B6172"/>
+                </a:solidFill>
+                <a:latin typeface="Malgun Gothic"/>
+                <a:ea typeface="Malgun Gothic"/>
+                <a:cs typeface="Malgun Gothic"/>
+              </a:defRPr>
+            </a:lvl2pPr>
+            <a:lvl3pPr algn="l">
+              <a:defRPr sz="1875" b="1">
+                <a:solidFill>
+                  <a:srgbClr val="0B6172"/>
+                </a:solidFill>
+                <a:latin typeface="Malgun Gothic"/>
+                <a:ea typeface="Malgun Gothic"/>
+                <a:cs typeface="Malgun Gothic"/>
+              </a:defRPr>
+            </a:lvl3pPr>
+            <a:lvl4pPr algn="l">
+              <a:defRPr sz="1875" b="1">
+                <a:solidFill>
+                  <a:srgbClr val="0B6172"/>
+                </a:solidFill>
+                <a:latin typeface="Malgun Gothic"/>
+                <a:ea typeface="Malgun Gothic"/>
+                <a:cs typeface="Malgun Gothic"/>
+              </a:defRPr>
+            </a:lvl4pPr>
+            <a:lvl5pPr algn="l">
+              <a:defRPr sz="1875" b="1">
+                <a:solidFill>
+                  <a:srgbClr val="0B6172"/>
+                </a:solidFill>
+                <a:latin typeface="Malgun Gothic"/>
+                <a:ea typeface="Malgun Gothic"/>
+                <a:cs typeface="Malgun Gothic"/>
+              </a:defRPr>
+            </a:lvl5pPr>
+            <a:lvl6pPr algn="l">
+              <a:defRPr sz="1875" b="1">
+                <a:solidFill>
+                  <a:srgbClr val="0B6172"/>
+                </a:solidFill>
+                <a:latin typeface="Malgun Gothic"/>
+                <a:ea typeface="Malgun Gothic"/>
+                <a:cs typeface="Malgun Gothic"/>
+              </a:defRPr>
+            </a:lvl6pPr>
+            <a:lvl7pPr algn="l">
+              <a:defRPr sz="1875" b="1">
+                <a:solidFill>
+                  <a:srgbClr val="0B6172"/>
+                </a:solidFill>
+                <a:latin typeface="Malgun Gothic"/>
+                <a:ea typeface="Malgun Gothic"/>
+                <a:cs typeface="Malgun Gothic"/>
+              </a:defRPr>
+            </a:lvl7pPr>
+            <a:lvl8pPr algn="l">
+              <a:defRPr sz="1875" b="1">
+                <a:solidFill>
+                  <a:srgbClr val="0B6172"/>
+                </a:solidFill>
+                <a:latin typeface="Malgun Gothic"/>
+                <a:ea typeface="Malgun Gothic"/>
+                <a:cs typeface="Malgun Gothic"/>
+              </a:defRPr>
+            </a:lvl8pPr>
+            <a:lvl9pPr algn="l">
+              <a:defRPr sz="1875" b="1">
+                <a:solidFill>
+                  <a:srgbClr val="0B6172"/>
+                </a:solidFill>
+                <a:latin typeface="Malgun Gothic"/>
+                <a:ea typeface="Malgun Gothic"/>
+                <a:cs typeface="Malgun Gothic"/>
+              </a:defRPr>
+            </a:lvl9pPr>
+          </a:lstStyle>
+          <a:p xmlns:a="http://schemas.openxmlformats.org/drawingml/2006/main">
+            <a:pPr algn="l">
+              <a:defRPr sz="1875" b="1">
+                <a:solidFill>
+                  <a:srgbClr val="0B6172"/>
+                </a:solidFill>
+                <a:latin typeface="Malgun Gothic"/>
+                <a:ea typeface="Malgun Gothic"/>
+                <a:cs typeface="Malgun Gothic"/>
+              </a:defRPr>
+            </a:pPr>
+            <a:r>
+              <a:rPr sz="1875" b="1">
+                <a:solidFill>
+                  <a:srgbClr val="0B6172"/>
+                </a:solidFill>
+                <a:latin typeface="Malgun Gothic"/>
+                <a:ea typeface="Malgun Gothic"/>
+                <a:cs typeface="Malgun Gothic"/>
+              </a:rPr>
+              <a:t>측정 조건</a:t>
+            </a:r>
+          </a:p>
+        </p:txBody>
+      </p:sp>
+      <p:sp>
+        <p:nvSpPr>
+          <p:cNvPr id="16" name="입력과 실행 조건은 비교 가능한가?">
+            <a:extLst xmlns:a="http://schemas.openxmlformats.org/drawingml/2006/main">
+              <a:ext uri="{FF2B5EF4-FFF2-40B4-BE49-F238E27FC236}">
+                <a16:creationId xmlns:a16="http://schemas.microsoft.com/office/drawing/2014/main" id="{3631A1EC-520E-4DCD-98AA-B2F8089FEE0A}"/>
+              </a:ext>
+            </a:extLst>
+          </p:cNvPr>
+          <p:cNvSpPr>
+            <a:spLocks xmlns:a="http://schemas.openxmlformats.org/drawingml/2006/main" noGrp="1"/>
+          </p:cNvSpPr>
+          <p:nvPr/>
+        </p:nvSpPr>
+        <p:spPr>
+          <a:xfrm xmlns:a="http://schemas.openxmlformats.org/drawingml/2006/main">
+            <a:off x="4343400" y="5086350"/>
+            <a:ext cx="3505200" cy="323850"/>
+          </a:xfrm>
+          <a:prstGeom xmlns:a="http://schemas.openxmlformats.org/drawingml/2006/main" prst="rect">
+            <a:avLst/>
+          </a:prstGeom>
+          <a:noFill xmlns:a="http://schemas.openxmlformats.org/drawingml/2006/main"/>
+          <a:ln xmlns:a="http://schemas.openxmlformats.org/drawingml/2006/main" w="0">
+            <a:noFill/>
+          </a:ln>
+        </p:spPr>
+        <p:txBody>
+          <a:bodyPr xmlns:a="http://schemas.openxmlformats.org/drawingml/2006/main" wrap="none" lIns="0" tIns="0" rIns="0" bIns="0" anchor="ctr">
+            <a:noAutofit/>
+          </a:bodyPr>
+          <a:lstStyle xmlns:a="http://schemas.openxmlformats.org/drawingml/2006/main">
+            <a:defPPr algn="l">
+              <a:defRPr sz="1650" b="0">
+                <a:solidFill>
+                  <a:srgbClr val="4D5A68"/>
+                </a:solidFill>
+                <a:latin typeface="Malgun Gothic"/>
+                <a:ea typeface="Malgun Gothic"/>
+                <a:cs typeface="Malgun Gothic"/>
+              </a:defRPr>
+            </a:defPPr>
+            <a:lvl1pPr algn="l">
+              <a:defRPr sz="1650" b="0">
+                <a:solidFill>
+                  <a:srgbClr val="4D5A68"/>
+                </a:solidFill>
+                <a:latin typeface="Malgun Gothic"/>
+                <a:ea typeface="Malgun Gothic"/>
+                <a:cs typeface="Malgun Gothic"/>
+              </a:defRPr>
+            </a:lvl1pPr>
+            <a:lvl2pPr algn="l">
+              <a:defRPr sz="1650" b="0">
+                <a:solidFill>
+                  <a:srgbClr val="4D5A68"/>
+                </a:solidFill>
+                <a:latin typeface="Malgun Gothic"/>
+                <a:ea typeface="Malgun Gothic"/>
+                <a:cs typeface="Malgun Gothic"/>
+              </a:defRPr>
+            </a:lvl2pPr>
+            <a:lvl3pPr algn="l">
+              <a:defRPr sz="1650" b="0">
+                <a:solidFill>
+                  <a:srgbClr val="4D5A68"/>
+                </a:solidFill>
+                <a:latin typeface="Malgun Gothic"/>
+                <a:ea typeface="Malgun Gothic"/>
+                <a:cs typeface="Malgun Gothic"/>
+              </a:defRPr>
+            </a:lvl3pPr>
+            <a:lvl4pPr algn="l">
+              <a:defRPr sz="1650" b="0">
+                <a:solidFill>
+                  <a:srgbClr val="4D5A68"/>
+                </a:solidFill>
+                <a:latin typeface="Malgun Gothic"/>
+                <a:ea typeface="Malgun Gothic"/>
+                <a:cs typeface="Malgun Gothic"/>
+              </a:defRPr>
+            </a:lvl4pPr>
+            <a:lvl5pPr algn="l">
+              <a:defRPr sz="1650" b="0">
+                <a:solidFill>
+                  <a:srgbClr val="4D5A68"/>
+                </a:solidFill>
+                <a:latin typeface="Malgun Gothic"/>
+                <a:ea typeface="Malgun Gothic"/>
+                <a:cs typeface="Malgun Gothic"/>
+              </a:defRPr>
+            </a:lvl5pPr>
+            <a:lvl6pPr algn="l">
+              <a:defRPr sz="1650" b="0">
+                <a:solidFill>
+                  <a:srgbClr val="4D5A68"/>
+                </a:solidFill>
+                <a:latin typeface="Malgun Gothic"/>
+                <a:ea typeface="Malgun Gothic"/>
+                <a:cs typeface="Malgun Gothic"/>
+              </a:defRPr>
+            </a:lvl6pPr>
+            <a:lvl7pPr algn="l">
+              <a:defRPr sz="1650" b="0">
+                <a:solidFill>
+                  <a:srgbClr val="4D5A68"/>
+                </a:solidFill>
+                <a:latin typeface="Malgun Gothic"/>
+                <a:ea typeface="Malgun Gothic"/>
+                <a:cs typeface="Malgun Gothic"/>
+              </a:defRPr>
+            </a:lvl7pPr>
+            <a:lvl8pPr algn="l">
+              <a:defRPr sz="1650" b="0">
+                <a:solidFill>
+                  <a:srgbClr val="4D5A68"/>
+                </a:solidFill>
+                <a:latin typeface="Malgun Gothic"/>
+                <a:ea typeface="Malgun Gothic"/>
+                <a:cs typeface="Malgun Gothic"/>
+              </a:defRPr>
+            </a:lvl8pPr>
+            <a:lvl9pPr algn="l">
+              <a:defRPr sz="1650" b="0">
+                <a:solidFill>
+                  <a:srgbClr val="4D5A68"/>
+                </a:solidFill>
+                <a:latin typeface="Malgun Gothic"/>
+                <a:ea typeface="Malgun Gothic"/>
+                <a:cs typeface="Malgun Gothic"/>
+              </a:defRPr>
+            </a:lvl9pPr>
+          </a:lstStyle>
+          <a:p xmlns:a="http://schemas.openxmlformats.org/drawingml/2006/main">
+            <a:pPr algn="l">
+              <a:defRPr sz="1650" b="0">
+                <a:solidFill>
+                  <a:srgbClr val="4D5A68"/>
+                </a:solidFill>
+                <a:latin typeface="Malgun Gothic"/>
+                <a:ea typeface="Malgun Gothic"/>
+                <a:cs typeface="Malgun Gothic"/>
+              </a:defRPr>
+            </a:pPr>
+            <a:r>
+              <a:rPr sz="1650" b="0">
+                <a:solidFill>
+                  <a:srgbClr val="4D5A68"/>
+                </a:solidFill>
+                <a:latin typeface="Malgun Gothic"/>
+                <a:ea typeface="Malgun Gothic"/>
+                <a:cs typeface="Malgun Gothic"/>
+              </a:rPr>
+              <a:t>입력과 실행 조건은 비교 가능한가?</a:t>
+            </a:r>
+          </a:p>
+        </p:txBody>
+      </p:sp>
+      <p:sp>
+        <p:nvSpPr>
+          <p:cNvPr id="17" name="기능 계약">
+            <a:extLst xmlns:a="http://schemas.openxmlformats.org/drawingml/2006/main">
+              <a:ext uri="{FF2B5EF4-FFF2-40B4-BE49-F238E27FC236}">
+                <a16:creationId xmlns:a16="http://schemas.microsoft.com/office/drawing/2014/main" id="{70D92B30-D121-45C6-913A-E0C74A034187}"/>
+              </a:ext>
+            </a:extLst>
+          </p:cNvPr>
+          <p:cNvSpPr>
+            <a:spLocks xmlns:a="http://schemas.openxmlformats.org/drawingml/2006/main" noGrp="1"/>
+          </p:cNvSpPr>
+          <p:nvPr/>
+        </p:nvSpPr>
+        <p:spPr>
+          <a:xfrm xmlns:a="http://schemas.openxmlformats.org/drawingml/2006/main">
+            <a:off x="8077200" y="4762500"/>
+            <a:ext cx="3505200" cy="323850"/>
+          </a:xfrm>
+          <a:prstGeom xmlns:a="http://schemas.openxmlformats.org/drawingml/2006/main" prst="rect">
+            <a:avLst/>
+          </a:prstGeom>
+          <a:noFill xmlns:a="http://schemas.openxmlformats.org/drawingml/2006/main"/>
+          <a:ln xmlns:a="http://schemas.openxmlformats.org/drawingml/2006/main" w="0">
+            <a:noFill/>
+          </a:ln>
+        </p:spPr>
+        <p:txBody>
+          <a:bodyPr xmlns:a="http://schemas.openxmlformats.org/drawingml/2006/main" wrap="none" lIns="0" tIns="0" rIns="0" bIns="0" anchor="ctr">
+            <a:noAutofit/>
+          </a:bodyPr>
+          <a:lstStyle xmlns:a="http://schemas.openxmlformats.org/drawingml/2006/main">
+            <a:defPPr algn="l">
+              <a:defRPr sz="1875" b="1">
+                <a:solidFill>
+                  <a:srgbClr val="0B6172"/>
+                </a:solidFill>
+                <a:latin typeface="Malgun Gothic"/>
+                <a:ea typeface="Malgun Gothic"/>
+                <a:cs typeface="Malgun Gothic"/>
+              </a:defRPr>
+            </a:defPPr>
+            <a:lvl1pPr algn="l">
+              <a:defRPr sz="1875" b="1">
+                <a:solidFill>
+                  <a:srgbClr val="0B6172"/>
+                </a:solidFill>
+                <a:latin typeface="Malgun Gothic"/>
+                <a:ea typeface="Malgun Gothic"/>
+                <a:cs typeface="Malgun Gothic"/>
+              </a:defRPr>
+            </a:lvl1pPr>
+            <a:lvl2pPr algn="l">
+              <a:defRPr sz="1875" b="1">
+                <a:solidFill>
+                  <a:srgbClr val="0B6172"/>
+                </a:solidFill>
+                <a:latin typeface="Malgun Gothic"/>
+                <a:ea typeface="Malgun Gothic"/>
+                <a:cs typeface="Malgun Gothic"/>
+              </a:defRPr>
+            </a:lvl2pPr>
+            <a:lvl3pPr algn="l">
+              <a:defRPr sz="1875" b="1">
+                <a:solidFill>
+                  <a:srgbClr val="0B6172"/>
+                </a:solidFill>
+                <a:latin typeface="Malgun Gothic"/>
+                <a:ea typeface="Malgun Gothic"/>
+                <a:cs typeface="Malgun Gothic"/>
+              </a:defRPr>
+            </a:lvl3pPr>
+            <a:lvl4pPr algn="l">
+              <a:defRPr sz="1875" b="1">
+                <a:solidFill>
+                  <a:srgbClr val="0B6172"/>
+                </a:solidFill>
+                <a:latin typeface="Malgun Gothic"/>
+                <a:ea typeface="Malgun Gothic"/>
+                <a:cs typeface="Malgun Gothic"/>
+              </a:defRPr>
+            </a:lvl4pPr>
+            <a:lvl5pPr algn="l">
+              <a:defRPr sz="1875" b="1">
+                <a:solidFill>
+                  <a:srgbClr val="0B6172"/>
+                </a:solidFill>
+                <a:latin typeface="Malgun Gothic"/>
+                <a:ea typeface="Malgun Gothic"/>
+                <a:cs typeface="Malgun Gothic"/>
+              </a:defRPr>
+            </a:lvl5pPr>
+            <a:lvl6pPr algn="l">
+              <a:defRPr sz="1875" b="1">
+                <a:solidFill>
+                  <a:srgbClr val="0B6172"/>
+                </a:solidFill>
+                <a:latin typeface="Malgun Gothic"/>
+                <a:ea typeface="Malgun Gothic"/>
+                <a:cs typeface="Malgun Gothic"/>
+              </a:defRPr>
+            </a:lvl6pPr>
+            <a:lvl7pPr algn="l">
+              <a:defRPr sz="1875" b="1">
+                <a:solidFill>
+                  <a:srgbClr val="0B6172"/>
+                </a:solidFill>
+                <a:latin typeface="Malgun Gothic"/>
+                <a:ea typeface="Malgun Gothic"/>
+                <a:cs typeface="Malgun Gothic"/>
+              </a:defRPr>
+            </a:lvl7pPr>
+            <a:lvl8pPr algn="l">
+              <a:defRPr sz="1875" b="1">
+                <a:solidFill>
+                  <a:srgbClr val="0B6172"/>
+                </a:solidFill>
+                <a:latin typeface="Malgun Gothic"/>
+                <a:ea typeface="Malgun Gothic"/>
+                <a:cs typeface="Malgun Gothic"/>
+              </a:defRPr>
+            </a:lvl8pPr>
+            <a:lvl9pPr algn="l">
+              <a:defRPr sz="1875" b="1">
+                <a:solidFill>
+                  <a:srgbClr val="0B6172"/>
+                </a:solidFill>
+                <a:latin typeface="Malgun Gothic"/>
+                <a:ea typeface="Malgun Gothic"/>
+                <a:cs typeface="Malgun Gothic"/>
+              </a:defRPr>
+            </a:lvl9pPr>
+          </a:lstStyle>
+          <a:p xmlns:a="http://schemas.openxmlformats.org/drawingml/2006/main">
+            <a:pPr algn="l">
+              <a:defRPr sz="1875" b="1">
+                <a:solidFill>
+                  <a:srgbClr val="0B6172"/>
+                </a:solidFill>
+                <a:latin typeface="Malgun Gothic"/>
+                <a:ea typeface="Malgun Gothic"/>
+                <a:cs typeface="Malgun Gothic"/>
+              </a:defRPr>
+            </a:pPr>
+            <a:r>
+              <a:rPr sz="1875" b="1">
+                <a:solidFill>
+                  <a:srgbClr val="0B6172"/>
+                </a:solidFill>
+                <a:latin typeface="Malgun Gothic"/>
+                <a:ea typeface="Malgun Gothic"/>
+                <a:cs typeface="Malgun Gothic"/>
+              </a:rPr>
+              <a:t>기능 계약</a:t>
+            </a:r>
+          </a:p>
+        </p:txBody>
+      </p:sp>
+      <p:sp>
+        <p:nvSpPr>
+          <p:cNvPr id="18" name="함께 다시 확인할 동작은?">
+            <a:extLst xmlns:a="http://schemas.openxmlformats.org/drawingml/2006/main">
+              <a:ext uri="{FF2B5EF4-FFF2-40B4-BE49-F238E27FC236}">
+                <a16:creationId xmlns:a16="http://schemas.microsoft.com/office/drawing/2014/main" id="{5DD98F72-43C2-4C2E-BEC5-3C7FF09B052A}"/>
+              </a:ext>
+            </a:extLst>
+          </p:cNvPr>
+          <p:cNvSpPr>
+            <a:spLocks xmlns:a="http://schemas.openxmlformats.org/drawingml/2006/main" noGrp="1"/>
+          </p:cNvSpPr>
+          <p:nvPr/>
+        </p:nvSpPr>
+        <p:spPr>
+          <a:xfrm xmlns:a="http://schemas.openxmlformats.org/drawingml/2006/main">
+            <a:off x="8077200" y="5086350"/>
+            <a:ext cx="3505200" cy="323850"/>
+          </a:xfrm>
+          <a:prstGeom xmlns:a="http://schemas.openxmlformats.org/drawingml/2006/main" prst="rect">
+            <a:avLst/>
+          </a:prstGeom>
+          <a:noFill xmlns:a="http://schemas.openxmlformats.org/drawingml/2006/main"/>
+          <a:ln xmlns:a="http://schemas.openxmlformats.org/drawingml/2006/main" w="0">
+            <a:noFill/>
+          </a:ln>
+        </p:spPr>
+        <p:txBody>
+          <a:bodyPr xmlns:a="http://schemas.openxmlformats.org/drawingml/2006/main" wrap="none" lIns="0" tIns="0" rIns="0" bIns="0" anchor="ctr">
+            <a:noAutofit/>
+          </a:bodyPr>
+          <a:lstStyle xmlns:a="http://schemas.openxmlformats.org/drawingml/2006/main">
+            <a:defPPr algn="l">
+              <a:defRPr sz="1650" b="0">
+                <a:solidFill>
+                  <a:srgbClr val="4D5A68"/>
+                </a:solidFill>
+                <a:latin typeface="Malgun Gothic"/>
+                <a:ea typeface="Malgun Gothic"/>
+                <a:cs typeface="Malgun Gothic"/>
+              </a:defRPr>
+            </a:defPPr>
+            <a:lvl1pPr algn="l">
+              <a:defRPr sz="1650" b="0">
+                <a:solidFill>
+                  <a:srgbClr val="4D5A68"/>
+                </a:solidFill>
+                <a:latin typeface="Malgun Gothic"/>
+                <a:ea typeface="Malgun Gothic"/>
+                <a:cs typeface="Malgun Gothic"/>
+              </a:defRPr>
+            </a:lvl1pPr>
+            <a:lvl2pPr algn="l">
+              <a:defRPr sz="1650" b="0">
+                <a:solidFill>
+                  <a:srgbClr val="4D5A68"/>
+                </a:solidFill>
+                <a:latin typeface="Malgun Gothic"/>
+                <a:ea typeface="Malgun Gothic"/>
+                <a:cs typeface="Malgun Gothic"/>
+              </a:defRPr>
+            </a:lvl2pPr>
+            <a:lvl3pPr algn="l">
+              <a:defRPr sz="1650" b="0">
+                <a:solidFill>
+                  <a:srgbClr val="4D5A68"/>
+                </a:solidFill>
+                <a:latin typeface="Malgun Gothic"/>
+                <a:ea typeface="Malgun Gothic"/>
+                <a:cs typeface="Malgun Gothic"/>
+              </a:defRPr>
+            </a:lvl3pPr>
+            <a:lvl4pPr algn="l">
+              <a:defRPr sz="1650" b="0">
+                <a:solidFill>
+                  <a:srgbClr val="4D5A68"/>
+                </a:solidFill>
+                <a:latin typeface="Malgun Gothic"/>
+                <a:ea typeface="Malgun Gothic"/>
+                <a:cs typeface="Malgun Gothic"/>
+              </a:defRPr>
+            </a:lvl4pPr>
+            <a:lvl5pPr algn="l">
+              <a:defRPr sz="1650" b="0">
+                <a:solidFill>
+                  <a:srgbClr val="4D5A68"/>
+                </a:solidFill>
+                <a:latin typeface="Malgun Gothic"/>
+                <a:ea typeface="Malgun Gothic"/>
+                <a:cs typeface="Malgun Gothic"/>
+              </a:defRPr>
+            </a:lvl5pPr>
+            <a:lvl6pPr algn="l">
+              <a:defRPr sz="1650" b="0">
+                <a:solidFill>
+                  <a:srgbClr val="4D5A68"/>
+                </a:solidFill>
+                <a:latin typeface="Malgun Gothic"/>
+                <a:ea typeface="Malgun Gothic"/>
+                <a:cs typeface="Malgun Gothic"/>
+              </a:defRPr>
+            </a:lvl6pPr>
+            <a:lvl7pPr algn="l">
+              <a:defRPr sz="1650" b="0">
+                <a:solidFill>
+                  <a:srgbClr val="4D5A68"/>
+                </a:solidFill>
+                <a:latin typeface="Malgun Gothic"/>
+                <a:ea typeface="Malgun Gothic"/>
+                <a:cs typeface="Malgun Gothic"/>
+              </a:defRPr>
+            </a:lvl7pPr>
+            <a:lvl8pPr algn="l">
+              <a:defRPr sz="1650" b="0">
+                <a:solidFill>
+                  <a:srgbClr val="4D5A68"/>
+                </a:solidFill>
+                <a:latin typeface="Malgun Gothic"/>
+                <a:ea typeface="Malgun Gothic"/>
+                <a:cs typeface="Malgun Gothic"/>
+              </a:defRPr>
+            </a:lvl8pPr>
+            <a:lvl9pPr algn="l">
+              <a:defRPr sz="1650" b="0">
+                <a:solidFill>
+                  <a:srgbClr val="4D5A68"/>
+                </a:solidFill>
+                <a:latin typeface="Malgun Gothic"/>
+                <a:ea typeface="Malgun Gothic"/>
+                <a:cs typeface="Malgun Gothic"/>
+              </a:defRPr>
+            </a:lvl9pPr>
+          </a:lstStyle>
+          <a:p xmlns:a="http://schemas.openxmlformats.org/drawingml/2006/main">
+            <a:pPr algn="l">
+              <a:defRPr sz="1650" b="0">
+                <a:solidFill>
+                  <a:srgbClr val="4D5A68"/>
+                </a:solidFill>
+                <a:latin typeface="Malgun Gothic"/>
+                <a:ea typeface="Malgun Gothic"/>
+                <a:cs typeface="Malgun Gothic"/>
+              </a:defRPr>
+            </a:pPr>
+            <a:r>
+              <a:rPr sz="1650" b="0">
+                <a:solidFill>
+                  <a:srgbClr val="4D5A68"/>
+                </a:solidFill>
+                <a:latin typeface="Malgun Gothic"/>
+                <a:ea typeface="Malgun Gothic"/>
+                <a:cs typeface="Malgun Gothic"/>
+              </a:rPr>
+              <a:t>함께 다시 확인할 동작은?</a:t>
+            </a:r>
+          </a:p>
+        </p:txBody>
+      </p:sp>
+      <p:sp>
+        <p:nvSpPr>
+          <p:cNvPr id="19" name="같은 문제가 반복될 때, 어느 Layer를 먼저 살펴볼까?">
+            <a:extLst xmlns:a="http://schemas.openxmlformats.org/drawingml/2006/main">
+              <a:ext uri="{FF2B5EF4-FFF2-40B4-BE49-F238E27FC236}">
+                <a16:creationId xmlns:a16="http://schemas.microsoft.com/office/drawing/2014/main" id="{29ADD395-DA0D-46BC-9D1C-F5AA89DA0094}"/>
+              </a:ext>
+            </a:extLst>
+          </p:cNvPr>
+          <p:cNvSpPr>
+            <a:spLocks xmlns:a="http://schemas.openxmlformats.org/drawingml/2006/main" noGrp="1"/>
+          </p:cNvSpPr>
+          <p:nvPr/>
+        </p:nvSpPr>
+        <p:spPr>
+          <a:xfrm xmlns:a="http://schemas.openxmlformats.org/drawingml/2006/main">
+            <a:off x="609600" y="5381625"/>
             <a:ext cx="10972800" cy="381000"/>
           </a:xfrm>
           <a:prstGeom xmlns:a="http://schemas.openxmlformats.org/drawingml/2006/main" prst="rect">
@@ -32665,7 +33148,7 @@
           </a:bodyPr>
           <a:lstStyle xmlns:a="http://schemas.openxmlformats.org/drawingml/2006/main">
             <a:defPPr algn="l">
-              <a:defRPr sz="2400" b="1">
+              <a:defRPr sz="2025" b="1">
                 <a:solidFill>
                   <a:srgbClr val="17212B"/>
                 </a:solidFill>
@@ -32675,7 +33158,7 @@
               </a:defRPr>
             </a:defPPr>
             <a:lvl1pPr algn="l">
-              <a:defRPr sz="2400" b="1">
+              <a:defRPr sz="2025" b="1">
                 <a:solidFill>
                   <a:srgbClr val="17212B"/>
                 </a:solidFill>
@@ -32685,7 +33168,7 @@
               </a:defRPr>
             </a:lvl1pPr>
             <a:lvl2pPr algn="l">
-              <a:defRPr sz="2400" b="1">
+              <a:defRPr sz="2025" b="1">
                 <a:solidFill>
                   <a:srgbClr val="17212B"/>
                 </a:solidFill>
@@ -32695,7 +33178,7 @@
               </a:defRPr>
             </a:lvl2pPr>
             <a:lvl3pPr algn="l">
-              <a:defRPr sz="2400" b="1">
+              <a:defRPr sz="2025" b="1">
                 <a:solidFill>
                   <a:srgbClr val="17212B"/>
                 </a:solidFill>
@@ -32705,7 +33188,7 @@
               </a:defRPr>
             </a:lvl3pPr>
             <a:lvl4pPr algn="l">
-              <a:defRPr sz="2400" b="1">
+              <a:defRPr sz="2025" b="1">
                 <a:solidFill>
                   <a:srgbClr val="17212B"/>
                 </a:solidFill>
@@ -32715,7 +33198,7 @@
               </a:defRPr>
             </a:lvl4pPr>
             <a:lvl5pPr algn="l">
-              <a:defRPr sz="2400" b="1">
+              <a:defRPr sz="2025" b="1">
                 <a:solidFill>
                   <a:srgbClr val="17212B"/>
                 </a:solidFill>
@@ -32725,7 +33208,7 @@
               </a:defRPr>
             </a:lvl5pPr>
             <a:lvl6pPr algn="l">
-              <a:defRPr sz="2400" b="1">
+              <a:defRPr sz="2025" b="1">
                 <a:solidFill>
                   <a:srgbClr val="17212B"/>
                 </a:solidFill>
@@ -32735,7 +33218,7 @@
               </a:defRPr>
             </a:lvl6pPr>
             <a:lvl7pPr algn="l">
-              <a:defRPr sz="2400" b="1">
+              <a:defRPr sz="2025" b="1">
                 <a:solidFill>
                   <a:srgbClr val="17212B"/>
                 </a:solidFill>
@@ -32745,7 +33228,7 @@
               </a:defRPr>
             </a:lvl7pPr>
             <a:lvl8pPr algn="l">
-              <a:defRPr sz="2400" b="1">
+              <a:defRPr sz="2025" b="1">
                 <a:solidFill>
                   <a:srgbClr val="17212B"/>
                 </a:solidFill>
@@ -32755,7 +33238,7 @@
               </a:defRPr>
             </a:lvl8pPr>
             <a:lvl9pPr algn="l">
-              <a:defRPr sz="2400" b="1">
+              <a:defRPr sz="2025" b="1">
                 <a:solidFill>
                   <a:srgbClr val="17212B"/>
                 </a:solidFill>
@@ -32767,7 +33250,7 @@
           </a:lstStyle>
           <a:p xmlns:a="http://schemas.openxmlformats.org/drawingml/2006/main">
             <a:pPr algn="l">
-              <a:defRPr sz="2400" b="1">
+              <a:defRPr sz="2025" b="1">
                 <a:solidFill>
                   <a:srgbClr val="17212B"/>
                 </a:solidFill>
@@ -32777,7 +33260,7 @@
               </a:defRPr>
             </a:pPr>
             <a:r>
-              <a:rPr sz="2400" b="1">
+              <a:rPr sz="2025" b="1">
                 <a:solidFill>
                   <a:srgbClr val="17212B"/>
                 </a:solidFill>
@@ -32793,7 +33276,7 @@
     </p:spTree>
     <p:extLst>
       <p:ext uri="{BB962C8B-B14F-4D97-AF65-F5344CB8AC3E}">
-        <p14:creationId xmlns:p14="http://schemas.microsoft.com/office/powerpoint/2010/main" val="24756570"/>
+        <p14:creationId xmlns:p14="http://schemas.microsoft.com/office/powerpoint/2010/main" val="49078485"/>
       </p:ext>
     </p:extLst>
   </p:cSld>
@@ -32824,7 +33307,7 @@
           <p:cNvPr id="16" name="ACT 4 · CONCEPTUAL / 가상 사례">
             <a:extLst xmlns:a="http://schemas.openxmlformats.org/drawingml/2006/main">
               <a:ext uri="{FF2B5EF4-FFF2-40B4-BE49-F238E27FC236}">
-                <a16:creationId xmlns:a16="http://schemas.microsoft.com/office/drawing/2014/main" id="{B188D1BA-F4B3-4BA2-A0D0-0D8BFF616FCD}"/>
+                <a16:creationId xmlns:a16="http://schemas.microsoft.com/office/drawing/2014/main" id="{4D208F80-E75D-4445-B265-46D35352548D}"/>
               </a:ext>
             </a:extLst>
           </p:cNvPr>
@@ -32982,7 +33465,7 @@
           <p:cNvPr id="2" name="S56">
             <a:extLst xmlns:a="http://schemas.openxmlformats.org/drawingml/2006/main">
               <a:ext uri="{FF2B5EF4-FFF2-40B4-BE49-F238E27FC236}">
-                <a16:creationId xmlns:a16="http://schemas.microsoft.com/office/drawing/2014/main" id="{8724C301-270C-4DC5-B4F4-5BEFEC58B3DC}"/>
+                <a16:creationId xmlns:a16="http://schemas.microsoft.com/office/drawing/2014/main" id="{2E30B05C-1D26-45DA-8897-CCE5B7104C20}"/>
               </a:ext>
             </a:extLst>
           </p:cNvPr>
@@ -33140,7 +33623,7 @@
           <p:cNvPr id="3" name="개념 사례: Project와 Workflow는 현재 맞다">
             <a:extLst xmlns:a="http://schemas.openxmlformats.org/drawingml/2006/main">
               <a:ext uri="{FF2B5EF4-FFF2-40B4-BE49-F238E27FC236}">
-                <a16:creationId xmlns:a16="http://schemas.microsoft.com/office/drawing/2014/main" id="{3CD109B8-7C64-4A8D-B594-F3ACD3662758}"/>
+                <a16:creationId xmlns:a16="http://schemas.microsoft.com/office/drawing/2014/main" id="{78894743-7705-4F70-9877-E9A5AA408006}"/>
               </a:ext>
             </a:extLst>
           </p:cNvPr>
@@ -33298,7 +33781,7 @@
           <p:cNvPr id="4" name="">
             <a:extLst xmlns:a="http://schemas.openxmlformats.org/drawingml/2006/main">
               <a:ext uri="{FF2B5EF4-FFF2-40B4-BE49-F238E27FC236}">
-                <a16:creationId xmlns:a16="http://schemas.microsoft.com/office/drawing/2014/main" id="{56916FFF-CCA7-4B64-8387-7A5E9351235C}"/>
+                <a16:creationId xmlns:a16="http://schemas.microsoft.com/office/drawing/2014/main" id="{0C307C46-CB51-4BA9-A117-8F18C839AD22}"/>
               </a:ext>
             </a:extLst>
           </p:cNvPr>
@@ -33329,7 +33812,7 @@
           <p:cNvPr id="5" name="DEMO-04A · 프로젝트 변화 전의 가상 설정">
             <a:extLst xmlns:a="http://schemas.openxmlformats.org/drawingml/2006/main">
               <a:ext uri="{FF2B5EF4-FFF2-40B4-BE49-F238E27FC236}">
-                <a16:creationId xmlns:a16="http://schemas.microsoft.com/office/drawing/2014/main" id="{4C4B0A01-EBA7-4DD8-B28B-A4A83B6AE099}"/>
+                <a16:creationId xmlns:a16="http://schemas.microsoft.com/office/drawing/2014/main" id="{267DFF59-F795-471C-83B6-10B6D23224DD}"/>
               </a:ext>
             </a:extLst>
           </p:cNvPr>
@@ -33487,7 +33970,7 @@
           <p:cNvPr id="6" name="실제 Repository 변경 이력, Agent 실행 또는 테스트 결과가 아니다.">
             <a:extLst xmlns:a="http://schemas.openxmlformats.org/drawingml/2006/main">
               <a:ext uri="{FF2B5EF4-FFF2-40B4-BE49-F238E27FC236}">
-                <a16:creationId xmlns:a16="http://schemas.microsoft.com/office/drawing/2014/main" id="{8D814486-E49A-4EBA-BBD8-018AC787B27D}"/>
+                <a16:creationId xmlns:a16="http://schemas.microsoft.com/office/drawing/2014/main" id="{8EFEF9A5-2022-4ED6-A91F-B0B20A904BBB}"/>
               </a:ext>
             </a:extLst>
           </p:cNvPr>
@@ -33645,7 +34128,7 @@
           <p:cNvPr id="7" name="처음에는 두 기준이 같았다">
             <a:extLst xmlns:a="http://schemas.openxmlformats.org/drawingml/2006/main">
               <a:ext uri="{FF2B5EF4-FFF2-40B4-BE49-F238E27FC236}">
-                <a16:creationId xmlns:a16="http://schemas.microsoft.com/office/drawing/2014/main" id="{48841EB0-DF09-4D96-BCB0-51949396FB3F}"/>
+                <a16:creationId xmlns:a16="http://schemas.microsoft.com/office/drawing/2014/main" id="{2DD512A1-08D5-46C8-9646-561C60361079}"/>
               </a:ext>
             </a:extLst>
           </p:cNvPr>
@@ -33803,7 +34286,7 @@
           <p:cNvPr id="8" name="프로젝트의 검증 기준">
             <a:extLst xmlns:a="http://schemas.openxmlformats.org/drawingml/2006/main">
               <a:ext uri="{FF2B5EF4-FFF2-40B4-BE49-F238E27FC236}">
-                <a16:creationId xmlns:a16="http://schemas.microsoft.com/office/drawing/2014/main" id="{81E9BF15-3977-4198-87EB-62DDE1139B3D}"/>
+                <a16:creationId xmlns:a16="http://schemas.microsoft.com/office/drawing/2014/main" id="{C95CA481-587C-45E5-A6EB-9AED0F1A6360}"/>
               </a:ext>
             </a:extLst>
           </p:cNvPr>
@@ -33961,7 +34444,7 @@
           <p:cNvPr id="9" name="재사용 Workflow의 지시">
             <a:extLst xmlns:a="http://schemas.openxmlformats.org/drawingml/2006/main">
               <a:ext uri="{FF2B5EF4-FFF2-40B4-BE49-F238E27FC236}">
-                <a16:creationId xmlns:a16="http://schemas.microsoft.com/office/drawing/2014/main" id="{42054DBE-62FD-404B-9424-70F397C4D7C2}"/>
+                <a16:creationId xmlns:a16="http://schemas.microsoft.com/office/drawing/2014/main" id="{480569BD-76F3-4087-A34C-A5BD619FE5C1}"/>
               </a:ext>
             </a:extLst>
           </p:cNvPr>
@@ -34119,7 +34602,7 @@
           <p:cNvPr id="10" name="">
             <a:extLst xmlns:a="http://schemas.openxmlformats.org/drawingml/2006/main">
               <a:ext uri="{FF2B5EF4-FFF2-40B4-BE49-F238E27FC236}">
-                <a16:creationId xmlns:a16="http://schemas.microsoft.com/office/drawing/2014/main" id="{43AC2561-45F8-414D-96DE-D1E4B8393ED3}"/>
+                <a16:creationId xmlns:a16="http://schemas.microsoft.com/office/drawing/2014/main" id="{C2590494-F391-4FA0-9922-574026D0FBD1}"/>
               </a:ext>
             </a:extLst>
           </p:cNvPr>
@@ -34150,7 +34633,7 @@
           <p:cNvPr id="11" name="">
             <a:extLst xmlns:a="http://schemas.openxmlformats.org/drawingml/2006/main">
               <a:ext uri="{FF2B5EF4-FFF2-40B4-BE49-F238E27FC236}">
-                <a16:creationId xmlns:a16="http://schemas.microsoft.com/office/drawing/2014/main" id="{A28807CD-385F-4542-B4E0-26E103E33B13}"/>
+                <a16:creationId xmlns:a16="http://schemas.microsoft.com/office/drawing/2014/main" id="{D78A3AAC-51B8-46D8-8934-A8FF9A677E0A}"/>
               </a:ext>
             </a:extLst>
           </p:cNvPr>
@@ -34181,7 +34664,7 @@
           <p:cNvPr id="12" name="단위 테스트">
             <a:extLst xmlns:a="http://schemas.openxmlformats.org/drawingml/2006/main">
               <a:ext uri="{FF2B5EF4-FFF2-40B4-BE49-F238E27FC236}">
-                <a16:creationId xmlns:a16="http://schemas.microsoft.com/office/drawing/2014/main" id="{05ACDB03-D0FC-4BF2-A6D6-959F2BC85316}"/>
+                <a16:creationId xmlns:a16="http://schemas.microsoft.com/office/drawing/2014/main" id="{27E651F7-91D7-477C-BC93-1B998FAAC440}"/>
               </a:ext>
             </a:extLst>
           </p:cNvPr>
@@ -34339,7 +34822,7 @@
           <p:cNvPr id="13" name="단위 테스트">
             <a:extLst xmlns:a="http://schemas.openxmlformats.org/drawingml/2006/main">
               <a:ext uri="{FF2B5EF4-FFF2-40B4-BE49-F238E27FC236}">
-                <a16:creationId xmlns:a16="http://schemas.microsoft.com/office/drawing/2014/main" id="{625E3DE7-239B-44D5-B9C1-0E4CA8ECBD0C}"/>
+                <a16:creationId xmlns:a16="http://schemas.microsoft.com/office/drawing/2014/main" id="{DE4BEFDC-F3E7-45D2-9029-652BA3D4BE91}"/>
               </a:ext>
             </a:extLst>
           </p:cNvPr>
@@ -34497,7 +34980,7 @@
           <p:cNvPr id="14" name="=">
             <a:extLst xmlns:a="http://schemas.openxmlformats.org/drawingml/2006/main">
               <a:ext uri="{FF2B5EF4-FFF2-40B4-BE49-F238E27FC236}">
-                <a16:creationId xmlns:a16="http://schemas.microsoft.com/office/drawing/2014/main" id="{FF7F4EE4-4862-461B-BBDA-356188C1B0E9}"/>
+                <a16:creationId xmlns:a16="http://schemas.microsoft.com/office/drawing/2014/main" id="{80EF4470-0080-4A37-9CE2-046ACD6686B0}"/>
               </a:ext>
             </a:extLst>
           </p:cNvPr>
@@ -34655,7 +35138,7 @@
           <p:cNvPr id="15" name="현재 프로젝트에 맞춰 만들어 둔 절차">
             <a:extLst xmlns:a="http://schemas.openxmlformats.org/drawingml/2006/main">
               <a:ext uri="{FF2B5EF4-FFF2-40B4-BE49-F238E27FC236}">
-                <a16:creationId xmlns:a16="http://schemas.microsoft.com/office/drawing/2014/main" id="{8E79C340-2B5B-4B92-A910-090E5E64E373}"/>
+                <a16:creationId xmlns:a16="http://schemas.microsoft.com/office/drawing/2014/main" id="{A9564782-7264-4C46-8E0D-FF3816A24328}"/>
               </a:ext>
             </a:extLst>
           </p:cNvPr>
@@ -34811,7 +35294,7 @@
     </p:spTree>
     <p:extLst>
       <p:ext uri="{BB962C8B-B14F-4D97-AF65-F5344CB8AC3E}">
-        <p14:creationId xmlns:p14="http://schemas.microsoft.com/office/powerpoint/2010/main" val="1661995354"/>
+        <p14:creationId xmlns:p14="http://schemas.microsoft.com/office/powerpoint/2010/main" val="605111379"/>
       </p:ext>
     </p:extLst>
   </p:cSld>
@@ -34842,7 +35325,7 @@
           <p:cNvPr id="19" name="ACT 4  ·  CONCEPTUAL / 가상 사례">
             <a:extLst xmlns:a="http://schemas.openxmlformats.org/drawingml/2006/main">
               <a:ext uri="{FF2B5EF4-FFF2-40B4-BE49-F238E27FC236}">
-                <a16:creationId xmlns:a16="http://schemas.microsoft.com/office/drawing/2014/main" id="{CF3CF175-D445-41E2-97CB-06EFD1CB0B26}"/>
+                <a16:creationId xmlns:a16="http://schemas.microsoft.com/office/drawing/2014/main" id="{32FEB8BE-79D6-4DED-A1E3-2B8B15145982}"/>
               </a:ext>
             </a:extLst>
           </p:cNvPr>
@@ -35000,7 +35483,7 @@
           <p:cNvPr id="2" name="S57">
             <a:extLst xmlns:a="http://schemas.openxmlformats.org/drawingml/2006/main">
               <a:ext uri="{FF2B5EF4-FFF2-40B4-BE49-F238E27FC236}">
-                <a16:creationId xmlns:a16="http://schemas.microsoft.com/office/drawing/2014/main" id="{7ACA12F2-6623-444F-9B9A-DFA887F2AD2E}"/>
+                <a16:creationId xmlns:a16="http://schemas.microsoft.com/office/drawing/2014/main" id="{47BCC5E5-C346-417C-88FE-C770BA024F55}"/>
               </a:ext>
             </a:extLst>
           </p:cNvPr>
@@ -35158,7 +35641,7 @@
           <p:cNvPr id="3" name="Project는 바뀌고 Workflow는 남았다">
             <a:extLst xmlns:a="http://schemas.openxmlformats.org/drawingml/2006/main">
               <a:ext uri="{FF2B5EF4-FFF2-40B4-BE49-F238E27FC236}">
-                <a16:creationId xmlns:a16="http://schemas.microsoft.com/office/drawing/2014/main" id="{8C18C11E-6981-4586-BFEF-843FC7AACB37}"/>
+                <a16:creationId xmlns:a16="http://schemas.microsoft.com/office/drawing/2014/main" id="{399EE5B6-4D1F-4CC8-8886-87DD5492830E}"/>
               </a:ext>
             </a:extLst>
           </p:cNvPr>
@@ -35316,7 +35799,7 @@
           <p:cNvPr id="4" name="">
             <a:extLst xmlns:a="http://schemas.openxmlformats.org/drawingml/2006/main">
               <a:ext uri="{FF2B5EF4-FFF2-40B4-BE49-F238E27FC236}">
-                <a16:creationId xmlns:a16="http://schemas.microsoft.com/office/drawing/2014/main" id="{5297B826-7DCF-4CA9-A174-70BCBCCC331F}"/>
+                <a16:creationId xmlns:a16="http://schemas.microsoft.com/office/drawing/2014/main" id="{828BA884-37DB-4429-933D-558F6232AC1B}"/>
               </a:ext>
             </a:extLst>
           </p:cNvPr>
@@ -35347,7 +35830,7 @@
           <p:cNvPr id="5" name="DEMO-04A  |  가상 설정 · 실제 Repository 변경 이력이 아님">
             <a:extLst xmlns:a="http://schemas.openxmlformats.org/drawingml/2006/main">
               <a:ext uri="{FF2B5EF4-FFF2-40B4-BE49-F238E27FC236}">
-                <a16:creationId xmlns:a16="http://schemas.microsoft.com/office/drawing/2014/main" id="{BAC951A8-91BB-49F6-AA98-E77BB16F27DC}"/>
+                <a16:creationId xmlns:a16="http://schemas.microsoft.com/office/drawing/2014/main" id="{40954EF3-C7E6-4429-9AF9-A25A79915F5F}"/>
               </a:ext>
             </a:extLst>
           </p:cNvPr>
@@ -35505,7 +35988,7 @@
           <p:cNvPr id="6" name="두 지침의 범위를 비교하는 장 · Agent 실행, 테스트 누락 또는 PASS / FAIL 결과를 뜻하지 않">
             <a:extLst xmlns:a="http://schemas.openxmlformats.org/drawingml/2006/main">
               <a:ext uri="{FF2B5EF4-FFF2-40B4-BE49-F238E27FC236}">
-                <a16:creationId xmlns:a16="http://schemas.microsoft.com/office/drawing/2014/main" id="{385C979F-888A-492B-8673-4CCC6655819A}"/>
+                <a16:creationId xmlns:a16="http://schemas.microsoft.com/office/drawing/2014/main" id="{E354E301-634D-4AAA-AAE2-1E33BEEC6322}"/>
               </a:ext>
             </a:extLst>
           </p:cNvPr>
@@ -35663,7 +36146,7 @@
           <p:cNvPr id="7" name="가정: 모듈 연결 동작도 검증해야 하는 프로젝트가 됐다">
             <a:extLst xmlns:a="http://schemas.openxmlformats.org/drawingml/2006/main">
               <a:ext uri="{FF2B5EF4-FFF2-40B4-BE49-F238E27FC236}">
-                <a16:creationId xmlns:a16="http://schemas.microsoft.com/office/drawing/2014/main" id="{3EFE750E-C3D3-4085-B107-7C2B8853C8F7}"/>
+                <a16:creationId xmlns:a16="http://schemas.microsoft.com/office/drawing/2014/main" id="{A7A710B1-723B-46F5-B8F8-ED0AF0207C97}"/>
               </a:ext>
             </a:extLst>
           </p:cNvPr>
@@ -35821,7 +36304,7 @@
           <p:cNvPr id="8" name="현재 프로젝트의 기준">
             <a:extLst xmlns:a="http://schemas.openxmlformats.org/drawingml/2006/main">
               <a:ext uri="{FF2B5EF4-FFF2-40B4-BE49-F238E27FC236}">
-                <a16:creationId xmlns:a16="http://schemas.microsoft.com/office/drawing/2014/main" id="{858C7C21-4A6D-4427-928D-06CA92BC3929}"/>
+                <a16:creationId xmlns:a16="http://schemas.microsoft.com/office/drawing/2014/main" id="{A70BFF26-59D0-45E2-BEAA-242E0BCBA227}"/>
               </a:ext>
             </a:extLst>
           </p:cNvPr>
@@ -35979,7 +36462,7 @@
           <p:cNvPr id="9" name="재사용 Workflow에 남은 지시">
             <a:extLst xmlns:a="http://schemas.openxmlformats.org/drawingml/2006/main">
               <a:ext uri="{FF2B5EF4-FFF2-40B4-BE49-F238E27FC236}">
-                <a16:creationId xmlns:a16="http://schemas.microsoft.com/office/drawing/2014/main" id="{8ED2FA5D-DF14-43C1-9889-BDE1D2393B08}"/>
+                <a16:creationId xmlns:a16="http://schemas.microsoft.com/office/drawing/2014/main" id="{4A28E3B8-FE0A-46B4-A9E5-25D3300F51BC}"/>
               </a:ext>
             </a:extLst>
           </p:cNvPr>
@@ -36137,7 +36620,7 @@
           <p:cNvPr id="10" name="">
             <a:extLst xmlns:a="http://schemas.openxmlformats.org/drawingml/2006/main">
               <a:ext uri="{FF2B5EF4-FFF2-40B4-BE49-F238E27FC236}">
-                <a16:creationId xmlns:a16="http://schemas.microsoft.com/office/drawing/2014/main" id="{1C17ECF3-3D39-4F39-9227-D5D77AD57461}"/>
+                <a16:creationId xmlns:a16="http://schemas.microsoft.com/office/drawing/2014/main" id="{45908E33-4367-43D9-B743-2EE1673F0FA7}"/>
               </a:ext>
             </a:extLst>
           </p:cNvPr>
@@ -36168,7 +36651,7 @@
           <p:cNvPr id="11" name="">
             <a:extLst xmlns:a="http://schemas.openxmlformats.org/drawingml/2006/main">
               <a:ext uri="{FF2B5EF4-FFF2-40B4-BE49-F238E27FC236}">
-                <a16:creationId xmlns:a16="http://schemas.microsoft.com/office/drawing/2014/main" id="{32CE79CB-3221-45F7-8567-033199F52C61}"/>
+                <a16:creationId xmlns:a16="http://schemas.microsoft.com/office/drawing/2014/main" id="{D4839550-9AFA-4540-9F11-FAB780D9EDF3}"/>
               </a:ext>
             </a:extLst>
           </p:cNvPr>
@@ -36199,7 +36682,7 @@
           <p:cNvPr id="12" name="단위 테스트">
             <a:extLst xmlns:a="http://schemas.openxmlformats.org/drawingml/2006/main">
               <a:ext uri="{FF2B5EF4-FFF2-40B4-BE49-F238E27FC236}">
-                <a16:creationId xmlns:a16="http://schemas.microsoft.com/office/drawing/2014/main" id="{504A168B-8FC0-4B0D-87F9-4B4AD0AFFB59}"/>
+                <a16:creationId xmlns:a16="http://schemas.microsoft.com/office/drawing/2014/main" id="{C58DAD01-FAA1-46C7-8FFE-8730227F94F1}"/>
               </a:ext>
             </a:extLst>
           </p:cNvPr>
@@ -36357,7 +36840,7 @@
           <p:cNvPr id="13" name="단위 테스트">
             <a:extLst xmlns:a="http://schemas.openxmlformats.org/drawingml/2006/main">
               <a:ext uri="{FF2B5EF4-FFF2-40B4-BE49-F238E27FC236}">
-                <a16:creationId xmlns:a16="http://schemas.microsoft.com/office/drawing/2014/main" id="{360BFC52-D755-4A35-A0FA-A61E63B90BD9}"/>
+                <a16:creationId xmlns:a16="http://schemas.microsoft.com/office/drawing/2014/main" id="{F036F046-D49E-4E36-8780-8A0CE31F163A}"/>
               </a:ext>
             </a:extLst>
           </p:cNvPr>
@@ -36515,7 +36998,7 @@
           <p:cNvPr id="14" name="">
             <a:extLst xmlns:a="http://schemas.openxmlformats.org/drawingml/2006/main">
               <a:ext uri="{FF2B5EF4-FFF2-40B4-BE49-F238E27FC236}">
-                <a16:creationId xmlns:a16="http://schemas.microsoft.com/office/drawing/2014/main" id="{67C70017-F4AC-439C-995E-3E91C2F633B3}"/>
+                <a16:creationId xmlns:a16="http://schemas.microsoft.com/office/drawing/2014/main" id="{62F3533A-57E9-4410-A1E3-0F30FDBFE5A2}"/>
               </a:ext>
             </a:extLst>
           </p:cNvPr>
@@ -36546,7 +37029,7 @@
           <p:cNvPr id="15" name="+ 통합 테스트">
             <a:extLst xmlns:a="http://schemas.openxmlformats.org/drawingml/2006/main">
               <a:ext uri="{FF2B5EF4-FFF2-40B4-BE49-F238E27FC236}">
-                <a16:creationId xmlns:a16="http://schemas.microsoft.com/office/drawing/2014/main" id="{3BC0FCC8-B698-49A7-9564-807692F50EAB}"/>
+                <a16:creationId xmlns:a16="http://schemas.microsoft.com/office/drawing/2014/main" id="{DEA1E641-5F53-4DA6-B102-117B43A7AC82}"/>
               </a:ext>
             </a:extLst>
           </p:cNvPr>
@@ -36704,7 +37187,7 @@
           <p:cNvPr id="16" name="">
             <a:extLst xmlns:a="http://schemas.openxmlformats.org/drawingml/2006/main">
               <a:ext uri="{FF2B5EF4-FFF2-40B4-BE49-F238E27FC236}">
-                <a16:creationId xmlns:a16="http://schemas.microsoft.com/office/drawing/2014/main" id="{0BD978A6-2D2F-4C5A-978C-60619EF3D62E}"/>
+                <a16:creationId xmlns:a16="http://schemas.microsoft.com/office/drawing/2014/main" id="{34EAF42C-0A6D-466B-9F67-8124E6EC2E5C}"/>
               </a:ext>
             </a:extLst>
           </p:cNvPr>
@@ -36735,7 +37218,7 @@
           <p:cNvPr id="17" name="단위 테스트만 지시">
             <a:extLst xmlns:a="http://schemas.openxmlformats.org/drawingml/2006/main">
               <a:ext uri="{FF2B5EF4-FFF2-40B4-BE49-F238E27FC236}">
-                <a16:creationId xmlns:a16="http://schemas.microsoft.com/office/drawing/2014/main" id="{BA2AF7AF-641D-4A6D-B2A3-F8A747444130}"/>
+                <a16:creationId xmlns:a16="http://schemas.microsoft.com/office/drawing/2014/main" id="{D10C59EC-F9AF-412F-AC45-400041930C3B}"/>
               </a:ext>
             </a:extLst>
           </p:cNvPr>
@@ -36893,7 +37376,7 @@
           <p:cNvPr id="18" name="프로젝트의 기준이 바뀌었을 때, 재사용 지침도 함께 바뀌었을까?">
             <a:extLst xmlns:a="http://schemas.openxmlformats.org/drawingml/2006/main">
               <a:ext uri="{FF2B5EF4-FFF2-40B4-BE49-F238E27FC236}">
-                <a16:creationId xmlns:a16="http://schemas.microsoft.com/office/drawing/2014/main" id="{31D9CA32-CE88-4ABD-94C5-583DE902845A}"/>
+                <a16:creationId xmlns:a16="http://schemas.microsoft.com/office/drawing/2014/main" id="{FFD08557-AE56-4B5A-826F-F4B5423062D0}"/>
               </a:ext>
             </a:extLst>
           </p:cNvPr>
@@ -37049,7 +37532,7 @@
     </p:spTree>
     <p:extLst>
       <p:ext uri="{BB962C8B-B14F-4D97-AF65-F5344CB8AC3E}">
-        <p14:creationId xmlns:p14="http://schemas.microsoft.com/office/powerpoint/2010/main" val="1368949399"/>
+        <p14:creationId xmlns:p14="http://schemas.microsoft.com/office/powerpoint/2010/main" val="587500346"/>
       </p:ext>
     </p:extLst>
   </p:cSld>
@@ -37080,7 +37563,7 @@
           <p:cNvPr id="15" name="ACT 4 · CONCEPTUAL / 가상 사례">
             <a:extLst xmlns:a="http://schemas.openxmlformats.org/drawingml/2006/main">
               <a:ext uri="{FF2B5EF4-FFF2-40B4-BE49-F238E27FC236}">
-                <a16:creationId xmlns:a16="http://schemas.microsoft.com/office/drawing/2014/main" id="{98B8A5B5-952E-4104-917F-6FF42DF66AC5}"/>
+                <a16:creationId xmlns:a16="http://schemas.microsoft.com/office/drawing/2014/main" id="{A95229B5-A4B4-4935-9B56-505B506F136D}"/>
               </a:ext>
             </a:extLst>
           </p:cNvPr>
@@ -37238,7 +37721,7 @@
           <p:cNvPr id="2" name="S58">
             <a:extLst xmlns:a="http://schemas.openxmlformats.org/drawingml/2006/main">
               <a:ext uri="{FF2B5EF4-FFF2-40B4-BE49-F238E27FC236}">
-                <a16:creationId xmlns:a16="http://schemas.microsoft.com/office/drawing/2014/main" id="{582BEC55-3778-4C65-93E5-1FB11A58CD6A}"/>
+                <a16:creationId xmlns:a16="http://schemas.microsoft.com/office/drawing/2014/main" id="{7B597993-10B9-4738-86F6-F5C91050F1E6}"/>
               </a:ext>
             </a:extLst>
           </p:cNvPr>
@@ -37396,7 +37879,7 @@
           <p:cNvPr id="3" name="Task 해결과 System 문제는 다르다">
             <a:extLst xmlns:a="http://schemas.openxmlformats.org/drawingml/2006/main">
               <a:ext uri="{FF2B5EF4-FFF2-40B4-BE49-F238E27FC236}">
-                <a16:creationId xmlns:a16="http://schemas.microsoft.com/office/drawing/2014/main" id="{D491C9A2-195E-4E1F-9F19-0A6932361143}"/>
+                <a16:creationId xmlns:a16="http://schemas.microsoft.com/office/drawing/2014/main" id="{7DDB6603-F5A6-49BF-BD25-CC71BD41F1FE}"/>
               </a:ext>
             </a:extLst>
           </p:cNvPr>
@@ -37554,7 +38037,7 @@
           <p:cNvPr id="4" name="">
             <a:extLst xmlns:a="http://schemas.openxmlformats.org/drawingml/2006/main">
               <a:ext uri="{FF2B5EF4-FFF2-40B4-BE49-F238E27FC236}">
-                <a16:creationId xmlns:a16="http://schemas.microsoft.com/office/drawing/2014/main" id="{BD242E7F-4DC1-4CA8-9270-C355CB85A044}"/>
+                <a16:creationId xmlns:a16="http://schemas.microsoft.com/office/drawing/2014/main" id="{E990D72F-C3DF-4837-A767-22E5579566B8}"/>
               </a:ext>
             </a:extLst>
           </p:cNvPr>
@@ -37585,7 +38068,7 @@
           <p:cNvPr id="5" name="DEMO-04A · 이번 요청과 재사용 지침의 범위 비교">
             <a:extLst xmlns:a="http://schemas.openxmlformats.org/drawingml/2006/main">
               <a:ext uri="{FF2B5EF4-FFF2-40B4-BE49-F238E27FC236}">
-                <a16:creationId xmlns:a16="http://schemas.microsoft.com/office/drawing/2014/main" id="{D7C6BE92-66F1-42D9-B5F4-34D7BE108E04}"/>
+                <a16:creationId xmlns:a16="http://schemas.microsoft.com/office/drawing/2014/main" id="{D095A335-776B-4F2C-B8B8-272FD01BAF7B}"/>
               </a:ext>
             </a:extLst>
           </p:cNvPr>
@@ -37743,7 +38226,7 @@
           <p:cNvPr id="6" name="아래는 가능한 대응이다. 실제 실행·복구 성공·검증 누락을 관찰한 결과가 아니다.">
             <a:extLst xmlns:a="http://schemas.openxmlformats.org/drawingml/2006/main">
               <a:ext uri="{FF2B5EF4-FFF2-40B4-BE49-F238E27FC236}">
-                <a16:creationId xmlns:a16="http://schemas.microsoft.com/office/drawing/2014/main" id="{5FC27DDD-3B29-4322-9545-D0F6431A929E}"/>
+                <a16:creationId xmlns:a16="http://schemas.microsoft.com/office/drawing/2014/main" id="{970C4B44-0963-462C-9CFB-689E389A5F5C}"/>
               </a:ext>
             </a:extLst>
           </p:cNvPr>
@@ -37901,7 +38384,7 @@
           <p:cNvPr id="7" name="이번 요청에 “통합 테스트도 확인해 줘”를 더한다면?">
             <a:extLst xmlns:a="http://schemas.openxmlformats.org/drawingml/2006/main">
               <a:ext uri="{FF2B5EF4-FFF2-40B4-BE49-F238E27FC236}">
-                <a16:creationId xmlns:a16="http://schemas.microsoft.com/office/drawing/2014/main" id="{9AE8BBE7-4667-48A6-9423-0E9DE296B374}"/>
+                <a16:creationId xmlns:a16="http://schemas.microsoft.com/office/drawing/2014/main" id="{703870D6-BE1A-42A5-862E-B2B7894B302F}"/>
               </a:ext>
             </a:extLst>
           </p:cNvPr>
@@ -38059,7 +38542,7 @@
           <p:cNvPr id="8" name="이번 Task">
             <a:extLst xmlns:a="http://schemas.openxmlformats.org/drawingml/2006/main">
               <a:ext uri="{FF2B5EF4-FFF2-40B4-BE49-F238E27FC236}">
-                <a16:creationId xmlns:a16="http://schemas.microsoft.com/office/drawing/2014/main" id="{46B693C4-C07A-4C6C-9640-D6DA6D46FAB6}"/>
+                <a16:creationId xmlns:a16="http://schemas.microsoft.com/office/drawing/2014/main" id="{56D2ECB3-1D2A-4F4B-8C4B-89CE1B5672FC}"/>
               </a:ext>
             </a:extLst>
           </p:cNvPr>
@@ -38217,7 +38700,7 @@
           <p:cNvPr id="9" name="다음 Task가 읽을 Workflow">
             <a:extLst xmlns:a="http://schemas.openxmlformats.org/drawingml/2006/main">
               <a:ext uri="{FF2B5EF4-FFF2-40B4-BE49-F238E27FC236}">
-                <a16:creationId xmlns:a16="http://schemas.microsoft.com/office/drawing/2014/main" id="{B7C1A546-8B58-4D69-AAA9-453E6D2C842B}"/>
+                <a16:creationId xmlns:a16="http://schemas.microsoft.com/office/drawing/2014/main" id="{9A1FF277-CA68-4F46-AE47-26A61A8D8F4D}"/>
               </a:ext>
             </a:extLst>
           </p:cNvPr>
@@ -38375,7 +38858,7 @@
           <p:cNvPr id="10" name="">
             <a:extLst xmlns:a="http://schemas.openxmlformats.org/drawingml/2006/main">
               <a:ext uri="{FF2B5EF4-FFF2-40B4-BE49-F238E27FC236}">
-                <a16:creationId xmlns:a16="http://schemas.microsoft.com/office/drawing/2014/main" id="{95C0FB87-32D1-404D-A7CA-258558FE94F7}"/>
+                <a16:creationId xmlns:a16="http://schemas.microsoft.com/office/drawing/2014/main" id="{506BE2AE-92FA-4D67-947E-221DE2D7985C}"/>
               </a:ext>
             </a:extLst>
           </p:cNvPr>
@@ -38406,7 +38889,7 @@
           <p:cNvPr id="11" name="">
             <a:extLst xmlns:a="http://schemas.openxmlformats.org/drawingml/2006/main">
               <a:ext uri="{FF2B5EF4-FFF2-40B4-BE49-F238E27FC236}">
-                <a16:creationId xmlns:a16="http://schemas.microsoft.com/office/drawing/2014/main" id="{27B54C0E-D5B4-4A29-AC5E-15D93579B1F6}"/>
+                <a16:creationId xmlns:a16="http://schemas.microsoft.com/office/drawing/2014/main" id="{793A4FA7-F335-439A-A47B-0CDA2C0C1709}"/>
               </a:ext>
             </a:extLst>
           </p:cNvPr>
@@ -38437,7 +38920,7 @@
           <p:cNvPr id="12" name="단위 + 통합 테스트를&#10;확인하도록 요청 가능">
             <a:extLst xmlns:a="http://schemas.openxmlformats.org/drawingml/2006/main">
               <a:ext uri="{FF2B5EF4-FFF2-40B4-BE49-F238E27FC236}">
-                <a16:creationId xmlns:a16="http://schemas.microsoft.com/office/drawing/2014/main" id="{109645C1-06FA-4208-90A6-E752AE0104EF}"/>
+                <a16:creationId xmlns:a16="http://schemas.microsoft.com/office/drawing/2014/main" id="{2EBAD7D6-39BB-4604-8A04-66EADDA5C5C9}"/>
               </a:ext>
             </a:extLst>
           </p:cNvPr>
@@ -38618,7 +39101,7 @@
           <p:cNvPr id="13" name="여전히&#10;단위 테스트만 지시">
             <a:extLst xmlns:a="http://schemas.openxmlformats.org/drawingml/2006/main">
               <a:ext uri="{FF2B5EF4-FFF2-40B4-BE49-F238E27FC236}">
-                <a16:creationId xmlns:a16="http://schemas.microsoft.com/office/drawing/2014/main" id="{01A1BF65-D3DB-46A0-AC0A-D649EFC88AFB}"/>
+                <a16:creationId xmlns:a16="http://schemas.microsoft.com/office/drawing/2014/main" id="{83895100-BFA4-4B12-B36A-798266859D01}"/>
               </a:ext>
             </a:extLst>
           </p:cNvPr>
@@ -38799,7 +39282,7 @@
           <p:cNvPr id="14" name="이번 답을 보정해도, 재사용 절차는 그대로일 수 있다.">
             <a:extLst xmlns:a="http://schemas.openxmlformats.org/drawingml/2006/main">
               <a:ext uri="{FF2B5EF4-FFF2-40B4-BE49-F238E27FC236}">
-                <a16:creationId xmlns:a16="http://schemas.microsoft.com/office/drawing/2014/main" id="{B0DC5B42-C34A-49E1-B227-8930C88AC49D}"/>
+                <a16:creationId xmlns:a16="http://schemas.microsoft.com/office/drawing/2014/main" id="{8AF0D0BD-25A3-45A2-B261-B9DDF9A631F0}"/>
               </a:ext>
             </a:extLst>
           </p:cNvPr>
@@ -38955,7 +39438,7 @@
     </p:spTree>
     <p:extLst>
       <p:ext uri="{BB962C8B-B14F-4D97-AF65-F5344CB8AC3E}">
-        <p14:creationId xmlns:p14="http://schemas.microsoft.com/office/powerpoint/2010/main" val="660501035"/>
+        <p14:creationId xmlns:p14="http://schemas.microsoft.com/office/powerpoint/2010/main" val="1662563015"/>
       </p:ext>
     </p:extLst>
   </p:cSld>
@@ -38986,7 +39469,7 @@
           <p:cNvPr id="18" name="ACT 4 · CONCEPTUAL / 대응 범위 비교">
             <a:extLst xmlns:a="http://schemas.openxmlformats.org/drawingml/2006/main">
               <a:ext uri="{FF2B5EF4-FFF2-40B4-BE49-F238E27FC236}">
-                <a16:creationId xmlns:a16="http://schemas.microsoft.com/office/drawing/2014/main" id="{0DD70173-9F81-403A-B26E-2D1E139C4A8B}"/>
+                <a16:creationId xmlns:a16="http://schemas.microsoft.com/office/drawing/2014/main" id="{B8EAA1DD-0B51-425D-93E9-5D2F2AA794E5}"/>
               </a:ext>
             </a:extLst>
           </p:cNvPr>
@@ -39144,7 +39627,7 @@
           <p:cNvPr id="2" name="S59">
             <a:extLst xmlns:a="http://schemas.openxmlformats.org/drawingml/2006/main">
               <a:ext uri="{FF2B5EF4-FFF2-40B4-BE49-F238E27FC236}">
-                <a16:creationId xmlns:a16="http://schemas.microsoft.com/office/drawing/2014/main" id="{15135598-636A-4897-9245-2B346FF1D54D}"/>
+                <a16:creationId xmlns:a16="http://schemas.microsoft.com/office/drawing/2014/main" id="{82833E5D-9C8D-4F32-9C4D-89A8E7703F79}"/>
               </a:ext>
             </a:extLst>
           </p:cNvPr>
@@ -39302,7 +39785,7 @@
           <p:cNvPr id="3" name="원인에 맞는 Layer를 고르기">
             <a:extLst xmlns:a="http://schemas.openxmlformats.org/drawingml/2006/main">
               <a:ext uri="{FF2B5EF4-FFF2-40B4-BE49-F238E27FC236}">
-                <a16:creationId xmlns:a16="http://schemas.microsoft.com/office/drawing/2014/main" id="{63E72D41-1E8A-487E-A633-F4E9D3A4B5A3}"/>
+                <a16:creationId xmlns:a16="http://schemas.microsoft.com/office/drawing/2014/main" id="{D298B89A-72FD-4356-9FA2-3B53C85279CD}"/>
               </a:ext>
             </a:extLst>
           </p:cNvPr>
@@ -39460,7 +39943,7 @@
           <p:cNvPr id="4" name="">
             <a:extLst xmlns:a="http://schemas.openxmlformats.org/drawingml/2006/main">
               <a:ext uri="{FF2B5EF4-FFF2-40B4-BE49-F238E27FC236}">
-                <a16:creationId xmlns:a16="http://schemas.microsoft.com/office/drawing/2014/main" id="{CA2A82D0-B67E-4025-8688-93C28E7A9260}"/>
+                <a16:creationId xmlns:a16="http://schemas.microsoft.com/office/drawing/2014/main" id="{5B9D62EE-6F1D-470D-AEE6-B929556D38E5}"/>
               </a:ext>
             </a:extLst>
           </p:cNvPr>
@@ -39491,7 +39974,7 @@
           <p:cNvPr id="5" name="DEMO-04A · DEMO-11 · 가상 사례의 선택지">
             <a:extLst xmlns:a="http://schemas.openxmlformats.org/drawingml/2006/main">
               <a:ext uri="{FF2B5EF4-FFF2-40B4-BE49-F238E27FC236}">
-                <a16:creationId xmlns:a16="http://schemas.microsoft.com/office/drawing/2014/main" id="{771E0A31-07D9-4C57-8029-8356C7939411}"/>
+                <a16:creationId xmlns:a16="http://schemas.microsoft.com/office/drawing/2014/main" id="{0D4E96FA-C050-43BE-B209-9CA33A042BE4}"/>
               </a:ext>
             </a:extLst>
           </p:cNvPr>
@@ -39649,7 +40132,7 @@
           <p:cNvPr id="6" name="Workflow가 원인으로 확인된 경우의 판단이며, 모든 문제의 정답은 아니다.">
             <a:extLst xmlns:a="http://schemas.openxmlformats.org/drawingml/2006/main">
               <a:ext uri="{FF2B5EF4-FFF2-40B4-BE49-F238E27FC236}">
-                <a16:creationId xmlns:a16="http://schemas.microsoft.com/office/drawing/2014/main" id="{C69253E9-2FAC-4BFC-BCEC-0560503DB214}"/>
+                <a16:creationId xmlns:a16="http://schemas.microsoft.com/office/drawing/2014/main" id="{C579A15D-5125-49FE-A2F9-C7AE7765A3A3}"/>
               </a:ext>
             </a:extLst>
           </p:cNvPr>
@@ -39807,7 +40290,7 @@
           <p:cNvPr id="7" name="무엇을 바꾸면 다음 작업에도 반영될까?">
             <a:extLst xmlns:a="http://schemas.openxmlformats.org/drawingml/2006/main">
               <a:ext uri="{FF2B5EF4-FFF2-40B4-BE49-F238E27FC236}">
-                <a16:creationId xmlns:a16="http://schemas.microsoft.com/office/drawing/2014/main" id="{000C5697-071C-4925-9E70-04EC276B9E18}"/>
+                <a16:creationId xmlns:a16="http://schemas.microsoft.com/office/drawing/2014/main" id="{BA8A0B05-E23A-4897-9F53-F10ED816D456}"/>
               </a:ext>
             </a:extLst>
           </p:cNvPr>
@@ -39965,7 +40448,7 @@
           <p:cNvPr id="8" name="">
             <a:extLst xmlns:a="http://schemas.openxmlformats.org/drawingml/2006/main">
               <a:ext uri="{FF2B5EF4-FFF2-40B4-BE49-F238E27FC236}">
-                <a16:creationId xmlns:a16="http://schemas.microsoft.com/office/drawing/2014/main" id="{F96621F3-ADD1-4718-BE7C-D6BAFD56A038}"/>
+                <a16:creationId xmlns:a16="http://schemas.microsoft.com/office/drawing/2014/main" id="{AF9AA6B4-8443-4290-908F-4479F4F39135}"/>
               </a:ext>
             </a:extLst>
           </p:cNvPr>
@@ -39996,7 +40479,7 @@
           <p:cNvPr id="9" name="이번 Prompt 보정">
             <a:extLst xmlns:a="http://schemas.openxmlformats.org/drawingml/2006/main">
               <a:ext uri="{FF2B5EF4-FFF2-40B4-BE49-F238E27FC236}">
-                <a16:creationId xmlns:a16="http://schemas.microsoft.com/office/drawing/2014/main" id="{7B956116-1FAB-4433-B83D-06291EF1E09E}"/>
+                <a16:creationId xmlns:a16="http://schemas.microsoft.com/office/drawing/2014/main" id="{71896001-93EF-4DAA-905F-EB1C4FC2CE67}"/>
               </a:ext>
             </a:extLst>
           </p:cNvPr>
@@ -40154,7 +40637,7 @@
           <p:cNvPr id="10" name="현재 Task의 요청 범위를 넓힌다">
             <a:extLst xmlns:a="http://schemas.openxmlformats.org/drawingml/2006/main">
               <a:ext uri="{FF2B5EF4-FFF2-40B4-BE49-F238E27FC236}">
-                <a16:creationId xmlns:a16="http://schemas.microsoft.com/office/drawing/2014/main" id="{A102D25F-131B-4901-BE35-9BEE86578011}"/>
+                <a16:creationId xmlns:a16="http://schemas.microsoft.com/office/drawing/2014/main" id="{606C35C4-D6C1-467C-BE4D-1673BECBE43E}"/>
               </a:ext>
             </a:extLst>
           </p:cNvPr>
@@ -40312,7 +40795,7 @@
           <p:cNvPr id="11" name="">
             <a:extLst xmlns:a="http://schemas.openxmlformats.org/drawingml/2006/main">
               <a:ext uri="{FF2B5EF4-FFF2-40B4-BE49-F238E27FC236}">
-                <a16:creationId xmlns:a16="http://schemas.microsoft.com/office/drawing/2014/main" id="{C48565A4-720D-473B-AA7D-B8625B0C405C}"/>
+                <a16:creationId xmlns:a16="http://schemas.microsoft.com/office/drawing/2014/main" id="{D2106E99-A5FF-490C-AA13-111B2D00FB00}"/>
               </a:ext>
             </a:extLst>
           </p:cNvPr>
@@ -40343,7 +40826,7 @@
           <p:cNvPr id="12" name="전역 규칙 추가">
             <a:extLst xmlns:a="http://schemas.openxmlformats.org/drawingml/2006/main">
               <a:ext uri="{FF2B5EF4-FFF2-40B4-BE49-F238E27FC236}">
-                <a16:creationId xmlns:a16="http://schemas.microsoft.com/office/drawing/2014/main" id="{74F7D23D-8B63-4A0D-8A23-189B28EBF6A9}"/>
+                <a16:creationId xmlns:a16="http://schemas.microsoft.com/office/drawing/2014/main" id="{EDAD358B-B4B9-4D30-8460-F0ED80F45FCB}"/>
               </a:ext>
             </a:extLst>
           </p:cNvPr>
@@ -40501,7 +40984,7 @@
           <p:cNvPr id="13" name="다른 지침과 중복·충돌할 수 있다">
             <a:extLst xmlns:a="http://schemas.openxmlformats.org/drawingml/2006/main">
               <a:ext uri="{FF2B5EF4-FFF2-40B4-BE49-F238E27FC236}">
-                <a16:creationId xmlns:a16="http://schemas.microsoft.com/office/drawing/2014/main" id="{BE457508-B66F-4745-A32B-B741379282FA}"/>
+                <a16:creationId xmlns:a16="http://schemas.microsoft.com/office/drawing/2014/main" id="{5CD7552A-E995-447B-BCC1-C584305998C8}"/>
               </a:ext>
             </a:extLst>
           </p:cNvPr>
@@ -40659,7 +41142,7 @@
           <p:cNvPr id="14" name="">
             <a:extLst xmlns:a="http://schemas.openxmlformats.org/drawingml/2006/main">
               <a:ext uri="{FF2B5EF4-FFF2-40B4-BE49-F238E27FC236}">
-                <a16:creationId xmlns:a16="http://schemas.microsoft.com/office/drawing/2014/main" id="{BBC839B8-EFFC-4447-89DF-47A49BE88CA3}"/>
+                <a16:creationId xmlns:a16="http://schemas.microsoft.com/office/drawing/2014/main" id="{843EC50F-A16B-4ABF-8B99-9D202B60ADA9}"/>
               </a:ext>
             </a:extLst>
           </p:cNvPr>
@@ -40690,7 +41173,7 @@
           <p:cNvPr id="15" name="원인인 Workflow 갱신">
             <a:extLst xmlns:a="http://schemas.openxmlformats.org/drawingml/2006/main">
               <a:ext uri="{FF2B5EF4-FFF2-40B4-BE49-F238E27FC236}">
-                <a16:creationId xmlns:a16="http://schemas.microsoft.com/office/drawing/2014/main" id="{3166CBDD-7386-4E87-81C2-38BADD6E4ADA}"/>
+                <a16:creationId xmlns:a16="http://schemas.microsoft.com/office/drawing/2014/main" id="{2D3BF4A5-5D84-416E-AB18-3D25D028B4C9}"/>
               </a:ext>
             </a:extLst>
           </p:cNvPr>
@@ -40848,7 +41331,7 @@
           <p:cNvPr id="16" name="다음 Task가 재사용할 절차를 바꾼다">
             <a:extLst xmlns:a="http://schemas.openxmlformats.org/drawingml/2006/main">
               <a:ext uri="{FF2B5EF4-FFF2-40B4-BE49-F238E27FC236}">
-                <a16:creationId xmlns:a16="http://schemas.microsoft.com/office/drawing/2014/main" id="{698B934B-C168-4560-AE31-21717B5F9CEF}"/>
+                <a16:creationId xmlns:a16="http://schemas.microsoft.com/office/drawing/2014/main" id="{D5FE95C9-054A-4945-8C15-48989ECBC8D7}"/>
               </a:ext>
             </a:extLst>
           </p:cNvPr>
@@ -41006,7 +41489,7 @@
           <p:cNvPr id="17" name="선택 기준: 원인이 있는 곳과 변경할 곳이 맞는가?">
             <a:extLst xmlns:a="http://schemas.openxmlformats.org/drawingml/2006/main">
               <a:ext uri="{FF2B5EF4-FFF2-40B4-BE49-F238E27FC236}">
-                <a16:creationId xmlns:a16="http://schemas.microsoft.com/office/drawing/2014/main" id="{75661024-430B-4DF1-9FCA-9396E33EA385}"/>
+                <a16:creationId xmlns:a16="http://schemas.microsoft.com/office/drawing/2014/main" id="{56D847C8-F04B-4FD4-97B4-4F95296D6867}"/>
               </a:ext>
             </a:extLst>
           </p:cNvPr>
@@ -41162,7 +41645,7 @@
     </p:spTree>
     <p:extLst>
       <p:ext uri="{BB962C8B-B14F-4D97-AF65-F5344CB8AC3E}">
-        <p14:creationId xmlns:p14="http://schemas.microsoft.com/office/powerpoint/2010/main" val="246966000"/>
+        <p14:creationId xmlns:p14="http://schemas.microsoft.com/office/powerpoint/2010/main" val="234179483"/>
       </p:ext>
     </p:extLst>
   </p:cSld>
@@ -41193,7 +41676,7 @@
           <p:cNvPr id="22" name="ACT 4 · CONCEPTUAL / 원인 후보">
             <a:extLst xmlns:a="http://schemas.openxmlformats.org/drawingml/2006/main">
               <a:ext uri="{FF2B5EF4-FFF2-40B4-BE49-F238E27FC236}">
-                <a16:creationId xmlns:a16="http://schemas.microsoft.com/office/drawing/2014/main" id="{E124FDFC-D493-4C35-B9EA-21A59717F14F}"/>
+                <a16:creationId xmlns:a16="http://schemas.microsoft.com/office/drawing/2014/main" id="{CD1BB30A-DC07-4BD1-AA5E-EB2B6D712B29}"/>
               </a:ext>
             </a:extLst>
           </p:cNvPr>
@@ -41351,7 +41834,7 @@
           <p:cNvPr id="2" name="S60">
             <a:extLst xmlns:a="http://schemas.openxmlformats.org/drawingml/2006/main">
               <a:ext uri="{FF2B5EF4-FFF2-40B4-BE49-F238E27FC236}">
-                <a16:creationId xmlns:a16="http://schemas.microsoft.com/office/drawing/2014/main" id="{2BE54AF0-B04B-48D6-A164-37D5B7288B57}"/>
+                <a16:creationId xmlns:a16="http://schemas.microsoft.com/office/drawing/2014/main" id="{9EA36383-6CF0-4136-964E-AE8DEA1183EA}"/>
               </a:ext>
             </a:extLst>
           </p:cNvPr>
@@ -41509,7 +41992,7 @@
           <p:cNvPr id="3" name="실패 지점과 원인 Layer 구분하기">
             <a:extLst xmlns:a="http://schemas.openxmlformats.org/drawingml/2006/main">
               <a:ext uri="{FF2B5EF4-FFF2-40B4-BE49-F238E27FC236}">
-                <a16:creationId xmlns:a16="http://schemas.microsoft.com/office/drawing/2014/main" id="{1EC5E075-2CCC-4E35-A2CC-C2BD7BC523A4}"/>
+                <a16:creationId xmlns:a16="http://schemas.microsoft.com/office/drawing/2014/main" id="{97848FCE-695C-4599-89DE-34D292DCA4FB}"/>
               </a:ext>
             </a:extLst>
           </p:cNvPr>
@@ -41667,7 +42150,7 @@
           <p:cNvPr id="4" name="">
             <a:extLst xmlns:a="http://schemas.openxmlformats.org/drawingml/2006/main">
               <a:ext uri="{FF2B5EF4-FFF2-40B4-BE49-F238E27FC236}">
-                <a16:creationId xmlns:a16="http://schemas.microsoft.com/office/drawing/2014/main" id="{65428B6C-CC8B-4073-9CC7-A31C4B6F143D}"/>
+                <a16:creationId xmlns:a16="http://schemas.microsoft.com/office/drawing/2014/main" id="{D3E7A5FC-1FD0-4A03-82BE-B74981B4E38E}"/>
               </a:ext>
             </a:extLst>
           </p:cNvPr>
@@ -41698,7 +42181,7 @@
           <p:cNvPr id="5" name="DEMO-11 · 원인을 찾기 위한 교육용 관점">
             <a:extLst xmlns:a="http://schemas.openxmlformats.org/drawingml/2006/main">
               <a:ext uri="{FF2B5EF4-FFF2-40B4-BE49-F238E27FC236}">
-                <a16:creationId xmlns:a16="http://schemas.microsoft.com/office/drawing/2014/main" id="{EFA931DB-C253-491A-B191-EE7EA745D597}"/>
+                <a16:creationId xmlns:a16="http://schemas.microsoft.com/office/drawing/2014/main" id="{73BB9592-7225-462F-B7CC-388DF2CCA16A}"/>
               </a:ext>
             </a:extLst>
           </p:cNvPr>
@@ -41856,7 +42339,7 @@
           <p:cNvPr id="6" name="가능한 원인 후보이며, 증상만으로 한 원인을 확정하지 않는다.">
             <a:extLst xmlns:a="http://schemas.openxmlformats.org/drawingml/2006/main">
               <a:ext uri="{FF2B5EF4-FFF2-40B4-BE49-F238E27FC236}">
-                <a16:creationId xmlns:a16="http://schemas.microsoft.com/office/drawing/2014/main" id="{CD0B1592-33BE-4F67-8782-C2DA41723617}"/>
+                <a16:creationId xmlns:a16="http://schemas.microsoft.com/office/drawing/2014/main" id="{552292F9-1E41-4156-B0DE-B17B30217088}"/>
               </a:ext>
             </a:extLst>
           </p:cNvPr>
@@ -42014,7 +42497,7 @@
           <p:cNvPr id="7" name="“요청한 검증이 충분한가?”">
             <a:extLst xmlns:a="http://schemas.openxmlformats.org/drawingml/2006/main">
               <a:ext uri="{FF2B5EF4-FFF2-40B4-BE49-F238E27FC236}">
-                <a16:creationId xmlns:a16="http://schemas.microsoft.com/office/drawing/2014/main" id="{79F5EAC0-508C-4AE6-B429-21DDAD716D1A}"/>
+                <a16:creationId xmlns:a16="http://schemas.microsoft.com/office/drawing/2014/main" id="{99B2F1A4-3FDB-4525-863C-4D03D26CC2C0}"/>
               </a:ext>
             </a:extLst>
           </p:cNvPr>
@@ -42172,7 +42655,7 @@
           <p:cNvPr id="8" name="증상에서 바로 결론으로 가지 않는다">
             <a:extLst xmlns:a="http://schemas.openxmlformats.org/drawingml/2006/main">
               <a:ext uri="{FF2B5EF4-FFF2-40B4-BE49-F238E27FC236}">
-                <a16:creationId xmlns:a16="http://schemas.microsoft.com/office/drawing/2014/main" id="{0A55FE8D-9FDC-4227-B4B6-684FEDEA260F}"/>
+                <a16:creationId xmlns:a16="http://schemas.microsoft.com/office/drawing/2014/main" id="{56EB54E1-A539-4DB2-9E1E-3FCED71B5BAD}"/>
               </a:ext>
             </a:extLst>
           </p:cNvPr>
@@ -42330,7 +42813,7 @@
           <p:cNvPr id="9" name="">
             <a:extLst xmlns:a="http://schemas.openxmlformats.org/drawingml/2006/main">
               <a:ext uri="{FF2B5EF4-FFF2-40B4-BE49-F238E27FC236}">
-                <a16:creationId xmlns:a16="http://schemas.microsoft.com/office/drawing/2014/main" id="{8A9F381C-DA71-425B-A174-4DD325BCFCF8}"/>
+                <a16:creationId xmlns:a16="http://schemas.microsoft.com/office/drawing/2014/main" id="{9CA3231C-5B15-4CD4-9A3D-31072FC15DFF}"/>
               </a:ext>
             </a:extLst>
           </p:cNvPr>
@@ -42361,7 +42844,7 @@
           <p:cNvPr id="10" name="Context">
             <a:extLst xmlns:a="http://schemas.openxmlformats.org/drawingml/2006/main">
               <a:ext uri="{FF2B5EF4-FFF2-40B4-BE49-F238E27FC236}">
-                <a16:creationId xmlns:a16="http://schemas.microsoft.com/office/drawing/2014/main" id="{C4C09E7D-D8A5-4639-83E1-855921EEAC19}"/>
+                <a16:creationId xmlns:a16="http://schemas.microsoft.com/office/drawing/2014/main" id="{7688491C-B17F-41DF-8CC7-05719792098A}"/>
               </a:ext>
             </a:extLst>
           </p:cNvPr>
@@ -42519,7 +43002,7 @@
           <p:cNvPr id="11" name="현재 기준이 맞는가?">
             <a:extLst xmlns:a="http://schemas.openxmlformats.org/drawingml/2006/main">
               <a:ext uri="{FF2B5EF4-FFF2-40B4-BE49-F238E27FC236}">
-                <a16:creationId xmlns:a16="http://schemas.microsoft.com/office/drawing/2014/main" id="{DB10E113-CEC5-4B5B-A1A2-A25F17E02CBC}"/>
+                <a16:creationId xmlns:a16="http://schemas.microsoft.com/office/drawing/2014/main" id="{A4F378B8-981E-4C58-B383-3D57F2DC201F}"/>
               </a:ext>
             </a:extLst>
           </p:cNvPr>
@@ -42677,7 +43160,7 @@
           <p:cNvPr id="12" name="">
             <a:extLst xmlns:a="http://schemas.openxmlformats.org/drawingml/2006/main">
               <a:ext uri="{FF2B5EF4-FFF2-40B4-BE49-F238E27FC236}">
-                <a16:creationId xmlns:a16="http://schemas.microsoft.com/office/drawing/2014/main" id="{A2A4816A-F81E-47AF-8DAE-C8F3FA0965FD}"/>
+                <a16:creationId xmlns:a16="http://schemas.microsoft.com/office/drawing/2014/main" id="{6FEA7543-DFDD-4FA8-9C3E-20811588BF16}"/>
               </a:ext>
             </a:extLst>
           </p:cNvPr>
@@ -42708,7 +43191,7 @@
           <p:cNvPr id="13" name="Workflow">
             <a:extLst xmlns:a="http://schemas.openxmlformats.org/drawingml/2006/main">
               <a:ext uri="{FF2B5EF4-FFF2-40B4-BE49-F238E27FC236}">
-                <a16:creationId xmlns:a16="http://schemas.microsoft.com/office/drawing/2014/main" id="{1979D835-6A1E-4F23-A623-20403DA6736F}"/>
+                <a16:creationId xmlns:a16="http://schemas.microsoft.com/office/drawing/2014/main" id="{184D951C-0E2B-47CF-954B-C4FD2B38043B}"/>
               </a:ext>
             </a:extLst>
           </p:cNvPr>
@@ -42866,7 +43349,7 @@
           <p:cNvPr id="14" name="어떤 절차를 지시하는가?">
             <a:extLst xmlns:a="http://schemas.openxmlformats.org/drawingml/2006/main">
               <a:ext uri="{FF2B5EF4-FFF2-40B4-BE49-F238E27FC236}">
-                <a16:creationId xmlns:a16="http://schemas.microsoft.com/office/drawing/2014/main" id="{F6E179C9-D226-478B-B97A-AF120E87E0A8}"/>
+                <a16:creationId xmlns:a16="http://schemas.microsoft.com/office/drawing/2014/main" id="{FD67965A-A217-43A3-AF4A-D36ABA69A3A2}"/>
               </a:ext>
             </a:extLst>
           </p:cNvPr>
@@ -43024,7 +43507,7 @@
           <p:cNvPr id="15" name="">
             <a:extLst xmlns:a="http://schemas.openxmlformats.org/drawingml/2006/main">
               <a:ext uri="{FF2B5EF4-FFF2-40B4-BE49-F238E27FC236}">
-                <a16:creationId xmlns:a16="http://schemas.microsoft.com/office/drawing/2014/main" id="{58160A79-6D3E-4A21-93D1-3CF8BBCF0C08}"/>
+                <a16:creationId xmlns:a16="http://schemas.microsoft.com/office/drawing/2014/main" id="{79ABFBDC-F9DF-43E6-90CB-68FDED1C838F}"/>
               </a:ext>
             </a:extLst>
           </p:cNvPr>
@@ -43055,7 +43538,7 @@
           <p:cNvPr id="16" name="환경 · 권한">
             <a:extLst xmlns:a="http://schemas.openxmlformats.org/drawingml/2006/main">
               <a:ext uri="{FF2B5EF4-FFF2-40B4-BE49-F238E27FC236}">
-                <a16:creationId xmlns:a16="http://schemas.microsoft.com/office/drawing/2014/main" id="{92F21B19-A929-4A5F-AAAD-C3BA3B268475}"/>
+                <a16:creationId xmlns:a16="http://schemas.microsoft.com/office/drawing/2014/main" id="{F3208D20-E90A-4288-95D6-FDB7DADBABFA}"/>
               </a:ext>
             </a:extLst>
           </p:cNvPr>
@@ -43213,7 +43696,7 @@
           <p:cNvPr id="17" name="실행 조건이 맞는가?">
             <a:extLst xmlns:a="http://schemas.openxmlformats.org/drawingml/2006/main">
               <a:ext uri="{FF2B5EF4-FFF2-40B4-BE49-F238E27FC236}">
-                <a16:creationId xmlns:a16="http://schemas.microsoft.com/office/drawing/2014/main" id="{47A237FE-A830-447F-80F0-9A6A292987A3}"/>
+                <a16:creationId xmlns:a16="http://schemas.microsoft.com/office/drawing/2014/main" id="{942DC9DE-D8CE-4FD0-A618-36655C608B45}"/>
               </a:ext>
             </a:extLst>
           </p:cNvPr>
@@ -43371,7 +43854,7 @@
           <p:cNvPr id="18" name="">
             <a:extLst xmlns:a="http://schemas.openxmlformats.org/drawingml/2006/main">
               <a:ext uri="{FF2B5EF4-FFF2-40B4-BE49-F238E27FC236}">
-                <a16:creationId xmlns:a16="http://schemas.microsoft.com/office/drawing/2014/main" id="{17145794-735C-4D11-AA61-84AE2F5053F2}"/>
+                <a16:creationId xmlns:a16="http://schemas.microsoft.com/office/drawing/2014/main" id="{C5A11B5C-7B3D-491B-8AA4-6765B8D5C3A8}"/>
               </a:ext>
             </a:extLst>
           </p:cNvPr>
@@ -43402,7 +43885,7 @@
           <p:cNvPr id="19" name="제품 코드">
             <a:extLst xmlns:a="http://schemas.openxmlformats.org/drawingml/2006/main">
               <a:ext uri="{FF2B5EF4-FFF2-40B4-BE49-F238E27FC236}">
-                <a16:creationId xmlns:a16="http://schemas.microsoft.com/office/drawing/2014/main" id="{9F44E6B4-F2D9-4560-A808-DE8D49C43742}"/>
+                <a16:creationId xmlns:a16="http://schemas.microsoft.com/office/drawing/2014/main" id="{BB782E89-3409-4E5F-9DCD-E211FF1D74FB}"/>
               </a:ext>
             </a:extLst>
           </p:cNvPr>
@@ -43560,7 +44043,7 @@
           <p:cNvPr id="20" name="동작 자체의 문제인가?">
             <a:extLst xmlns:a="http://schemas.openxmlformats.org/drawingml/2006/main">
               <a:ext uri="{FF2B5EF4-FFF2-40B4-BE49-F238E27FC236}">
-                <a16:creationId xmlns:a16="http://schemas.microsoft.com/office/drawing/2014/main" id="{CB59DA0E-CF0A-4DAA-9CCA-527F5E6B4BCE}"/>
+                <a16:creationId xmlns:a16="http://schemas.microsoft.com/office/drawing/2014/main" id="{C4F75C14-B789-415D-A0E3-016FB560D4F4}"/>
               </a:ext>
             </a:extLst>
           </p:cNvPr>
@@ -43718,7 +44201,7 @@
           <p:cNvPr id="21" name="확인할 기록부터 찾는다">
             <a:extLst xmlns:a="http://schemas.openxmlformats.org/drawingml/2006/main">
               <a:ext uri="{FF2B5EF4-FFF2-40B4-BE49-F238E27FC236}">
-                <a16:creationId xmlns:a16="http://schemas.microsoft.com/office/drawing/2014/main" id="{AFD5B47C-884C-47A3-8BA7-866336D37371}"/>
+                <a16:creationId xmlns:a16="http://schemas.microsoft.com/office/drawing/2014/main" id="{55DB406C-2229-44ED-84B9-BF2FDDB51026}"/>
               </a:ext>
             </a:extLst>
           </p:cNvPr>
@@ -43874,7 +44357,7 @@
     </p:spTree>
     <p:extLst>
       <p:ext uri="{BB962C8B-B14F-4D97-AF65-F5344CB8AC3E}">
-        <p14:creationId xmlns:p14="http://schemas.microsoft.com/office/powerpoint/2010/main" val="1687972762"/>
+        <p14:creationId xmlns:p14="http://schemas.microsoft.com/office/powerpoint/2010/main" val="543056541"/>
       </p:ext>
     </p:extLst>
   </p:cSld>
@@ -43905,7 +44388,7 @@
           <p:cNvPr id="14" name="ACT 4 · CONCEPTUAL / 가정과 추론">
             <a:extLst xmlns:a="http://schemas.openxmlformats.org/drawingml/2006/main">
               <a:ext uri="{FF2B5EF4-FFF2-40B4-BE49-F238E27FC236}">
-                <a16:creationId xmlns:a16="http://schemas.microsoft.com/office/drawing/2014/main" id="{BFDE586C-EBED-450A-B87E-8F54D5495C76}"/>
+                <a16:creationId xmlns:a16="http://schemas.microsoft.com/office/drawing/2014/main" id="{76FF5CC0-5719-4D16-BFF1-A0A905675FC4}"/>
               </a:ext>
             </a:extLst>
           </p:cNvPr>
@@ -44063,7 +44546,7 @@
           <p:cNvPr id="2" name="S61">
             <a:extLst xmlns:a="http://schemas.openxmlformats.org/drawingml/2006/main">
               <a:ext uri="{FF2B5EF4-FFF2-40B4-BE49-F238E27FC236}">
-                <a16:creationId xmlns:a16="http://schemas.microsoft.com/office/drawing/2014/main" id="{D7A7F0B0-D42E-49BD-9A1B-6027078AE237}"/>
+                <a16:creationId xmlns:a16="http://schemas.microsoft.com/office/drawing/2014/main" id="{60E7D2CA-92D9-41D3-871E-765AE988E3A4}"/>
               </a:ext>
             </a:extLst>
           </p:cNvPr>
@@ -44221,7 +44704,7 @@
           <p:cNvPr id="3" name="먼저 관찰하고, 그다음 가설을 세운다">
             <a:extLst xmlns:a="http://schemas.openxmlformats.org/drawingml/2006/main">
               <a:ext uri="{FF2B5EF4-FFF2-40B4-BE49-F238E27FC236}">
-                <a16:creationId xmlns:a16="http://schemas.microsoft.com/office/drawing/2014/main" id="{3173C640-2C87-4DD2-AE57-F01D64B86829}"/>
+                <a16:creationId xmlns:a16="http://schemas.microsoft.com/office/drawing/2014/main" id="{05C9A514-F053-4D78-BD0A-BC243016110C}"/>
               </a:ext>
             </a:extLst>
           </p:cNvPr>
@@ -44379,7 +44862,7 @@
           <p:cNvPr id="4" name="">
             <a:extLst xmlns:a="http://schemas.openxmlformats.org/drawingml/2006/main">
               <a:ext uri="{FF2B5EF4-FFF2-40B4-BE49-F238E27FC236}">
-                <a16:creationId xmlns:a16="http://schemas.microsoft.com/office/drawing/2014/main" id="{6E78506E-B1D8-4DCB-BCA0-F3C12BBD91CB}"/>
+                <a16:creationId xmlns:a16="http://schemas.microsoft.com/office/drawing/2014/main" id="{B9EE2C5B-DC51-4C51-8103-FC67B7C76711}"/>
               </a:ext>
             </a:extLst>
           </p:cNvPr>
@@ -44410,7 +44893,7 @@
           <p:cNvPr id="5" name="DEMO-04A · 구성된 사례의 전제와 원인 가설">
             <a:extLst xmlns:a="http://schemas.openxmlformats.org/drawingml/2006/main">
               <a:ext uri="{FF2B5EF4-FFF2-40B4-BE49-F238E27FC236}">
-                <a16:creationId xmlns:a16="http://schemas.microsoft.com/office/drawing/2014/main" id="{B3DB512C-CFF1-44E5-A8D5-A5C1F119C817}"/>
+                <a16:creationId xmlns:a16="http://schemas.microsoft.com/office/drawing/2014/main" id="{13C9E8F5-3E91-4389-8739-418F5E45B079}"/>
               </a:ext>
             </a:extLst>
           </p:cNvPr>
@@ -44568,7 +45051,7 @@
           <p:cNvPr id="6" name="가상 설정을 실제 Trial 관찰로 표현하지 않는다. 실행 결과는 아직 없다.">
             <a:extLst xmlns:a="http://schemas.openxmlformats.org/drawingml/2006/main">
               <a:ext uri="{FF2B5EF4-FFF2-40B4-BE49-F238E27FC236}">
-                <a16:creationId xmlns:a16="http://schemas.microsoft.com/office/drawing/2014/main" id="{BF483BB6-6133-44A8-8193-099DA0B8B1F4}"/>
+                <a16:creationId xmlns:a16="http://schemas.microsoft.com/office/drawing/2014/main" id="{DD23BE9A-3A12-4D0E-B596-67C20DB0890E}"/>
               </a:ext>
             </a:extLst>
           </p:cNvPr>
@@ -44726,7 +45209,7 @@
           <p:cNvPr id="7" name="사례에 주어진 정보">
             <a:extLst xmlns:a="http://schemas.openxmlformats.org/drawingml/2006/main">
               <a:ext uri="{FF2B5EF4-FFF2-40B4-BE49-F238E27FC236}">
-                <a16:creationId xmlns:a16="http://schemas.microsoft.com/office/drawing/2014/main" id="{5F621411-E188-47BF-B1EA-E9CFF8B37B9E}"/>
+                <a16:creationId xmlns:a16="http://schemas.microsoft.com/office/drawing/2014/main" id="{8035D89E-295D-4A01-95D2-A55AB4275CC2}"/>
               </a:ext>
             </a:extLst>
           </p:cNvPr>
@@ -44884,7 +45367,7 @@
           <p:cNvPr id="8" name="확인해야 할 가설">
             <a:extLst xmlns:a="http://schemas.openxmlformats.org/drawingml/2006/main">
               <a:ext uri="{FF2B5EF4-FFF2-40B4-BE49-F238E27FC236}">
-                <a16:creationId xmlns:a16="http://schemas.microsoft.com/office/drawing/2014/main" id="{FB77A61F-5816-45B0-94FD-969EA973A8E2}"/>
+                <a16:creationId xmlns:a16="http://schemas.microsoft.com/office/drawing/2014/main" id="{E0977B98-B842-4010-93E6-2DDF86C47F98}"/>
               </a:ext>
             </a:extLst>
           </p:cNvPr>
@@ -45042,7 +45525,7 @@
           <p:cNvPr id="9" name="">
             <a:extLst xmlns:a="http://schemas.openxmlformats.org/drawingml/2006/main">
               <a:ext uri="{FF2B5EF4-FFF2-40B4-BE49-F238E27FC236}">
-                <a16:creationId xmlns:a16="http://schemas.microsoft.com/office/drawing/2014/main" id="{9632A82B-2A76-40C6-87BA-64309607CBFE}"/>
+                <a16:creationId xmlns:a16="http://schemas.microsoft.com/office/drawing/2014/main" id="{A2AE628E-FFC2-45CB-A53C-8C506F675807}"/>
               </a:ext>
             </a:extLst>
           </p:cNvPr>
@@ -45073,7 +45556,7 @@
           <p:cNvPr id="10" name="">
             <a:extLst xmlns:a="http://schemas.openxmlformats.org/drawingml/2006/main">
               <a:ext uri="{FF2B5EF4-FFF2-40B4-BE49-F238E27FC236}">
-                <a16:creationId xmlns:a16="http://schemas.microsoft.com/office/drawing/2014/main" id="{43829C28-1077-4F0C-8673-6792C88B274C}"/>
+                <a16:creationId xmlns:a16="http://schemas.microsoft.com/office/drawing/2014/main" id="{F1DA93EB-406C-41AE-B68B-97B232F594A6}"/>
               </a:ext>
             </a:extLst>
           </p:cNvPr>
@@ -45104,7 +45587,7 @@
           <p:cNvPr id="11" name="현재 기준: 단위 + 통합&#10;재사용 지침: 단위만">
             <a:extLst xmlns:a="http://schemas.openxmlformats.org/drawingml/2006/main">
               <a:ext uri="{FF2B5EF4-FFF2-40B4-BE49-F238E27FC236}">
-                <a16:creationId xmlns:a16="http://schemas.microsoft.com/office/drawing/2014/main" id="{2FEA3E98-5B67-4682-8FDD-30F64F34808D}"/>
+                <a16:creationId xmlns:a16="http://schemas.microsoft.com/office/drawing/2014/main" id="{435A186A-AE9E-4E48-A7C8-AAA2C096E136}"/>
               </a:ext>
             </a:extLst>
           </p:cNvPr>
@@ -45285,7 +45768,7 @@
           <p:cNvPr id="12" name="오래된 Workflow가&#10;문제의 원인일 수 있다">
             <a:extLst xmlns:a="http://schemas.openxmlformats.org/drawingml/2006/main">
               <a:ext uri="{FF2B5EF4-FFF2-40B4-BE49-F238E27FC236}">
-                <a16:creationId xmlns:a16="http://schemas.microsoft.com/office/drawing/2014/main" id="{7B2B132B-A630-4F96-8CC1-CB79D34FA5DE}"/>
+                <a16:creationId xmlns:a16="http://schemas.microsoft.com/office/drawing/2014/main" id="{4F307774-A9CC-409B-9EF8-BBB902C79817}"/>
               </a:ext>
             </a:extLst>
           </p:cNvPr>
@@ -45466,7 +45949,7 @@
           <p:cNvPr id="13" name="실행 경로와 실제로 읽은 지침을 대조해야 원인을 판단할 수 있다.">
             <a:extLst xmlns:a="http://schemas.openxmlformats.org/drawingml/2006/main">
               <a:ext uri="{FF2B5EF4-FFF2-40B4-BE49-F238E27FC236}">
-                <a16:creationId xmlns:a16="http://schemas.microsoft.com/office/drawing/2014/main" id="{40195D8D-1B39-41F3-9999-C2A0D2753EC7}"/>
+                <a16:creationId xmlns:a16="http://schemas.microsoft.com/office/drawing/2014/main" id="{28F0FF9E-8EB7-47D7-82B1-D6F9E4B3FA26}"/>
               </a:ext>
             </a:extLst>
           </p:cNvPr>
@@ -45622,7 +46105,7 @@
     </p:spTree>
     <p:extLst>
       <p:ext uri="{BB962C8B-B14F-4D97-AF65-F5344CB8AC3E}">
-        <p14:creationId xmlns:p14="http://schemas.microsoft.com/office/powerpoint/2010/main" val="249293769"/>
+        <p14:creationId xmlns:p14="http://schemas.microsoft.com/office/powerpoint/2010/main" val="1818459010"/>
       </p:ext>
     </p:extLst>
   </p:cSld>
@@ -45653,7 +46136,7 @@
           <p:cNvPr id="16" name="ACT 4 · CONCEPTUAL / 원인에 맞는 수정">
             <a:extLst xmlns:a="http://schemas.openxmlformats.org/drawingml/2006/main">
               <a:ext uri="{FF2B5EF4-FFF2-40B4-BE49-F238E27FC236}">
-                <a16:creationId xmlns:a16="http://schemas.microsoft.com/office/drawing/2014/main" id="{E25F0EA9-DB56-4335-B698-5212928F2104}"/>
+                <a16:creationId xmlns:a16="http://schemas.microsoft.com/office/drawing/2014/main" id="{1D730BE7-B4BC-4F7B-BBC3-2507AB0707B4}"/>
               </a:ext>
             </a:extLst>
           </p:cNvPr>
@@ -45811,7 +46294,7 @@
           <p:cNvPr id="2" name="S62">
             <a:extLst xmlns:a="http://schemas.openxmlformats.org/drawingml/2006/main">
               <a:ext uri="{FF2B5EF4-FFF2-40B4-BE49-F238E27FC236}">
-                <a16:creationId xmlns:a16="http://schemas.microsoft.com/office/drawing/2014/main" id="{C95AC4D8-4909-4FDE-8A85-3F80A8E55895}"/>
+                <a16:creationId xmlns:a16="http://schemas.microsoft.com/office/drawing/2014/main" id="{2E3B158D-44C5-4902-A1AE-3F285399B1DF}"/>
               </a:ext>
             </a:extLst>
           </p:cNvPr>
@@ -45969,7 +46452,7 @@
           <p:cNvPr id="3" name="Cause가 지지하는 최소 변경">
             <a:extLst xmlns:a="http://schemas.openxmlformats.org/drawingml/2006/main">
               <a:ext uri="{FF2B5EF4-FFF2-40B4-BE49-F238E27FC236}">
-                <a16:creationId xmlns:a16="http://schemas.microsoft.com/office/drawing/2014/main" id="{4A387A7E-37BD-454B-9E3A-731037917D1D}"/>
+                <a16:creationId xmlns:a16="http://schemas.microsoft.com/office/drawing/2014/main" id="{F44B45B5-6DC7-47BB-BE6F-77FECCF8C1B8}"/>
               </a:ext>
             </a:extLst>
           </p:cNvPr>
@@ -46127,7 +46610,7 @@
           <p:cNvPr id="4" name="">
             <a:extLst xmlns:a="http://schemas.openxmlformats.org/drawingml/2006/main">
               <a:ext uri="{FF2B5EF4-FFF2-40B4-BE49-F238E27FC236}">
-                <a16:creationId xmlns:a16="http://schemas.microsoft.com/office/drawing/2014/main" id="{14103217-F876-4124-827B-2546064B015D}"/>
+                <a16:creationId xmlns:a16="http://schemas.microsoft.com/office/drawing/2014/main" id="{5619DF39-FBCE-492A-BE08-89691F694894}"/>
               </a:ext>
             </a:extLst>
           </p:cNvPr>
@@ -46158,7 +46641,7 @@
           <p:cNvPr id="5" name="DEMO-04A · 원인이 확인됐다고 가정한 변경 설계">
             <a:extLst xmlns:a="http://schemas.openxmlformats.org/drawingml/2006/main">
               <a:ext uri="{FF2B5EF4-FFF2-40B4-BE49-F238E27FC236}">
-                <a16:creationId xmlns:a16="http://schemas.microsoft.com/office/drawing/2014/main" id="{5985BC25-B4EB-4E64-AF67-D88668131F06}"/>
+                <a16:creationId xmlns:a16="http://schemas.microsoft.com/office/drawing/2014/main" id="{F6D26239-A845-4505-8DD5-0FD96F6D2ACE}"/>
               </a:ext>
             </a:extLst>
           </p:cNvPr>
@@ -46316,7 +46799,7 @@
           <p:cNvPr id="6" name="실제 코드·Skill 수정 또는 실행 결과가 아니다. 관련 없는 규칙은 임의로 바꾸지 않는다.">
             <a:extLst xmlns:a="http://schemas.openxmlformats.org/drawingml/2006/main">
               <a:ext uri="{FF2B5EF4-FFF2-40B4-BE49-F238E27FC236}">
-                <a16:creationId xmlns:a16="http://schemas.microsoft.com/office/drawing/2014/main" id="{E8FF8FB6-9144-4BA7-8403-25A5DEC06ADB}"/>
+                <a16:creationId xmlns:a16="http://schemas.microsoft.com/office/drawing/2014/main" id="{D24E1902-9F26-40FA-ACF1-301614B2F672}"/>
               </a:ext>
             </a:extLst>
           </p:cNvPr>
@@ -46474,7 +46957,7 @@
           <p:cNvPr id="7" name="Workflow가 원인으로 확인됐다면">
             <a:extLst xmlns:a="http://schemas.openxmlformats.org/drawingml/2006/main">
               <a:ext uri="{FF2B5EF4-FFF2-40B4-BE49-F238E27FC236}">
-                <a16:creationId xmlns:a16="http://schemas.microsoft.com/office/drawing/2014/main" id="{38E24749-AA91-4DFD-8138-7E800586EF88}"/>
+                <a16:creationId xmlns:a16="http://schemas.microsoft.com/office/drawing/2014/main" id="{9B2B4093-7B79-4FA8-8A46-70C2821A4D8F}"/>
               </a:ext>
             </a:extLst>
           </p:cNvPr>
@@ -46632,7 +47115,7 @@
           <p:cNvPr id="8" name="기존 재사용 지침">
             <a:extLst xmlns:a="http://schemas.openxmlformats.org/drawingml/2006/main">
               <a:ext uri="{FF2B5EF4-FFF2-40B4-BE49-F238E27FC236}">
-                <a16:creationId xmlns:a16="http://schemas.microsoft.com/office/drawing/2014/main" id="{A01221BB-D21E-4FEE-BDF4-01AD8D4F6706}"/>
+                <a16:creationId xmlns:a16="http://schemas.microsoft.com/office/drawing/2014/main" id="{1A7BF349-31CB-43F3-9292-4750744BCF6B}"/>
               </a:ext>
             </a:extLst>
           </p:cNvPr>
@@ -46790,7 +47273,7 @@
           <p:cNvPr id="9" name="갱신할 지침">
             <a:extLst xmlns:a="http://schemas.openxmlformats.org/drawingml/2006/main">
               <a:ext uri="{FF2B5EF4-FFF2-40B4-BE49-F238E27FC236}">
-                <a16:creationId xmlns:a16="http://schemas.microsoft.com/office/drawing/2014/main" id="{AB468D65-9FFE-42C2-AA64-8F41429DE4A5}"/>
+                <a16:creationId xmlns:a16="http://schemas.microsoft.com/office/drawing/2014/main" id="{D9A06DCF-D784-4904-A66A-EDA7CCF38693}"/>
               </a:ext>
             </a:extLst>
           </p:cNvPr>
@@ -46948,7 +47431,7 @@
           <p:cNvPr id="10" name="">
             <a:extLst xmlns:a="http://schemas.openxmlformats.org/drawingml/2006/main">
               <a:ext uri="{FF2B5EF4-FFF2-40B4-BE49-F238E27FC236}">
-                <a16:creationId xmlns:a16="http://schemas.microsoft.com/office/drawing/2014/main" id="{F5F2A063-7DBE-44BE-B572-B9F3CA51D3FD}"/>
+                <a16:creationId xmlns:a16="http://schemas.microsoft.com/office/drawing/2014/main" id="{6A41ED7E-EE70-405E-8196-5CC92A0BB0C5}"/>
               </a:ext>
             </a:extLst>
           </p:cNvPr>
@@ -46979,7 +47462,7 @@
           <p:cNvPr id="11" name="">
             <a:extLst xmlns:a="http://schemas.openxmlformats.org/drawingml/2006/main">
               <a:ext uri="{FF2B5EF4-FFF2-40B4-BE49-F238E27FC236}">
-                <a16:creationId xmlns:a16="http://schemas.microsoft.com/office/drawing/2014/main" id="{F1D90188-7935-486D-B34C-2625771483FB}"/>
+                <a16:creationId xmlns:a16="http://schemas.microsoft.com/office/drawing/2014/main" id="{24A04920-FC2F-46CA-B750-98A7C5CB7DE3}"/>
               </a:ext>
             </a:extLst>
           </p:cNvPr>
@@ -47010,7 +47493,7 @@
           <p:cNvPr id="12" name="단위 테스트를 확인">
             <a:extLst xmlns:a="http://schemas.openxmlformats.org/drawingml/2006/main">
               <a:ext uri="{FF2B5EF4-FFF2-40B4-BE49-F238E27FC236}">
-                <a16:creationId xmlns:a16="http://schemas.microsoft.com/office/drawing/2014/main" id="{1ED42421-5BF0-4040-9578-F3DE9DB3EE0E}"/>
+                <a16:creationId xmlns:a16="http://schemas.microsoft.com/office/drawing/2014/main" id="{0E081CFA-557F-434F-8618-6AA1DD44B5E7}"/>
               </a:ext>
             </a:extLst>
           </p:cNvPr>
@@ -47168,7 +47651,7 @@
           <p:cNvPr id="13" name="">
             <a:extLst xmlns:a="http://schemas.openxmlformats.org/drawingml/2006/main">
               <a:ext uri="{FF2B5EF4-FFF2-40B4-BE49-F238E27FC236}">
-                <a16:creationId xmlns:a16="http://schemas.microsoft.com/office/drawing/2014/main" id="{3D5243E6-1784-4438-BC69-35793D089FBF}"/>
+                <a16:creationId xmlns:a16="http://schemas.microsoft.com/office/drawing/2014/main" id="{0F95FD08-E29B-430F-9EA6-969F821C3173}"/>
               </a:ext>
             </a:extLst>
           </p:cNvPr>
@@ -47198,7 +47681,7 @@
           <p:cNvPr id="14" name="단위 + 통합 테스트 확인">
             <a:extLst xmlns:a="http://schemas.openxmlformats.org/drawingml/2006/main">
               <a:ext uri="{FF2B5EF4-FFF2-40B4-BE49-F238E27FC236}">
-                <a16:creationId xmlns:a16="http://schemas.microsoft.com/office/drawing/2014/main" id="{1A0829A0-03F7-409B-A74F-62C5BE33E093}"/>
+                <a16:creationId xmlns:a16="http://schemas.microsoft.com/office/drawing/2014/main" id="{EFE9F8A2-874C-4AAE-8537-5A475157A3FD}"/>
               </a:ext>
             </a:extLst>
           </p:cNvPr>
@@ -47356,7 +47839,7 @@
           <p:cNvPr id="15" name="원인이 뒷받침하는 범위까지 바꾼다.">
             <a:extLst xmlns:a="http://schemas.openxmlformats.org/drawingml/2006/main">
               <a:ext uri="{FF2B5EF4-FFF2-40B4-BE49-F238E27FC236}">
-                <a16:creationId xmlns:a16="http://schemas.microsoft.com/office/drawing/2014/main" id="{67F191CF-21BA-404E-A947-8062535E92C8}"/>
+                <a16:creationId xmlns:a16="http://schemas.microsoft.com/office/drawing/2014/main" id="{5923C2B3-7B52-4FD5-90EF-A0BBB9327076}"/>
               </a:ext>
             </a:extLst>
           </p:cNvPr>
@@ -47512,7 +47995,7 @@
     </p:spTree>
     <p:extLst>
       <p:ext uri="{BB962C8B-B14F-4D97-AF65-F5344CB8AC3E}">
-        <p14:creationId xmlns:p14="http://schemas.microsoft.com/office/powerpoint/2010/main" val="258870474"/>
+        <p14:creationId xmlns:p14="http://schemas.microsoft.com/office/powerpoint/2010/main" val="1717575251"/>
       </p:ext>
     </p:extLst>
   </p:cSld>
@@ -47543,7 +48026,7 @@
           <p:cNvPr id="14" name="ACT 4 · CONCEPTUAL / 평가 범위">
             <a:extLst xmlns:a="http://schemas.openxmlformats.org/drawingml/2006/main">
               <a:ext uri="{FF2B5EF4-FFF2-40B4-BE49-F238E27FC236}">
-                <a16:creationId xmlns:a16="http://schemas.microsoft.com/office/drawing/2014/main" id="{A0B159B0-CA99-44BE-AA5C-91A6C3A36E82}"/>
+                <a16:creationId xmlns:a16="http://schemas.microsoft.com/office/drawing/2014/main" id="{2F8CFFDD-C763-4576-8206-E2295E1F474D}"/>
               </a:ext>
             </a:extLst>
           </p:cNvPr>
@@ -47701,7 +48184,7 @@
           <p:cNvPr id="2" name="S63">
             <a:extLst xmlns:a="http://schemas.openxmlformats.org/drawingml/2006/main">
               <a:ext uri="{FF2B5EF4-FFF2-40B4-BE49-F238E27FC236}">
-                <a16:creationId xmlns:a16="http://schemas.microsoft.com/office/drawing/2014/main" id="{5DDD4B45-8C72-4AAF-A1DD-87F0C9F23553}"/>
+                <a16:creationId xmlns:a16="http://schemas.microsoft.com/office/drawing/2014/main" id="{E943949B-4F86-4BE0-84AB-F6F43683DFB3}"/>
               </a:ext>
             </a:extLst>
           </p:cNvPr>
@@ -47859,7 +48342,7 @@
           <p:cNvPr id="3" name="같은 Task의 재실행만으로 충분할까?">
             <a:extLst xmlns:a="http://schemas.openxmlformats.org/drawingml/2006/main">
               <a:ext uri="{FF2B5EF4-FFF2-40B4-BE49-F238E27FC236}">
-                <a16:creationId xmlns:a16="http://schemas.microsoft.com/office/drawing/2014/main" id="{2EF52626-C34B-409B-A8CD-1B22591D27D4}"/>
+                <a16:creationId xmlns:a16="http://schemas.microsoft.com/office/drawing/2014/main" id="{51432A99-DAD2-4110-9FF5-49FBBC50FA90}"/>
               </a:ext>
             </a:extLst>
           </p:cNvPr>
@@ -48017,7 +48500,7 @@
           <p:cNvPr id="4" name="">
             <a:extLst xmlns:a="http://schemas.openxmlformats.org/drawingml/2006/main">
               <a:ext uri="{FF2B5EF4-FFF2-40B4-BE49-F238E27FC236}">
-                <a16:creationId xmlns:a16="http://schemas.microsoft.com/office/drawing/2014/main" id="{BD5906AC-A564-4BC3-A659-9BBC7B236FF7}"/>
+                <a16:creationId xmlns:a16="http://schemas.microsoft.com/office/drawing/2014/main" id="{3FA7AF29-7E1F-47BA-B765-9E5C9D7D0580}"/>
               </a:ext>
             </a:extLst>
           </p:cNvPr>
@@ -48048,7 +48531,7 @@
           <p:cNvPr id="5" name="DEMO-04A · 변경 후 확인할 질문을 설계한 도식">
             <a:extLst xmlns:a="http://schemas.openxmlformats.org/drawingml/2006/main">
               <a:ext uri="{FF2B5EF4-FFF2-40B4-BE49-F238E27FC236}">
-                <a16:creationId xmlns:a16="http://schemas.microsoft.com/office/drawing/2014/main" id="{74B38BC0-C964-4E04-A65D-E2245E480C99}"/>
+                <a16:creationId xmlns:a16="http://schemas.microsoft.com/office/drawing/2014/main" id="{07F1F22C-7563-4326-A092-FABE761F11AD}"/>
               </a:ext>
             </a:extLst>
           </p:cNvPr>
@@ -48206,7 +48689,7 @@
           <p:cNvPr id="6" name="재실행·회귀 테스트 결과는 없다. 두 검증 질문을 구분하는 가상 사례다.">
             <a:extLst xmlns:a="http://schemas.openxmlformats.org/drawingml/2006/main">
               <a:ext uri="{FF2B5EF4-FFF2-40B4-BE49-F238E27FC236}">
-                <a16:creationId xmlns:a16="http://schemas.microsoft.com/office/drawing/2014/main" id="{7C5D4065-BA4C-41AD-AE2C-CB49DC99FF89}"/>
+                <a16:creationId xmlns:a16="http://schemas.microsoft.com/office/drawing/2014/main" id="{6ADB5E85-D0B5-4593-B90C-3DED3A0E6DCD}"/>
               </a:ext>
             </a:extLst>
           </p:cNvPr>
@@ -48364,7 +48847,7 @@
           <p:cNvPr id="7" name="이번 작업을 다시 확인">
             <a:extLst xmlns:a="http://schemas.openxmlformats.org/drawingml/2006/main">
               <a:ext uri="{FF2B5EF4-FFF2-40B4-BE49-F238E27FC236}">
-                <a16:creationId xmlns:a16="http://schemas.microsoft.com/office/drawing/2014/main" id="{01715AC3-A82A-441C-8E73-D8A308D11B1E}"/>
+                <a16:creationId xmlns:a16="http://schemas.microsoft.com/office/drawing/2014/main" id="{3AE6B2E1-7FF2-4944-B6E8-2351D0DD6828}"/>
               </a:ext>
             </a:extLst>
           </p:cNvPr>
@@ -48522,7 +49005,7 @@
           <p:cNvPr id="8" name="다른 작업도 확인">
             <a:extLst xmlns:a="http://schemas.openxmlformats.org/drawingml/2006/main">
               <a:ext uri="{FF2B5EF4-FFF2-40B4-BE49-F238E27FC236}">
-                <a16:creationId xmlns:a16="http://schemas.microsoft.com/office/drawing/2014/main" id="{3C447CDB-73EF-49F8-B74A-31673AB31715}"/>
+                <a16:creationId xmlns:a16="http://schemas.microsoft.com/office/drawing/2014/main" id="{2BA47B7C-676A-4794-82B6-EAA773F653F9}"/>
               </a:ext>
             </a:extLst>
           </p:cNvPr>
@@ -48680,7 +49163,7 @@
           <p:cNvPr id="9" name="">
             <a:extLst xmlns:a="http://schemas.openxmlformats.org/drawingml/2006/main">
               <a:ext uri="{FF2B5EF4-FFF2-40B4-BE49-F238E27FC236}">
-                <a16:creationId xmlns:a16="http://schemas.microsoft.com/office/drawing/2014/main" id="{CC0E3E82-48CE-496E-9705-074A4912B575}"/>
+                <a16:creationId xmlns:a16="http://schemas.microsoft.com/office/drawing/2014/main" id="{DD3CDFE0-B39B-47B1-AD41-029F1A1598BF}"/>
               </a:ext>
             </a:extLst>
           </p:cNvPr>
@@ -48711,7 +49194,7 @@
           <p:cNvPr id="10" name="">
             <a:extLst xmlns:a="http://schemas.openxmlformats.org/drawingml/2006/main">
               <a:ext uri="{FF2B5EF4-FFF2-40B4-BE49-F238E27FC236}">
-                <a16:creationId xmlns:a16="http://schemas.microsoft.com/office/drawing/2014/main" id="{70AE58F0-F335-4DCD-A20C-20C861D384B3}"/>
+                <a16:creationId xmlns:a16="http://schemas.microsoft.com/office/drawing/2014/main" id="{28285F5B-2A5F-40BA-8E92-D4CE00845722}"/>
               </a:ext>
             </a:extLst>
           </p:cNvPr>
@@ -48742,7 +49225,7 @@
           <p:cNvPr id="11" name="요청했던 검증 범위를&#10;이제 다루는가?">
             <a:extLst xmlns:a="http://schemas.openxmlformats.org/drawingml/2006/main">
               <a:ext uri="{FF2B5EF4-FFF2-40B4-BE49-F238E27FC236}">
-                <a16:creationId xmlns:a16="http://schemas.microsoft.com/office/drawing/2014/main" id="{1F13F95A-9BF2-4073-B76C-69AE76F2EBFA}"/>
+                <a16:creationId xmlns:a16="http://schemas.microsoft.com/office/drawing/2014/main" id="{9698596F-B11C-4C04-88FF-6677A317A4A2}"/>
               </a:ext>
             </a:extLst>
           </p:cNvPr>
@@ -48923,7 +49406,7 @@
           <p:cNvPr id="12" name="바뀐 지침이 다른 작업을&#10;방해하지 않는가?">
             <a:extLst xmlns:a="http://schemas.openxmlformats.org/drawingml/2006/main">
               <a:ext uri="{FF2B5EF4-FFF2-40B4-BE49-F238E27FC236}">
-                <a16:creationId xmlns:a16="http://schemas.microsoft.com/office/drawing/2014/main" id="{E10A4E99-238D-4CF6-8452-16FB6B653B38}"/>
+                <a16:creationId xmlns:a16="http://schemas.microsoft.com/office/drawing/2014/main" id="{257EDBCD-AE80-4E5C-BE9A-DF63CB285738}"/>
               </a:ext>
             </a:extLst>
           </p:cNvPr>
@@ -49104,7 +49587,7 @@
           <p:cNvPr id="13" name="확인할 범위가 다르므로, 두 질문이 모두 필요하다.">
             <a:extLst xmlns:a="http://schemas.openxmlformats.org/drawingml/2006/main">
               <a:ext uri="{FF2B5EF4-FFF2-40B4-BE49-F238E27FC236}">
-                <a16:creationId xmlns:a16="http://schemas.microsoft.com/office/drawing/2014/main" id="{DB04549D-4A73-4600-9822-223F74ECC98F}"/>
+                <a16:creationId xmlns:a16="http://schemas.microsoft.com/office/drawing/2014/main" id="{B6768A34-03AE-4EB7-8068-35823FCB6849}"/>
               </a:ext>
             </a:extLst>
           </p:cNvPr>
@@ -49260,7 +49743,7 @@
     </p:spTree>
     <p:extLst>
       <p:ext uri="{BB962C8B-B14F-4D97-AF65-F5344CB8AC3E}">
-        <p14:creationId xmlns:p14="http://schemas.microsoft.com/office/powerpoint/2010/main" val="2017032946"/>
+        <p14:creationId xmlns:p14="http://schemas.microsoft.com/office/powerpoint/2010/main" val="1664038353"/>
       </p:ext>
     </p:extLst>
   </p:cSld>

--- a/production/ACT_4.pptx
+++ b/production/ACT_4.pptx
@@ -2,30 +2,30 @@
 <file path=ppt/presentation.xml><?xml version="1.0" encoding="utf-8"?>
 <p:presentation xmlns:p="http://schemas.openxmlformats.org/presentationml/2006/main">
   <p:sldMasterIdLst>
-    <p:sldMasterId xmlns:r="http://schemas.openxmlformats.org/officeDocument/2006/relationships" id="2147483648" r:id="R6b40b168f1d244a5"/>
+    <p:sldMasterId xmlns:r="http://schemas.openxmlformats.org/officeDocument/2006/relationships" id="2147483648" r:id="R19fc302c183b4125"/>
   </p:sldMasterIdLst>
   <p:notesMasterIdLst>
-    <p:notesMasterId xmlns:r="http://schemas.openxmlformats.org/officeDocument/2006/relationships" r:id="R7786023421954f7c"/>
+    <p:notesMasterId xmlns:r="http://schemas.openxmlformats.org/officeDocument/2006/relationships" r:id="R1187e6c04f8b46c3"/>
   </p:notesMasterIdLst>
   <p:sldIdLst>
-    <p:sldId xmlns:r="http://schemas.openxmlformats.org/officeDocument/2006/relationships" id="256" r:id="R3257151a61304768"/>
-    <p:sldId xmlns:r="http://schemas.openxmlformats.org/officeDocument/2006/relationships" id="257" r:id="R7de5ec5bba8b4b34"/>
-    <p:sldId xmlns:r="http://schemas.openxmlformats.org/officeDocument/2006/relationships" id="258" r:id="R3bda84a2a7bb4fa5"/>
-    <p:sldId xmlns:r="http://schemas.openxmlformats.org/officeDocument/2006/relationships" id="259" r:id="Ra35db27ebbd049a4"/>
-    <p:sldId xmlns:r="http://schemas.openxmlformats.org/officeDocument/2006/relationships" id="260" r:id="R18c98f908aa34fbd"/>
-    <p:sldId xmlns:r="http://schemas.openxmlformats.org/officeDocument/2006/relationships" id="261" r:id="R39d7109830a14fdd"/>
-    <p:sldId xmlns:r="http://schemas.openxmlformats.org/officeDocument/2006/relationships" id="262" r:id="R102b592e9f334c43"/>
-    <p:sldId xmlns:r="http://schemas.openxmlformats.org/officeDocument/2006/relationships" id="263" r:id="R1d9183dfd25a4744"/>
-    <p:sldId xmlns:r="http://schemas.openxmlformats.org/officeDocument/2006/relationships" id="264" r:id="R4df2321c64954a84"/>
-    <p:sldId xmlns:r="http://schemas.openxmlformats.org/officeDocument/2006/relationships" id="265" r:id="R9f2aaced60dd47ec"/>
-    <p:sldId xmlns:r="http://schemas.openxmlformats.org/officeDocument/2006/relationships" id="266" r:id="Rb08faee737fe4e60"/>
-    <p:sldId xmlns:r="http://schemas.openxmlformats.org/officeDocument/2006/relationships" id="267" r:id="R15380c17f7cc4ff4"/>
-    <p:sldId xmlns:r="http://schemas.openxmlformats.org/officeDocument/2006/relationships" id="268" r:id="Rbc6fae68dba547dc"/>
-    <p:sldId xmlns:r="http://schemas.openxmlformats.org/officeDocument/2006/relationships" id="269" r:id="R1a3bba41101c42e7"/>
-    <p:sldId xmlns:r="http://schemas.openxmlformats.org/officeDocument/2006/relationships" id="270" r:id="R5731dfa887ce44d7"/>
-    <p:sldId xmlns:r="http://schemas.openxmlformats.org/officeDocument/2006/relationships" id="271" r:id="R1616a3561bdb4ecf"/>
-    <p:sldId xmlns:r="http://schemas.openxmlformats.org/officeDocument/2006/relationships" id="272" r:id="R06b134e51800473c"/>
-    <p:sldId xmlns:r="http://schemas.openxmlformats.org/officeDocument/2006/relationships" id="273" r:id="Rd13b1a9bb84a4466"/>
+    <p:sldId xmlns:r="http://schemas.openxmlformats.org/officeDocument/2006/relationships" id="256" r:id="Rba0f4659f05441c3"/>
+    <p:sldId xmlns:r="http://schemas.openxmlformats.org/officeDocument/2006/relationships" id="257" r:id="R8be4303090c74aa0"/>
+    <p:sldId xmlns:r="http://schemas.openxmlformats.org/officeDocument/2006/relationships" id="258" r:id="R98e20e03c185439e"/>
+    <p:sldId xmlns:r="http://schemas.openxmlformats.org/officeDocument/2006/relationships" id="259" r:id="Rea922add53cd443d"/>
+    <p:sldId xmlns:r="http://schemas.openxmlformats.org/officeDocument/2006/relationships" id="260" r:id="R90250cf08e2b49ac"/>
+    <p:sldId xmlns:r="http://schemas.openxmlformats.org/officeDocument/2006/relationships" id="261" r:id="R8cb1d525a0d24165"/>
+    <p:sldId xmlns:r="http://schemas.openxmlformats.org/officeDocument/2006/relationships" id="262" r:id="Rb6a7938ad67e4da5"/>
+    <p:sldId xmlns:r="http://schemas.openxmlformats.org/officeDocument/2006/relationships" id="263" r:id="Rc9d1dd740c89402f"/>
+    <p:sldId xmlns:r="http://schemas.openxmlformats.org/officeDocument/2006/relationships" id="264" r:id="Rba45d019e2b14199"/>
+    <p:sldId xmlns:r="http://schemas.openxmlformats.org/officeDocument/2006/relationships" id="265" r:id="Ree9d6ca87ecf4678"/>
+    <p:sldId xmlns:r="http://schemas.openxmlformats.org/officeDocument/2006/relationships" id="266" r:id="R70947982f0b6435f"/>
+    <p:sldId xmlns:r="http://schemas.openxmlformats.org/officeDocument/2006/relationships" id="267" r:id="R2128d56063bb44a9"/>
+    <p:sldId xmlns:r="http://schemas.openxmlformats.org/officeDocument/2006/relationships" id="268" r:id="Rca88ebdb60b14a02"/>
+    <p:sldId xmlns:r="http://schemas.openxmlformats.org/officeDocument/2006/relationships" id="269" r:id="R7a796a5f7f8746b1"/>
+    <p:sldId xmlns:r="http://schemas.openxmlformats.org/officeDocument/2006/relationships" id="270" r:id="R01f8fa74c27a4c84"/>
+    <p:sldId xmlns:r="http://schemas.openxmlformats.org/officeDocument/2006/relationships" id="271" r:id="Rf5122e4fa92d45e7"/>
+    <p:sldId xmlns:r="http://schemas.openxmlformats.org/officeDocument/2006/relationships" id="272" r:id="R4a5911997f1d471f"/>
+    <p:sldId xmlns:r="http://schemas.openxmlformats.org/officeDocument/2006/relationships" id="273" r:id="Rb679a8bfe902463b"/>
   </p:sldIdLst>
   <p:sldSz cx="12192000" cy="6858000"/>
   <p:notesSz cx="6858000" cy="9144000"/>
@@ -4434,12 +4434,7 @@
           </a:p>
           <a:p xmlns:a="http://schemas.openxmlformats.org/drawingml/2006/main">
             <a:r>
-              <a:t>**Slide ID:**</a:t>
-            </a:r>
-          </a:p>
-          <a:p xmlns:a="http://schemas.openxmlformats.org/drawingml/2006/main">
-            <a:r>
-              <a:t>S57</a:t>
+              <a:t>Slide ID: S57</a:t>
             </a:r>
           </a:p>
           <a:p xmlns:a="http://schemas.openxmlformats.org/drawingml/2006/main">
@@ -4449,12 +4444,7 @@
           </a:p>
           <a:p xmlns:a="http://schemas.openxmlformats.org/drawingml/2006/main">
             <a:r>
-              <a:t>**Working Title:**</a:t>
-            </a:r>
-          </a:p>
-          <a:p xmlns:a="http://schemas.openxmlformats.org/drawingml/2006/main">
-            <a:r>
-              <a:t>Project는 바뀌고 Workflow는 남았다</a:t>
+              <a:t>Working Title: Project는 바뀌고 Workflow는 남았다</a:t>
             </a:r>
           </a:p>
           <a:p xmlns:a="http://schemas.openxmlformats.org/drawingml/2006/main">
@@ -4464,12 +4454,7 @@
           </a:p>
           <a:p xmlns:a="http://schemas.openxmlformats.org/drawingml/2006/main">
             <a:r>
-              <a:t>**ACT / Section:**</a:t>
-            </a:r>
-          </a:p>
-          <a:p xmlns:a="http://schemas.openxmlformats.org/drawingml/2006/main">
-            <a:r>
-              <a:t>ACT 4 / 4B  CONCEPTUAL STALE HARNESS / DEMO-04A</a:t>
+              <a:t>ACT / Section: ACT 4 / 4B  CONCEPTUAL STALE HARNESS / DEMO-04A</a:t>
             </a:r>
           </a:p>
           <a:p xmlns:a="http://schemas.openxmlformats.org/drawingml/2006/main">
@@ -4479,12 +4464,7 @@
           </a:p>
           <a:p xmlns:a="http://schemas.openxmlformats.org/drawingml/2006/main">
             <a:r>
-              <a:t>**Allocated Time:**</a:t>
-            </a:r>
-          </a:p>
-          <a:p xmlns:a="http://schemas.openxmlformats.org/drawingml/2006/main">
-            <a:r>
-              <a:t>4 minutes</a:t>
+              <a:t>Allocated Time: 4 minutes</a:t>
             </a:r>
           </a:p>
           <a:p xmlns:a="http://schemas.openxmlformats.org/drawingml/2006/main">
@@ -4494,12 +4474,7 @@
           </a:p>
           <a:p xmlns:a="http://schemas.openxmlformats.org/drawingml/2006/main">
             <a:r>
-              <a:t>**Mode Split:**</a:t>
-            </a:r>
-          </a:p>
-          <a:p xmlns:a="http://schemas.openxmlformats.org/drawingml/2006/main">
-            <a:r>
-              <a:t>Demo 2분 (VISUAL) + Case 2분</a:t>
+              <a:t>Mode Split: Demo 2분 (VISUAL) + Case 2분</a:t>
             </a:r>
           </a:p>
           <a:p xmlns:a="http://schemas.openxmlformats.org/drawingml/2006/main">
@@ -4509,12 +4484,7 @@
           </a:p>
           <a:p xmlns:a="http://schemas.openxmlformats.org/drawingml/2006/main">
             <a:r>
-              <a:t>**Primary Message:**</a:t>
-            </a:r>
-          </a:p>
-          <a:p xmlns:a="http://schemas.openxmlformats.org/drawingml/2006/main">
-            <a:r>
-              <a:t>모듈 연결 동작까지 검증해야 하는 가상 프로젝트에서 공식 기준은 단위+통합 테스트로 넓어졌지만 재사용 Workflow에는 단위 테스트 지시가 남아 있다. 이는 지시 범위의 차이다.</a:t>
+              <a:t>Primary Message: 모듈 연결 동작까지 검증해야 하는 가상 프로젝트에서 공식 기준은 단위+통합 테스트로 넓어졌지만 재사용 Workflow에는 단위 테스트 지시가 남아 있다. 이는 지시 범위의 차이다.</a:t>
             </a:r>
           </a:p>
           <a:p xmlns:a="http://schemas.openxmlformats.org/drawingml/2006/main">
@@ -4524,12 +4494,7 @@
           </a:p>
           <a:p xmlns:a="http://schemas.openxmlformats.org/drawingml/2006/main">
             <a:r>
-              <a:t>**Opening Question:**</a:t>
-            </a:r>
-          </a:p>
-          <a:p xmlns:a="http://schemas.openxmlformats.org/drawingml/2006/main">
-            <a:r>
-              <a:t>“다음 Task에서 old workflow를 따르면 누가 틀린 걸까?”</a:t>
+              <a:t>Opening Question: “다음 Task에서 old workflow를 따르면 누가 틀린 걸까?”</a:t>
             </a:r>
           </a:p>
           <a:p xmlns:a="http://schemas.openxmlformats.org/drawingml/2006/main">
@@ -4539,7 +4504,12 @@
           </a:p>
           <a:p xmlns:a="http://schemas.openxmlformats.org/drawingml/2006/main">
             <a:r>
-              <a:t>**Speaker Flow:**</a:t>
+              <a:t>Speaker Flow:</a:t>
+            </a:r>
+          </a:p>
+          <a:p xmlns:a="http://schemas.openxmlformats.org/drawingml/2006/main">
+            <a:r>
+              <a:t/>
             </a:r>
           </a:p>
           <a:p xmlns:a="http://schemas.openxmlformats.org/drawingml/2006/main">
@@ -4549,7 +4519,7 @@
           </a:p>
           <a:p xmlns:a="http://schemas.openxmlformats.org/drawingml/2006/main">
             <a:r>
-              <a:t>2. (1:00–2:00 / Demo) 왼쪽 현재 기준의 단위+통합 테스트와 오른쪽 재사용 Workflow의 단위 테스트 지시를 대조한다.</a:t>
+              <a:t>2. (1:00–2:00 / Demo) 왼쪽 A/B 각각의 박스와 둘 사이 연결까지 감싼 통합 범위를 가리킨다. 오른쪽에는 같은 모듈과 연결이 있지만 재사용 지시는 단위 테스트만 요구한다. 두 그림은 실행 결과가 아니라 지시 범위의 차이다.</a:t>
             </a:r>
           </a:p>
           <a:p xmlns:a="http://schemas.openxmlformats.org/drawingml/2006/main">
@@ -4569,12 +4539,7 @@
           </a:p>
           <a:p xmlns:a="http://schemas.openxmlformats.org/drawingml/2006/main">
             <a:r>
-              <a:t>**Evidence / Source:**</a:t>
-            </a:r>
-          </a:p>
-          <a:p xmlns:a="http://schemas.openxmlformats.org/drawingml/2006/main">
-            <a:r>
-              <a:t>DEMO-04A / DEC-0021 / BEAT-038–039 / CONCEPTUAL. 단위+통합 테스트 가상 설정은 발표용 Pilot에 대한 최신 사용자 승인으로 확정됐다. 실제 Repository 이력이나 Trial 근거가 추가된 것은 아니다.</a:t>
+              <a:t>Evidence / Source: DEMO-04A / DEC-0021 / BEAT-038–039 / CONCEPTUAL. 단위+통합 테스트 가상 설정은 발표용 Pilot에 대한 최신 사용자 승인으로 확정됐다. 실제 Repository 이력이나 Trial 근거가 추가된 것은 아니다. 편집 가능한 native 범위 도식: production/source/presentation-revision/test-scope-visual.mjs. 모듈 A/B는 사례를 설명하는 일반 표기이며 실제 graypipe 모듈을 식별하지 않는다.</a:t>
             </a:r>
           </a:p>
           <a:p xmlns:a="http://schemas.openxmlformats.org/drawingml/2006/main">
@@ -4584,12 +4549,7 @@
           </a:p>
           <a:p xmlns:a="http://schemas.openxmlformats.org/drawingml/2006/main">
             <a:r>
-              <a:t>**Claim Boundary:**</a:t>
-            </a:r>
-          </a:p>
-          <a:p xmlns:a="http://schemas.openxmlformats.org/drawingml/2006/main">
-            <a:r>
-              <a:t>승인된 가상 설정이다. 실제 Repository migration, 기존 graypipe Skill, Agent 실행, 테스트 누락 또는 PASS/FAIL 결과를 뜻하지 않는다. 지시의 범위를 비교하며 실제 실행 결과는 보여주지 않는다.</a:t>
+              <a:t>Claim Boundary: 승인된 가상 설정이다. 실제 Repository migration, 기존 graypipe Skill, Agent 실행, 테스트 누락 또는 PASS/FAIL 결과를 뜻하지 않는다. 지시의 범위를 비교하며 실제 실행 결과는 보여주지 않는다.</a:t>
             </a:r>
           </a:p>
           <a:p xmlns:a="http://schemas.openxmlformats.org/drawingml/2006/main">
@@ -4599,12 +4559,7 @@
           </a:p>
           <a:p xmlns:a="http://schemas.openxmlformats.org/drawingml/2006/main">
             <a:r>
-              <a:t>**Beginner Explanation:**</a:t>
-            </a:r>
-          </a:p>
-          <a:p xmlns:a="http://schemas.openxmlformats.org/drawingml/2006/main">
-            <a:r>
-              <a:t>Agent가 따르는 지침이 Project의 현재 절차와 맞는지 살핀다.</a:t>
+              <a:t>Beginner Explanation: Agent가 따르는 지침이 Project의 현재 절차와 맞는지 살핀다.</a:t>
             </a:r>
           </a:p>
           <a:p xmlns:a="http://schemas.openxmlformats.org/drawingml/2006/main">
@@ -4614,12 +4569,7 @@
           </a:p>
           <a:p xmlns:a="http://schemas.openxmlformats.org/drawingml/2006/main">
             <a:r>
-              <a:t>**Advanced Insight:**</a:t>
-            </a:r>
-          </a:p>
-          <a:p xmlns:a="http://schemas.openxmlformats.org/drawingml/2006/main">
-            <a:r>
-              <a:t>Project source의 변화와 stale artifact의 위치를 분리해 본다.</a:t>
+              <a:t>Advanced Insight: Project source의 변화와 stale artifact의 위치를 분리해 본다.</a:t>
             </a:r>
           </a:p>
           <a:p xmlns:a="http://schemas.openxmlformats.org/drawingml/2006/main">
@@ -4629,12 +4579,7 @@
           </a:p>
           <a:p xmlns:a="http://schemas.openxmlformats.org/drawingml/2006/main">
             <a:r>
-              <a:t>**C++ Vision Bridge:**</a:t>
-            </a:r>
-          </a:p>
-          <a:p xmlns:a="http://schemas.openxmlformats.org/drawingml/2006/main">
-            <a:r>
-              <a:t>없음.</a:t>
+              <a:t>C++ Vision Bridge: 없음.</a:t>
             </a:r>
           </a:p>
           <a:p xmlns:a="http://schemas.openxmlformats.org/drawingml/2006/main">
@@ -4644,12 +4589,7 @@
           </a:p>
           <a:p xmlns:a="http://schemas.openxmlformats.org/drawingml/2006/main">
             <a:r>
-              <a:t>**Demo Operation:**</a:t>
-            </a:r>
-          </a:p>
-          <a:p xmlns:a="http://schemas.openxmlformats.org/drawingml/2006/main">
-            <a:r>
-              <a:t>production/ACT_4.pptx의 S57와 production/preview/act4/S57.png 개념 도식을 사용한다. 구체적 명령·Runner 구현·테스트 수·실행 캡처를 추가하지 않는다. 현재 기준과 이전 Workflow 지시를 차례로 가리킨다.</a:t>
+              <a:t>Demo Operation: production/ACT_4.pptx의 S57와 production/preview/act4/S57.png 개념 도식을 사용한다. 구체적 명령·Runner 구현·테스트 수·실행 캡처를 추가하지 않는다. 각 모듈의 범위→왼쪽의 연결을 포함한 통합 범위→오른쪽에 남은 단위 테스트 지시를 차례로 가리킨다. 모듈의 실제 테스트가 실행됐거나 통합 테스트를 누락했다고 말하지 않는다.</a:t>
             </a:r>
           </a:p>
           <a:p xmlns:a="http://schemas.openxmlformats.org/drawingml/2006/main">
@@ -4659,12 +4599,7 @@
           </a:p>
           <a:p xmlns:a="http://schemas.openxmlformats.org/drawingml/2006/main">
             <a:r>
-              <a:t>**Audience Interaction:**</a:t>
-            </a:r>
-          </a:p>
-          <a:p xmlns:a="http://schemas.openxmlformats.org/drawingml/2006/main">
-            <a:r>
-              <a:t>무엇이 바뀌었고 무엇이 남았는지 잠시 비교한다. Agent 탓이나 특정 실패를 가정하지 않는다.</a:t>
+              <a:t>Audience Interaction: 무엇이 바뀌었고 무엇이 남았는지 잠시 비교한다. Agent 탓이나 특정 실패를 가정하지 않는다.</a:t>
             </a:r>
           </a:p>
           <a:p xmlns:a="http://schemas.openxmlformats.org/drawingml/2006/main">
@@ -4674,12 +4609,7 @@
           </a:p>
           <a:p xmlns:a="http://schemas.openxmlformats.org/drawingml/2006/main">
             <a:r>
-              <a:t>**Transition:**</a:t>
-            </a:r>
-          </a:p>
-          <a:p xmlns:a="http://schemas.openxmlformats.org/drawingml/2006/main">
-            <a:r>
-              <a:t>“이번 요청에 통합 테스트도 확인해 달라고 쓰면, 다음 작업이 읽을 Workflow까지 바뀔까요?” S58로 이동한다.</a:t>
+              <a:t>Transition: “이번 요청에 통합 테스트도 확인해 달라고 쓰면, 다음 작업이 읽을 Workflow까지 바뀔까요?” S58로 이동한다.</a:t>
             </a:r>
           </a:p>
           <a:p xmlns:a="http://schemas.openxmlformats.org/drawingml/2006/main">
@@ -4689,12 +4619,7 @@
           </a:p>
           <a:p xmlns:a="http://schemas.openxmlformats.org/drawingml/2006/main">
             <a:r>
-              <a:t>**Time Management:**</a:t>
-            </a:r>
-          </a:p>
-          <a:p xmlns:a="http://schemas.openxmlformats.org/drawingml/2006/main">
-            <a:r>
-              <a:t>Demo 2분은 도식 공개에, Case 2분은 stale 간극을 해석하는 데 쓴다.</a:t>
+              <a:t>Time Management: Demo 2분은 도식 공개에, Case 2분은 stale 간극을 해석하는 데 쓴다.</a:t>
             </a:r>
           </a:p>
           <a:p xmlns:a="http://schemas.openxmlformats.org/drawingml/2006/main">
@@ -4704,12 +4629,7 @@
           </a:p>
           <a:p xmlns:a="http://schemas.openxmlformats.org/drawingml/2006/main">
             <a:r>
-              <a:t>**Fallback:**</a:t>
-            </a:r>
-          </a:p>
-          <a:p xmlns:a="http://schemas.openxmlformats.org/drawingml/2006/main">
-            <a:r>
-              <a:t>LOCAL STATIC ARTIFACT — production/ACT_4.pptx의 S57와 production/preview/act4/S57.png를 사용한다. 원본 실행 캡처 또는 새로운 Trial 결과로 표현하지 않는다. 로컬 렌더링 검토 결과는 통합 평가 문서에 기록한다.</a:t>
+              <a:t>Fallback: LOCAL STATIC ARTIFACT — production/ACT_4.pptx의 S57와 production/preview/act4/S57.png를 사용한다. 원본 실행 캡처 또는 새로운 Trial 결과로 표현하지 않는다. 로컬 렌더링 검토 결과는 통합 평가 문서에 기록한다.</a:t>
             </a:r>
           </a:p>
           <a:p xmlns:a="http://schemas.openxmlformats.org/drawingml/2006/main">
@@ -4719,12 +4639,7 @@
           </a:p>
           <a:p xmlns:a="http://schemas.openxmlformats.org/drawingml/2006/main">
             <a:r>
-              <a:t>**Validation Status:**</a:t>
-            </a:r>
-          </a:p>
-          <a:p xmlns:a="http://schemas.openxmlformats.org/drawingml/2006/main">
-            <a:r>
-              <a:t>REVIEWED — 원문·Claim 경계, 화면의 설명 순서와 운영 지침을 대조했다. 최종 PPT/Notes/PNG 대조 결과는 production/evaluation/FULL_DECK_PRESENTATION_REVISION.md에 기록한다. Windows PowerPoint, 발표 PC 글꼴, 교육장 투사, 실제 시간 리허설은 UNVERIFIED.</a:t>
+              <a:t>Validation Status: REVIEWED — 승인된 전체 이미지 후보의 반영과 로컬 렌더링 결과는 production/evaluation/FULL_DECK_IMAGE_EXPANSION.md에 기록한다. Windows PowerPoint, 발표 PC 글꼴, 교육장 투사, 실제 시간 리허설은 UNVERIFIED.</a:t>
             </a:r>
           </a:p>
         </p:txBody>
@@ -6956,7 +6871,7 @@
           <p:cNvPr id="3" name="Title">
             <a:extLst xmlns:a="http://schemas.openxmlformats.org/drawingml/2006/main">
               <a:ext uri="{FF2B5EF4-FFF2-40B4-BE49-F238E27FC236}">
-                <a16:creationId xmlns:a16="http://schemas.microsoft.com/office/drawing/2014/main" id="{3DA29F06-16A8-4C26-8A72-6FB275823F07}"/>
+                <a16:creationId xmlns:a16="http://schemas.microsoft.com/office/drawing/2014/main" id="{9299EA83-5D2F-4E11-AD00-7B23BB22321C}"/>
               </a:ext>
             </a:extLst>
           </p:cNvPr>
@@ -7185,7 +7100,7 @@
           <p:cNvPr id="2" name="Subtitle">
             <a:extLst xmlns:a="http://schemas.openxmlformats.org/drawingml/2006/main">
               <a:ext uri="{FF2B5EF4-FFF2-40B4-BE49-F238E27FC236}">
-                <a16:creationId xmlns:a16="http://schemas.microsoft.com/office/drawing/2014/main" id="{811CBD8C-5B75-4055-9766-36ABD2D42F89}"/>
+                <a16:creationId xmlns:a16="http://schemas.microsoft.com/office/drawing/2014/main" id="{27D63821-F2C6-4670-9A53-3CD668DA59CB}"/>
               </a:ext>
             </a:extLst>
           </p:cNvPr>
@@ -7431,7 +7346,7 @@
           <p:cNvPr id="2" name="Section title">
             <a:extLst xmlns:a="http://schemas.openxmlformats.org/drawingml/2006/main">
               <a:ext uri="{FF2B5EF4-FFF2-40B4-BE49-F238E27FC236}">
-                <a16:creationId xmlns:a16="http://schemas.microsoft.com/office/drawing/2014/main" id="{EBBBF5AC-FA87-4F8E-9392-781D6B98D142}"/>
+                <a16:creationId xmlns:a16="http://schemas.microsoft.com/office/drawing/2014/main" id="{69186F08-452B-4C51-8093-E51D41C0A0D6}"/>
               </a:ext>
             </a:extLst>
           </p:cNvPr>
@@ -7677,7 +7592,7 @@
           <p:cNvPr id="3" name="Title">
             <a:extLst xmlns:a="http://schemas.openxmlformats.org/drawingml/2006/main">
               <a:ext uri="{FF2B5EF4-FFF2-40B4-BE49-F238E27FC236}">
-                <a16:creationId xmlns:a16="http://schemas.microsoft.com/office/drawing/2014/main" id="{FB0836DD-B2DB-413B-BCA7-8B6DAFFCA2A4}"/>
+                <a16:creationId xmlns:a16="http://schemas.microsoft.com/office/drawing/2014/main" id="{9A134F7E-CC72-4AF3-AE3C-D8EF50ED30E6}"/>
               </a:ext>
             </a:extLst>
           </p:cNvPr>
@@ -7906,7 +7821,7 @@
           <p:cNvPr id="2" name="Body">
             <a:extLst xmlns:a="http://schemas.openxmlformats.org/drawingml/2006/main">
               <a:ext uri="{FF2B5EF4-FFF2-40B4-BE49-F238E27FC236}">
-                <a16:creationId xmlns:a16="http://schemas.microsoft.com/office/drawing/2014/main" id="{49F05725-1F20-4704-844F-6B9BC5CB6FD9}"/>
+                <a16:creationId xmlns:a16="http://schemas.microsoft.com/office/drawing/2014/main" id="{E1A1F04E-2B30-4DA2-A4A0-5485A624F745}"/>
               </a:ext>
             </a:extLst>
           </p:cNvPr>
@@ -8152,7 +8067,7 @@
           <p:cNvPr id="4" name="Title">
             <a:extLst xmlns:a="http://schemas.openxmlformats.org/drawingml/2006/main">
               <a:ext uri="{FF2B5EF4-FFF2-40B4-BE49-F238E27FC236}">
-                <a16:creationId xmlns:a16="http://schemas.microsoft.com/office/drawing/2014/main" id="{B0F53006-C28E-4EC2-8AD7-2E86E1D68F6A}"/>
+                <a16:creationId xmlns:a16="http://schemas.microsoft.com/office/drawing/2014/main" id="{C9968CD7-5F3F-4C21-8262-D2D583EF617E}"/>
               </a:ext>
             </a:extLst>
           </p:cNvPr>
@@ -8381,7 +8296,7 @@
           <p:cNvPr id="2" name="Left column">
             <a:extLst xmlns:a="http://schemas.openxmlformats.org/drawingml/2006/main">
               <a:ext uri="{FF2B5EF4-FFF2-40B4-BE49-F238E27FC236}">
-                <a16:creationId xmlns:a16="http://schemas.microsoft.com/office/drawing/2014/main" id="{EF07158B-4FD2-45EC-ADF9-112DC1728E4C}"/>
+                <a16:creationId xmlns:a16="http://schemas.microsoft.com/office/drawing/2014/main" id="{36F5E373-3CD2-48AE-B365-B8CA15F2B9C3}"/>
               </a:ext>
             </a:extLst>
           </p:cNvPr>
@@ -8610,7 +8525,7 @@
           <p:cNvPr id="3" name="Right column">
             <a:extLst xmlns:a="http://schemas.openxmlformats.org/drawingml/2006/main">
               <a:ext uri="{FF2B5EF4-FFF2-40B4-BE49-F238E27FC236}">
-                <a16:creationId xmlns:a16="http://schemas.microsoft.com/office/drawing/2014/main" id="{6DC33407-8D5B-44C3-80E8-0FEC8021BB34}"/>
+                <a16:creationId xmlns:a16="http://schemas.microsoft.com/office/drawing/2014/main" id="{46D9B7D3-5702-4226-8BD4-2166124E3F25}"/>
               </a:ext>
             </a:extLst>
           </p:cNvPr>
@@ -8856,7 +8771,7 @@
           <p:cNvPr id="3" name="Title">
             <a:extLst xmlns:a="http://schemas.openxmlformats.org/drawingml/2006/main">
               <a:ext uri="{FF2B5EF4-FFF2-40B4-BE49-F238E27FC236}">
-                <a16:creationId xmlns:a16="http://schemas.microsoft.com/office/drawing/2014/main" id="{925651EB-1531-4FD3-BEFD-D77B253934D3}"/>
+                <a16:creationId xmlns:a16="http://schemas.microsoft.com/office/drawing/2014/main" id="{56DE66A4-EE23-49BA-8D47-543BE522E217}"/>
               </a:ext>
             </a:extLst>
           </p:cNvPr>
@@ -9085,7 +9000,7 @@
           <p:cNvPr id="2" name="Left column">
             <a:extLst xmlns:a="http://schemas.openxmlformats.org/drawingml/2006/main">
               <a:ext uri="{FF2B5EF4-FFF2-40B4-BE49-F238E27FC236}">
-                <a16:creationId xmlns:a16="http://schemas.microsoft.com/office/drawing/2014/main" id="{27BF8E69-3CFA-471A-B02A-55CE468297D2}"/>
+                <a16:creationId xmlns:a16="http://schemas.microsoft.com/office/drawing/2014/main" id="{3E0FD09A-FC99-4613-8CD0-772C7D3F6455}"/>
               </a:ext>
             </a:extLst>
           </p:cNvPr>
@@ -9352,12 +9267,12 @@
   </p:cSld>
   <p:clrMap bg1="lt1" tx1="dk1" bg2="lt2" tx2="dk2" accent1="accent1" accent2="accent2" accent3="accent3" accent4="accent4" accent5="accent5" accent6="accent6" hlink="hlink" folHlink="folHlink"/>
   <p:sldLayoutIdLst>
-    <p:sldLayoutId xmlns:r="http://schemas.openxmlformats.org/officeDocument/2006/relationships" id="2147483649" r:id="R32b62ff314154f62"/>
-    <p:sldLayoutId xmlns:r="http://schemas.openxmlformats.org/officeDocument/2006/relationships" id="2147483650" r:id="R3e80f07d47fd4ba3"/>
-    <p:sldLayoutId xmlns:r="http://schemas.openxmlformats.org/officeDocument/2006/relationships" id="2147483651" r:id="R130f9241913f4099"/>
-    <p:sldLayoutId xmlns:r="http://schemas.openxmlformats.org/officeDocument/2006/relationships" id="2147483652" r:id="R7f4ca49c3193454d"/>
-    <p:sldLayoutId xmlns:r="http://schemas.openxmlformats.org/officeDocument/2006/relationships" id="2147483653" r:id="R3b25adcb62924d67"/>
-    <p:sldLayoutId xmlns:r="http://schemas.openxmlformats.org/officeDocument/2006/relationships" id="2147483654" r:id="R2069ab5e617b44c2"/>
+    <p:sldLayoutId xmlns:r="http://schemas.openxmlformats.org/officeDocument/2006/relationships" id="2147483649" r:id="R999d8fd3e43a407f"/>
+    <p:sldLayoutId xmlns:r="http://schemas.openxmlformats.org/officeDocument/2006/relationships" id="2147483650" r:id="Rdc79382fd9b44eb5"/>
+    <p:sldLayoutId xmlns:r="http://schemas.openxmlformats.org/officeDocument/2006/relationships" id="2147483651" r:id="R2b178e056ba641d2"/>
+    <p:sldLayoutId xmlns:r="http://schemas.openxmlformats.org/officeDocument/2006/relationships" id="2147483652" r:id="R5663d31381be4873"/>
+    <p:sldLayoutId xmlns:r="http://schemas.openxmlformats.org/officeDocument/2006/relationships" id="2147483653" r:id="Rc13c928ed2484052"/>
+    <p:sldLayoutId xmlns:r="http://schemas.openxmlformats.org/officeDocument/2006/relationships" id="2147483654" r:id="R8a043cc1bb0742ee"/>
   </p:sldLayoutIdLst>
   <p:txStyles>
     <p:titleStyle>
@@ -9908,7 +9823,7 @@
           <p:cNvPr id="18" name="ACT 4 · 확인된 제품 결과">
             <a:extLst xmlns:a="http://schemas.openxmlformats.org/drawingml/2006/main">
               <a:ext uri="{FF2B5EF4-FFF2-40B4-BE49-F238E27FC236}">
-                <a16:creationId xmlns:a16="http://schemas.microsoft.com/office/drawing/2014/main" id="{10512AB2-B22E-4D6B-8DBD-9FB4DF36CE67}"/>
+                <a16:creationId xmlns:a16="http://schemas.microsoft.com/office/drawing/2014/main" id="{E3504AE8-0096-4A2D-B84B-7B9779878CB7}"/>
               </a:ext>
             </a:extLst>
           </p:cNvPr>
@@ -10066,7 +9981,7 @@
           <p:cNvPr id="2" name="S55">
             <a:extLst xmlns:a="http://schemas.openxmlformats.org/drawingml/2006/main">
               <a:ext uri="{FF2B5EF4-FFF2-40B4-BE49-F238E27FC236}">
-                <a16:creationId xmlns:a16="http://schemas.microsoft.com/office/drawing/2014/main" id="{D8C10507-41AA-49D8-8E77-5A5D8E956720}"/>
+                <a16:creationId xmlns:a16="http://schemas.microsoft.com/office/drawing/2014/main" id="{38BE8121-63BB-4026-BB85-B27F41B04F6F}"/>
               </a:ext>
             </a:extLst>
           </p:cNvPr>
@@ -10224,7 +10139,7 @@
           <p:cNvPr id="3" name="여기까지는 잘 동작했다">
             <a:extLst xmlns:a="http://schemas.openxmlformats.org/drawingml/2006/main">
               <a:ext uri="{FF2B5EF4-FFF2-40B4-BE49-F238E27FC236}">
-                <a16:creationId xmlns:a16="http://schemas.microsoft.com/office/drawing/2014/main" id="{8C5E13DA-7776-4868-8807-6FC7D08C33EC}"/>
+                <a16:creationId xmlns:a16="http://schemas.microsoft.com/office/drawing/2014/main" id="{5B518D37-C3B7-4976-88D7-E392AE1B2B90}"/>
               </a:ext>
             </a:extLst>
           </p:cNvPr>
@@ -10382,7 +10297,7 @@
           <p:cNvPr id="4" name="">
             <a:extLst xmlns:a="http://schemas.openxmlformats.org/drawingml/2006/main">
               <a:ext uri="{FF2B5EF4-FFF2-40B4-BE49-F238E27FC236}">
-                <a16:creationId xmlns:a16="http://schemas.microsoft.com/office/drawing/2014/main" id="{EB3113C2-DFD2-461B-8471-B6C7FEC6C79F}"/>
+                <a16:creationId xmlns:a16="http://schemas.microsoft.com/office/drawing/2014/main" id="{98C01255-6CAA-4244-8A84-726BCF5CDCF0}"/>
               </a:ext>
             </a:extLst>
           </p:cNvPr>
@@ -10413,7 +10328,7 @@
           <p:cNvPr id="5" name="STATE-04-PERF · image_statistics · 실제 기록 요약">
             <a:extLst xmlns:a="http://schemas.openxmlformats.org/drawingml/2006/main">
               <a:ext uri="{FF2B5EF4-FFF2-40B4-BE49-F238E27FC236}">
-                <a16:creationId xmlns:a16="http://schemas.microsoft.com/office/drawing/2014/main" id="{E695BEFE-286C-4E1E-BD65-B8079557DD54}"/>
+                <a16:creationId xmlns:a16="http://schemas.microsoft.com/office/drawing/2014/main" id="{980968E4-1745-4AFC-A682-4AB270C782A9}"/>
               </a:ext>
             </a:extLst>
           </p:cNvPr>
@@ -10571,7 +10486,7 @@
           <p:cNvPr id="6" name="기록된 입력·코드·환경의 결과이며, 뒤의 가상 사례와 별개다.">
             <a:extLst xmlns:a="http://schemas.openxmlformats.org/drawingml/2006/main">
               <a:ext uri="{FF2B5EF4-FFF2-40B4-BE49-F238E27FC236}">
-                <a16:creationId xmlns:a16="http://schemas.microsoft.com/office/drawing/2014/main" id="{A201454B-CFED-497D-9855-F1858A534F9B}"/>
+                <a16:creationId xmlns:a16="http://schemas.microsoft.com/office/drawing/2014/main" id="{506F826A-F82B-4593-9D34-852AE6EF20AD}"/>
               </a:ext>
             </a:extLst>
           </p:cNvPr>
@@ -10729,7 +10644,7 @@
           <p:cNvPr id="7" name="작업을 맡기고, 결과를 확인할 수 있었다">
             <a:extLst xmlns:a="http://schemas.openxmlformats.org/drawingml/2006/main">
               <a:ext uri="{FF2B5EF4-FFF2-40B4-BE49-F238E27FC236}">
-                <a16:creationId xmlns:a16="http://schemas.microsoft.com/office/drawing/2014/main" id="{2066FE73-AD2F-42C1-872A-64F7582BF0B3}"/>
+                <a16:creationId xmlns:a16="http://schemas.microsoft.com/office/drawing/2014/main" id="{4FADE44F-E8E7-48DA-90F6-86D509864EC3}"/>
               </a:ext>
             </a:extLst>
           </p:cNvPr>
@@ -10887,7 +10802,7 @@
           <p:cNvPr id="8" name="">
             <a:extLst xmlns:a="http://schemas.openxmlformats.org/drawingml/2006/main">
               <a:ext uri="{FF2B5EF4-FFF2-40B4-BE49-F238E27FC236}">
-                <a16:creationId xmlns:a16="http://schemas.microsoft.com/office/drawing/2014/main" id="{D0FF5BC8-CA1E-47BC-9F91-2F6033664E2C}"/>
+                <a16:creationId xmlns:a16="http://schemas.microsoft.com/office/drawing/2014/main" id="{C4FF7CD5-5163-4B47-96B6-42B8E7E64BA2}"/>
               </a:ext>
             </a:extLst>
           </p:cNvPr>
@@ -10918,7 +10833,7 @@
           <p:cNvPr id="9" name="동작 계약">
             <a:extLst xmlns:a="http://schemas.openxmlformats.org/drawingml/2006/main">
               <a:ext uri="{FF2B5EF4-FFF2-40B4-BE49-F238E27FC236}">
-                <a16:creationId xmlns:a16="http://schemas.microsoft.com/office/drawing/2014/main" id="{037DF208-7C3C-483D-86F3-ECAB26C76A96}"/>
+                <a16:creationId xmlns:a16="http://schemas.microsoft.com/office/drawing/2014/main" id="{13E7F9A2-DC48-4043-B550-53D81A774C15}"/>
               </a:ext>
             </a:extLst>
           </p:cNvPr>
@@ -11076,7 +10991,7 @@
           <p:cNvPr id="10" name="">
             <a:extLst xmlns:a="http://schemas.openxmlformats.org/drawingml/2006/main">
               <a:ext uri="{FF2B5EF4-FFF2-40B4-BE49-F238E27FC236}">
-                <a16:creationId xmlns:a16="http://schemas.microsoft.com/office/drawing/2014/main" id="{A3129E03-0BED-4A8D-B895-9A3B5F3926F1}"/>
+                <a16:creationId xmlns:a16="http://schemas.microsoft.com/office/drawing/2014/main" id="{8CC6EDCA-EFBF-4BE0-B63F-DA5D9E9DEB05}"/>
               </a:ext>
             </a:extLst>
           </p:cNvPr>
@@ -11107,7 +11022,7 @@
           <p:cNvPr id="11" name="테스트">
             <a:extLst xmlns:a="http://schemas.openxmlformats.org/drawingml/2006/main">
               <a:ext uri="{FF2B5EF4-FFF2-40B4-BE49-F238E27FC236}">
-                <a16:creationId xmlns:a16="http://schemas.microsoft.com/office/drawing/2014/main" id="{9120D229-C77E-49DF-9FDA-8BC1D7A08D01}"/>
+                <a16:creationId xmlns:a16="http://schemas.microsoft.com/office/drawing/2014/main" id="{9E3B394B-C212-4DBE-8B9E-E8F86627056F}"/>
               </a:ext>
             </a:extLst>
           </p:cNvPr>
@@ -11265,7 +11180,7 @@
           <p:cNvPr id="12" name="">
             <a:extLst xmlns:a="http://schemas.openxmlformats.org/drawingml/2006/main">
               <a:ext uri="{FF2B5EF4-FFF2-40B4-BE49-F238E27FC236}">
-                <a16:creationId xmlns:a16="http://schemas.microsoft.com/office/drawing/2014/main" id="{D3CF36B5-B726-485D-B554-450D21603A16}"/>
+                <a16:creationId xmlns:a16="http://schemas.microsoft.com/office/drawing/2014/main" id="{87DED274-BE95-44F6-B613-05FEB7C4F609}"/>
               </a:ext>
             </a:extLst>
           </p:cNvPr>
@@ -11296,7 +11211,7 @@
           <p:cNvPr id="13" name="성능 측정">
             <a:extLst xmlns:a="http://schemas.openxmlformats.org/drawingml/2006/main">
               <a:ext uri="{FF2B5EF4-FFF2-40B4-BE49-F238E27FC236}">
-                <a16:creationId xmlns:a16="http://schemas.microsoft.com/office/drawing/2014/main" id="{0CFE0925-8930-4DAF-9E3C-72FCBFAEBA8D}"/>
+                <a16:creationId xmlns:a16="http://schemas.microsoft.com/office/drawing/2014/main" id="{275B665C-BEAE-4E4C-9F2A-7A690220AB29}"/>
               </a:ext>
             </a:extLst>
           </p:cNvPr>
@@ -11454,7 +11369,7 @@
           <p:cNvPr id="14" name="입력·출력 조건 확인">
             <a:extLst xmlns:a="http://schemas.openxmlformats.org/drawingml/2006/main">
               <a:ext uri="{FF2B5EF4-FFF2-40B4-BE49-F238E27FC236}">
-                <a16:creationId xmlns:a16="http://schemas.microsoft.com/office/drawing/2014/main" id="{06E26F30-CAA0-407D-9D41-4279955B47E6}"/>
+                <a16:creationId xmlns:a16="http://schemas.microsoft.com/office/drawing/2014/main" id="{B160318B-A749-4CCD-BA33-45FD1305C237}"/>
               </a:ext>
             </a:extLst>
           </p:cNvPr>
@@ -11612,7 +11527,7 @@
           <p:cNvPr id="15" name="전체 테스트 11/11">
             <a:extLst xmlns:a="http://schemas.openxmlformats.org/drawingml/2006/main">
               <a:ext uri="{FF2B5EF4-FFF2-40B4-BE49-F238E27FC236}">
-                <a16:creationId xmlns:a16="http://schemas.microsoft.com/office/drawing/2014/main" id="{2A06A389-05CE-4C2A-93E5-19343000BB8D}"/>
+                <a16:creationId xmlns:a16="http://schemas.microsoft.com/office/drawing/2014/main" id="{BA18B499-2845-4408-9184-6C5E33E49D4C}"/>
               </a:ext>
             </a:extLst>
           </p:cNvPr>
@@ -11770,7 +11685,7 @@
           <p:cNvPr id="16" name="Benchmark guard 확인">
             <a:extLst xmlns:a="http://schemas.openxmlformats.org/drawingml/2006/main">
               <a:ext uri="{FF2B5EF4-FFF2-40B4-BE49-F238E27FC236}">
-                <a16:creationId xmlns:a16="http://schemas.microsoft.com/office/drawing/2014/main" id="{0AE9C591-CD90-4CB4-AF7A-A76F11B90B9B}"/>
+                <a16:creationId xmlns:a16="http://schemas.microsoft.com/office/drawing/2014/main" id="{30A641AD-FDAB-4A4F-A378-056FF5F785B8}"/>
               </a:ext>
             </a:extLst>
           </p:cNvPr>
@@ -11928,7 +11843,7 @@
           <p:cNvPr id="17" name="그렇다면 프로젝트가 바뀐 뒤에도 맞을까?">
             <a:extLst xmlns:a="http://schemas.openxmlformats.org/drawingml/2006/main">
               <a:ext uri="{FF2B5EF4-FFF2-40B4-BE49-F238E27FC236}">
-                <a16:creationId xmlns:a16="http://schemas.microsoft.com/office/drawing/2014/main" id="{BF166DC9-52FE-4DDC-9853-C3D40F4C09E0}"/>
+                <a16:creationId xmlns:a16="http://schemas.microsoft.com/office/drawing/2014/main" id="{1F035698-6876-4A4A-A700-24EF08E513FE}"/>
               </a:ext>
             </a:extLst>
           </p:cNvPr>
@@ -12084,7 +11999,7 @@
     </p:spTree>
     <p:extLst>
       <p:ext uri="{BB962C8B-B14F-4D97-AF65-F5344CB8AC3E}">
-        <p14:creationId xmlns:p14="http://schemas.microsoft.com/office/powerpoint/2010/main" val="440390482"/>
+        <p14:creationId xmlns:p14="http://schemas.microsoft.com/office/powerpoint/2010/main" val="150195447"/>
       </p:ext>
     </p:extLst>
   </p:cSld>
@@ -12115,7 +12030,7 @@
           <p:cNvPr id="24" name="ACT 4 · CONCEPTUAL / 평가 설계">
             <a:extLst xmlns:a="http://schemas.openxmlformats.org/drawingml/2006/main">
               <a:ext uri="{FF2B5EF4-FFF2-40B4-BE49-F238E27FC236}">
-                <a16:creationId xmlns:a16="http://schemas.microsoft.com/office/drawing/2014/main" id="{521BA115-72AE-41EB-8562-8FA7FF53FD35}"/>
+                <a16:creationId xmlns:a16="http://schemas.microsoft.com/office/drawing/2014/main" id="{0EDE014E-C365-4DB5-A237-959E019CA3D7}"/>
               </a:ext>
             </a:extLst>
           </p:cNvPr>
@@ -12273,7 +12188,7 @@
           <p:cNvPr id="2" name="S64">
             <a:extLst xmlns:a="http://schemas.openxmlformats.org/drawingml/2006/main">
               <a:ext uri="{FF2B5EF4-FFF2-40B4-BE49-F238E27FC236}">
-                <a16:creationId xmlns:a16="http://schemas.microsoft.com/office/drawing/2014/main" id="{A529F723-0778-4C00-B07C-4AD51E806DAF}"/>
+                <a16:creationId xmlns:a16="http://schemas.microsoft.com/office/drawing/2014/main" id="{C3313B26-B365-43A9-920B-7E495E738417}"/>
               </a:ext>
             </a:extLst>
           </p:cNvPr>
@@ -12431,7 +12346,7 @@
           <p:cNvPr id="3" name="대표 작업으로 변경 범위를 확인하기">
             <a:extLst xmlns:a="http://schemas.openxmlformats.org/drawingml/2006/main">
               <a:ext uri="{FF2B5EF4-FFF2-40B4-BE49-F238E27FC236}">
-                <a16:creationId xmlns:a16="http://schemas.microsoft.com/office/drawing/2014/main" id="{42E265A0-55A7-4622-AD33-868E53975C5C}"/>
+                <a16:creationId xmlns:a16="http://schemas.microsoft.com/office/drawing/2014/main" id="{AC4DCD8F-A6BD-4A4A-A518-B8508CAAA7AB}"/>
               </a:ext>
             </a:extLst>
           </p:cNvPr>
@@ -12589,7 +12504,7 @@
           <p:cNvPr id="4" name="">
             <a:extLst xmlns:a="http://schemas.openxmlformats.org/drawingml/2006/main">
               <a:ext uri="{FF2B5EF4-FFF2-40B4-BE49-F238E27FC236}">
-                <a16:creationId xmlns:a16="http://schemas.microsoft.com/office/drawing/2014/main" id="{E9CC5D72-4ED4-45EF-A2EF-77A2697A89B8}"/>
+                <a16:creationId xmlns:a16="http://schemas.microsoft.com/office/drawing/2014/main" id="{11F66B81-7AFB-4BBC-9983-D6E73B5D63BD}"/>
               </a:ext>
             </a:extLst>
           </p:cNvPr>
@@ -12620,7 +12535,7 @@
           <p:cNvPr id="5" name="DEMO-10 · 네 작업 모두 이 Workflow 변경 후의 평가 결과는 없음">
             <a:extLst xmlns:a="http://schemas.openxmlformats.org/drawingml/2006/main">
               <a:ext uri="{FF2B5EF4-FFF2-40B4-BE49-F238E27FC236}">
-                <a16:creationId xmlns:a16="http://schemas.microsoft.com/office/drawing/2014/main" id="{BE28947E-BEB3-4362-8A3A-30E860C87BE3}"/>
+                <a16:creationId xmlns:a16="http://schemas.microsoft.com/office/drawing/2014/main" id="{E2A07402-00BB-46BF-9976-BBA4668CB466}"/>
               </a:ext>
             </a:extLst>
           </p:cNvPr>
@@ -12778,7 +12693,7 @@
           <p:cNvPr id="6" name="EVAL-01/02: 별도 과거 관찰 참고 · EVAL-03/04: 설계만 있음 · 새 실행·PASS/FAI">
             <a:extLst xmlns:a="http://schemas.openxmlformats.org/drawingml/2006/main">
               <a:ext uri="{FF2B5EF4-FFF2-40B4-BE49-F238E27FC236}">
-                <a16:creationId xmlns:a16="http://schemas.microsoft.com/office/drawing/2014/main" id="{9F620136-A858-4FB5-B2A7-320FB46D1CFB}"/>
+                <a16:creationId xmlns:a16="http://schemas.microsoft.com/office/drawing/2014/main" id="{F9A417E4-1745-4D41-B587-617E5EA104DD}"/>
               </a:ext>
             </a:extLst>
           </p:cNvPr>
@@ -12936,7 +12851,7 @@
           <p:cNvPr id="7" name="작업 수보다, 서로 다른 위험을 덮는가?">
             <a:extLst xmlns:a="http://schemas.openxmlformats.org/drawingml/2006/main">
               <a:ext uri="{FF2B5EF4-FFF2-40B4-BE49-F238E27FC236}">
-                <a16:creationId xmlns:a16="http://schemas.microsoft.com/office/drawing/2014/main" id="{B58397DE-6B00-4E2C-978A-FF2830BFA614}"/>
+                <a16:creationId xmlns:a16="http://schemas.microsoft.com/office/drawing/2014/main" id="{FF36B15B-44ED-48FB-A7E5-0B2E0D1E7A3B}"/>
               </a:ext>
             </a:extLst>
           </p:cNvPr>
@@ -13094,7 +13009,7 @@
           <p:cNvPr id="8" name="">
             <a:extLst xmlns:a="http://schemas.openxmlformats.org/drawingml/2006/main">
               <a:ext uri="{FF2B5EF4-FFF2-40B4-BE49-F238E27FC236}">
-                <a16:creationId xmlns:a16="http://schemas.microsoft.com/office/drawing/2014/main" id="{23AE5492-C823-4AEC-A516-1D341E6D56B7}"/>
+                <a16:creationId xmlns:a16="http://schemas.microsoft.com/office/drawing/2014/main" id="{5ED5C009-BD0E-4E66-A0C8-F85CB7E9B616}"/>
               </a:ext>
             </a:extLst>
           </p:cNvPr>
@@ -13125,7 +13040,7 @@
           <p:cNvPr id="9" name="버그 수정">
             <a:extLst xmlns:a="http://schemas.openxmlformats.org/drawingml/2006/main">
               <a:ext uri="{FF2B5EF4-FFF2-40B4-BE49-F238E27FC236}">
-                <a16:creationId xmlns:a16="http://schemas.microsoft.com/office/drawing/2014/main" id="{F0FC2C39-3C2D-4631-AE0C-2271D31076BF}"/>
+                <a16:creationId xmlns:a16="http://schemas.microsoft.com/office/drawing/2014/main" id="{8CF0D460-CA94-48C2-B4BC-653D77C9F84F}"/>
               </a:ext>
             </a:extLst>
           </p:cNvPr>
@@ -13283,7 +13198,7 @@
           <p:cNvPr id="10" name="동작 계약을 확인하는가?">
             <a:extLst xmlns:a="http://schemas.openxmlformats.org/drawingml/2006/main">
               <a:ext uri="{FF2B5EF4-FFF2-40B4-BE49-F238E27FC236}">
-                <a16:creationId xmlns:a16="http://schemas.microsoft.com/office/drawing/2014/main" id="{B23B9C96-5774-48BC-9C81-7AC21D621C24}"/>
+                <a16:creationId xmlns:a16="http://schemas.microsoft.com/office/drawing/2014/main" id="{452AB70E-5614-4C00-909D-04439D8EEADC}"/>
               </a:ext>
             </a:extLst>
           </p:cNvPr>
@@ -13441,7 +13356,7 @@
           <p:cNvPr id="11" name="EVAL-01 · TRIAL-002">
             <a:extLst xmlns:a="http://schemas.openxmlformats.org/drawingml/2006/main">
               <a:ext uri="{FF2B5EF4-FFF2-40B4-BE49-F238E27FC236}">
-                <a16:creationId xmlns:a16="http://schemas.microsoft.com/office/drawing/2014/main" id="{4F6C3599-5DF5-4BFD-BC1F-9D0EC47293AC}"/>
+                <a16:creationId xmlns:a16="http://schemas.microsoft.com/office/drawing/2014/main" id="{BFD52CA6-C1C3-4A98-9C0C-535FCD16EAD7}"/>
               </a:ext>
             </a:extLst>
           </p:cNvPr>
@@ -13599,7 +13514,7 @@
           <p:cNvPr id="12" name="">
             <a:extLst xmlns:a="http://schemas.openxmlformats.org/drawingml/2006/main">
               <a:ext uri="{FF2B5EF4-FFF2-40B4-BE49-F238E27FC236}">
-                <a16:creationId xmlns:a16="http://schemas.microsoft.com/office/drawing/2014/main" id="{C77C089B-B558-4D85-AB98-AEC7AE624C52}"/>
+                <a16:creationId xmlns:a16="http://schemas.microsoft.com/office/drawing/2014/main" id="{665D9793-234C-4FDB-AE24-C1073F32F2D0}"/>
               </a:ext>
             </a:extLst>
           </p:cNvPr>
@@ -13630,7 +13545,7 @@
           <p:cNvPr id="13" name="성능 변경">
             <a:extLst xmlns:a="http://schemas.openxmlformats.org/drawingml/2006/main">
               <a:ext uri="{FF2B5EF4-FFF2-40B4-BE49-F238E27FC236}">
-                <a16:creationId xmlns:a16="http://schemas.microsoft.com/office/drawing/2014/main" id="{92070087-0FD8-4988-B9BE-58647F4F9040}"/>
+                <a16:creationId xmlns:a16="http://schemas.microsoft.com/office/drawing/2014/main" id="{2A3AD869-AF6B-4410-A2DF-17565B892F2E}"/>
               </a:ext>
             </a:extLst>
           </p:cNvPr>
@@ -13788,7 +13703,7 @@
           <p:cNvPr id="14" name="측정과 검증 범위를 유지하는가?">
             <a:extLst xmlns:a="http://schemas.openxmlformats.org/drawingml/2006/main">
               <a:ext uri="{FF2B5EF4-FFF2-40B4-BE49-F238E27FC236}">
-                <a16:creationId xmlns:a16="http://schemas.microsoft.com/office/drawing/2014/main" id="{15AEF85C-FA07-4110-A10A-DEBF949CD50F}"/>
+                <a16:creationId xmlns:a16="http://schemas.microsoft.com/office/drawing/2014/main" id="{C8446649-F637-4C33-9DEB-42EC892C7B2E}"/>
               </a:ext>
             </a:extLst>
           </p:cNvPr>
@@ -13946,7 +13861,7 @@
           <p:cNvPr id="15" name="EVAL-02 · STATE-04-PERF">
             <a:extLst xmlns:a="http://schemas.openxmlformats.org/drawingml/2006/main">
               <a:ext uri="{FF2B5EF4-FFF2-40B4-BE49-F238E27FC236}">
-                <a16:creationId xmlns:a16="http://schemas.microsoft.com/office/drawing/2014/main" id="{390DA5AE-E7DB-4827-9E7C-3F392F681B59}"/>
+                <a16:creationId xmlns:a16="http://schemas.microsoft.com/office/drawing/2014/main" id="{E4DA4EAE-876D-4A4B-A423-0D7DDB7219F5}"/>
               </a:ext>
             </a:extLst>
           </p:cNvPr>
@@ -14104,7 +14019,7 @@
           <p:cNvPr id="16" name="">
             <a:extLst xmlns:a="http://schemas.openxmlformats.org/drawingml/2006/main">
               <a:ext uri="{FF2B5EF4-FFF2-40B4-BE49-F238E27FC236}">
-                <a16:creationId xmlns:a16="http://schemas.microsoft.com/office/drawing/2014/main" id="{115D6FB4-3B36-46E9-A62C-BD6476E3E313}"/>
+                <a16:creationId xmlns:a16="http://schemas.microsoft.com/office/drawing/2014/main" id="{B6413700-B804-408A-A839-E8ED5DEADE5B}"/>
               </a:ext>
             </a:extLst>
           </p:cNvPr>
@@ -14135,7 +14050,7 @@
           <p:cNvPr id="17" name="문서만 수정">
             <a:extLst xmlns:a="http://schemas.openxmlformats.org/drawingml/2006/main">
               <a:ext uri="{FF2B5EF4-FFF2-40B4-BE49-F238E27FC236}">
-                <a16:creationId xmlns:a16="http://schemas.microsoft.com/office/drawing/2014/main" id="{5815BF84-0E1F-4563-8B7D-3A24B56BFD31}"/>
+                <a16:creationId xmlns:a16="http://schemas.microsoft.com/office/drawing/2014/main" id="{C1CF5DEC-6A20-4A16-86C0-381878E68ED0}"/>
               </a:ext>
             </a:extLst>
           </p:cNvPr>
@@ -14293,7 +14208,7 @@
           <p:cNvPr id="18" name="불필요한 절차를 강요하지 않는가?">
             <a:extLst xmlns:a="http://schemas.openxmlformats.org/drawingml/2006/main">
               <a:ext uri="{FF2B5EF4-FFF2-40B4-BE49-F238E27FC236}">
-                <a16:creationId xmlns:a16="http://schemas.microsoft.com/office/drawing/2014/main" id="{5541F133-1794-4CC3-A667-6393A9E17E48}"/>
+                <a16:creationId xmlns:a16="http://schemas.microsoft.com/office/drawing/2014/main" id="{87CD42F2-4AFD-4ECE-8AF1-BA013564CD43}"/>
               </a:ext>
             </a:extLst>
           </p:cNvPr>
@@ -14451,7 +14366,7 @@
           <p:cNvPr id="19" name="EVAL-03 · 설계 사례">
             <a:extLst xmlns:a="http://schemas.openxmlformats.org/drawingml/2006/main">
               <a:ext uri="{FF2B5EF4-FFF2-40B4-BE49-F238E27FC236}">
-                <a16:creationId xmlns:a16="http://schemas.microsoft.com/office/drawing/2014/main" id="{0AC92FAB-AF3A-4317-86C3-308B35724A1A}"/>
+                <a16:creationId xmlns:a16="http://schemas.microsoft.com/office/drawing/2014/main" id="{533848EE-82C0-4458-B072-CC37D8D6D1BB}"/>
               </a:ext>
             </a:extLst>
           </p:cNvPr>
@@ -14609,7 +14524,7 @@
           <p:cNvPr id="20" name="">
             <a:extLst xmlns:a="http://schemas.openxmlformats.org/drawingml/2006/main">
               <a:ext uri="{FF2B5EF4-FFF2-40B4-BE49-F238E27FC236}">
-                <a16:creationId xmlns:a16="http://schemas.microsoft.com/office/drawing/2014/main" id="{62025F28-FDD9-49B0-AC84-CA8C8FE7D2AB}"/>
+                <a16:creationId xmlns:a16="http://schemas.microsoft.com/office/drawing/2014/main" id="{9E2EF19A-4C6A-465F-A213-FE3BD28B5C72}"/>
               </a:ext>
             </a:extLst>
           </p:cNvPr>
@@ -14640,7 +14555,7 @@
           <p:cNvPr id="21" name="작은 리팩터링">
             <a:extLst xmlns:a="http://schemas.openxmlformats.org/drawingml/2006/main">
               <a:ext uri="{FF2B5EF4-FFF2-40B4-BE49-F238E27FC236}">
-                <a16:creationId xmlns:a16="http://schemas.microsoft.com/office/drawing/2014/main" id="{DF42F7F6-F969-46B5-9C58-C2905B3E1CC3}"/>
+                <a16:creationId xmlns:a16="http://schemas.microsoft.com/office/drawing/2014/main" id="{C68932E6-135E-4D76-801D-86CDEA44C987}"/>
               </a:ext>
             </a:extLst>
           </p:cNvPr>
@@ -14798,7 +14713,7 @@
           <p:cNvPr id="22" name="다른 유효한 작업을 방해하지 않는가?">
             <a:extLst xmlns:a="http://schemas.openxmlformats.org/drawingml/2006/main">
               <a:ext uri="{FF2B5EF4-FFF2-40B4-BE49-F238E27FC236}">
-                <a16:creationId xmlns:a16="http://schemas.microsoft.com/office/drawing/2014/main" id="{4E1A1CBA-4B43-4A08-B4E4-8E36264E4170}"/>
+                <a16:creationId xmlns:a16="http://schemas.microsoft.com/office/drawing/2014/main" id="{A336A098-20FE-4901-86E6-81F1B8675634}"/>
               </a:ext>
             </a:extLst>
           </p:cNvPr>
@@ -14956,7 +14871,7 @@
           <p:cNvPr id="23" name="EVAL-04 · 설계 사례">
             <a:extLst xmlns:a="http://schemas.openxmlformats.org/drawingml/2006/main">
               <a:ext uri="{FF2B5EF4-FFF2-40B4-BE49-F238E27FC236}">
-                <a16:creationId xmlns:a16="http://schemas.microsoft.com/office/drawing/2014/main" id="{C3DAFCCD-1C42-4E4C-90B5-C01689CC5A3D}"/>
+                <a16:creationId xmlns:a16="http://schemas.microsoft.com/office/drawing/2014/main" id="{723AC556-8581-4855-BF11-621AE04236E6}"/>
               </a:ext>
             </a:extLst>
           </p:cNvPr>
@@ -15112,7 +15027,7 @@
     </p:spTree>
     <p:extLst>
       <p:ext uri="{BB962C8B-B14F-4D97-AF65-F5344CB8AC3E}">
-        <p14:creationId xmlns:p14="http://schemas.microsoft.com/office/powerpoint/2010/main" val="1514878397"/>
+        <p14:creationId xmlns:p14="http://schemas.microsoft.com/office/powerpoint/2010/main" val="1489629676"/>
       </p:ext>
     </p:extLst>
   </p:cSld>
@@ -15143,7 +15058,7 @@
           <p:cNvPr id="18" name="ACT 4 · CONCEPTUAL / 규칙 유지보수">
             <a:extLst xmlns:a="http://schemas.openxmlformats.org/drawingml/2006/main">
               <a:ext uri="{FF2B5EF4-FFF2-40B4-BE49-F238E27FC236}">
-                <a16:creationId xmlns:a16="http://schemas.microsoft.com/office/drawing/2014/main" id="{6C6403F4-86BB-4174-8B70-200B93530C84}"/>
+                <a16:creationId xmlns:a16="http://schemas.microsoft.com/office/drawing/2014/main" id="{A2A893A2-58DC-4F7C-8D80-78DC6A187CB7}"/>
               </a:ext>
             </a:extLst>
           </p:cNvPr>
@@ -15301,7 +15216,7 @@
           <p:cNvPr id="2" name="S65">
             <a:extLst xmlns:a="http://schemas.openxmlformats.org/drawingml/2006/main">
               <a:ext uri="{FF2B5EF4-FFF2-40B4-BE49-F238E27FC236}">
-                <a16:creationId xmlns:a16="http://schemas.microsoft.com/office/drawing/2014/main" id="{1661A8E1-6E6A-4E94-88A4-D0313006BE94}"/>
+                <a16:creationId xmlns:a16="http://schemas.microsoft.com/office/drawing/2014/main" id="{59B8F692-CD9B-4345-A161-18D30815B12E}"/>
               </a:ext>
             </a:extLst>
           </p:cNvPr>
@@ -15459,7 +15374,7 @@
           <p:cNvPr id="3" name="Harness도 특정 실패에 맞춰&#10;과적합될 수 있다">
             <a:extLst xmlns:a="http://schemas.openxmlformats.org/drawingml/2006/main">
               <a:ext uri="{FF2B5EF4-FFF2-40B4-BE49-F238E27FC236}">
-                <a16:creationId xmlns:a16="http://schemas.microsoft.com/office/drawing/2014/main" id="{4D9FD633-406B-42C9-A322-579E584527D6}"/>
+                <a16:creationId xmlns:a16="http://schemas.microsoft.com/office/drawing/2014/main" id="{BF3575A0-88E5-4D19-9878-48A00DAB130F}"/>
               </a:ext>
             </a:extLst>
           </p:cNvPr>
@@ -15640,7 +15555,7 @@
           <p:cNvPr id="4" name="">
             <a:extLst xmlns:a="http://schemas.openxmlformats.org/drawingml/2006/main">
               <a:ext uri="{FF2B5EF4-FFF2-40B4-BE49-F238E27FC236}">
-                <a16:creationId xmlns:a16="http://schemas.microsoft.com/office/drawing/2014/main" id="{3A8BA5AE-F984-4591-900E-9D8C82E8E322}"/>
+                <a16:creationId xmlns:a16="http://schemas.microsoft.com/office/drawing/2014/main" id="{C8601E6B-F123-4C02-8019-DC32CA8CCA7C}"/>
               </a:ext>
             </a:extLst>
           </p:cNvPr>
@@ -15671,7 +15586,7 @@
           <p:cNvPr id="5" name="DEMO-04A · 과적합은 이 교육의 비유">
             <a:extLst xmlns:a="http://schemas.openxmlformats.org/drawingml/2006/main">
               <a:ext uri="{FF2B5EF4-FFF2-40B4-BE49-F238E27FC236}">
-                <a16:creationId xmlns:a16="http://schemas.microsoft.com/office/drawing/2014/main" id="{DFC9C21E-7F9E-41CA-A921-DE43F34117C5}"/>
+                <a16:creationId xmlns:a16="http://schemas.microsoft.com/office/drawing/2014/main" id="{F0A2AFC2-5C78-4A38-A4BE-32B2F22E1DD9}"/>
               </a:ext>
             </a:extLst>
           </p:cNvPr>
@@ -15829,7 +15744,7 @@
           <p:cNvPr id="6" name="Machine Learning의 통계적 과적합과 같은 현상이라는 주장이 아니다.">
             <a:extLst xmlns:a="http://schemas.openxmlformats.org/drawingml/2006/main">
               <a:ext uri="{FF2B5EF4-FFF2-40B4-BE49-F238E27FC236}">
-                <a16:creationId xmlns:a16="http://schemas.microsoft.com/office/drawing/2014/main" id="{F449BF96-129A-48F3-8991-D67BB8ECFE14}"/>
+                <a16:creationId xmlns:a16="http://schemas.microsoft.com/office/drawing/2014/main" id="{A18FA03D-9780-43F3-8A5D-9527131B2587}"/>
               </a:ext>
             </a:extLst>
           </p:cNvPr>
@@ -15987,7 +15902,7 @@
           <p:cNvPr id="7" name="실패할 때마다 규칙을 하나씩 더하면">
             <a:extLst xmlns:a="http://schemas.openxmlformats.org/drawingml/2006/main">
               <a:ext uri="{FF2B5EF4-FFF2-40B4-BE49-F238E27FC236}">
-                <a16:creationId xmlns:a16="http://schemas.microsoft.com/office/drawing/2014/main" id="{2405BE74-2EE3-4229-BC2D-E418A49D3AA8}"/>
+                <a16:creationId xmlns:a16="http://schemas.microsoft.com/office/drawing/2014/main" id="{2C3B6ED3-5A56-4D70-991E-F6EEDB5851B2}"/>
               </a:ext>
             </a:extLst>
           </p:cNvPr>
@@ -16145,7 +16060,7 @@
           <p:cNvPr id="8" name="">
             <a:extLst xmlns:a="http://schemas.openxmlformats.org/drawingml/2006/main">
               <a:ext uri="{FF2B5EF4-FFF2-40B4-BE49-F238E27FC236}">
-                <a16:creationId xmlns:a16="http://schemas.microsoft.com/office/drawing/2014/main" id="{F487DD37-BD9F-4241-853B-EF275F1EE7D3}"/>
+                <a16:creationId xmlns:a16="http://schemas.microsoft.com/office/drawing/2014/main" id="{35DC3BF6-E07A-42CB-820A-B905BD623309}"/>
               </a:ext>
             </a:extLst>
           </p:cNvPr>
@@ -16176,7 +16091,7 @@
           <p:cNvPr id="9" name="규칙 누적">
             <a:extLst xmlns:a="http://schemas.openxmlformats.org/drawingml/2006/main">
               <a:ext uri="{FF2B5EF4-FFF2-40B4-BE49-F238E27FC236}">
-                <a16:creationId xmlns:a16="http://schemas.microsoft.com/office/drawing/2014/main" id="{A17865EA-BFAF-4B8F-BA0D-A949F1A7BB39}"/>
+                <a16:creationId xmlns:a16="http://schemas.microsoft.com/office/drawing/2014/main" id="{2438234A-231D-4028-8581-FE457D71291E}"/>
               </a:ext>
             </a:extLst>
           </p:cNvPr>
@@ -16334,7 +16249,7 @@
           <p:cNvPr id="10" name="읽고 유지할 내용이 커짐">
             <a:extLst xmlns:a="http://schemas.openxmlformats.org/drawingml/2006/main">
               <a:ext uri="{FF2B5EF4-FFF2-40B4-BE49-F238E27FC236}">
-                <a16:creationId xmlns:a16="http://schemas.microsoft.com/office/drawing/2014/main" id="{52A8AABF-6925-45B6-B914-9B9D0E368E4A}"/>
+                <a16:creationId xmlns:a16="http://schemas.microsoft.com/office/drawing/2014/main" id="{C816B43C-F025-4545-9BC5-B048F5023429}"/>
               </a:ext>
             </a:extLst>
           </p:cNvPr>
@@ -16492,7 +16407,7 @@
           <p:cNvPr id="11" name="">
             <a:extLst xmlns:a="http://schemas.openxmlformats.org/drawingml/2006/main">
               <a:ext uri="{FF2B5EF4-FFF2-40B4-BE49-F238E27FC236}">
-                <a16:creationId xmlns:a16="http://schemas.microsoft.com/office/drawing/2014/main" id="{DD6EDFD8-378B-4F91-9EC8-064D35E9E191}"/>
+                <a16:creationId xmlns:a16="http://schemas.microsoft.com/office/drawing/2014/main" id="{1E7C9820-DF93-48FC-BDE8-78C6945336FB}"/>
               </a:ext>
             </a:extLst>
           </p:cNvPr>
@@ -16523,7 +16438,7 @@
           <p:cNvPr id="12" name="규칙 충돌">
             <a:extLst xmlns:a="http://schemas.openxmlformats.org/drawingml/2006/main">
               <a:ext uri="{FF2B5EF4-FFF2-40B4-BE49-F238E27FC236}">
-                <a16:creationId xmlns:a16="http://schemas.microsoft.com/office/drawing/2014/main" id="{852A51CF-4A39-4D0B-A858-040ED3027628}"/>
+                <a16:creationId xmlns:a16="http://schemas.microsoft.com/office/drawing/2014/main" id="{4E6DFE15-8A5D-4E67-9F1A-E18C2DC27382}"/>
               </a:ext>
             </a:extLst>
           </p:cNvPr>
@@ -16681,7 +16596,7 @@
           <p:cNvPr id="13" name="서로 다른 지시가 섞임">
             <a:extLst xmlns:a="http://schemas.openxmlformats.org/drawingml/2006/main">
               <a:ext uri="{FF2B5EF4-FFF2-40B4-BE49-F238E27FC236}">
-                <a16:creationId xmlns:a16="http://schemas.microsoft.com/office/drawing/2014/main" id="{BF4CC26A-830C-46F2-B85A-2CFFDFD9E499}"/>
+                <a16:creationId xmlns:a16="http://schemas.microsoft.com/office/drawing/2014/main" id="{6C25094C-6C36-4156-BDE2-60EA5ADAC7E1}"/>
               </a:ext>
             </a:extLst>
           </p:cNvPr>
@@ -16839,7 +16754,7 @@
           <p:cNvPr id="14" name="">
             <a:extLst xmlns:a="http://schemas.openxmlformats.org/drawingml/2006/main">
               <a:ext uri="{FF2B5EF4-FFF2-40B4-BE49-F238E27FC236}">
-                <a16:creationId xmlns:a16="http://schemas.microsoft.com/office/drawing/2014/main" id="{B29CED2E-ED70-4E34-9301-3AF771142B87}"/>
+                <a16:creationId xmlns:a16="http://schemas.microsoft.com/office/drawing/2014/main" id="{52F08D2F-9F36-4B0E-AF62-F38F053282BC}"/>
               </a:ext>
             </a:extLst>
           </p:cNvPr>
@@ -16870,7 +16785,7 @@
           <p:cNvPr id="15" name="특정 작업에만 맞춤">
             <a:extLst xmlns:a="http://schemas.openxmlformats.org/drawingml/2006/main">
               <a:ext uri="{FF2B5EF4-FFF2-40B4-BE49-F238E27FC236}">
-                <a16:creationId xmlns:a16="http://schemas.microsoft.com/office/drawing/2014/main" id="{92FD355D-FFF3-41C6-84A7-A8B9B66BC860}"/>
+                <a16:creationId xmlns:a16="http://schemas.microsoft.com/office/drawing/2014/main" id="{D419A8D1-CC27-4EF7-A595-D86DC8575D9C}"/>
               </a:ext>
             </a:extLst>
           </p:cNvPr>
@@ -17028,7 +16943,7 @@
           <p:cNvPr id="16" name="다른 작업에서 적합성 미확인">
             <a:extLst xmlns:a="http://schemas.openxmlformats.org/drawingml/2006/main">
               <a:ext uri="{FF2B5EF4-FFF2-40B4-BE49-F238E27FC236}">
-                <a16:creationId xmlns:a16="http://schemas.microsoft.com/office/drawing/2014/main" id="{6E3C59B7-C706-48FA-A122-5290B6050F98}"/>
+                <a16:creationId xmlns:a16="http://schemas.microsoft.com/office/drawing/2014/main" id="{48E893DF-135E-4B1D-B205-F3BDF1160353}"/>
               </a:ext>
             </a:extLst>
           </p:cNvPr>
@@ -17186,7 +17101,7 @@
           <p:cNvPr id="17" name="원인을 확인하고, 대표 작업으로 평가하고, 불필요한 규칙을 정리한다.">
             <a:extLst xmlns:a="http://schemas.openxmlformats.org/drawingml/2006/main">
               <a:ext uri="{FF2B5EF4-FFF2-40B4-BE49-F238E27FC236}">
-                <a16:creationId xmlns:a16="http://schemas.microsoft.com/office/drawing/2014/main" id="{96C0D491-F150-45E9-9AB9-67C3A8BEEE67}"/>
+                <a16:creationId xmlns:a16="http://schemas.microsoft.com/office/drawing/2014/main" id="{EA8E736F-6E13-4A67-A724-FCC6D4B62B4A}"/>
               </a:ext>
             </a:extLst>
           </p:cNvPr>
@@ -17342,7 +17257,7 @@
     </p:spTree>
     <p:extLst>
       <p:ext uri="{BB962C8B-B14F-4D97-AF65-F5344CB8AC3E}">
-        <p14:creationId xmlns:p14="http://schemas.microsoft.com/office/powerpoint/2010/main" val="1376911830"/>
+        <p14:creationId xmlns:p14="http://schemas.microsoft.com/office/powerpoint/2010/main" val="1064878913"/>
       </p:ext>
     </p:extLst>
   </p:cSld>
@@ -17373,7 +17288,7 @@
           <p:cNvPr id="27" name="ACT 4 · 이 교육의 Loop 모델">
             <a:extLst xmlns:a="http://schemas.openxmlformats.org/drawingml/2006/main">
               <a:ext uri="{FF2B5EF4-FFF2-40B4-BE49-F238E27FC236}">
-                <a16:creationId xmlns:a16="http://schemas.microsoft.com/office/drawing/2014/main" id="{4AC7A60D-7743-4816-A8D8-30F52BA9BEC0}"/>
+                <a16:creationId xmlns:a16="http://schemas.microsoft.com/office/drawing/2014/main" id="{7CFBC64F-6DE6-4EF0-9DA7-A177DA9BECC5}"/>
               </a:ext>
             </a:extLst>
           </p:cNvPr>
@@ -17531,7 +17446,7 @@
           <p:cNvPr id="2" name="S66">
             <a:extLst xmlns:a="http://schemas.openxmlformats.org/drawingml/2006/main">
               <a:ext uri="{FF2B5EF4-FFF2-40B4-BE49-F238E27FC236}">
-                <a16:creationId xmlns:a16="http://schemas.microsoft.com/office/drawing/2014/main" id="{9BBAF0A2-ACA8-4841-A2F1-D5D0D31E3BA4}"/>
+                <a16:creationId xmlns:a16="http://schemas.microsoft.com/office/drawing/2014/main" id="{48F0C6BD-966D-4A1D-91AD-3D1102CD4128}"/>
               </a:ext>
             </a:extLst>
           </p:cNvPr>
@@ -17689,7 +17604,7 @@
           <p:cNvPr id="3" name="Feedback을 System Change와&#10;Evaluation으로 잇기">
             <a:extLst xmlns:a="http://schemas.openxmlformats.org/drawingml/2006/main">
               <a:ext uri="{FF2B5EF4-FFF2-40B4-BE49-F238E27FC236}">
-                <a16:creationId xmlns:a16="http://schemas.microsoft.com/office/drawing/2014/main" id="{38ECF955-410E-4B89-BC16-DB7A5218FEC6}"/>
+                <a16:creationId xmlns:a16="http://schemas.microsoft.com/office/drawing/2014/main" id="{06B38422-8042-43A9-9779-EC30FE034C75}"/>
               </a:ext>
             </a:extLst>
           </p:cNvPr>
@@ -17870,7 +17785,7 @@
           <p:cNvPr id="4" name="">
             <a:extLst xmlns:a="http://schemas.openxmlformats.org/drawingml/2006/main">
               <a:ext uri="{FF2B5EF4-FFF2-40B4-BE49-F238E27FC236}">
-                <a16:creationId xmlns:a16="http://schemas.microsoft.com/office/drawing/2014/main" id="{72416D82-7FCE-4EF2-AF71-66E2CBC81651}"/>
+                <a16:creationId xmlns:a16="http://schemas.microsoft.com/office/drawing/2014/main" id="{5E89601C-BA5F-42C5-A28C-3F4D9B5EEEB4}"/>
               </a:ext>
             </a:extLst>
           </p:cNvPr>
@@ -17901,7 +17816,7 @@
           <p:cNvPr id="5" name="DEC-0023 · 교육용 운영 모델">
             <a:extLst xmlns:a="http://schemas.openxmlformats.org/drawingml/2006/main">
               <a:ext uri="{FF2B5EF4-FFF2-40B4-BE49-F238E27FC236}">
-                <a16:creationId xmlns:a16="http://schemas.microsoft.com/office/drawing/2014/main" id="{72AE6BF8-2D62-4C92-9E60-7F3E07F79A6C}"/>
+                <a16:creationId xmlns:a16="http://schemas.microsoft.com/office/drawing/2014/main" id="{D4434C3D-9385-4429-87D6-8EC945E0B007}"/>
               </a:ext>
             </a:extLst>
           </p:cNvPr>
@@ -18059,7 +17974,7 @@
           <p:cNvPr id="6" name="모델의 자동 학습이나 실제 Product Loop를 관찰했다는 뜻은 아니다.">
             <a:extLst xmlns:a="http://schemas.openxmlformats.org/drawingml/2006/main">
               <a:ext uri="{FF2B5EF4-FFF2-40B4-BE49-F238E27FC236}">
-                <a16:creationId xmlns:a16="http://schemas.microsoft.com/office/drawing/2014/main" id="{E4592E80-D6AF-4D1B-91BD-3A95C49E926C}"/>
+                <a16:creationId xmlns:a16="http://schemas.microsoft.com/office/drawing/2014/main" id="{2ECF02EE-4F97-4359-B5EA-A028AA89D12F}"/>
               </a:ext>
             </a:extLst>
           </p:cNvPr>
@@ -18217,7 +18132,7 @@
           <p:cNvPr id="7" name="">
             <a:extLst xmlns:a="http://schemas.openxmlformats.org/drawingml/2006/main">
               <a:ext uri="{FF2B5EF4-FFF2-40B4-BE49-F238E27FC236}">
-                <a16:creationId xmlns:a16="http://schemas.microsoft.com/office/drawing/2014/main" id="{FC012FBF-0203-45F5-BE8D-7FB86B859AA9}"/>
+                <a16:creationId xmlns:a16="http://schemas.microsoft.com/office/drawing/2014/main" id="{22439615-0BFB-4316-813E-5C8048E9944C}"/>
               </a:ext>
             </a:extLst>
           </p:cNvPr>
@@ -18248,7 +18163,7 @@
           <p:cNvPr id="8" name="실행">
             <a:extLst xmlns:a="http://schemas.openxmlformats.org/drawingml/2006/main">
               <a:ext uri="{FF2B5EF4-FFF2-40B4-BE49-F238E27FC236}">
-                <a16:creationId xmlns:a16="http://schemas.microsoft.com/office/drawing/2014/main" id="{F9A6C9C4-67A3-4F23-B95E-B228CDF62DBB}"/>
+                <a16:creationId xmlns:a16="http://schemas.microsoft.com/office/drawing/2014/main" id="{B681AE4F-A8CF-4C54-9012-5325EFDF15DB}"/>
               </a:ext>
             </a:extLst>
           </p:cNvPr>
@@ -18406,7 +18321,7 @@
           <p:cNvPr id="9" name="무엇을 했나?">
             <a:extLst xmlns:a="http://schemas.openxmlformats.org/drawingml/2006/main">
               <a:ext uri="{FF2B5EF4-FFF2-40B4-BE49-F238E27FC236}">
-                <a16:creationId xmlns:a16="http://schemas.microsoft.com/office/drawing/2014/main" id="{0353336C-E896-4360-89F3-1AA31EFD530B}"/>
+                <a16:creationId xmlns:a16="http://schemas.microsoft.com/office/drawing/2014/main" id="{232AEF4B-1016-40AE-B15C-A0618ADB71B4}"/>
               </a:ext>
             </a:extLst>
           </p:cNvPr>
@@ -18564,7 +18479,7 @@
           <p:cNvPr id="10" name="">
             <a:extLst xmlns:a="http://schemas.openxmlformats.org/drawingml/2006/main">
               <a:ext uri="{FF2B5EF4-FFF2-40B4-BE49-F238E27FC236}">
-                <a16:creationId xmlns:a16="http://schemas.microsoft.com/office/drawing/2014/main" id="{6825CE2F-1451-4BED-9AE1-8E8CB93B219F}"/>
+                <a16:creationId xmlns:a16="http://schemas.microsoft.com/office/drawing/2014/main" id="{486A25C6-856D-4150-BD29-DFB2C3CDCFE8}"/>
               </a:ext>
             </a:extLst>
           </p:cNvPr>
@@ -18594,7 +18509,7 @@
           <p:cNvPr id="11" name="">
             <a:extLst xmlns:a="http://schemas.openxmlformats.org/drawingml/2006/main">
               <a:ext uri="{FF2B5EF4-FFF2-40B4-BE49-F238E27FC236}">
-                <a16:creationId xmlns:a16="http://schemas.microsoft.com/office/drawing/2014/main" id="{8B96FC77-D79A-40B2-B760-B1CFA3A27EB5}"/>
+                <a16:creationId xmlns:a16="http://schemas.microsoft.com/office/drawing/2014/main" id="{8C9C8E39-99CF-407B-B3F8-2CCE6184F0C4}"/>
               </a:ext>
             </a:extLst>
           </p:cNvPr>
@@ -18625,7 +18540,7 @@
           <p:cNvPr id="12" name="관찰">
             <a:extLst xmlns:a="http://schemas.openxmlformats.org/drawingml/2006/main">
               <a:ext uri="{FF2B5EF4-FFF2-40B4-BE49-F238E27FC236}">
-                <a16:creationId xmlns:a16="http://schemas.microsoft.com/office/drawing/2014/main" id="{9D055271-8BFC-4A9A-997E-5BF3DF9E2B84}"/>
+                <a16:creationId xmlns:a16="http://schemas.microsoft.com/office/drawing/2014/main" id="{F72237AC-99D6-40E9-985C-C0DC34032B64}"/>
               </a:ext>
             </a:extLst>
           </p:cNvPr>
@@ -18783,7 +18698,7 @@
           <p:cNvPr id="13" name="무엇이 보였나?">
             <a:extLst xmlns:a="http://schemas.openxmlformats.org/drawingml/2006/main">
               <a:ext uri="{FF2B5EF4-FFF2-40B4-BE49-F238E27FC236}">
-                <a16:creationId xmlns:a16="http://schemas.microsoft.com/office/drawing/2014/main" id="{C28B0FA2-0D1B-4386-A532-9C22146A6BCD}"/>
+                <a16:creationId xmlns:a16="http://schemas.microsoft.com/office/drawing/2014/main" id="{7DD9D524-9B4F-4B9B-8969-6FE2696D0F78}"/>
               </a:ext>
             </a:extLst>
           </p:cNvPr>
@@ -18941,7 +18856,7 @@
           <p:cNvPr id="14" name="">
             <a:extLst xmlns:a="http://schemas.openxmlformats.org/drawingml/2006/main">
               <a:ext uri="{FF2B5EF4-FFF2-40B4-BE49-F238E27FC236}">
-                <a16:creationId xmlns:a16="http://schemas.microsoft.com/office/drawing/2014/main" id="{A35AAEAB-9181-4EB6-9B0E-A7D69435571A}"/>
+                <a16:creationId xmlns:a16="http://schemas.microsoft.com/office/drawing/2014/main" id="{84BE0C54-F60A-4AF9-9980-45498A56818A}"/>
               </a:ext>
             </a:extLst>
           </p:cNvPr>
@@ -18971,7 +18886,7 @@
           <p:cNvPr id="15" name="">
             <a:extLst xmlns:a="http://schemas.openxmlformats.org/drawingml/2006/main">
               <a:ext uri="{FF2B5EF4-FFF2-40B4-BE49-F238E27FC236}">
-                <a16:creationId xmlns:a16="http://schemas.microsoft.com/office/drawing/2014/main" id="{AAF5974A-480B-4062-AF79-6DEFF5B51654}"/>
+                <a16:creationId xmlns:a16="http://schemas.microsoft.com/office/drawing/2014/main" id="{5FDFC822-FDEE-45E5-A413-BE1655F8AE7C}"/>
               </a:ext>
             </a:extLst>
           </p:cNvPr>
@@ -19002,7 +18917,7 @@
           <p:cNvPr id="16" name="원인 판단">
             <a:extLst xmlns:a="http://schemas.openxmlformats.org/drawingml/2006/main">
               <a:ext uri="{FF2B5EF4-FFF2-40B4-BE49-F238E27FC236}">
-                <a16:creationId xmlns:a16="http://schemas.microsoft.com/office/drawing/2014/main" id="{D351AE02-DD1F-4824-9B1F-B530A8518584}"/>
+                <a16:creationId xmlns:a16="http://schemas.microsoft.com/office/drawing/2014/main" id="{3E489FE1-F5FE-45F7-A1C1-A4F6F3B02243}"/>
               </a:ext>
             </a:extLst>
           </p:cNvPr>
@@ -19160,7 +19075,7 @@
           <p:cNvPr id="17" name="왜 생겼나?">
             <a:extLst xmlns:a="http://schemas.openxmlformats.org/drawingml/2006/main">
               <a:ext uri="{FF2B5EF4-FFF2-40B4-BE49-F238E27FC236}">
-                <a16:creationId xmlns:a16="http://schemas.microsoft.com/office/drawing/2014/main" id="{4013DF60-9069-4548-B73D-6E669D2B2707}"/>
+                <a16:creationId xmlns:a16="http://schemas.microsoft.com/office/drawing/2014/main" id="{8CF1E4C4-B56A-4C2C-82AC-BF45A5E92AB9}"/>
               </a:ext>
             </a:extLst>
           </p:cNvPr>
@@ -19318,7 +19233,7 @@
           <p:cNvPr id="18" name="">
             <a:extLst xmlns:a="http://schemas.openxmlformats.org/drawingml/2006/main">
               <a:ext uri="{FF2B5EF4-FFF2-40B4-BE49-F238E27FC236}">
-                <a16:creationId xmlns:a16="http://schemas.microsoft.com/office/drawing/2014/main" id="{C8A88043-AFF7-4881-BCC2-F1DC3468807D}"/>
+                <a16:creationId xmlns:a16="http://schemas.microsoft.com/office/drawing/2014/main" id="{D75B37E8-9885-4069-B3F9-DC39DFAC7BBE}"/>
               </a:ext>
             </a:extLst>
           </p:cNvPr>
@@ -19348,7 +19263,7 @@
           <p:cNvPr id="19" name="">
             <a:extLst xmlns:a="http://schemas.openxmlformats.org/drawingml/2006/main">
               <a:ext uri="{FF2B5EF4-FFF2-40B4-BE49-F238E27FC236}">
-                <a16:creationId xmlns:a16="http://schemas.microsoft.com/office/drawing/2014/main" id="{B3AF5045-A84D-44F8-85B0-D53B67333153}"/>
+                <a16:creationId xmlns:a16="http://schemas.microsoft.com/office/drawing/2014/main" id="{9ED554E3-0D98-43A4-BC87-13286566EAB2}"/>
               </a:ext>
             </a:extLst>
           </p:cNvPr>
@@ -19379,7 +19294,7 @@
           <p:cNvPr id="20" name="시스템 변경">
             <a:extLst xmlns:a="http://schemas.openxmlformats.org/drawingml/2006/main">
               <a:ext uri="{FF2B5EF4-FFF2-40B4-BE49-F238E27FC236}">
-                <a16:creationId xmlns:a16="http://schemas.microsoft.com/office/drawing/2014/main" id="{60E78876-7CDA-435E-B337-E8302E2DF0E6}"/>
+                <a16:creationId xmlns:a16="http://schemas.microsoft.com/office/drawing/2014/main" id="{73ABD73C-6586-4DEB-8D72-F5A2363E11B2}"/>
               </a:ext>
             </a:extLst>
           </p:cNvPr>
@@ -19537,7 +19452,7 @@
           <p:cNvPr id="21" name="어디를 바꾸나?">
             <a:extLst xmlns:a="http://schemas.openxmlformats.org/drawingml/2006/main">
               <a:ext uri="{FF2B5EF4-FFF2-40B4-BE49-F238E27FC236}">
-                <a16:creationId xmlns:a16="http://schemas.microsoft.com/office/drawing/2014/main" id="{439C2378-BA69-4CB5-8CF8-1BEA33CE83C7}"/>
+                <a16:creationId xmlns:a16="http://schemas.microsoft.com/office/drawing/2014/main" id="{BE739E01-6B4D-4C4D-89CA-5201B2913E2C}"/>
               </a:ext>
             </a:extLst>
           </p:cNvPr>
@@ -19695,7 +19610,7 @@
           <p:cNvPr id="22" name="">
             <a:extLst xmlns:a="http://schemas.openxmlformats.org/drawingml/2006/main">
               <a:ext uri="{FF2B5EF4-FFF2-40B4-BE49-F238E27FC236}">
-                <a16:creationId xmlns:a16="http://schemas.microsoft.com/office/drawing/2014/main" id="{35E3EC34-B43C-4C18-B929-12982EC543AA}"/>
+                <a16:creationId xmlns:a16="http://schemas.microsoft.com/office/drawing/2014/main" id="{A46FDE40-ABDD-4CAA-8810-01CEAF070F98}"/>
               </a:ext>
             </a:extLst>
           </p:cNvPr>
@@ -19725,7 +19640,7 @@
           <p:cNvPr id="23" name="">
             <a:extLst xmlns:a="http://schemas.openxmlformats.org/drawingml/2006/main">
               <a:ext uri="{FF2B5EF4-FFF2-40B4-BE49-F238E27FC236}">
-                <a16:creationId xmlns:a16="http://schemas.microsoft.com/office/drawing/2014/main" id="{1DD629F5-B75D-4A10-B50A-A9BECF438396}"/>
+                <a16:creationId xmlns:a16="http://schemas.microsoft.com/office/drawing/2014/main" id="{8AAB77A4-E86A-4ED5-814E-C4298A246A21}"/>
               </a:ext>
             </a:extLst>
           </p:cNvPr>
@@ -19756,7 +19671,7 @@
           <p:cNvPr id="24" name="재평가">
             <a:extLst xmlns:a="http://schemas.openxmlformats.org/drawingml/2006/main">
               <a:ext uri="{FF2B5EF4-FFF2-40B4-BE49-F238E27FC236}">
-                <a16:creationId xmlns:a16="http://schemas.microsoft.com/office/drawing/2014/main" id="{7CB9A1BE-D0C3-4861-87FC-87B41DAFBA6A}"/>
+                <a16:creationId xmlns:a16="http://schemas.microsoft.com/office/drawing/2014/main" id="{FAAA1E15-CD0B-4E72-8E77-347B2379DF9A}"/>
               </a:ext>
             </a:extLst>
           </p:cNvPr>
@@ -19914,7 +19829,7 @@
           <p:cNvPr id="25" name="다른 작업도&#10;괜찮은가?">
             <a:extLst xmlns:a="http://schemas.openxmlformats.org/drawingml/2006/main">
               <a:ext uri="{FF2B5EF4-FFF2-40B4-BE49-F238E27FC236}">
-                <a16:creationId xmlns:a16="http://schemas.microsoft.com/office/drawing/2014/main" id="{DF8FCA0F-7BC5-412D-B77C-0FB1D68EFA51}"/>
+                <a16:creationId xmlns:a16="http://schemas.microsoft.com/office/drawing/2014/main" id="{6F5F218A-0575-4E93-8D28-21F1CBE104CF}"/>
               </a:ext>
             </a:extLst>
           </p:cNvPr>
@@ -20095,7 +20010,7 @@
           <p:cNvPr id="26" name="다음 작업에도 영향을 주는 변경으로 연결한다.">
             <a:extLst xmlns:a="http://schemas.openxmlformats.org/drawingml/2006/main">
               <a:ext uri="{FF2B5EF4-FFF2-40B4-BE49-F238E27FC236}">
-                <a16:creationId xmlns:a16="http://schemas.microsoft.com/office/drawing/2014/main" id="{49D1AFD8-CCF4-4E6F-8978-F8E7CA9C41AF}"/>
+                <a16:creationId xmlns:a16="http://schemas.microsoft.com/office/drawing/2014/main" id="{4190CB0E-193F-465B-AA55-A61D0F78E814}"/>
               </a:ext>
             </a:extLst>
           </p:cNvPr>
@@ -20251,7 +20166,7 @@
     </p:spTree>
     <p:extLst>
       <p:ext uri="{BB962C8B-B14F-4D97-AF65-F5344CB8AC3E}">
-        <p14:creationId xmlns:p14="http://schemas.microsoft.com/office/powerpoint/2010/main" val="1855194572"/>
+        <p14:creationId xmlns:p14="http://schemas.microsoft.com/office/powerpoint/2010/main" val="1103198284"/>
       </p:ext>
     </p:extLst>
   </p:cSld>
@@ -20282,7 +20197,7 @@
           <p:cNvPr id="21" name="ACT 4 · OBSERVED META / 교육자료 제작 기록">
             <a:extLst xmlns:a="http://schemas.openxmlformats.org/drawingml/2006/main">
               <a:ext uri="{FF2B5EF4-FFF2-40B4-BE49-F238E27FC236}">
-                <a16:creationId xmlns:a16="http://schemas.microsoft.com/office/drawing/2014/main" id="{AA97E08D-2833-42B2-9FEA-FA66B1091F8B}"/>
+                <a16:creationId xmlns:a16="http://schemas.microsoft.com/office/drawing/2014/main" id="{E8A5A20E-39F8-47CC-91D3-72DCF31ADE18}"/>
               </a:ext>
             </a:extLst>
           </p:cNvPr>
@@ -20440,7 +20355,7 @@
           <p:cNvPr id="2" name="S67">
             <a:extLst xmlns:a="http://schemas.openxmlformats.org/drawingml/2006/main">
               <a:ext uri="{FF2B5EF4-FFF2-40B4-BE49-F238E27FC236}">
-                <a16:creationId xmlns:a16="http://schemas.microsoft.com/office/drawing/2014/main" id="{5846EFAC-4D9D-40CF-90D0-E1CBDCD5BDCB}"/>
+                <a16:creationId xmlns:a16="http://schemas.microsoft.com/office/drawing/2014/main" id="{1D110E53-8F3C-4847-8870-3250B45A1595}"/>
               </a:ext>
             </a:extLst>
           </p:cNvPr>
@@ -20598,7 +20513,7 @@
           <p:cNvPr id="3" name="실제 제작 기록: TRIAL-006">
             <a:extLst xmlns:a="http://schemas.openxmlformats.org/drawingml/2006/main">
               <a:ext uri="{FF2B5EF4-FFF2-40B4-BE49-F238E27FC236}">
-                <a16:creationId xmlns:a16="http://schemas.microsoft.com/office/drawing/2014/main" id="{2C758813-D5E7-4E34-BA05-4AA39B97A5F8}"/>
+                <a16:creationId xmlns:a16="http://schemas.microsoft.com/office/drawing/2014/main" id="{0C8AEDE9-1A4D-4DA4-8439-43261F007004}"/>
               </a:ext>
             </a:extLst>
           </p:cNvPr>
@@ -20756,7 +20671,7 @@
           <p:cNvPr id="4" name="">
             <a:extLst xmlns:a="http://schemas.openxmlformats.org/drawingml/2006/main">
               <a:ext uri="{FF2B5EF4-FFF2-40B4-BE49-F238E27FC236}">
-                <a16:creationId xmlns:a16="http://schemas.microsoft.com/office/drawing/2014/main" id="{9D3DC047-AAD7-471E-BB52-F489E7A85CCF}"/>
+                <a16:creationId xmlns:a16="http://schemas.microsoft.com/office/drawing/2014/main" id="{BE893BEB-0767-4599-8BB0-3BD8BDB2168F}"/>
               </a:ext>
             </a:extLst>
           </p:cNvPr>
@@ -20787,7 +20702,7 @@
           <p:cNvPr id="5" name="">
             <a:extLst xmlns:a="http://schemas.openxmlformats.org/drawingml/2006/main">
               <a:ext uri="{FF2B5EF4-FFF2-40B4-BE49-F238E27FC236}">
-                <a16:creationId xmlns:a16="http://schemas.microsoft.com/office/drawing/2014/main" id="{EF66AD9F-B2EF-4409-9136-B50D6B987847}"/>
+                <a16:creationId xmlns:a16="http://schemas.microsoft.com/office/drawing/2014/main" id="{A8638545-5ACA-4EB2-8C8D-DE069D518450}"/>
               </a:ext>
             </a:extLst>
           </p:cNvPr>
@@ -20818,7 +20733,7 @@
           <p:cNvPr id="6" name="TRIAL-006 · 과거 Codex CLI 조사 기록의 재구성">
             <a:extLst xmlns:a="http://schemas.openxmlformats.org/drawingml/2006/main">
               <a:ext uri="{FF2B5EF4-FFF2-40B4-BE49-F238E27FC236}">
-                <a16:creationId xmlns:a16="http://schemas.microsoft.com/office/drawing/2014/main" id="{3CC54441-9DE7-4D9C-BAEE-734348E6B477}"/>
+                <a16:creationId xmlns:a16="http://schemas.microsoft.com/office/drawing/2014/main" id="{6AB869CF-5D6A-439D-8783-6B2CC83CBD7F}"/>
               </a:ext>
             </a:extLst>
           </p:cNvPr>
@@ -20976,7 +20891,7 @@
           <p:cNvPr id="7" name="앞의 가상 Workflow와 별개 사건이다. 제품 코드·Demo Skill의 수정 사례가 아니다.">
             <a:extLst xmlns:a="http://schemas.openxmlformats.org/drawingml/2006/main">
               <a:ext uri="{FF2B5EF4-FFF2-40B4-BE49-F238E27FC236}">
-                <a16:creationId xmlns:a16="http://schemas.microsoft.com/office/drawing/2014/main" id="{838A4BCB-429A-4AFF-94E9-E6014A22B647}"/>
+                <a16:creationId xmlns:a16="http://schemas.microsoft.com/office/drawing/2014/main" id="{6FAB4479-23C6-44E4-82E7-1BD04F42EB90}"/>
               </a:ext>
             </a:extLst>
           </p:cNvPr>
@@ -21134,7 +21049,7 @@
           <p:cNvPr id="8" name="성능 조사에 Prompt 밖의 환경도 함께 관여했다.">
             <a:extLst xmlns:a="http://schemas.openxmlformats.org/drawingml/2006/main">
               <a:ext uri="{FF2B5EF4-FFF2-40B4-BE49-F238E27FC236}">
-                <a16:creationId xmlns:a16="http://schemas.microsoft.com/office/drawing/2014/main" id="{DAC019B1-2FFD-41E5-BCF8-12383CC3C08F}"/>
+                <a16:creationId xmlns:a16="http://schemas.microsoft.com/office/drawing/2014/main" id="{BD45365E-3208-4017-8DDB-887DD2517DBE}"/>
               </a:ext>
             </a:extLst>
           </p:cNvPr>
@@ -21292,7 +21207,7 @@
           <p:cNvPr id="9" name="작업 요청">
             <a:extLst xmlns:a="http://schemas.openxmlformats.org/drawingml/2006/main">
               <a:ext uri="{FF2B5EF4-FFF2-40B4-BE49-F238E27FC236}">
-                <a16:creationId xmlns:a16="http://schemas.microsoft.com/office/drawing/2014/main" id="{B59B6369-95DF-42AD-87D3-CF81B5FB925D}"/>
+                <a16:creationId xmlns:a16="http://schemas.microsoft.com/office/drawing/2014/main" id="{251851DC-C3FB-4C63-B0FA-CBA592A5B05C}"/>
               </a:ext>
             </a:extLst>
           </p:cNvPr>
@@ -21450,7 +21365,7 @@
           <p:cNvPr id="10" name="실행 환경">
             <a:extLst xmlns:a="http://schemas.openxmlformats.org/drawingml/2006/main">
               <a:ext uri="{FF2B5EF4-FFF2-40B4-BE49-F238E27FC236}">
-                <a16:creationId xmlns:a16="http://schemas.microsoft.com/office/drawing/2014/main" id="{713B655C-0AE9-412C-AE75-5CF7187D6B74}"/>
+                <a16:creationId xmlns:a16="http://schemas.microsoft.com/office/drawing/2014/main" id="{162E42D0-5318-4BA8-B73E-E6B9F41313ED}"/>
               </a:ext>
             </a:extLst>
           </p:cNvPr>
@@ -21608,7 +21523,7 @@
           <p:cNvPr id="11" name="결과 해석">
             <a:extLst xmlns:a="http://schemas.openxmlformats.org/drawingml/2006/main">
               <a:ext uri="{FF2B5EF4-FFF2-40B4-BE49-F238E27FC236}">
-                <a16:creationId xmlns:a16="http://schemas.microsoft.com/office/drawing/2014/main" id="{9BCDCAFC-F1DA-43A4-A2ED-1E7821BB5C01}"/>
+                <a16:creationId xmlns:a16="http://schemas.microsoft.com/office/drawing/2014/main" id="{525EE50C-924A-4453-AC7E-B5B1C6C4FA27}"/>
               </a:ext>
             </a:extLst>
           </p:cNvPr>
@@ -21766,7 +21681,7 @@
           <p:cNvPr id="12" name="">
             <a:extLst xmlns:a="http://schemas.openxmlformats.org/drawingml/2006/main">
               <a:ext uri="{FF2B5EF4-FFF2-40B4-BE49-F238E27FC236}">
-                <a16:creationId xmlns:a16="http://schemas.microsoft.com/office/drawing/2014/main" id="{C113443F-354F-4432-8B0A-AF73A3A71B18}"/>
+                <a16:creationId xmlns:a16="http://schemas.microsoft.com/office/drawing/2014/main" id="{E7352F67-CECA-4DEF-A2D5-4B1C7A83C32B}"/>
               </a:ext>
             </a:extLst>
           </p:cNvPr>
@@ -21797,7 +21712,7 @@
           <p:cNvPr id="13" name="">
             <a:extLst xmlns:a="http://schemas.openxmlformats.org/drawingml/2006/main">
               <a:ext uri="{FF2B5EF4-FFF2-40B4-BE49-F238E27FC236}">
-                <a16:creationId xmlns:a16="http://schemas.microsoft.com/office/drawing/2014/main" id="{ADBFC15A-E19D-4283-A676-D523CC15FB04}"/>
+                <a16:creationId xmlns:a16="http://schemas.microsoft.com/office/drawing/2014/main" id="{5A0D1426-0584-4422-AD4B-576FDDEF1694}"/>
               </a:ext>
             </a:extLst>
           </p:cNvPr>
@@ -21828,7 +21743,7 @@
           <p:cNvPr id="14" name="">
             <a:extLst xmlns:a="http://schemas.openxmlformats.org/drawingml/2006/main">
               <a:ext uri="{FF2B5EF4-FFF2-40B4-BE49-F238E27FC236}">
-                <a16:creationId xmlns:a16="http://schemas.microsoft.com/office/drawing/2014/main" id="{393F7F35-D92A-422B-AA69-C6A0F8E470C4}"/>
+                <a16:creationId xmlns:a16="http://schemas.microsoft.com/office/drawing/2014/main" id="{2C5C5ABB-95ED-4CE9-B953-650B67AEBA12}"/>
               </a:ext>
             </a:extLst>
           </p:cNvPr>
@@ -21859,7 +21774,7 @@
           <p:cNvPr id="15" name="">
             <a:extLst xmlns:a="http://schemas.openxmlformats.org/drawingml/2006/main">
               <a:ext uri="{FF2B5EF4-FFF2-40B4-BE49-F238E27FC236}">
-                <a16:creationId xmlns:a16="http://schemas.microsoft.com/office/drawing/2014/main" id="{DCFDBBF1-7FC5-4B4D-A6A1-C687B78261ED}"/>
+                <a16:creationId xmlns:a16="http://schemas.microsoft.com/office/drawing/2014/main" id="{6C393B88-5D6F-484F-A832-8182417E29F1}"/>
               </a:ext>
             </a:extLst>
           </p:cNvPr>
@@ -21889,7 +21804,7 @@
           <p:cNvPr id="16" name="">
             <a:extLst xmlns:a="http://schemas.openxmlformats.org/drawingml/2006/main">
               <a:ext uri="{FF2B5EF4-FFF2-40B4-BE49-F238E27FC236}">
-                <a16:creationId xmlns:a16="http://schemas.microsoft.com/office/drawing/2014/main" id="{5725C919-5792-49BF-82A5-84E7A3381273}"/>
+                <a16:creationId xmlns:a16="http://schemas.microsoft.com/office/drawing/2014/main" id="{292745BE-DD44-46C2-A906-F17233D63212}"/>
               </a:ext>
             </a:extLst>
           </p:cNvPr>
@@ -21919,7 +21834,7 @@
           <p:cNvPr id="17" name="성능 개선 작업">
             <a:extLst xmlns:a="http://schemas.openxmlformats.org/drawingml/2006/main">
               <a:ext uri="{FF2B5EF4-FFF2-40B4-BE49-F238E27FC236}">
-                <a16:creationId xmlns:a16="http://schemas.microsoft.com/office/drawing/2014/main" id="{24E594FC-85D3-482A-9D21-8708DAD5DCBC}"/>
+                <a16:creationId xmlns:a16="http://schemas.microsoft.com/office/drawing/2014/main" id="{DBE65E41-FBE5-49B2-84FD-E777A1F95BBF}"/>
               </a:ext>
             </a:extLst>
           </p:cNvPr>
@@ -22077,7 +21992,7 @@
           <p:cNvPr id="18" name="Global Skill 관여&#10;시작 경고도 기록">
             <a:extLst xmlns:a="http://schemas.openxmlformats.org/drawingml/2006/main">
               <a:ext uri="{FF2B5EF4-FFF2-40B4-BE49-F238E27FC236}">
-                <a16:creationId xmlns:a16="http://schemas.microsoft.com/office/drawing/2014/main" id="{9701FB4A-348D-4CCF-B200-28A4A84ADB07}"/>
+                <a16:creationId xmlns:a16="http://schemas.microsoft.com/office/drawing/2014/main" id="{07E172F0-2692-401B-A8A5-31F9CD62FFC1}"/>
               </a:ext>
             </a:extLst>
           </p:cNvPr>
@@ -22258,7 +22173,7 @@
           <p:cNvPr id="19" name="Prompt만의 효과?&#10;귀속은 PARTIAL">
             <a:extLst xmlns:a="http://schemas.openxmlformats.org/drawingml/2006/main">
               <a:ext uri="{FF2B5EF4-FFF2-40B4-BE49-F238E27FC236}">
-                <a16:creationId xmlns:a16="http://schemas.microsoft.com/office/drawing/2014/main" id="{AD8FC58D-8BFF-43BF-9A70-2A2AF1A6A140}"/>
+                <a16:creationId xmlns:a16="http://schemas.microsoft.com/office/drawing/2014/main" id="{88285C35-8C30-445E-824B-6ADE614910FE}"/>
               </a:ext>
             </a:extLst>
           </p:cNvPr>
@@ -22439,7 +22354,7 @@
           <p:cNvPr id="20" name="좋은 결과가 있다는 것과 원인을 안다는 것은 별개다.">
             <a:extLst xmlns:a="http://schemas.openxmlformats.org/drawingml/2006/main">
               <a:ext uri="{FF2B5EF4-FFF2-40B4-BE49-F238E27FC236}">
-                <a16:creationId xmlns:a16="http://schemas.microsoft.com/office/drawing/2014/main" id="{ACBED411-DAAA-4B5D-B450-148EC09C30DF}"/>
+                <a16:creationId xmlns:a16="http://schemas.microsoft.com/office/drawing/2014/main" id="{46676EF4-74E5-4A61-AC17-0F52BD0A165D}"/>
               </a:ext>
             </a:extLst>
           </p:cNvPr>
@@ -22595,7 +22510,7 @@
     </p:spTree>
     <p:extLst>
       <p:ext uri="{BB962C8B-B14F-4D97-AF65-F5344CB8AC3E}">
-        <p14:creationId xmlns:p14="http://schemas.microsoft.com/office/powerpoint/2010/main" val="2078261901"/>
+        <p14:creationId xmlns:p14="http://schemas.microsoft.com/office/powerpoint/2010/main" val="2042711821"/>
       </p:ext>
     </p:extLst>
   </p:cSld>
@@ -22626,7 +22541,7 @@
           <p:cNvPr id="17" name="ACT 4 · OBSERVED META / 두 가지 검증 질문">
             <a:extLst xmlns:a="http://schemas.openxmlformats.org/drawingml/2006/main">
               <a:ext uri="{FF2B5EF4-FFF2-40B4-BE49-F238E27FC236}">
-                <a16:creationId xmlns:a16="http://schemas.microsoft.com/office/drawing/2014/main" id="{68E5A435-25C7-4D7A-A26B-8B1EE118AD75}"/>
+                <a16:creationId xmlns:a16="http://schemas.microsoft.com/office/drawing/2014/main" id="{090ABEE1-8CC0-4A4D-9622-A9C132CF78E3}"/>
               </a:ext>
             </a:extLst>
           </p:cNvPr>
@@ -22784,7 +22699,7 @@
           <p:cNvPr id="2" name="S68">
             <a:extLst xmlns:a="http://schemas.openxmlformats.org/drawingml/2006/main">
               <a:ext uri="{FF2B5EF4-FFF2-40B4-BE49-F238E27FC236}">
-                <a16:creationId xmlns:a16="http://schemas.microsoft.com/office/drawing/2014/main" id="{7D3C8ECD-1E4A-4E87-BABC-D7192843AE45}"/>
+                <a16:creationId xmlns:a16="http://schemas.microsoft.com/office/drawing/2014/main" id="{F9122DA9-7DEF-4339-B18C-4CEF93585C0B}"/>
               </a:ext>
             </a:extLst>
           </p:cNvPr>
@@ -22942,7 +22857,7 @@
           <p:cNvPr id="3" name="결과의 타당성과 원인 귀속은 별개다">
             <a:extLst xmlns:a="http://schemas.openxmlformats.org/drawingml/2006/main">
               <a:ext uri="{FF2B5EF4-FFF2-40B4-BE49-F238E27FC236}">
-                <a16:creationId xmlns:a16="http://schemas.microsoft.com/office/drawing/2014/main" id="{DA0FB156-6E04-4264-8EBE-4797156D8E5A}"/>
+                <a16:creationId xmlns:a16="http://schemas.microsoft.com/office/drawing/2014/main" id="{6C886581-C78A-4041-B489-0C3011817481}"/>
               </a:ext>
             </a:extLst>
           </p:cNvPr>
@@ -23100,7 +23015,7 @@
           <p:cNvPr id="4" name="">
             <a:extLst xmlns:a="http://schemas.openxmlformats.org/drawingml/2006/main">
               <a:ext uri="{FF2B5EF4-FFF2-40B4-BE49-F238E27FC236}">
-                <a16:creationId xmlns:a16="http://schemas.microsoft.com/office/drawing/2014/main" id="{0B8B9FF9-457C-4DE7-BF83-93783EDF66D2}"/>
+                <a16:creationId xmlns:a16="http://schemas.microsoft.com/office/drawing/2014/main" id="{486FE47C-A65C-4E97-83D9-7E46BDFED186}"/>
               </a:ext>
             </a:extLst>
           </p:cNvPr>
@@ -23131,7 +23046,7 @@
           <p:cNvPr id="5" name="">
             <a:extLst xmlns:a="http://schemas.openxmlformats.org/drawingml/2006/main">
               <a:ext uri="{FF2B5EF4-FFF2-40B4-BE49-F238E27FC236}">
-                <a16:creationId xmlns:a16="http://schemas.microsoft.com/office/drawing/2014/main" id="{B7737A82-D858-4FD1-B9F3-111DE09B4738}"/>
+                <a16:creationId xmlns:a16="http://schemas.microsoft.com/office/drawing/2014/main" id="{291CB808-8EC9-443B-956E-DE8D0B96073C}"/>
               </a:ext>
             </a:extLst>
           </p:cNvPr>
@@ -23162,7 +23077,7 @@
           <p:cNvPr id="6" name="TRIAL-006 · resize_nearest · 7 one-call samples · 기록 재구성">
             <a:extLst xmlns:a="http://schemas.openxmlformats.org/drawingml/2006/main">
               <a:ext uri="{FF2B5EF4-FFF2-40B4-BE49-F238E27FC236}">
-                <a16:creationId xmlns:a16="http://schemas.microsoft.com/office/drawing/2014/main" id="{FFD4C4D8-2D57-4A93-9926-CECB2624DF32}"/>
+                <a16:creationId xmlns:a16="http://schemas.microsoft.com/office/drawing/2014/main" id="{20DED3B2-72DD-4C79-BA68-F77FD408E5F9}"/>
               </a:ext>
             </a:extLst>
           </p:cNvPr>
@@ -23320,7 +23235,7 @@
           <p:cNvPr id="7" name="기록된 합성 입력·CPython 3.9.6·macOS arm64의 결과. 현재 Desktop 또는 일반 효과">
             <a:extLst xmlns:a="http://schemas.openxmlformats.org/drawingml/2006/main">
               <a:ext uri="{FF2B5EF4-FFF2-40B4-BE49-F238E27FC236}">
-                <a16:creationId xmlns:a16="http://schemas.microsoft.com/office/drawing/2014/main" id="{FA118364-7103-4C20-AF4F-54AB4C57B43F}"/>
+                <a16:creationId xmlns:a16="http://schemas.microsoft.com/office/drawing/2014/main" id="{B98661EC-3DE8-4997-9CE5-4AD79554AA85}"/>
               </a:ext>
             </a:extLst>
           </p:cNvPr>
@@ -23478,7 +23393,7 @@
           <p:cNvPr id="8" name="측정 결과는 유효한가?">
             <a:extLst xmlns:a="http://schemas.openxmlformats.org/drawingml/2006/main">
               <a:ext uri="{FF2B5EF4-FFF2-40B4-BE49-F238E27FC236}">
-                <a16:creationId xmlns:a16="http://schemas.microsoft.com/office/drawing/2014/main" id="{698BFDDF-DE33-435E-86A0-C8BE50C276CA}"/>
+                <a16:creationId xmlns:a16="http://schemas.microsoft.com/office/drawing/2014/main" id="{D7D778F8-515B-4AFC-B913-0932BE08BD91}"/>
               </a:ext>
             </a:extLst>
           </p:cNvPr>
@@ -23636,7 +23551,7 @@
           <p:cNvPr id="9" name="무엇이 결과를 만들었나?">
             <a:extLst xmlns:a="http://schemas.openxmlformats.org/drawingml/2006/main">
               <a:ext uri="{FF2B5EF4-FFF2-40B4-BE49-F238E27FC236}">
-                <a16:creationId xmlns:a16="http://schemas.microsoft.com/office/drawing/2014/main" id="{261AA955-3F94-46A0-9E6E-3ACADF6A8C0A}"/>
+                <a16:creationId xmlns:a16="http://schemas.microsoft.com/office/drawing/2014/main" id="{A5E627CB-C9C9-45A4-91DA-17968895B942}"/>
               </a:ext>
             </a:extLst>
           </p:cNvPr>
@@ -23794,7 +23709,7 @@
           <p:cNvPr id="10" name="">
             <a:extLst xmlns:a="http://schemas.openxmlformats.org/drawingml/2006/main">
               <a:ext uri="{FF2B5EF4-FFF2-40B4-BE49-F238E27FC236}">
-                <a16:creationId xmlns:a16="http://schemas.microsoft.com/office/drawing/2014/main" id="{F718E473-CA13-4F3D-AAE1-D7A877412CDA}"/>
+                <a16:creationId xmlns:a16="http://schemas.microsoft.com/office/drawing/2014/main" id="{F274D082-C143-4BE9-A3D4-383AA6A1CA39}"/>
               </a:ext>
             </a:extLst>
           </p:cNvPr>
@@ -23825,7 +23740,7 @@
           <p:cNvPr id="11" name="">
             <a:extLst xmlns:a="http://schemas.openxmlformats.org/drawingml/2006/main">
               <a:ext uri="{FF2B5EF4-FFF2-40B4-BE49-F238E27FC236}">
-                <a16:creationId xmlns:a16="http://schemas.microsoft.com/office/drawing/2014/main" id="{5B79AE91-17ED-4439-98AC-C0A64460B925}"/>
+                <a16:creationId xmlns:a16="http://schemas.microsoft.com/office/drawing/2014/main" id="{2C4B9AA2-A339-4C38-A9C5-874C8C4CCC06}"/>
               </a:ext>
             </a:extLst>
           </p:cNvPr>
@@ -23856,7 +23771,7 @@
           <p:cNvPr id="12" name="입력·출력 hash 일치&#10;같은 조건의 측정 기록">
             <a:extLst xmlns:a="http://schemas.openxmlformats.org/drawingml/2006/main">
               <a:ext uri="{FF2B5EF4-FFF2-40B4-BE49-F238E27FC236}">
-                <a16:creationId xmlns:a16="http://schemas.microsoft.com/office/drawing/2014/main" id="{EFC48608-3649-4B72-BBB9-A15BF8469F63}"/>
+                <a16:creationId xmlns:a16="http://schemas.microsoft.com/office/drawing/2014/main" id="{B6C65FF3-9227-4C75-8E6A-10B52C808D51}"/>
               </a:ext>
             </a:extLst>
           </p:cNvPr>
@@ -24037,7 +23952,7 @@
           <p:cNvPr id="13" name="Global Skill이 평가 절차에 관여&#10;Prompt만의 효과는 분리 못함">
             <a:extLst xmlns:a="http://schemas.openxmlformats.org/drawingml/2006/main">
               <a:ext uri="{FF2B5EF4-FFF2-40B4-BE49-F238E27FC236}">
-                <a16:creationId xmlns:a16="http://schemas.microsoft.com/office/drawing/2014/main" id="{7C3E8C05-9C39-43B9-B058-FAA60E1AA128}"/>
+                <a16:creationId xmlns:a16="http://schemas.microsoft.com/office/drawing/2014/main" id="{B514C740-FB06-4B80-B32F-875FCE558B40}"/>
               </a:ext>
             </a:extLst>
           </p:cNvPr>
@@ -24218,7 +24133,7 @@
           <p:cNvPr id="14" name="144.2 → 33.5 ms/call median">
             <a:extLst xmlns:a="http://schemas.openxmlformats.org/drawingml/2006/main">
               <a:ext uri="{FF2B5EF4-FFF2-40B4-BE49-F238E27FC236}">
-                <a16:creationId xmlns:a16="http://schemas.microsoft.com/office/drawing/2014/main" id="{3DA83C9E-124F-4DE8-94DC-EC79F95E0F47}"/>
+                <a16:creationId xmlns:a16="http://schemas.microsoft.com/office/drawing/2014/main" id="{B2E736C9-1B5C-44D3-A8E7-541BAF094EFA}"/>
               </a:ext>
             </a:extLst>
           </p:cNvPr>
@@ -24376,7 +24291,7 @@
           <p:cNvPr id="15" name="인과 해석: PARTIAL">
             <a:extLst xmlns:a="http://schemas.openxmlformats.org/drawingml/2006/main">
               <a:ext uri="{FF2B5EF4-FFF2-40B4-BE49-F238E27FC236}">
-                <a16:creationId xmlns:a16="http://schemas.microsoft.com/office/drawing/2014/main" id="{D74FEB70-88BC-469B-99D3-9CC54C7630E7}"/>
+                <a16:creationId xmlns:a16="http://schemas.microsoft.com/office/drawing/2014/main" id="{3FEA2540-34F1-4C8F-BEBF-32ACAECA2D3E}"/>
               </a:ext>
             </a:extLst>
           </p:cNvPr>
@@ -24534,7 +24449,7 @@
           <p:cNvPr id="16" name="측정된 변화와, 그 변화의 원인에 대한 확신을 따로 기록한다.">
             <a:extLst xmlns:a="http://schemas.openxmlformats.org/drawingml/2006/main">
               <a:ext uri="{FF2B5EF4-FFF2-40B4-BE49-F238E27FC236}">
-                <a16:creationId xmlns:a16="http://schemas.microsoft.com/office/drawing/2014/main" id="{1FCDA963-8655-46F9-9A6E-F78F88FF9EDC}"/>
+                <a16:creationId xmlns:a16="http://schemas.microsoft.com/office/drawing/2014/main" id="{BF4DDA5D-1F70-421B-A22A-E26BA3E2B67E}"/>
               </a:ext>
             </a:extLst>
           </p:cNvPr>
@@ -24690,7 +24605,7 @@
     </p:spTree>
     <p:extLst>
       <p:ext uri="{BB962C8B-B14F-4D97-AF65-F5344CB8AC3E}">
-        <p14:creationId xmlns:p14="http://schemas.microsoft.com/office/powerpoint/2010/main" val="1856095990"/>
+        <p14:creationId xmlns:p14="http://schemas.microsoft.com/office/powerpoint/2010/main" val="1421723608"/>
       </p:ext>
     </p:extLst>
   </p:cSld>
@@ -24721,7 +24636,7 @@
           <p:cNvPr id="16" name="ACT 4 · OBSERVED META / 실제 기록 방식 변경">
             <a:extLst xmlns:a="http://schemas.openxmlformats.org/drawingml/2006/main">
               <a:ext uri="{FF2B5EF4-FFF2-40B4-BE49-F238E27FC236}">
-                <a16:creationId xmlns:a16="http://schemas.microsoft.com/office/drawing/2014/main" id="{6A97102A-B46E-47C4-9996-344984C857F2}"/>
+                <a16:creationId xmlns:a16="http://schemas.microsoft.com/office/drawing/2014/main" id="{55C82510-1E3D-4CA5-AD01-2A82A2236EE2}"/>
               </a:ext>
             </a:extLst>
           </p:cNvPr>
@@ -24879,7 +24794,7 @@
           <p:cNvPr id="2" name="S69">
             <a:extLst xmlns:a="http://schemas.openxmlformats.org/drawingml/2006/main">
               <a:ext uri="{FF2B5EF4-FFF2-40B4-BE49-F238E27FC236}">
-                <a16:creationId xmlns:a16="http://schemas.microsoft.com/office/drawing/2014/main" id="{6CB08126-B296-4B6E-8E13-1D102ED95067}"/>
+                <a16:creationId xmlns:a16="http://schemas.microsoft.com/office/drawing/2014/main" id="{F50D7CCE-8F7A-495F-908F-9F9615AC97A4}"/>
               </a:ext>
             </a:extLst>
           </p:cNvPr>
@@ -25037,7 +24952,7 @@
           <p:cNvPr id="3" name="평가와 보고 규칙을 Evidence에 맞추다">
             <a:extLst xmlns:a="http://schemas.openxmlformats.org/drawingml/2006/main">
               <a:ext uri="{FF2B5EF4-FFF2-40B4-BE49-F238E27FC236}">
-                <a16:creationId xmlns:a16="http://schemas.microsoft.com/office/drawing/2014/main" id="{D93CC28B-277D-403C-BE69-7665F6DA33D6}"/>
+                <a16:creationId xmlns:a16="http://schemas.microsoft.com/office/drawing/2014/main" id="{1F05F979-B137-4F47-9D9F-39A9F42EAC40}"/>
               </a:ext>
             </a:extLst>
           </p:cNvPr>
@@ -25195,7 +25110,7 @@
           <p:cNvPr id="4" name="">
             <a:extLst xmlns:a="http://schemas.openxmlformats.org/drawingml/2006/main">
               <a:ext uri="{FF2B5EF4-FFF2-40B4-BE49-F238E27FC236}">
-                <a16:creationId xmlns:a16="http://schemas.microsoft.com/office/drawing/2014/main" id="{1633F006-802C-429B-B08A-97D40559C989}"/>
+                <a16:creationId xmlns:a16="http://schemas.microsoft.com/office/drawing/2014/main" id="{56E3B3E1-7EB7-42C0-AB63-201D375FDE6F}"/>
               </a:ext>
             </a:extLst>
           </p:cNvPr>
@@ -25226,7 +25141,7 @@
           <p:cNvPr id="5" name="">
             <a:extLst xmlns:a="http://schemas.openxmlformats.org/drawingml/2006/main">
               <a:ext uri="{FF2B5EF4-FFF2-40B4-BE49-F238E27FC236}">
-                <a16:creationId xmlns:a16="http://schemas.microsoft.com/office/drawing/2014/main" id="{8DC8BC04-443A-48C7-BA4F-32B32B79E4FF}"/>
+                <a16:creationId xmlns:a16="http://schemas.microsoft.com/office/drawing/2014/main" id="{2E622813-AE19-48FC-A34B-F1A855F82DA4}"/>
               </a:ext>
             </a:extLst>
           </p:cNvPr>
@@ -25257,7 +25172,7 @@
           <p:cNvPr id="6" name="TRIAL-006 → DEC-0016 · 평가·보고 기준을 요약한 도식">
             <a:extLst xmlns:a="http://schemas.openxmlformats.org/drawingml/2006/main">
               <a:ext uri="{FF2B5EF4-FFF2-40B4-BE49-F238E27FC236}">
-                <a16:creationId xmlns:a16="http://schemas.microsoft.com/office/drawing/2014/main" id="{AE022E24-AE37-48F1-B1B1-4CA65FDE42A9}"/>
+                <a16:creationId xmlns:a16="http://schemas.microsoft.com/office/drawing/2014/main" id="{CC50E9C1-B666-4B19-9FAC-E5D1F284A124}"/>
               </a:ext>
             </a:extLst>
           </p:cNvPr>
@@ -25415,7 +25330,7 @@
           <p:cNvPr id="7" name="제품 코드·Demo Skill 수정이 아니며, 격리 환경에서 Prompt 효과를 검증한 것도 아니다.">
             <a:extLst xmlns:a="http://schemas.openxmlformats.org/drawingml/2006/main">
               <a:ext uri="{FF2B5EF4-FFF2-40B4-BE49-F238E27FC236}">
-                <a16:creationId xmlns:a16="http://schemas.microsoft.com/office/drawing/2014/main" id="{A60ACFB4-950B-45A3-87A8-5A4F68F99EAD}"/>
+                <a16:creationId xmlns:a16="http://schemas.microsoft.com/office/drawing/2014/main" id="{A51A20D5-6FEF-4780-8BFC-AA3D711190E8}"/>
               </a:ext>
             </a:extLst>
           </p:cNvPr>
@@ -25573,7 +25488,7 @@
           <p:cNvPr id="8" name="이후 Trial에는 관찰된 환경 영향도 기록한다.">
             <a:extLst xmlns:a="http://schemas.openxmlformats.org/drawingml/2006/main">
               <a:ext uri="{FF2B5EF4-FFF2-40B4-BE49-F238E27FC236}">
-                <a16:creationId xmlns:a16="http://schemas.microsoft.com/office/drawing/2014/main" id="{5475D457-E748-41B0-97A1-7CA1CA20B731}"/>
+                <a16:creationId xmlns:a16="http://schemas.microsoft.com/office/drawing/2014/main" id="{CFF58B88-DFE7-4239-8B19-E43638832FC0}"/>
               </a:ext>
             </a:extLst>
           </p:cNvPr>
@@ -25731,7 +25646,7 @@
           <p:cNvPr id="9" name="기존 평가의 빈틈">
             <a:extLst xmlns:a="http://schemas.openxmlformats.org/drawingml/2006/main">
               <a:ext uri="{FF2B5EF4-FFF2-40B4-BE49-F238E27FC236}">
-                <a16:creationId xmlns:a16="http://schemas.microsoft.com/office/drawing/2014/main" id="{20B4C0BB-4DE4-4FEB-8559-7C16134A34C7}"/>
+                <a16:creationId xmlns:a16="http://schemas.microsoft.com/office/drawing/2014/main" id="{62E7488D-A876-47DE-B451-355887520758}"/>
               </a:ext>
             </a:extLst>
           </p:cNvPr>
@@ -25889,7 +25804,7 @@
           <p:cNvPr id="10" name="후속 기록 기준">
             <a:extLst xmlns:a="http://schemas.openxmlformats.org/drawingml/2006/main">
               <a:ext uri="{FF2B5EF4-FFF2-40B4-BE49-F238E27FC236}">
-                <a16:creationId xmlns:a16="http://schemas.microsoft.com/office/drawing/2014/main" id="{9561D7E7-24DA-48FA-8675-332332A8256C}"/>
+                <a16:creationId xmlns:a16="http://schemas.microsoft.com/office/drawing/2014/main" id="{F34B3183-D204-4A73-88DD-9B6CC1D7EC81}"/>
               </a:ext>
             </a:extLst>
           </p:cNvPr>
@@ -26047,7 +25962,7 @@
           <p:cNvPr id="11" name="">
             <a:extLst xmlns:a="http://schemas.openxmlformats.org/drawingml/2006/main">
               <a:ext uri="{FF2B5EF4-FFF2-40B4-BE49-F238E27FC236}">
-                <a16:creationId xmlns:a16="http://schemas.microsoft.com/office/drawing/2014/main" id="{B63FAA3F-261D-42E6-84D2-A32B7B9CBD55}"/>
+                <a16:creationId xmlns:a16="http://schemas.microsoft.com/office/drawing/2014/main" id="{7C4EA876-BF60-45FE-959D-20FC17AF5221}"/>
               </a:ext>
             </a:extLst>
           </p:cNvPr>
@@ -26078,7 +25993,7 @@
           <p:cNvPr id="12" name="">
             <a:extLst xmlns:a="http://schemas.openxmlformats.org/drawingml/2006/main">
               <a:ext uri="{FF2B5EF4-FFF2-40B4-BE49-F238E27FC236}">
-                <a16:creationId xmlns:a16="http://schemas.microsoft.com/office/drawing/2014/main" id="{40582636-AAE4-4FD3-8DC6-4CB4FB390D97}"/>
+                <a16:creationId xmlns:a16="http://schemas.microsoft.com/office/drawing/2014/main" id="{C4AA61E8-DD53-4786-843F-3BA06399F54C}"/>
               </a:ext>
             </a:extLst>
           </p:cNvPr>
@@ -26109,7 +26024,7 @@
           <p:cNvPr id="13" name="작업과 Repository 중심&#10;주변 Harness 영향 설명 부족">
             <a:extLst xmlns:a="http://schemas.openxmlformats.org/drawingml/2006/main">
               <a:ext uri="{FF2B5EF4-FFF2-40B4-BE49-F238E27FC236}">
-                <a16:creationId xmlns:a16="http://schemas.microsoft.com/office/drawing/2014/main" id="{68465672-B30B-4359-B106-66D139A48472}"/>
+                <a16:creationId xmlns:a16="http://schemas.microsoft.com/office/drawing/2014/main" id="{D449EC0C-04BA-4EF5-8AE5-0D7BA341FD43}"/>
               </a:ext>
             </a:extLst>
           </p:cNvPr>
@@ -26290,7 +26205,7 @@
           <p:cNvPr id="14" name="관찰된 Skills · 경고 · 사용 여부&#10;결과를 설명할 수 있는 범위">
             <a:extLst xmlns:a="http://schemas.openxmlformats.org/drawingml/2006/main">
               <a:ext uri="{FF2B5EF4-FFF2-40B4-BE49-F238E27FC236}">
-                <a16:creationId xmlns:a16="http://schemas.microsoft.com/office/drawing/2014/main" id="{594A2E66-6CC9-4506-B35B-F004E0C91D77}"/>
+                <a16:creationId xmlns:a16="http://schemas.microsoft.com/office/drawing/2014/main" id="{94EDD6F7-9D31-4D99-9858-B73E7137DA38}"/>
               </a:ext>
             </a:extLst>
           </p:cNvPr>
@@ -26471,7 +26386,7 @@
           <p:cNvPr id="15" name="기존 결과는 PARTIAL로 보존하고, 관찰된 조건을 함께 남긴다.">
             <a:extLst xmlns:a="http://schemas.openxmlformats.org/drawingml/2006/main">
               <a:ext uri="{FF2B5EF4-FFF2-40B4-BE49-F238E27FC236}">
-                <a16:creationId xmlns:a16="http://schemas.microsoft.com/office/drawing/2014/main" id="{A679BAC3-9D45-4420-A9FB-B4492C4043A0}"/>
+                <a16:creationId xmlns:a16="http://schemas.microsoft.com/office/drawing/2014/main" id="{47BA6416-6D74-4E17-913F-BB03531F157A}"/>
               </a:ext>
             </a:extLst>
           </p:cNvPr>
@@ -26627,7 +26542,7 @@
     </p:spTree>
     <p:extLst>
       <p:ext uri="{BB962C8B-B14F-4D97-AF65-F5344CB8AC3E}">
-        <p14:creationId xmlns:p14="http://schemas.microsoft.com/office/powerpoint/2010/main" val="1286640307"/>
+        <p14:creationId xmlns:p14="http://schemas.microsoft.com/office/powerpoint/2010/main" val="382025335"/>
       </p:ext>
     </p:extLst>
   </p:cSld>
@@ -26658,7 +26573,7 @@
           <p:cNvPr id="17" name="ACT 4 · OBSERVED META / 후속 기록 대조">
             <a:extLst xmlns:a="http://schemas.openxmlformats.org/drawingml/2006/main">
               <a:ext uri="{FF2B5EF4-FFF2-40B4-BE49-F238E27FC236}">
-                <a16:creationId xmlns:a16="http://schemas.microsoft.com/office/drawing/2014/main" id="{EA577319-3397-49FE-A026-6D6EE4C1FF2F}"/>
+                <a16:creationId xmlns:a16="http://schemas.microsoft.com/office/drawing/2014/main" id="{9E0061CE-97D4-48C2-A2A8-942A58E71B69}"/>
               </a:ext>
             </a:extLst>
           </p:cNvPr>
@@ -26816,7 +26731,7 @@
           <p:cNvPr id="2" name="S70">
             <a:extLst xmlns:a="http://schemas.openxmlformats.org/drawingml/2006/main">
               <a:ext uri="{FF2B5EF4-FFF2-40B4-BE49-F238E27FC236}">
-                <a16:creationId xmlns:a16="http://schemas.microsoft.com/office/drawing/2014/main" id="{BA8A5B51-DAA9-4AF1-9A47-6540B4690010}"/>
+                <a16:creationId xmlns:a16="http://schemas.microsoft.com/office/drawing/2014/main" id="{661FE919-A756-4206-98E2-6AC5CB38A8EE}"/>
               </a:ext>
             </a:extLst>
           </p:cNvPr>
@@ -26974,7 +26889,7 @@
           <p:cNvPr id="3" name="후속 기록은 개선됐지만 완전하지 않았다">
             <a:extLst xmlns:a="http://schemas.openxmlformats.org/drawingml/2006/main">
               <a:ext uri="{FF2B5EF4-FFF2-40B4-BE49-F238E27FC236}">
-                <a16:creationId xmlns:a16="http://schemas.microsoft.com/office/drawing/2014/main" id="{3E7AC213-F545-4272-AA64-399458AA703D}"/>
+                <a16:creationId xmlns:a16="http://schemas.microsoft.com/office/drawing/2014/main" id="{EC4DAAA4-D8DE-4122-9199-2DAB93D772FB}"/>
               </a:ext>
             </a:extLst>
           </p:cNvPr>
@@ -27132,7 +27047,7 @@
           <p:cNvPr id="4" name="">
             <a:extLst xmlns:a="http://schemas.openxmlformats.org/drawingml/2006/main">
               <a:ext uri="{FF2B5EF4-FFF2-40B4-BE49-F238E27FC236}">
-                <a16:creationId xmlns:a16="http://schemas.microsoft.com/office/drawing/2014/main" id="{31EAE675-0E37-49E1-A354-EBA0C4BCE87A}"/>
+                <a16:creationId xmlns:a16="http://schemas.microsoft.com/office/drawing/2014/main" id="{3E135F63-B792-4063-B1A2-D7A8B82B284E}"/>
               </a:ext>
             </a:extLst>
           </p:cNvPr>
@@ -27163,7 +27078,7 @@
           <p:cNvPr id="5" name="">
             <a:extLst xmlns:a="http://schemas.openxmlformats.org/drawingml/2006/main">
               <a:ext uri="{FF2B5EF4-FFF2-40B4-BE49-F238E27FC236}">
-                <a16:creationId xmlns:a16="http://schemas.microsoft.com/office/drawing/2014/main" id="{6B1176DB-264B-46E6-97F2-09CC72904EDF}"/>
+                <a16:creationId xmlns:a16="http://schemas.microsoft.com/office/drawing/2014/main" id="{6918C5D3-1B09-4378-9FA4-1A7EA1BF4537}"/>
               </a:ext>
             </a:extLst>
           </p:cNvPr>
@@ -27194,7 +27109,7 @@
           <p:cNvPr id="6" name="TRIAL-007/008 · DEC-0016 · 원문 기록의 의미를 요약한 도식">
             <a:extLst xmlns:a="http://schemas.openxmlformats.org/drawingml/2006/main">
               <a:ext uri="{FF2B5EF4-FFF2-40B4-BE49-F238E27FC236}">
-                <a16:creationId xmlns:a16="http://schemas.microsoft.com/office/drawing/2014/main" id="{D68F8FF8-0C1E-4415-9792-44A3E5E6D5AF}"/>
+                <a16:creationId xmlns:a16="http://schemas.microsoft.com/office/drawing/2014/main" id="{114DF449-2825-4739-92F0-87F4CC80736A}"/>
               </a:ext>
             </a:extLst>
           </p:cNvPr>
@@ -27352,7 +27267,7 @@
           <p:cNvPr id="7" name="MCP 작업 결과는 없음. 완전한 환경 목록이나 측정된 품질 향상을 뜻하지 않는다.">
             <a:extLst xmlns:a="http://schemas.openxmlformats.org/drawingml/2006/main">
               <a:ext uri="{FF2B5EF4-FFF2-40B4-BE49-F238E27FC236}">
-                <a16:creationId xmlns:a16="http://schemas.microsoft.com/office/drawing/2014/main" id="{FA866DDD-2E21-414D-9236-6B032227C364}"/>
+                <a16:creationId xmlns:a16="http://schemas.microsoft.com/office/drawing/2014/main" id="{D0D15855-E33C-4481-B76C-E97728600069}"/>
               </a:ext>
             </a:extLst>
           </p:cNvPr>
@@ -27510,7 +27425,7 @@
           <p:cNvPr id="8" name="TRIAL-007 · 보고와 기록의 불일치">
             <a:extLst xmlns:a="http://schemas.openxmlformats.org/drawingml/2006/main">
               <a:ext uri="{FF2B5EF4-FFF2-40B4-BE49-F238E27FC236}">
-                <a16:creationId xmlns:a16="http://schemas.microsoft.com/office/drawing/2014/main" id="{A21918AF-C7A9-4A91-BA0F-7EAF9CDB4E1C}"/>
+                <a16:creationId xmlns:a16="http://schemas.microsoft.com/office/drawing/2014/main" id="{D42EF2DE-53E7-4E23-B64C-1FA444F8196F}"/>
               </a:ext>
             </a:extLst>
           </p:cNvPr>
@@ -27668,7 +27583,7 @@
           <p:cNvPr id="9" name="">
             <a:extLst xmlns:a="http://schemas.openxmlformats.org/drawingml/2006/main">
               <a:ext uri="{FF2B5EF4-FFF2-40B4-BE49-F238E27FC236}">
-                <a16:creationId xmlns:a16="http://schemas.microsoft.com/office/drawing/2014/main" id="{B4C31F4C-C334-4427-AB4F-AA8D8DDA4DDA}"/>
+                <a16:creationId xmlns:a16="http://schemas.microsoft.com/office/drawing/2014/main" id="{91298F5F-8290-4AEC-8D15-0F6632045858}"/>
               </a:ext>
             </a:extLst>
           </p:cNvPr>
@@ -27699,7 +27614,7 @@
           <p:cNvPr id="10" name="최종 보고">
             <a:extLst xmlns:a="http://schemas.openxmlformats.org/drawingml/2006/main">
               <a:ext uri="{FF2B5EF4-FFF2-40B4-BE49-F238E27FC236}">
-                <a16:creationId xmlns:a16="http://schemas.microsoft.com/office/drawing/2014/main" id="{7E196E57-2BA4-4D6E-BF1E-9AF03BF62108}"/>
+                <a16:creationId xmlns:a16="http://schemas.microsoft.com/office/drawing/2014/main" id="{0911E4D0-7E6B-4740-BA18-34561AA20F53}"/>
               </a:ext>
             </a:extLst>
           </p:cNvPr>
@@ -27857,7 +27772,7 @@
           <p:cNvPr id="11" name="MCP 경고 없음">
             <a:extLst xmlns:a="http://schemas.openxmlformats.org/drawingml/2006/main">
               <a:ext uri="{FF2B5EF4-FFF2-40B4-BE49-F238E27FC236}">
-                <a16:creationId xmlns:a16="http://schemas.microsoft.com/office/drawing/2014/main" id="{4341B99C-6BD5-4E45-886B-DFC53D6DE461}"/>
+                <a16:creationId xmlns:a16="http://schemas.microsoft.com/office/drawing/2014/main" id="{38C3FC18-BC13-4913-B0B3-43453BDFB53E}"/>
               </a:ext>
             </a:extLst>
           </p:cNvPr>
@@ -28015,7 +27930,7 @@
           <p:cNvPr id="12" name="보존된 stderr">
             <a:extLst xmlns:a="http://schemas.openxmlformats.org/drawingml/2006/main">
               <a:ext uri="{FF2B5EF4-FFF2-40B4-BE49-F238E27FC236}">
-                <a16:creationId xmlns:a16="http://schemas.microsoft.com/office/drawing/2014/main" id="{AE40716E-FBD5-4BF9-9997-8F54C023AEA9}"/>
+                <a16:creationId xmlns:a16="http://schemas.microsoft.com/office/drawing/2014/main" id="{40EE0377-48C3-48A6-AC1A-2F51248EFAA7}"/>
               </a:ext>
             </a:extLst>
           </p:cNvPr>
@@ -28173,7 +28088,7 @@
           <p:cNvPr id="13" name="Nimble AuthRequired">
             <a:extLst xmlns:a="http://schemas.openxmlformats.org/drawingml/2006/main">
               <a:ext uri="{FF2B5EF4-FFF2-40B4-BE49-F238E27FC236}">
-                <a16:creationId xmlns:a16="http://schemas.microsoft.com/office/drawing/2014/main" id="{9D43A7C9-448F-4F1D-BA72-078789058820}"/>
+                <a16:creationId xmlns:a16="http://schemas.microsoft.com/office/drawing/2014/main" id="{46EDDBA0-24F6-4887-A768-CDEFD71766A6}"/>
               </a:ext>
             </a:extLst>
           </p:cNvPr>
@@ -28331,7 +28246,7 @@
           <p:cNvPr id="14" name="">
             <a:extLst xmlns:a="http://schemas.openxmlformats.org/drawingml/2006/main">
               <a:ext uri="{FF2B5EF4-FFF2-40B4-BE49-F238E27FC236}">
-                <a16:creationId xmlns:a16="http://schemas.microsoft.com/office/drawing/2014/main" id="{199C3319-8505-4C40-A6A8-3C6B6B85B6E1}"/>
+                <a16:creationId xmlns:a16="http://schemas.microsoft.com/office/drawing/2014/main" id="{4AF78A6E-38EC-4714-BCCC-76C0852C30CA}"/>
               </a:ext>
             </a:extLst>
           </p:cNvPr>
@@ -28362,7 +28277,7 @@
           <p:cNvPr id="15" name="TRIAL-008">
             <a:extLst xmlns:a="http://schemas.openxmlformats.org/drawingml/2006/main">
               <a:ext uri="{FF2B5EF4-FFF2-40B4-BE49-F238E27FC236}">
-                <a16:creationId xmlns:a16="http://schemas.microsoft.com/office/drawing/2014/main" id="{D38B781A-7A28-4AC8-8798-ABD3B68BB58F}"/>
+                <a16:creationId xmlns:a16="http://schemas.microsoft.com/office/drawing/2014/main" id="{9D914692-B872-4457-8695-B00CD25FBEBA}"/>
               </a:ext>
             </a:extLst>
           </p:cNvPr>
@@ -28520,7 +28435,7 @@
           <p:cNvPr id="16" name="Repository Skill 호출과 Global influence를 별도 기록">
             <a:extLst xmlns:a="http://schemas.openxmlformats.org/drawingml/2006/main">
               <a:ext uri="{FF2B5EF4-FFF2-40B4-BE49-F238E27FC236}">
-                <a16:creationId xmlns:a16="http://schemas.microsoft.com/office/drawing/2014/main" id="{ABE631B6-B9D1-4778-AF5D-BCB0CE50C191}"/>
+                <a16:creationId xmlns:a16="http://schemas.microsoft.com/office/drawing/2014/main" id="{417E4D4C-1DAD-41D3-885D-F5240ADF2D4F}"/>
               </a:ext>
             </a:extLst>
           </p:cNvPr>
@@ -28676,7 +28591,7 @@
     </p:spTree>
     <p:extLst>
       <p:ext uri="{BB962C8B-B14F-4D97-AF65-F5344CB8AC3E}">
-        <p14:creationId xmlns:p14="http://schemas.microsoft.com/office/powerpoint/2010/main" val="1860392857"/>
+        <p14:creationId xmlns:p14="http://schemas.microsoft.com/office/powerpoint/2010/main" val="1394447906"/>
       </p:ext>
     </p:extLst>
   </p:cSld>
@@ -28707,7 +28622,7 @@
           <p:cNvPr id="15" name="ACT 4 · OBSERVED META / 사례 회수">
             <a:extLst xmlns:a="http://schemas.openxmlformats.org/drawingml/2006/main">
               <a:ext uri="{FF2B5EF4-FFF2-40B4-BE49-F238E27FC236}">
-                <a16:creationId xmlns:a16="http://schemas.microsoft.com/office/drawing/2014/main" id="{523EE41F-BD49-4A7F-BBE7-D41150E6E635}"/>
+                <a16:creationId xmlns:a16="http://schemas.microsoft.com/office/drawing/2014/main" id="{2B80F7F9-6634-4206-A2B5-3E8C8D50BF3C}"/>
               </a:ext>
             </a:extLst>
           </p:cNvPr>
@@ -28865,7 +28780,7 @@
           <p:cNvPr id="2" name="S71">
             <a:extLst xmlns:a="http://schemas.openxmlformats.org/drawingml/2006/main">
               <a:ext uri="{FF2B5EF4-FFF2-40B4-BE49-F238E27FC236}">
-                <a16:creationId xmlns:a16="http://schemas.microsoft.com/office/drawing/2014/main" id="{3E69173D-D9D1-4E31-A85E-2EB1C42E2595}"/>
+                <a16:creationId xmlns:a16="http://schemas.microsoft.com/office/drawing/2014/main" id="{C5C46E3A-7EB9-43AA-96B7-696327D370C9}"/>
               </a:ext>
             </a:extLst>
           </p:cNvPr>
@@ -29023,7 +28938,7 @@
           <p:cNvPr id="3" name="실제 Meta Loop에서 바뀐 것">
             <a:extLst xmlns:a="http://schemas.openxmlformats.org/drawingml/2006/main">
               <a:ext uri="{FF2B5EF4-FFF2-40B4-BE49-F238E27FC236}">
-                <a16:creationId xmlns:a16="http://schemas.microsoft.com/office/drawing/2014/main" id="{D81E77FB-5E53-46ED-8795-3F4B1BA0A76C}"/>
+                <a16:creationId xmlns:a16="http://schemas.microsoft.com/office/drawing/2014/main" id="{5B82A699-D7EA-483D-9991-7AA42DC56F06}"/>
               </a:ext>
             </a:extLst>
           </p:cNvPr>
@@ -29181,7 +29096,7 @@
           <p:cNvPr id="4" name="">
             <a:extLst xmlns:a="http://schemas.openxmlformats.org/drawingml/2006/main">
               <a:ext uri="{FF2B5EF4-FFF2-40B4-BE49-F238E27FC236}">
-                <a16:creationId xmlns:a16="http://schemas.microsoft.com/office/drawing/2014/main" id="{C74AC8DB-4696-4A07-88C0-5C02FAB8A44D}"/>
+                <a16:creationId xmlns:a16="http://schemas.microsoft.com/office/drawing/2014/main" id="{A8BD0EA4-D1C0-4153-A921-8441F2FBCDE6}"/>
               </a:ext>
             </a:extLst>
           </p:cNvPr>
@@ -29212,7 +29127,7 @@
           <p:cNvPr id="5" name="">
             <a:extLst xmlns:a="http://schemas.openxmlformats.org/drawingml/2006/main">
               <a:ext uri="{FF2B5EF4-FFF2-40B4-BE49-F238E27FC236}">
-                <a16:creationId xmlns:a16="http://schemas.microsoft.com/office/drawing/2014/main" id="{1D6B268E-2A3C-4918-8273-71FC77E80EA7}"/>
+                <a16:creationId xmlns:a16="http://schemas.microsoft.com/office/drawing/2014/main" id="{BE6A198C-7A35-443B-B31B-B0E500575D2E}"/>
               </a:ext>
             </a:extLst>
           </p:cNvPr>
@@ -29243,7 +29158,7 @@
           <p:cNvPr id="6" name="TRIAL-006 → DEC-0016 → TRIAL-007/008 · 실제 제작 기록">
             <a:extLst xmlns:a="http://schemas.openxmlformats.org/drawingml/2006/main">
               <a:ext uri="{FF2B5EF4-FFF2-40B4-BE49-F238E27FC236}">
-                <a16:creationId xmlns:a16="http://schemas.microsoft.com/office/drawing/2014/main" id="{7143C2F2-6909-4ED4-82E8-332050190227}"/>
+                <a16:creationId xmlns:a16="http://schemas.microsoft.com/office/drawing/2014/main" id="{8F2974EA-7FD9-4AC6-A2DC-A45DCCAD8ECE}"/>
               </a:ext>
             </a:extLst>
           </p:cNvPr>
@@ -29401,7 +29316,7 @@
           <p:cNvPr id="7" name="제품 코드의 개선이나 가상 stale Workflow의 복구 이력이 아니다.">
             <a:extLst xmlns:a="http://schemas.openxmlformats.org/drawingml/2006/main">
               <a:ext uri="{FF2B5EF4-FFF2-40B4-BE49-F238E27FC236}">
-                <a16:creationId xmlns:a16="http://schemas.microsoft.com/office/drawing/2014/main" id="{DC181D3C-8D43-47A3-A493-4834F32E4F3B}"/>
+                <a16:creationId xmlns:a16="http://schemas.microsoft.com/office/drawing/2014/main" id="{11D5A557-859D-48D8-B804-9ED093F67EDA}"/>
               </a:ext>
             </a:extLst>
           </p:cNvPr>
@@ -29559,7 +29474,7 @@
           <p:cNvPr id="8" name="실제로 바뀐 것">
             <a:extLst xmlns:a="http://schemas.openxmlformats.org/drawingml/2006/main">
               <a:ext uri="{FF2B5EF4-FFF2-40B4-BE49-F238E27FC236}">
-                <a16:creationId xmlns:a16="http://schemas.microsoft.com/office/drawing/2014/main" id="{A80C5529-871F-419C-ADBE-FF26A8959480}"/>
+                <a16:creationId xmlns:a16="http://schemas.microsoft.com/office/drawing/2014/main" id="{441A01A9-48F0-4C43-AD16-495320B7741C}"/>
               </a:ext>
             </a:extLst>
           </p:cNvPr>
@@ -29717,7 +29632,7 @@
           <p:cNvPr id="9" name="아직 확인하지 못한 것">
             <a:extLst xmlns:a="http://schemas.openxmlformats.org/drawingml/2006/main">
               <a:ext uri="{FF2B5EF4-FFF2-40B4-BE49-F238E27FC236}">
-                <a16:creationId xmlns:a16="http://schemas.microsoft.com/office/drawing/2014/main" id="{F961EFB6-FFA8-435A-A5F9-9A86ABCB70CA}"/>
+                <a16:creationId xmlns:a16="http://schemas.microsoft.com/office/drawing/2014/main" id="{8AF22517-D805-45E1-904A-D005C03CBE16}"/>
               </a:ext>
             </a:extLst>
           </p:cNvPr>
@@ -29875,7 +29790,7 @@
           <p:cNvPr id="10" name="">
             <a:extLst xmlns:a="http://schemas.openxmlformats.org/drawingml/2006/main">
               <a:ext uri="{FF2B5EF4-FFF2-40B4-BE49-F238E27FC236}">
-                <a16:creationId xmlns:a16="http://schemas.microsoft.com/office/drawing/2014/main" id="{D3E608EB-12CC-45D7-8E3E-B09A2AB48369}"/>
+                <a16:creationId xmlns:a16="http://schemas.microsoft.com/office/drawing/2014/main" id="{FDD34EBD-C01A-4AB4-A4AA-E14031088383}"/>
               </a:ext>
             </a:extLst>
           </p:cNvPr>
@@ -29906,7 +29821,7 @@
           <p:cNvPr id="11" name="">
             <a:extLst xmlns:a="http://schemas.openxmlformats.org/drawingml/2006/main">
               <a:ext uri="{FF2B5EF4-FFF2-40B4-BE49-F238E27FC236}">
-                <a16:creationId xmlns:a16="http://schemas.microsoft.com/office/drawing/2014/main" id="{178A5403-951B-4DCC-8948-8E8C080C5193}"/>
+                <a16:creationId xmlns:a16="http://schemas.microsoft.com/office/drawing/2014/main" id="{73CA7F59-C4AF-405C-81E9-6EF2B59F4839}"/>
               </a:ext>
             </a:extLst>
           </p:cNvPr>
@@ -29937,7 +29852,7 @@
           <p:cNvPr id="12" name="Trial을 평가하고&#10;보고하는 기준">
             <a:extLst xmlns:a="http://schemas.openxmlformats.org/drawingml/2006/main">
               <a:ext uri="{FF2B5EF4-FFF2-40B4-BE49-F238E27FC236}">
-                <a16:creationId xmlns:a16="http://schemas.microsoft.com/office/drawing/2014/main" id="{945ED69A-DC32-4C08-ABB8-B4E956B9A482}"/>
+                <a16:creationId xmlns:a16="http://schemas.microsoft.com/office/drawing/2014/main" id="{8C974770-6CD8-4079-960C-418DDDEFC8B7}"/>
               </a:ext>
             </a:extLst>
           </p:cNvPr>
@@ -30118,7 +30033,7 @@
           <p:cNvPr id="13" name="원인별 효과&#10;환경 목록의 완전성&#10;Trial 품질의 향상">
             <a:extLst xmlns:a="http://schemas.openxmlformats.org/drawingml/2006/main">
               <a:ext uri="{FF2B5EF4-FFF2-40B4-BE49-F238E27FC236}">
-                <a16:creationId xmlns:a16="http://schemas.microsoft.com/office/drawing/2014/main" id="{4D94EBBD-0FA0-4E03-AA25-2185E689BFF7}"/>
+                <a16:creationId xmlns:a16="http://schemas.microsoft.com/office/drawing/2014/main" id="{6B4D48BC-5085-4C25-A3FD-816F190AC142}"/>
               </a:ext>
             </a:extLst>
           </p:cNvPr>
@@ -30322,7 +30237,7 @@
           <p:cNvPr id="14" name="Feedback은 평가 체계도 바꿀 수 있다. 변경 뒤의 결과는 다시 확인한다.">
             <a:extLst xmlns:a="http://schemas.openxmlformats.org/drawingml/2006/main">
               <a:ext uri="{FF2B5EF4-FFF2-40B4-BE49-F238E27FC236}">
-                <a16:creationId xmlns:a16="http://schemas.microsoft.com/office/drawing/2014/main" id="{624FAB22-CF39-4B7D-A3A4-89F5E39A56B3}"/>
+                <a16:creationId xmlns:a16="http://schemas.microsoft.com/office/drawing/2014/main" id="{2149F271-DD60-4EBC-97CD-9C1EF599A343}"/>
               </a:ext>
             </a:extLst>
           </p:cNvPr>
@@ -30478,7 +30393,7 @@
     </p:spTree>
     <p:extLst>
       <p:ext uri="{BB962C8B-B14F-4D97-AF65-F5344CB8AC3E}">
-        <p14:creationId xmlns:p14="http://schemas.microsoft.com/office/powerpoint/2010/main" val="110884425"/>
+        <p14:creationId xmlns:p14="http://schemas.microsoft.com/office/powerpoint/2010/main" val="156712345"/>
       </p:ext>
     </p:extLst>
   </p:cSld>
@@ -30509,7 +30424,7 @@
           <p:cNvPr id="20" name="ACT 4 · C++ VISION / 적용을 위한 가상 질문">
             <a:extLst xmlns:a="http://schemas.openxmlformats.org/drawingml/2006/main">
               <a:ext uri="{FF2B5EF4-FFF2-40B4-BE49-F238E27FC236}">
-                <a16:creationId xmlns:a16="http://schemas.microsoft.com/office/drawing/2014/main" id="{2EDA1614-BD2D-4467-856D-688E69BC9B72}"/>
+                <a16:creationId xmlns:a16="http://schemas.microsoft.com/office/drawing/2014/main" id="{A19245B3-8224-4409-B739-D57611070E23}"/>
               </a:ext>
             </a:extLst>
           </p:cNvPr>
@@ -30667,7 +30582,7 @@
           <p:cNvPr id="2" name="S72">
             <a:extLst xmlns:a="http://schemas.openxmlformats.org/drawingml/2006/main">
               <a:ext uri="{FF2B5EF4-FFF2-40B4-BE49-F238E27FC236}">
-                <a16:creationId xmlns:a16="http://schemas.microsoft.com/office/drawing/2014/main" id="{4F9DD32C-C014-42D0-A6CB-01A9377E6AA1}"/>
+                <a16:creationId xmlns:a16="http://schemas.microsoft.com/office/drawing/2014/main" id="{D1CB9AB6-2434-4C4C-AC0F-EBAE3D5B02E9}"/>
               </a:ext>
             </a:extLst>
           </p:cNvPr>
@@ -30825,7 +30740,7 @@
           <p:cNvPr id="3" name="Project와 환경이 바뀌면&#10;검증도 다시 본다">
             <a:extLst xmlns:a="http://schemas.openxmlformats.org/drawingml/2006/main">
               <a:ext uri="{FF2B5EF4-FFF2-40B4-BE49-F238E27FC236}">
-                <a16:creationId xmlns:a16="http://schemas.microsoft.com/office/drawing/2014/main" id="{5F0DDB28-1447-4C38-9508-CDCC2A79BE13}"/>
+                <a16:creationId xmlns:a16="http://schemas.microsoft.com/office/drawing/2014/main" id="{08E0C0BF-7065-43B2-9A32-BD445F599D58}"/>
               </a:ext>
             </a:extLst>
           </p:cNvPr>
@@ -31006,7 +30921,7 @@
           <p:cNvPr id="4" name="">
             <a:extLst xmlns:a="http://schemas.openxmlformats.org/drawingml/2006/main">
               <a:ext uri="{FF2B5EF4-FFF2-40B4-BE49-F238E27FC236}">
-                <a16:creationId xmlns:a16="http://schemas.microsoft.com/office/drawing/2014/main" id="{75475D5D-63BF-4DD0-8BAB-274FFC1261A8}"/>
+                <a16:creationId xmlns:a16="http://schemas.microsoft.com/office/drawing/2014/main" id="{89779875-C391-4080-AAD2-90C06E852198}"/>
               </a:ext>
             </a:extLst>
           </p:cNvPr>
@@ -31037,7 +30952,7 @@
           <p:cNvPr id="5" name="BEAT-059 · TRANS-012 · 교육용 전이 모델 · AI 생성 설명용 삽화">
             <a:extLst xmlns:a="http://schemas.openxmlformats.org/drawingml/2006/main">
               <a:ext uri="{FF2B5EF4-FFF2-40B4-BE49-F238E27FC236}">
-                <a16:creationId xmlns:a16="http://schemas.microsoft.com/office/drawing/2014/main" id="{66C8E194-EB7D-44EB-87C8-3503BC71491F}"/>
+                <a16:creationId xmlns:a16="http://schemas.microsoft.com/office/drawing/2014/main" id="{B12C5210-7664-4B69-8E10-886571953EF0}"/>
               </a:ext>
             </a:extLst>
           </p:cNvPr>
@@ -31195,7 +31110,7 @@
           <p:cNvPr id="6" name="실제 C++ 사건·성능 결과가 아닙니다. 변경 표시는 확인할 조건을 뜻하며 원인이나 결과를 단정하지 않습니다">
             <a:extLst xmlns:a="http://schemas.openxmlformats.org/drawingml/2006/main">
               <a:ext uri="{FF2B5EF4-FFF2-40B4-BE49-F238E27FC236}">
-                <a16:creationId xmlns:a16="http://schemas.microsoft.com/office/drawing/2014/main" id="{9D73B60A-3CD1-4378-9B20-085532915ECA}"/>
+                <a16:creationId xmlns:a16="http://schemas.microsoft.com/office/drawing/2014/main" id="{30097FEE-89CE-468A-89AC-B0207A4A50BA}"/>
               </a:ext>
             </a:extLst>
           </p:cNvPr>
@@ -31353,7 +31268,7 @@
           <p:cNvPr id="7" name="GPU · 빌드 · 측정 조건이 달라졌다면?">
             <a:extLst xmlns:a="http://schemas.openxmlformats.org/drawingml/2006/main">
               <a:ext uri="{FF2B5EF4-FFF2-40B4-BE49-F238E27FC236}">
-                <a16:creationId xmlns:a16="http://schemas.microsoft.com/office/drawing/2014/main" id="{0ED53F02-B58E-4FEF-9EDF-C1967579A569}"/>
+                <a16:creationId xmlns:a16="http://schemas.microsoft.com/office/drawing/2014/main" id="{F2E94CA8-072D-4A94-95E9-12C02EFC01A1}"/>
               </a:ext>
             </a:extLst>
           </p:cNvPr>
@@ -31511,7 +31426,7 @@
           <p:cNvPr id="8" name="">
             <a:extLst xmlns:a="http://schemas.openxmlformats.org/drawingml/2006/main">
               <a:ext uri="{FF2B5EF4-FFF2-40B4-BE49-F238E27FC236}">
-                <a16:creationId xmlns:a16="http://schemas.microsoft.com/office/drawing/2014/main" id="{D3979662-EA90-4F1C-B1AA-2EEFEF133FD2}"/>
+                <a16:creationId xmlns:a16="http://schemas.microsoft.com/office/drawing/2014/main" id="{11F240C1-FEBE-435F-A5E4-0E58010EB913}"/>
               </a:ext>
             </a:extLst>
           </p:cNvPr>
@@ -31521,7 +31436,7 @@
           <p:nvPr/>
         </p:nvPicPr>
         <p:blipFill>
-          <a:blip xmlns:r="http://schemas.openxmlformats.org/officeDocument/2006/relationships" xmlns:a="http://schemas.openxmlformats.org/drawingml/2006/main" r:embed="Reba6bbfb74d74f02"/>
+          <a:blip xmlns:r="http://schemas.openxmlformats.org/officeDocument/2006/relationships" xmlns:a="http://schemas.openxmlformats.org/drawingml/2006/main" r:embed="R2fd14e134e924b34"/>
           <a:srcRect xmlns:a="http://schemas.openxmlformats.org/drawingml/2006/main" l="0" t="6000" r="0" b="10000"/>
           <a:stretch xmlns:a="http://schemas.openxmlformats.org/drawingml/2006/main"/>
         </p:blipFill>
@@ -31540,7 +31455,7 @@
           <p:cNvPr id="9" name="입력">
             <a:extLst xmlns:a="http://schemas.openxmlformats.org/drawingml/2006/main">
               <a:ext uri="{FF2B5EF4-FFF2-40B4-BE49-F238E27FC236}">
-                <a16:creationId xmlns:a16="http://schemas.microsoft.com/office/drawing/2014/main" id="{7697BDCA-1E14-45E1-B29E-2A90535756C2}"/>
+                <a16:creationId xmlns:a16="http://schemas.microsoft.com/office/drawing/2014/main" id="{7B6C155A-DD4B-431C-AD11-D81CB2C03145}"/>
               </a:ext>
             </a:extLst>
           </p:cNvPr>
@@ -31698,7 +31613,7 @@
           <p:cNvPr id="10" name="처리 코드">
             <a:extLst xmlns:a="http://schemas.openxmlformats.org/drawingml/2006/main">
               <a:ext uri="{FF2B5EF4-FFF2-40B4-BE49-F238E27FC236}">
-                <a16:creationId xmlns:a16="http://schemas.microsoft.com/office/drawing/2014/main" id="{A01F4959-84B7-40EF-BF6D-DC7223067F00}"/>
+                <a16:creationId xmlns:a16="http://schemas.microsoft.com/office/drawing/2014/main" id="{1D6A58E0-6CA5-4538-889D-525B061C5DA5}"/>
               </a:ext>
             </a:extLst>
           </p:cNvPr>
@@ -31856,7 +31771,7 @@
           <p:cNvPr id="11" name="실행 장치 · 변경 조건">
             <a:extLst xmlns:a="http://schemas.openxmlformats.org/drawingml/2006/main">
               <a:ext uri="{FF2B5EF4-FFF2-40B4-BE49-F238E27FC236}">
-                <a16:creationId xmlns:a16="http://schemas.microsoft.com/office/drawing/2014/main" id="{FC965941-F714-43EF-90F9-F378D066CBA3}"/>
+                <a16:creationId xmlns:a16="http://schemas.microsoft.com/office/drawing/2014/main" id="{8EB466FF-A9A4-40A5-92DA-967E86A41EE0}"/>
               </a:ext>
             </a:extLst>
           </p:cNvPr>
@@ -32014,7 +31929,7 @@
           <p:cNvPr id="12" name="출력">
             <a:extLst xmlns:a="http://schemas.openxmlformats.org/drawingml/2006/main">
               <a:ext uri="{FF2B5EF4-FFF2-40B4-BE49-F238E27FC236}">
-                <a16:creationId xmlns:a16="http://schemas.microsoft.com/office/drawing/2014/main" id="{499815AC-1007-403D-8A69-699E3C14053B}"/>
+                <a16:creationId xmlns:a16="http://schemas.microsoft.com/office/drawing/2014/main" id="{82C3A192-723D-4A50-AAFD-3858011FC308}"/>
               </a:ext>
             </a:extLst>
           </p:cNvPr>
@@ -32172,7 +32087,7 @@
           <p:cNvPr id="13" name="기존 가정">
             <a:extLst xmlns:a="http://schemas.openxmlformats.org/drawingml/2006/main">
               <a:ext uri="{FF2B5EF4-FFF2-40B4-BE49-F238E27FC236}">
-                <a16:creationId xmlns:a16="http://schemas.microsoft.com/office/drawing/2014/main" id="{584F74BD-9ED9-4903-BA06-C250435FCD9A}"/>
+                <a16:creationId xmlns:a16="http://schemas.microsoft.com/office/drawing/2014/main" id="{4B46AC2A-FBAF-4AFF-9FD2-4A4F78CD6FD8}"/>
               </a:ext>
             </a:extLst>
           </p:cNvPr>
@@ -32330,7 +32245,7 @@
           <p:cNvPr id="14" name="어떤 조건에서 맞던 판단인가?">
             <a:extLst xmlns:a="http://schemas.openxmlformats.org/drawingml/2006/main">
               <a:ext uri="{FF2B5EF4-FFF2-40B4-BE49-F238E27FC236}">
-                <a16:creationId xmlns:a16="http://schemas.microsoft.com/office/drawing/2014/main" id="{FCFCD6D9-03E9-427C-A815-FDA3BE795615}"/>
+                <a16:creationId xmlns:a16="http://schemas.microsoft.com/office/drawing/2014/main" id="{F5FC231B-EA2A-4016-BC26-5599F1007A93}"/>
               </a:ext>
             </a:extLst>
           </p:cNvPr>
@@ -32488,7 +32403,7 @@
           <p:cNvPr id="15" name="측정 조건">
             <a:extLst xmlns:a="http://schemas.openxmlformats.org/drawingml/2006/main">
               <a:ext uri="{FF2B5EF4-FFF2-40B4-BE49-F238E27FC236}">
-                <a16:creationId xmlns:a16="http://schemas.microsoft.com/office/drawing/2014/main" id="{6EE3C243-44BB-44D9-9F90-18E409EC2FDD}"/>
+                <a16:creationId xmlns:a16="http://schemas.microsoft.com/office/drawing/2014/main" id="{00A142FF-F2E2-4BEA-9A57-00A7B9ACE92B}"/>
               </a:ext>
             </a:extLst>
           </p:cNvPr>
@@ -32646,7 +32561,7 @@
           <p:cNvPr id="16" name="입력과 실행 조건은 비교 가능한가?">
             <a:extLst xmlns:a="http://schemas.openxmlformats.org/drawingml/2006/main">
               <a:ext uri="{FF2B5EF4-FFF2-40B4-BE49-F238E27FC236}">
-                <a16:creationId xmlns:a16="http://schemas.microsoft.com/office/drawing/2014/main" id="{3631A1EC-520E-4DCD-98AA-B2F8089FEE0A}"/>
+                <a16:creationId xmlns:a16="http://schemas.microsoft.com/office/drawing/2014/main" id="{5356E36A-2E3A-4822-A79A-3450BFCD9987}"/>
               </a:ext>
             </a:extLst>
           </p:cNvPr>
@@ -32804,7 +32719,7 @@
           <p:cNvPr id="17" name="기능 계약">
             <a:extLst xmlns:a="http://schemas.openxmlformats.org/drawingml/2006/main">
               <a:ext uri="{FF2B5EF4-FFF2-40B4-BE49-F238E27FC236}">
-                <a16:creationId xmlns:a16="http://schemas.microsoft.com/office/drawing/2014/main" id="{70D92B30-D121-45C6-913A-E0C74A034187}"/>
+                <a16:creationId xmlns:a16="http://schemas.microsoft.com/office/drawing/2014/main" id="{D5C696BF-360E-40C4-A51B-7A711728ED8A}"/>
               </a:ext>
             </a:extLst>
           </p:cNvPr>
@@ -32962,7 +32877,7 @@
           <p:cNvPr id="18" name="함께 다시 확인할 동작은?">
             <a:extLst xmlns:a="http://schemas.openxmlformats.org/drawingml/2006/main">
               <a:ext uri="{FF2B5EF4-FFF2-40B4-BE49-F238E27FC236}">
-                <a16:creationId xmlns:a16="http://schemas.microsoft.com/office/drawing/2014/main" id="{5DD98F72-43C2-4C2E-BEC5-3C7FF09B052A}"/>
+                <a16:creationId xmlns:a16="http://schemas.microsoft.com/office/drawing/2014/main" id="{C6E63F9C-F6B9-4853-AB7D-44BE4B97CCC6}"/>
               </a:ext>
             </a:extLst>
           </p:cNvPr>
@@ -33120,7 +33035,7 @@
           <p:cNvPr id="19" name="같은 문제가 반복될 때, 어느 Layer를 먼저 살펴볼까?">
             <a:extLst xmlns:a="http://schemas.openxmlformats.org/drawingml/2006/main">
               <a:ext uri="{FF2B5EF4-FFF2-40B4-BE49-F238E27FC236}">
-                <a16:creationId xmlns:a16="http://schemas.microsoft.com/office/drawing/2014/main" id="{29ADD395-DA0D-46BC-9D1C-F5AA89DA0094}"/>
+                <a16:creationId xmlns:a16="http://schemas.microsoft.com/office/drawing/2014/main" id="{C85426A7-05C2-4FC1-B9DD-8534CEB8A0FB}"/>
               </a:ext>
             </a:extLst>
           </p:cNvPr>
@@ -33276,7 +33191,7 @@
     </p:spTree>
     <p:extLst>
       <p:ext uri="{BB962C8B-B14F-4D97-AF65-F5344CB8AC3E}">
-        <p14:creationId xmlns:p14="http://schemas.microsoft.com/office/powerpoint/2010/main" val="49078485"/>
+        <p14:creationId xmlns:p14="http://schemas.microsoft.com/office/powerpoint/2010/main" val="357130141"/>
       </p:ext>
     </p:extLst>
   </p:cSld>
@@ -33307,7 +33222,7 @@
           <p:cNvPr id="16" name="ACT 4 · CONCEPTUAL / 가상 사례">
             <a:extLst xmlns:a="http://schemas.openxmlformats.org/drawingml/2006/main">
               <a:ext uri="{FF2B5EF4-FFF2-40B4-BE49-F238E27FC236}">
-                <a16:creationId xmlns:a16="http://schemas.microsoft.com/office/drawing/2014/main" id="{4D208F80-E75D-4445-B265-46D35352548D}"/>
+                <a16:creationId xmlns:a16="http://schemas.microsoft.com/office/drawing/2014/main" id="{011B90A0-F453-4E70-9966-0983A58DAB7A}"/>
               </a:ext>
             </a:extLst>
           </p:cNvPr>
@@ -33465,7 +33380,7 @@
           <p:cNvPr id="2" name="S56">
             <a:extLst xmlns:a="http://schemas.openxmlformats.org/drawingml/2006/main">
               <a:ext uri="{FF2B5EF4-FFF2-40B4-BE49-F238E27FC236}">
-                <a16:creationId xmlns:a16="http://schemas.microsoft.com/office/drawing/2014/main" id="{2E30B05C-1D26-45DA-8897-CCE5B7104C20}"/>
+                <a16:creationId xmlns:a16="http://schemas.microsoft.com/office/drawing/2014/main" id="{00611DDF-8944-402B-8B68-158DB42A62AC}"/>
               </a:ext>
             </a:extLst>
           </p:cNvPr>
@@ -33623,7 +33538,7 @@
           <p:cNvPr id="3" name="개념 사례: Project와 Workflow는 현재 맞다">
             <a:extLst xmlns:a="http://schemas.openxmlformats.org/drawingml/2006/main">
               <a:ext uri="{FF2B5EF4-FFF2-40B4-BE49-F238E27FC236}">
-                <a16:creationId xmlns:a16="http://schemas.microsoft.com/office/drawing/2014/main" id="{78894743-7705-4F70-9877-E9A5AA408006}"/>
+                <a16:creationId xmlns:a16="http://schemas.microsoft.com/office/drawing/2014/main" id="{DDA07CD4-B2D4-474B-AB06-5844DCA68E42}"/>
               </a:ext>
             </a:extLst>
           </p:cNvPr>
@@ -33781,7 +33696,7 @@
           <p:cNvPr id="4" name="">
             <a:extLst xmlns:a="http://schemas.openxmlformats.org/drawingml/2006/main">
               <a:ext uri="{FF2B5EF4-FFF2-40B4-BE49-F238E27FC236}">
-                <a16:creationId xmlns:a16="http://schemas.microsoft.com/office/drawing/2014/main" id="{0C307C46-CB51-4BA9-A117-8F18C839AD22}"/>
+                <a16:creationId xmlns:a16="http://schemas.microsoft.com/office/drawing/2014/main" id="{005EE1E8-7C5C-4E5C-9A0D-B5C679E046E6}"/>
               </a:ext>
             </a:extLst>
           </p:cNvPr>
@@ -33812,7 +33727,7 @@
           <p:cNvPr id="5" name="DEMO-04A · 프로젝트 변화 전의 가상 설정">
             <a:extLst xmlns:a="http://schemas.openxmlformats.org/drawingml/2006/main">
               <a:ext uri="{FF2B5EF4-FFF2-40B4-BE49-F238E27FC236}">
-                <a16:creationId xmlns:a16="http://schemas.microsoft.com/office/drawing/2014/main" id="{267DFF59-F795-471C-83B6-10B6D23224DD}"/>
+                <a16:creationId xmlns:a16="http://schemas.microsoft.com/office/drawing/2014/main" id="{68B3A43A-E27E-4A57-95A4-3D44D149B4EA}"/>
               </a:ext>
             </a:extLst>
           </p:cNvPr>
@@ -33970,7 +33885,7 @@
           <p:cNvPr id="6" name="실제 Repository 변경 이력, Agent 실행 또는 테스트 결과가 아니다.">
             <a:extLst xmlns:a="http://schemas.openxmlformats.org/drawingml/2006/main">
               <a:ext uri="{FF2B5EF4-FFF2-40B4-BE49-F238E27FC236}">
-                <a16:creationId xmlns:a16="http://schemas.microsoft.com/office/drawing/2014/main" id="{8EFEF9A5-2022-4ED6-A91F-B0B20A904BBB}"/>
+                <a16:creationId xmlns:a16="http://schemas.microsoft.com/office/drawing/2014/main" id="{67D8BF84-E71C-416C-A8CC-49F187751E04}"/>
               </a:ext>
             </a:extLst>
           </p:cNvPr>
@@ -34128,7 +34043,7 @@
           <p:cNvPr id="7" name="처음에는 두 기준이 같았다">
             <a:extLst xmlns:a="http://schemas.openxmlformats.org/drawingml/2006/main">
               <a:ext uri="{FF2B5EF4-FFF2-40B4-BE49-F238E27FC236}">
-                <a16:creationId xmlns:a16="http://schemas.microsoft.com/office/drawing/2014/main" id="{2DD512A1-08D5-46C8-9646-561C60361079}"/>
+                <a16:creationId xmlns:a16="http://schemas.microsoft.com/office/drawing/2014/main" id="{34F8B370-DEF2-4159-B008-5D5E649F7E35}"/>
               </a:ext>
             </a:extLst>
           </p:cNvPr>
@@ -34286,7 +34201,7 @@
           <p:cNvPr id="8" name="프로젝트의 검증 기준">
             <a:extLst xmlns:a="http://schemas.openxmlformats.org/drawingml/2006/main">
               <a:ext uri="{FF2B5EF4-FFF2-40B4-BE49-F238E27FC236}">
-                <a16:creationId xmlns:a16="http://schemas.microsoft.com/office/drawing/2014/main" id="{C95CA481-587C-45E5-A6EB-9AED0F1A6360}"/>
+                <a16:creationId xmlns:a16="http://schemas.microsoft.com/office/drawing/2014/main" id="{AE7BBDEE-323C-4204-8EC4-44B2ED433F1A}"/>
               </a:ext>
             </a:extLst>
           </p:cNvPr>
@@ -34444,7 +34359,7 @@
           <p:cNvPr id="9" name="재사용 Workflow의 지시">
             <a:extLst xmlns:a="http://schemas.openxmlformats.org/drawingml/2006/main">
               <a:ext uri="{FF2B5EF4-FFF2-40B4-BE49-F238E27FC236}">
-                <a16:creationId xmlns:a16="http://schemas.microsoft.com/office/drawing/2014/main" id="{480569BD-76F3-4087-A34C-A5BD619FE5C1}"/>
+                <a16:creationId xmlns:a16="http://schemas.microsoft.com/office/drawing/2014/main" id="{B9C72027-A4D7-4BF1-8800-3B9FE80AC86A}"/>
               </a:ext>
             </a:extLst>
           </p:cNvPr>
@@ -34602,7 +34517,7 @@
           <p:cNvPr id="10" name="">
             <a:extLst xmlns:a="http://schemas.openxmlformats.org/drawingml/2006/main">
               <a:ext uri="{FF2B5EF4-FFF2-40B4-BE49-F238E27FC236}">
-                <a16:creationId xmlns:a16="http://schemas.microsoft.com/office/drawing/2014/main" id="{C2590494-F391-4FA0-9922-574026D0FBD1}"/>
+                <a16:creationId xmlns:a16="http://schemas.microsoft.com/office/drawing/2014/main" id="{0A8C690F-796F-41DB-B113-C1FA7BE45811}"/>
               </a:ext>
             </a:extLst>
           </p:cNvPr>
@@ -34633,7 +34548,7 @@
           <p:cNvPr id="11" name="">
             <a:extLst xmlns:a="http://schemas.openxmlformats.org/drawingml/2006/main">
               <a:ext uri="{FF2B5EF4-FFF2-40B4-BE49-F238E27FC236}">
-                <a16:creationId xmlns:a16="http://schemas.microsoft.com/office/drawing/2014/main" id="{D78A3AAC-51B8-46D8-8934-A8FF9A677E0A}"/>
+                <a16:creationId xmlns:a16="http://schemas.microsoft.com/office/drawing/2014/main" id="{9AA773ED-5111-44A1-9FCE-054A41513AF9}"/>
               </a:ext>
             </a:extLst>
           </p:cNvPr>
@@ -34664,7 +34579,7 @@
           <p:cNvPr id="12" name="단위 테스트">
             <a:extLst xmlns:a="http://schemas.openxmlformats.org/drawingml/2006/main">
               <a:ext uri="{FF2B5EF4-FFF2-40B4-BE49-F238E27FC236}">
-                <a16:creationId xmlns:a16="http://schemas.microsoft.com/office/drawing/2014/main" id="{27E651F7-91D7-477C-BC93-1B998FAAC440}"/>
+                <a16:creationId xmlns:a16="http://schemas.microsoft.com/office/drawing/2014/main" id="{7C806749-BE3B-456D-8669-E680C6821CFF}"/>
               </a:ext>
             </a:extLst>
           </p:cNvPr>
@@ -34822,7 +34737,7 @@
           <p:cNvPr id="13" name="단위 테스트">
             <a:extLst xmlns:a="http://schemas.openxmlformats.org/drawingml/2006/main">
               <a:ext uri="{FF2B5EF4-FFF2-40B4-BE49-F238E27FC236}">
-                <a16:creationId xmlns:a16="http://schemas.microsoft.com/office/drawing/2014/main" id="{DE4BEFDC-F3E7-45D2-9029-652BA3D4BE91}"/>
+                <a16:creationId xmlns:a16="http://schemas.microsoft.com/office/drawing/2014/main" id="{4A8F4F31-C6BB-4B61-B81D-6A397B6F5F97}"/>
               </a:ext>
             </a:extLst>
           </p:cNvPr>
@@ -34980,7 +34895,7 @@
           <p:cNvPr id="14" name="=">
             <a:extLst xmlns:a="http://schemas.openxmlformats.org/drawingml/2006/main">
               <a:ext uri="{FF2B5EF4-FFF2-40B4-BE49-F238E27FC236}">
-                <a16:creationId xmlns:a16="http://schemas.microsoft.com/office/drawing/2014/main" id="{80EF4470-0080-4A37-9CE2-046ACD6686B0}"/>
+                <a16:creationId xmlns:a16="http://schemas.microsoft.com/office/drawing/2014/main" id="{FE7598A4-6029-448E-8E69-7A5726A37320}"/>
               </a:ext>
             </a:extLst>
           </p:cNvPr>
@@ -35138,7 +35053,7 @@
           <p:cNvPr id="15" name="현재 프로젝트에 맞춰 만들어 둔 절차">
             <a:extLst xmlns:a="http://schemas.openxmlformats.org/drawingml/2006/main">
               <a:ext uri="{FF2B5EF4-FFF2-40B4-BE49-F238E27FC236}">
-                <a16:creationId xmlns:a16="http://schemas.microsoft.com/office/drawing/2014/main" id="{A9564782-7264-4C46-8E0D-FF3816A24328}"/>
+                <a16:creationId xmlns:a16="http://schemas.microsoft.com/office/drawing/2014/main" id="{FC721455-84BA-4435-89A4-EEA80F64FBDA}"/>
               </a:ext>
             </a:extLst>
           </p:cNvPr>
@@ -35294,7 +35209,7 @@
     </p:spTree>
     <p:extLst>
       <p:ext uri="{BB962C8B-B14F-4D97-AF65-F5344CB8AC3E}">
-        <p14:creationId xmlns:p14="http://schemas.microsoft.com/office/powerpoint/2010/main" val="605111379"/>
+        <p14:creationId xmlns:p14="http://schemas.microsoft.com/office/powerpoint/2010/main" val="1420282853"/>
       </p:ext>
     </p:extLst>
   </p:cSld>
@@ -35322,10 +35237,10 @@
       </p:grpSpPr>
       <p:sp>
         <p:nvSpPr>
-          <p:cNvPr id="19" name="ACT 4  ·  CONCEPTUAL / 가상 사례">
+          <p:cNvPr id="29" name="ACT 4  ·  CONCEPTUAL / 가상 사례">
             <a:extLst xmlns:a="http://schemas.openxmlformats.org/drawingml/2006/main">
               <a:ext uri="{FF2B5EF4-FFF2-40B4-BE49-F238E27FC236}">
-                <a16:creationId xmlns:a16="http://schemas.microsoft.com/office/drawing/2014/main" id="{32FEB8BE-79D6-4DED-A1E3-2B8B15145982}"/>
+                <a16:creationId xmlns:a16="http://schemas.microsoft.com/office/drawing/2014/main" id="{2F55E514-6B55-41DD-889C-A1A2119A92F9}"/>
               </a:ext>
             </a:extLst>
           </p:cNvPr>
@@ -35337,7 +35252,7 @@
         <p:spPr>
           <a:xfrm xmlns:a="http://schemas.openxmlformats.org/drawingml/2006/main">
             <a:off x="609600" y="457200"/>
-            <a:ext cx="9810750" cy="247650"/>
+            <a:ext cx="9810750" cy="266700"/>
           </a:xfrm>
           <a:prstGeom xmlns:a="http://schemas.openxmlformats.org/drawingml/2006/main" prst="rect">
             <a:avLst/>
@@ -35483,7 +35398,7 @@
           <p:cNvPr id="2" name="S57">
             <a:extLst xmlns:a="http://schemas.openxmlformats.org/drawingml/2006/main">
               <a:ext uri="{FF2B5EF4-FFF2-40B4-BE49-F238E27FC236}">
-                <a16:creationId xmlns:a16="http://schemas.microsoft.com/office/drawing/2014/main" id="{47BCC5E5-C346-417C-88FE-C770BA024F55}"/>
+                <a16:creationId xmlns:a16="http://schemas.microsoft.com/office/drawing/2014/main" id="{7EB65A7D-9D24-4FE7-84AA-1B932F958562}"/>
               </a:ext>
             </a:extLst>
           </p:cNvPr>
@@ -35495,7 +35410,7 @@
         <p:spPr>
           <a:xfrm xmlns:a="http://schemas.openxmlformats.org/drawingml/2006/main">
             <a:off x="10668000" y="457200"/>
-            <a:ext cx="914400" cy="247650"/>
+            <a:ext cx="914400" cy="266700"/>
           </a:xfrm>
           <a:prstGeom xmlns:a="http://schemas.openxmlformats.org/drawingml/2006/main" prst="rect">
             <a:avLst/>
@@ -35641,7 +35556,7 @@
           <p:cNvPr id="3" name="Project는 바뀌고 Workflow는 남았다">
             <a:extLst xmlns:a="http://schemas.openxmlformats.org/drawingml/2006/main">
               <a:ext uri="{FF2B5EF4-FFF2-40B4-BE49-F238E27FC236}">
-                <a16:creationId xmlns:a16="http://schemas.microsoft.com/office/drawing/2014/main" id="{399EE5B6-4D1F-4CC8-8886-87DD5492830E}"/>
+                <a16:creationId xmlns:a16="http://schemas.microsoft.com/office/drawing/2014/main" id="{202CD785-F8DB-4726-8D6D-351932F3E176}"/>
               </a:ext>
             </a:extLst>
           </p:cNvPr>
@@ -35796,357 +35711,10 @@
       </p:sp>
       <p:sp>
         <p:nvSpPr>
-          <p:cNvPr id="4" name="">
+          <p:cNvPr id="4" name="가정: 모듈 연결 동작도 검증해야 하는 프로젝트가 됐다">
             <a:extLst xmlns:a="http://schemas.openxmlformats.org/drawingml/2006/main">
               <a:ext uri="{FF2B5EF4-FFF2-40B4-BE49-F238E27FC236}">
-                <a16:creationId xmlns:a16="http://schemas.microsoft.com/office/drawing/2014/main" id="{828BA884-37DB-4429-933D-558F6232AC1B}"/>
-              </a:ext>
-            </a:extLst>
-          </p:cNvPr>
-          <p:cNvSpPr>
-            <a:spLocks xmlns:a="http://schemas.openxmlformats.org/drawingml/2006/main" noGrp="1"/>
-          </p:cNvSpPr>
-          <p:nvPr/>
-        </p:nvSpPr>
-        <p:spPr>
-          <a:xfrm xmlns:a="http://schemas.openxmlformats.org/drawingml/2006/main">
-            <a:off x="609600" y="5829300"/>
-            <a:ext cx="10972800" cy="0"/>
-          </a:xfrm>
-          <a:prstGeom xmlns:a="http://schemas.openxmlformats.org/drawingml/2006/main" prst="line">
-            <a:avLst/>
-          </a:prstGeom>
-          <a:noFill xmlns:a="http://schemas.openxmlformats.org/drawingml/2006/main"/>
-          <a:ln xmlns:a="http://schemas.openxmlformats.org/drawingml/2006/main" w="19050">
-            <a:solidFill>
-              <a:srgbClr val="805400"/>
-            </a:solidFill>
-            <a:prstDash val="dash"/>
-          </a:ln>
-        </p:spPr>
-      </p:sp>
-      <p:sp>
-        <p:nvSpPr>
-          <p:cNvPr id="5" name="DEMO-04A  |  가상 설정 · 실제 Repository 변경 이력이 아님">
-            <a:extLst xmlns:a="http://schemas.openxmlformats.org/drawingml/2006/main">
-              <a:ext uri="{FF2B5EF4-FFF2-40B4-BE49-F238E27FC236}">
-                <a16:creationId xmlns:a16="http://schemas.microsoft.com/office/drawing/2014/main" id="{40954EF3-C7E6-4429-9AF9-A25A79915F5F}"/>
-              </a:ext>
-            </a:extLst>
-          </p:cNvPr>
-          <p:cNvSpPr>
-            <a:spLocks xmlns:a="http://schemas.openxmlformats.org/drawingml/2006/main" noGrp="1"/>
-          </p:cNvSpPr>
-          <p:nvPr/>
-        </p:nvSpPr>
-        <p:spPr>
-          <a:xfrm xmlns:a="http://schemas.openxmlformats.org/drawingml/2006/main">
-            <a:off x="609600" y="5915025"/>
-            <a:ext cx="10972800" cy="247650"/>
-          </a:xfrm>
-          <a:prstGeom xmlns:a="http://schemas.openxmlformats.org/drawingml/2006/main" prst="rect">
-            <a:avLst/>
-          </a:prstGeom>
-          <a:noFill xmlns:a="http://schemas.openxmlformats.org/drawingml/2006/main"/>
-          <a:ln xmlns:a="http://schemas.openxmlformats.org/drawingml/2006/main" w="0">
-            <a:noFill/>
-          </a:ln>
-        </p:spPr>
-        <p:txBody>
-          <a:bodyPr xmlns:a="http://schemas.openxmlformats.org/drawingml/2006/main" wrap="none" lIns="0" tIns="0" rIns="0" bIns="0" anchor="ctr">
-            <a:noAutofit/>
-          </a:bodyPr>
-          <a:lstStyle xmlns:a="http://schemas.openxmlformats.org/drawingml/2006/main">
-            <a:defPPr algn="l">
-              <a:defRPr sz="1425" b="1">
-                <a:solidFill>
-                  <a:srgbClr val="805400"/>
-                </a:solidFill>
-                <a:latin typeface="Malgun Gothic"/>
-                <a:ea typeface="Malgun Gothic"/>
-                <a:cs typeface="Malgun Gothic"/>
-              </a:defRPr>
-            </a:defPPr>
-            <a:lvl1pPr algn="l">
-              <a:defRPr sz="1425" b="1">
-                <a:solidFill>
-                  <a:srgbClr val="805400"/>
-                </a:solidFill>
-                <a:latin typeface="Malgun Gothic"/>
-                <a:ea typeface="Malgun Gothic"/>
-                <a:cs typeface="Malgun Gothic"/>
-              </a:defRPr>
-            </a:lvl1pPr>
-            <a:lvl2pPr algn="l">
-              <a:defRPr sz="1425" b="1">
-                <a:solidFill>
-                  <a:srgbClr val="805400"/>
-                </a:solidFill>
-                <a:latin typeface="Malgun Gothic"/>
-                <a:ea typeface="Malgun Gothic"/>
-                <a:cs typeface="Malgun Gothic"/>
-              </a:defRPr>
-            </a:lvl2pPr>
-            <a:lvl3pPr algn="l">
-              <a:defRPr sz="1425" b="1">
-                <a:solidFill>
-                  <a:srgbClr val="805400"/>
-                </a:solidFill>
-                <a:latin typeface="Malgun Gothic"/>
-                <a:ea typeface="Malgun Gothic"/>
-                <a:cs typeface="Malgun Gothic"/>
-              </a:defRPr>
-            </a:lvl3pPr>
-            <a:lvl4pPr algn="l">
-              <a:defRPr sz="1425" b="1">
-                <a:solidFill>
-                  <a:srgbClr val="805400"/>
-                </a:solidFill>
-                <a:latin typeface="Malgun Gothic"/>
-                <a:ea typeface="Malgun Gothic"/>
-                <a:cs typeface="Malgun Gothic"/>
-              </a:defRPr>
-            </a:lvl4pPr>
-            <a:lvl5pPr algn="l">
-              <a:defRPr sz="1425" b="1">
-                <a:solidFill>
-                  <a:srgbClr val="805400"/>
-                </a:solidFill>
-                <a:latin typeface="Malgun Gothic"/>
-                <a:ea typeface="Malgun Gothic"/>
-                <a:cs typeface="Malgun Gothic"/>
-              </a:defRPr>
-            </a:lvl5pPr>
-            <a:lvl6pPr algn="l">
-              <a:defRPr sz="1425" b="1">
-                <a:solidFill>
-                  <a:srgbClr val="805400"/>
-                </a:solidFill>
-                <a:latin typeface="Malgun Gothic"/>
-                <a:ea typeface="Malgun Gothic"/>
-                <a:cs typeface="Malgun Gothic"/>
-              </a:defRPr>
-            </a:lvl6pPr>
-            <a:lvl7pPr algn="l">
-              <a:defRPr sz="1425" b="1">
-                <a:solidFill>
-                  <a:srgbClr val="805400"/>
-                </a:solidFill>
-                <a:latin typeface="Malgun Gothic"/>
-                <a:ea typeface="Malgun Gothic"/>
-                <a:cs typeface="Malgun Gothic"/>
-              </a:defRPr>
-            </a:lvl7pPr>
-            <a:lvl8pPr algn="l">
-              <a:defRPr sz="1425" b="1">
-                <a:solidFill>
-                  <a:srgbClr val="805400"/>
-                </a:solidFill>
-                <a:latin typeface="Malgun Gothic"/>
-                <a:ea typeface="Malgun Gothic"/>
-                <a:cs typeface="Malgun Gothic"/>
-              </a:defRPr>
-            </a:lvl8pPr>
-            <a:lvl9pPr algn="l">
-              <a:defRPr sz="1425" b="1">
-                <a:solidFill>
-                  <a:srgbClr val="805400"/>
-                </a:solidFill>
-                <a:latin typeface="Malgun Gothic"/>
-                <a:ea typeface="Malgun Gothic"/>
-                <a:cs typeface="Malgun Gothic"/>
-              </a:defRPr>
-            </a:lvl9pPr>
-          </a:lstStyle>
-          <a:p xmlns:a="http://schemas.openxmlformats.org/drawingml/2006/main">
-            <a:pPr algn="l">
-              <a:defRPr sz="1425" b="1">
-                <a:solidFill>
-                  <a:srgbClr val="805400"/>
-                </a:solidFill>
-                <a:latin typeface="Malgun Gothic"/>
-                <a:ea typeface="Malgun Gothic"/>
-                <a:cs typeface="Malgun Gothic"/>
-              </a:defRPr>
-            </a:pPr>
-            <a:r>
-              <a:rPr sz="1425" b="1">
-                <a:solidFill>
-                  <a:srgbClr val="805400"/>
-                </a:solidFill>
-                <a:latin typeface="Malgun Gothic"/>
-                <a:ea typeface="Malgun Gothic"/>
-                <a:cs typeface="Malgun Gothic"/>
-              </a:rPr>
-              <a:t>DEMO-04A  |  가상 설정 · 실제 Repository 변경 이력이 아님</a:t>
-            </a:r>
-          </a:p>
-        </p:txBody>
-      </p:sp>
-      <p:sp>
-        <p:nvSpPr>
-          <p:cNvPr id="6" name="두 지침의 범위를 비교하는 장 · Agent 실행, 테스트 누락 또는 PASS / FAIL 결과를 뜻하지 않">
-            <a:extLst xmlns:a="http://schemas.openxmlformats.org/drawingml/2006/main">
-              <a:ext uri="{FF2B5EF4-FFF2-40B4-BE49-F238E27FC236}">
-                <a16:creationId xmlns:a16="http://schemas.microsoft.com/office/drawing/2014/main" id="{E354E301-634D-4AAA-AAE2-1E33BEEC6322}"/>
-              </a:ext>
-            </a:extLst>
-          </p:cNvPr>
-          <p:cNvSpPr>
-            <a:spLocks xmlns:a="http://schemas.openxmlformats.org/drawingml/2006/main" noGrp="1"/>
-          </p:cNvSpPr>
-          <p:nvPr/>
-        </p:nvSpPr>
-        <p:spPr>
-          <a:xfrm xmlns:a="http://schemas.openxmlformats.org/drawingml/2006/main">
-            <a:off x="609600" y="6191250"/>
-            <a:ext cx="10972800" cy="209550"/>
-          </a:xfrm>
-          <a:prstGeom xmlns:a="http://schemas.openxmlformats.org/drawingml/2006/main" prst="rect">
-            <a:avLst/>
-          </a:prstGeom>
-          <a:noFill xmlns:a="http://schemas.openxmlformats.org/drawingml/2006/main"/>
-          <a:ln xmlns:a="http://schemas.openxmlformats.org/drawingml/2006/main" w="0">
-            <a:noFill/>
-          </a:ln>
-        </p:spPr>
-        <p:txBody>
-          <a:bodyPr xmlns:a="http://schemas.openxmlformats.org/drawingml/2006/main" wrap="none" lIns="0" tIns="0" rIns="0" bIns="0" anchor="ctr">
-            <a:noAutofit/>
-          </a:bodyPr>
-          <a:lstStyle xmlns:a="http://schemas.openxmlformats.org/drawingml/2006/main">
-            <a:defPPr algn="l">
-              <a:defRPr sz="1425" b="0">
-                <a:solidFill>
-                  <a:srgbClr val="4D5A68"/>
-                </a:solidFill>
-                <a:latin typeface="Malgun Gothic"/>
-                <a:ea typeface="Malgun Gothic"/>
-                <a:cs typeface="Malgun Gothic"/>
-              </a:defRPr>
-            </a:defPPr>
-            <a:lvl1pPr algn="l">
-              <a:defRPr sz="1425" b="0">
-                <a:solidFill>
-                  <a:srgbClr val="4D5A68"/>
-                </a:solidFill>
-                <a:latin typeface="Malgun Gothic"/>
-                <a:ea typeface="Malgun Gothic"/>
-                <a:cs typeface="Malgun Gothic"/>
-              </a:defRPr>
-            </a:lvl1pPr>
-            <a:lvl2pPr algn="l">
-              <a:defRPr sz="1425" b="0">
-                <a:solidFill>
-                  <a:srgbClr val="4D5A68"/>
-                </a:solidFill>
-                <a:latin typeface="Malgun Gothic"/>
-                <a:ea typeface="Malgun Gothic"/>
-                <a:cs typeface="Malgun Gothic"/>
-              </a:defRPr>
-            </a:lvl2pPr>
-            <a:lvl3pPr algn="l">
-              <a:defRPr sz="1425" b="0">
-                <a:solidFill>
-                  <a:srgbClr val="4D5A68"/>
-                </a:solidFill>
-                <a:latin typeface="Malgun Gothic"/>
-                <a:ea typeface="Malgun Gothic"/>
-                <a:cs typeface="Malgun Gothic"/>
-              </a:defRPr>
-            </a:lvl3pPr>
-            <a:lvl4pPr algn="l">
-              <a:defRPr sz="1425" b="0">
-                <a:solidFill>
-                  <a:srgbClr val="4D5A68"/>
-                </a:solidFill>
-                <a:latin typeface="Malgun Gothic"/>
-                <a:ea typeface="Malgun Gothic"/>
-                <a:cs typeface="Malgun Gothic"/>
-              </a:defRPr>
-            </a:lvl4pPr>
-            <a:lvl5pPr algn="l">
-              <a:defRPr sz="1425" b="0">
-                <a:solidFill>
-                  <a:srgbClr val="4D5A68"/>
-                </a:solidFill>
-                <a:latin typeface="Malgun Gothic"/>
-                <a:ea typeface="Malgun Gothic"/>
-                <a:cs typeface="Malgun Gothic"/>
-              </a:defRPr>
-            </a:lvl5pPr>
-            <a:lvl6pPr algn="l">
-              <a:defRPr sz="1425" b="0">
-                <a:solidFill>
-                  <a:srgbClr val="4D5A68"/>
-                </a:solidFill>
-                <a:latin typeface="Malgun Gothic"/>
-                <a:ea typeface="Malgun Gothic"/>
-                <a:cs typeface="Malgun Gothic"/>
-              </a:defRPr>
-            </a:lvl6pPr>
-            <a:lvl7pPr algn="l">
-              <a:defRPr sz="1425" b="0">
-                <a:solidFill>
-                  <a:srgbClr val="4D5A68"/>
-                </a:solidFill>
-                <a:latin typeface="Malgun Gothic"/>
-                <a:ea typeface="Malgun Gothic"/>
-                <a:cs typeface="Malgun Gothic"/>
-              </a:defRPr>
-            </a:lvl7pPr>
-            <a:lvl8pPr algn="l">
-              <a:defRPr sz="1425" b="0">
-                <a:solidFill>
-                  <a:srgbClr val="4D5A68"/>
-                </a:solidFill>
-                <a:latin typeface="Malgun Gothic"/>
-                <a:ea typeface="Malgun Gothic"/>
-                <a:cs typeface="Malgun Gothic"/>
-              </a:defRPr>
-            </a:lvl8pPr>
-            <a:lvl9pPr algn="l">
-              <a:defRPr sz="1425" b="0">
-                <a:solidFill>
-                  <a:srgbClr val="4D5A68"/>
-                </a:solidFill>
-                <a:latin typeface="Malgun Gothic"/>
-                <a:ea typeface="Malgun Gothic"/>
-                <a:cs typeface="Malgun Gothic"/>
-              </a:defRPr>
-            </a:lvl9pPr>
-          </a:lstStyle>
-          <a:p xmlns:a="http://schemas.openxmlformats.org/drawingml/2006/main">
-            <a:pPr algn="l">
-              <a:defRPr sz="1425" b="0">
-                <a:solidFill>
-                  <a:srgbClr val="4D5A68"/>
-                </a:solidFill>
-                <a:latin typeface="Malgun Gothic"/>
-                <a:ea typeface="Malgun Gothic"/>
-                <a:cs typeface="Malgun Gothic"/>
-              </a:defRPr>
-            </a:pPr>
-            <a:r>
-              <a:rPr sz="1425" b="0">
-                <a:solidFill>
-                  <a:srgbClr val="4D5A68"/>
-                </a:solidFill>
-                <a:latin typeface="Malgun Gothic"/>
-                <a:ea typeface="Malgun Gothic"/>
-                <a:cs typeface="Malgun Gothic"/>
-              </a:rPr>
-              <a:t>두 지침의 범위를 비교하는 장 · Agent 실행, 테스트 누락 또는 PASS / FAIL 결과를 뜻하지 않음</a:t>
-            </a:r>
-          </a:p>
-        </p:txBody>
-      </p:sp>
-      <p:sp>
-        <p:nvSpPr>
-          <p:cNvPr id="7" name="가정: 모듈 연결 동작도 검증해야 하는 프로젝트가 됐다">
-            <a:extLst xmlns:a="http://schemas.openxmlformats.org/drawingml/2006/main">
-              <a:ext uri="{FF2B5EF4-FFF2-40B4-BE49-F238E27FC236}">
-                <a16:creationId xmlns:a16="http://schemas.microsoft.com/office/drawing/2014/main" id="{A7A710B1-723B-46F5-B8F8-ED0AF0207C97}"/>
+                <a16:creationId xmlns:a16="http://schemas.microsoft.com/office/drawing/2014/main" id="{707D003B-1A36-4812-A67B-B3A3DDEF39D9}"/>
               </a:ext>
             </a:extLst>
           </p:cNvPr>
@@ -36301,10 +35869,10 @@
       </p:sp>
       <p:sp>
         <p:nvSpPr>
-          <p:cNvPr id="8" name="현재 프로젝트의 기준">
+          <p:cNvPr id="5" name="현재 프로젝트의 기준">
             <a:extLst xmlns:a="http://schemas.openxmlformats.org/drawingml/2006/main">
               <a:ext uri="{FF2B5EF4-FFF2-40B4-BE49-F238E27FC236}">
-                <a16:creationId xmlns:a16="http://schemas.microsoft.com/office/drawing/2014/main" id="{A70BFF26-59D0-45E2-BEAA-242E0BCBA227}"/>
+                <a16:creationId xmlns:a16="http://schemas.microsoft.com/office/drawing/2014/main" id="{D2A01DFA-69FD-4FD6-93A3-A9BD85920364}"/>
               </a:ext>
             </a:extLst>
           </p:cNvPr>
@@ -36315,7 +35883,7 @@
         </p:nvSpPr>
         <p:spPr>
           <a:xfrm xmlns:a="http://schemas.openxmlformats.org/drawingml/2006/main">
-            <a:off x="609600" y="2409825"/>
+            <a:off x="609600" y="2276475"/>
             <a:ext cx="5238750" cy="400050"/>
           </a:xfrm>
           <a:prstGeom xmlns:a="http://schemas.openxmlformats.org/drawingml/2006/main" prst="rect">
@@ -36459,10 +36027,10 @@
       </p:sp>
       <p:sp>
         <p:nvSpPr>
-          <p:cNvPr id="9" name="재사용 Workflow에 남은 지시">
+          <p:cNvPr id="6" name="재사용 Workflow에 남은 지시">
             <a:extLst xmlns:a="http://schemas.openxmlformats.org/drawingml/2006/main">
               <a:ext uri="{FF2B5EF4-FFF2-40B4-BE49-F238E27FC236}">
-                <a16:creationId xmlns:a16="http://schemas.microsoft.com/office/drawing/2014/main" id="{4A28E3B8-FE0A-46B4-A9E5-25D3300F51BC}"/>
+                <a16:creationId xmlns:a16="http://schemas.microsoft.com/office/drawing/2014/main" id="{0F209849-B020-48ED-B915-CBC3791761CE}"/>
               </a:ext>
             </a:extLst>
           </p:cNvPr>
@@ -36473,7 +36041,7 @@
         </p:nvSpPr>
         <p:spPr>
           <a:xfrm xmlns:a="http://schemas.openxmlformats.org/drawingml/2006/main">
-            <a:off x="6705600" y="2409825"/>
+            <a:off x="6705600" y="2276475"/>
             <a:ext cx="4876800" cy="400050"/>
           </a:xfrm>
           <a:prstGeom xmlns:a="http://schemas.openxmlformats.org/drawingml/2006/main" prst="rect">
@@ -36617,10 +36185,10 @@
       </p:sp>
       <p:sp>
         <p:nvSpPr>
-          <p:cNvPr id="10" name="">
+          <p:cNvPr id="7" name="">
             <a:extLst xmlns:a="http://schemas.openxmlformats.org/drawingml/2006/main">
               <a:ext uri="{FF2B5EF4-FFF2-40B4-BE49-F238E27FC236}">
-                <a16:creationId xmlns:a16="http://schemas.microsoft.com/office/drawing/2014/main" id="{45908E33-4367-43D9-B743-2EE1673F0FA7}"/>
+                <a16:creationId xmlns:a16="http://schemas.microsoft.com/office/drawing/2014/main" id="{063DE83F-3303-487C-92F1-06E53BA3CAB4}"/>
               </a:ext>
             </a:extLst>
           </p:cNvPr>
@@ -36631,7 +36199,7 @@
         </p:nvSpPr>
         <p:spPr>
           <a:xfrm xmlns:a="http://schemas.openxmlformats.org/drawingml/2006/main">
-            <a:off x="609600" y="2990850"/>
+            <a:off x="609600" y="2819400"/>
             <a:ext cx="4953000" cy="0"/>
           </a:xfrm>
           <a:prstGeom xmlns:a="http://schemas.openxmlformats.org/drawingml/2006/main" prst="line">
@@ -36648,10 +36216,10 @@
       </p:sp>
       <p:sp>
         <p:nvSpPr>
-          <p:cNvPr id="11" name="">
+          <p:cNvPr id="8" name="">
             <a:extLst xmlns:a="http://schemas.openxmlformats.org/drawingml/2006/main">
               <a:ext uri="{FF2B5EF4-FFF2-40B4-BE49-F238E27FC236}">
-                <a16:creationId xmlns:a16="http://schemas.microsoft.com/office/drawing/2014/main" id="{D4839550-9AFA-4540-9F11-FAB780D9EDF3}"/>
+                <a16:creationId xmlns:a16="http://schemas.microsoft.com/office/drawing/2014/main" id="{AC07FD5D-A8BA-483A-843D-883BA3081E3F}"/>
               </a:ext>
             </a:extLst>
           </p:cNvPr>
@@ -36662,7 +36230,7 @@
         </p:nvSpPr>
         <p:spPr>
           <a:xfrm xmlns:a="http://schemas.openxmlformats.org/drawingml/2006/main">
-            <a:off x="6705600" y="2990850"/>
+            <a:off x="6705600" y="2819400"/>
             <a:ext cx="4876800" cy="0"/>
           </a:xfrm>
           <a:prstGeom xmlns:a="http://schemas.openxmlformats.org/drawingml/2006/main" prst="line">
@@ -36679,10 +36247,10 @@
       </p:sp>
       <p:sp>
         <p:nvSpPr>
-          <p:cNvPr id="12" name="단위 테스트">
+          <p:cNvPr id="9" name="단위 테스트 · 각 모듈">
             <a:extLst xmlns:a="http://schemas.openxmlformats.org/drawingml/2006/main">
               <a:ext uri="{FF2B5EF4-FFF2-40B4-BE49-F238E27FC236}">
-                <a16:creationId xmlns:a16="http://schemas.microsoft.com/office/drawing/2014/main" id="{C58DAD01-FAA1-46C7-8FFE-8730227F94F1}"/>
+                <a16:creationId xmlns:a16="http://schemas.microsoft.com/office/drawing/2014/main" id="{7F9B7C3E-A936-4228-85CB-79FBD3CCF189}"/>
               </a:ext>
             </a:extLst>
           </p:cNvPr>
@@ -36693,8 +36261,8 @@
         </p:nvSpPr>
         <p:spPr>
           <a:xfrm xmlns:a="http://schemas.openxmlformats.org/drawingml/2006/main">
-            <a:off x="609600" y="3343275"/>
-            <a:ext cx="4953000" cy="438150"/>
+            <a:off x="609600" y="2971800"/>
+            <a:ext cx="4953000" cy="361950"/>
           </a:xfrm>
           <a:prstGeom xmlns:a="http://schemas.openxmlformats.org/drawingml/2006/main" prst="rect">
             <a:avLst/>
@@ -36710,7 +36278,7 @@
           </a:bodyPr>
           <a:lstStyle xmlns:a="http://schemas.openxmlformats.org/drawingml/2006/main">
             <a:defPPr algn="l">
-              <a:defRPr sz="2475" b="1">
+              <a:defRPr sz="2025" b="1">
                 <a:solidFill>
                   <a:srgbClr val="17212B"/>
                 </a:solidFill>
@@ -36720,7 +36288,7 @@
               </a:defRPr>
             </a:defPPr>
             <a:lvl1pPr algn="l">
-              <a:defRPr sz="2475" b="1">
+              <a:defRPr sz="2025" b="1">
                 <a:solidFill>
                   <a:srgbClr val="17212B"/>
                 </a:solidFill>
@@ -36730,7 +36298,7 @@
               </a:defRPr>
             </a:lvl1pPr>
             <a:lvl2pPr algn="l">
-              <a:defRPr sz="2475" b="1">
+              <a:defRPr sz="2025" b="1">
                 <a:solidFill>
                   <a:srgbClr val="17212B"/>
                 </a:solidFill>
@@ -36740,7 +36308,7 @@
               </a:defRPr>
             </a:lvl2pPr>
             <a:lvl3pPr algn="l">
-              <a:defRPr sz="2475" b="1">
+              <a:defRPr sz="2025" b="1">
                 <a:solidFill>
                   <a:srgbClr val="17212B"/>
                 </a:solidFill>
@@ -36750,7 +36318,7 @@
               </a:defRPr>
             </a:lvl3pPr>
             <a:lvl4pPr algn="l">
-              <a:defRPr sz="2475" b="1">
+              <a:defRPr sz="2025" b="1">
                 <a:solidFill>
                   <a:srgbClr val="17212B"/>
                 </a:solidFill>
@@ -36760,7 +36328,7 @@
               </a:defRPr>
             </a:lvl4pPr>
             <a:lvl5pPr algn="l">
-              <a:defRPr sz="2475" b="1">
+              <a:defRPr sz="2025" b="1">
                 <a:solidFill>
                   <a:srgbClr val="17212B"/>
                 </a:solidFill>
@@ -36770,7 +36338,7 @@
               </a:defRPr>
             </a:lvl5pPr>
             <a:lvl6pPr algn="l">
-              <a:defRPr sz="2475" b="1">
+              <a:defRPr sz="2025" b="1">
                 <a:solidFill>
                   <a:srgbClr val="17212B"/>
                 </a:solidFill>
@@ -36780,7 +36348,7 @@
               </a:defRPr>
             </a:lvl6pPr>
             <a:lvl7pPr algn="l">
-              <a:defRPr sz="2475" b="1">
+              <a:defRPr sz="2025" b="1">
                 <a:solidFill>
                   <a:srgbClr val="17212B"/>
                 </a:solidFill>
@@ -36790,7 +36358,7 @@
               </a:defRPr>
             </a:lvl7pPr>
             <a:lvl8pPr algn="l">
-              <a:defRPr sz="2475" b="1">
+              <a:defRPr sz="2025" b="1">
                 <a:solidFill>
                   <a:srgbClr val="17212B"/>
                 </a:solidFill>
@@ -36800,7 +36368,7 @@
               </a:defRPr>
             </a:lvl8pPr>
             <a:lvl9pPr algn="l">
-              <a:defRPr sz="2475" b="1">
+              <a:defRPr sz="2025" b="1">
                 <a:solidFill>
                   <a:srgbClr val="17212B"/>
                 </a:solidFill>
@@ -36812,7 +36380,7 @@
           </a:lstStyle>
           <a:p xmlns:a="http://schemas.openxmlformats.org/drawingml/2006/main">
             <a:pPr algn="l">
-              <a:defRPr sz="2475" b="1">
+              <a:defRPr sz="2025" b="1">
                 <a:solidFill>
                   <a:srgbClr val="17212B"/>
                 </a:solidFill>
@@ -36822,7 +36390,7 @@
               </a:defRPr>
             </a:pPr>
             <a:r>
-              <a:rPr sz="2475" b="1">
+              <a:rPr sz="2025" b="1">
                 <a:solidFill>
                   <a:srgbClr val="17212B"/>
                 </a:solidFill>
@@ -36830,17 +36398,17 @@
                 <a:ea typeface="Malgun Gothic"/>
                 <a:cs typeface="Malgun Gothic"/>
               </a:rPr>
-              <a:t>단위 테스트</a:t>
+              <a:t>단위 테스트 · 각 모듈</a:t>
             </a:r>
           </a:p>
         </p:txBody>
       </p:sp>
       <p:sp>
         <p:nvSpPr>
-          <p:cNvPr id="13" name="단위 테스트">
+          <p:cNvPr id="10" name="단위 테스트 · 각 모듈">
             <a:extLst xmlns:a="http://schemas.openxmlformats.org/drawingml/2006/main">
               <a:ext uri="{FF2B5EF4-FFF2-40B4-BE49-F238E27FC236}">
-                <a16:creationId xmlns:a16="http://schemas.microsoft.com/office/drawing/2014/main" id="{F036F046-D49E-4E36-8780-8A0CE31F163A}"/>
+                <a16:creationId xmlns:a16="http://schemas.microsoft.com/office/drawing/2014/main" id="{941B16A4-C821-4C1C-A97D-79F4A9607062}"/>
               </a:ext>
             </a:extLst>
           </p:cNvPr>
@@ -36851,8 +36419,8 @@
         </p:nvSpPr>
         <p:spPr>
           <a:xfrm xmlns:a="http://schemas.openxmlformats.org/drawingml/2006/main">
-            <a:off x="6705600" y="3343275"/>
-            <a:ext cx="4876800" cy="438150"/>
+            <a:off x="6705600" y="2971800"/>
+            <a:ext cx="4876800" cy="361950"/>
           </a:xfrm>
           <a:prstGeom xmlns:a="http://schemas.openxmlformats.org/drawingml/2006/main" prst="rect">
             <a:avLst/>
@@ -36868,7 +36436,7 @@
           </a:bodyPr>
           <a:lstStyle xmlns:a="http://schemas.openxmlformats.org/drawingml/2006/main">
             <a:defPPr algn="l">
-              <a:defRPr sz="2475" b="1">
+              <a:defRPr sz="2025" b="1">
                 <a:solidFill>
                   <a:srgbClr val="17212B"/>
                 </a:solidFill>
@@ -36878,7 +36446,7 @@
               </a:defRPr>
             </a:defPPr>
             <a:lvl1pPr algn="l">
-              <a:defRPr sz="2475" b="1">
+              <a:defRPr sz="2025" b="1">
                 <a:solidFill>
                   <a:srgbClr val="17212B"/>
                 </a:solidFill>
@@ -36888,7 +36456,7 @@
               </a:defRPr>
             </a:lvl1pPr>
             <a:lvl2pPr algn="l">
-              <a:defRPr sz="2475" b="1">
+              <a:defRPr sz="2025" b="1">
                 <a:solidFill>
                   <a:srgbClr val="17212B"/>
                 </a:solidFill>
@@ -36898,7 +36466,7 @@
               </a:defRPr>
             </a:lvl2pPr>
             <a:lvl3pPr algn="l">
-              <a:defRPr sz="2475" b="1">
+              <a:defRPr sz="2025" b="1">
                 <a:solidFill>
                   <a:srgbClr val="17212B"/>
                 </a:solidFill>
@@ -36908,7 +36476,7 @@
               </a:defRPr>
             </a:lvl3pPr>
             <a:lvl4pPr algn="l">
-              <a:defRPr sz="2475" b="1">
+              <a:defRPr sz="2025" b="1">
                 <a:solidFill>
                   <a:srgbClr val="17212B"/>
                 </a:solidFill>
@@ -36918,7 +36486,7 @@
               </a:defRPr>
             </a:lvl4pPr>
             <a:lvl5pPr algn="l">
-              <a:defRPr sz="2475" b="1">
+              <a:defRPr sz="2025" b="1">
                 <a:solidFill>
                   <a:srgbClr val="17212B"/>
                 </a:solidFill>
@@ -36928,7 +36496,7 @@
               </a:defRPr>
             </a:lvl5pPr>
             <a:lvl6pPr algn="l">
-              <a:defRPr sz="2475" b="1">
+              <a:defRPr sz="2025" b="1">
                 <a:solidFill>
                   <a:srgbClr val="17212B"/>
                 </a:solidFill>
@@ -36938,7 +36506,7 @@
               </a:defRPr>
             </a:lvl6pPr>
             <a:lvl7pPr algn="l">
-              <a:defRPr sz="2475" b="1">
+              <a:defRPr sz="2025" b="1">
                 <a:solidFill>
                   <a:srgbClr val="17212B"/>
                 </a:solidFill>
@@ -36948,7 +36516,7 @@
               </a:defRPr>
             </a:lvl7pPr>
             <a:lvl8pPr algn="l">
-              <a:defRPr sz="2475" b="1">
+              <a:defRPr sz="2025" b="1">
                 <a:solidFill>
                   <a:srgbClr val="17212B"/>
                 </a:solidFill>
@@ -36958,7 +36526,7 @@
               </a:defRPr>
             </a:lvl8pPr>
             <a:lvl9pPr algn="l">
-              <a:defRPr sz="2475" b="1">
+              <a:defRPr sz="2025" b="1">
                 <a:solidFill>
                   <a:srgbClr val="17212B"/>
                 </a:solidFill>
@@ -36970,7 +36538,7 @@
           </a:lstStyle>
           <a:p xmlns:a="http://schemas.openxmlformats.org/drawingml/2006/main">
             <a:pPr algn="l">
-              <a:defRPr sz="2475" b="1">
+              <a:defRPr sz="2025" b="1">
                 <a:solidFill>
                   <a:srgbClr val="17212B"/>
                 </a:solidFill>
@@ -36980,7 +36548,7 @@
               </a:defRPr>
             </a:pPr>
             <a:r>
-              <a:rPr sz="2475" b="1">
+              <a:rPr sz="2025" b="1">
                 <a:solidFill>
                   <a:srgbClr val="17212B"/>
                 </a:solidFill>
@@ -36988,17 +36556,17 @@
                 <a:ea typeface="Malgun Gothic"/>
                 <a:cs typeface="Malgun Gothic"/>
               </a:rPr>
-              <a:t>단위 테스트</a:t>
+              <a:t>단위 테스트 · 각 모듈</a:t>
             </a:r>
           </a:p>
         </p:txBody>
       </p:sp>
       <p:sp>
         <p:nvSpPr>
-          <p:cNvPr id="14" name="">
+          <p:cNvPr id="11" name="">
             <a:extLst xmlns:a="http://schemas.openxmlformats.org/drawingml/2006/main">
               <a:ext uri="{FF2B5EF4-FFF2-40B4-BE49-F238E27FC236}">
-                <a16:creationId xmlns:a16="http://schemas.microsoft.com/office/drawing/2014/main" id="{62F3533A-57E9-4410-A1E3-0F30FDBFE5A2}"/>
+                <a16:creationId xmlns:a16="http://schemas.microsoft.com/office/drawing/2014/main" id="{4EEFCDFF-BA40-4131-BB56-DBCB7AD119BA}"/>
               </a:ext>
             </a:extLst>
           </p:cNvPr>
@@ -37009,8 +36577,8 @@
         </p:nvSpPr>
         <p:spPr>
           <a:xfrm xmlns:a="http://schemas.openxmlformats.org/drawingml/2006/main">
-            <a:off x="609600" y="4048125"/>
-            <a:ext cx="4953000" cy="742950"/>
+            <a:off x="609600" y="3371850"/>
+            <a:ext cx="4953000" cy="1200150"/>
           </a:xfrm>
           <a:prstGeom xmlns:a="http://schemas.openxmlformats.org/drawingml/2006/main" prst="rect">
             <a:avLst/>
@@ -37018,18 +36586,20 @@
           <a:solidFill xmlns:a="http://schemas.openxmlformats.org/drawingml/2006/main">
             <a:srgbClr val="E0EFF0"/>
           </a:solidFill>
-          <a:ln xmlns:a="http://schemas.openxmlformats.org/drawingml/2006/main" w="0">
-            <a:noFill/>
+          <a:ln xmlns:a="http://schemas.openxmlformats.org/drawingml/2006/main" w="19050">
+            <a:solidFill>
+              <a:srgbClr val="0B6172"/>
+            </a:solidFill>
             <a:prstDash val="solid"/>
           </a:ln>
         </p:spPr>
       </p:sp>
       <p:sp>
         <p:nvSpPr>
-          <p:cNvPr id="15" name="+ 통합 테스트">
+          <p:cNvPr id="12" name="">
             <a:extLst xmlns:a="http://schemas.openxmlformats.org/drawingml/2006/main">
               <a:ext uri="{FF2B5EF4-FFF2-40B4-BE49-F238E27FC236}">
-                <a16:creationId xmlns:a16="http://schemas.microsoft.com/office/drawing/2014/main" id="{DEA1E641-5F53-4DA6-B102-117B43A7AC82}"/>
+                <a16:creationId xmlns:a16="http://schemas.microsoft.com/office/drawing/2014/main" id="{5382FE18-D14E-43CA-BE8B-7DCD3CA4E3EE}"/>
               </a:ext>
             </a:extLst>
           </p:cNvPr>
@@ -37040,8 +36610,420 @@
         </p:nvSpPr>
         <p:spPr>
           <a:xfrm xmlns:a="http://schemas.openxmlformats.org/drawingml/2006/main">
-            <a:off x="838200" y="4200525"/>
-            <a:ext cx="4495800" cy="419100"/>
+            <a:off x="800100" y="3562350"/>
+            <a:ext cx="1733550" cy="685800"/>
+          </a:xfrm>
+          <a:prstGeom xmlns:a="http://schemas.openxmlformats.org/drawingml/2006/main" prst="rect">
+            <a:avLst/>
+          </a:prstGeom>
+          <a:solidFill xmlns:a="http://schemas.openxmlformats.org/drawingml/2006/main">
+            <a:srgbClr val="FFFFFF"/>
+          </a:solidFill>
+          <a:ln xmlns:a="http://schemas.openxmlformats.org/drawingml/2006/main" w="19050">
+            <a:solidFill>
+              <a:srgbClr val="0B6172"/>
+            </a:solidFill>
+            <a:prstDash val="solid"/>
+          </a:ln>
+        </p:spPr>
+      </p:sp>
+      <p:sp>
+        <p:nvSpPr>
+          <p:cNvPr id="13" name="모듈 A">
+            <a:extLst xmlns:a="http://schemas.openxmlformats.org/drawingml/2006/main">
+              <a:ext uri="{FF2B5EF4-FFF2-40B4-BE49-F238E27FC236}">
+                <a16:creationId xmlns:a16="http://schemas.microsoft.com/office/drawing/2014/main" id="{FBF9E6AD-7F01-4E64-92F1-2DFE2376FB2F}"/>
+              </a:ext>
+            </a:extLst>
+          </p:cNvPr>
+          <p:cNvSpPr>
+            <a:spLocks xmlns:a="http://schemas.openxmlformats.org/drawingml/2006/main" noGrp="1"/>
+          </p:cNvSpPr>
+          <p:nvPr/>
+        </p:nvSpPr>
+        <p:spPr>
+          <a:xfrm xmlns:a="http://schemas.openxmlformats.org/drawingml/2006/main">
+            <a:off x="914400" y="3724275"/>
+            <a:ext cx="1504950" cy="342900"/>
+          </a:xfrm>
+          <a:prstGeom xmlns:a="http://schemas.openxmlformats.org/drawingml/2006/main" prst="rect">
+            <a:avLst/>
+          </a:prstGeom>
+          <a:noFill xmlns:a="http://schemas.openxmlformats.org/drawingml/2006/main"/>
+          <a:ln xmlns:a="http://schemas.openxmlformats.org/drawingml/2006/main" w="0">
+            <a:noFill/>
+          </a:ln>
+        </p:spPr>
+        <p:txBody>
+          <a:bodyPr xmlns:a="http://schemas.openxmlformats.org/drawingml/2006/main" wrap="none" lIns="0" tIns="0" rIns="0" bIns="0" anchor="ctr">
+            <a:noAutofit/>
+          </a:bodyPr>
+          <a:lstStyle xmlns:a="http://schemas.openxmlformats.org/drawingml/2006/main">
+            <a:defPPr algn="ctr">
+              <a:defRPr sz="2025" b="1">
+                <a:solidFill>
+                  <a:srgbClr val="17212B"/>
+                </a:solidFill>
+                <a:latin typeface="Malgun Gothic"/>
+                <a:ea typeface="Malgun Gothic"/>
+                <a:cs typeface="Malgun Gothic"/>
+              </a:defRPr>
+            </a:defPPr>
+            <a:lvl1pPr algn="ctr">
+              <a:defRPr sz="2025" b="1">
+                <a:solidFill>
+                  <a:srgbClr val="17212B"/>
+                </a:solidFill>
+                <a:latin typeface="Malgun Gothic"/>
+                <a:ea typeface="Malgun Gothic"/>
+                <a:cs typeface="Malgun Gothic"/>
+              </a:defRPr>
+            </a:lvl1pPr>
+            <a:lvl2pPr algn="ctr">
+              <a:defRPr sz="2025" b="1">
+                <a:solidFill>
+                  <a:srgbClr val="17212B"/>
+                </a:solidFill>
+                <a:latin typeface="Malgun Gothic"/>
+                <a:ea typeface="Malgun Gothic"/>
+                <a:cs typeface="Malgun Gothic"/>
+              </a:defRPr>
+            </a:lvl2pPr>
+            <a:lvl3pPr algn="ctr">
+              <a:defRPr sz="2025" b="1">
+                <a:solidFill>
+                  <a:srgbClr val="17212B"/>
+                </a:solidFill>
+                <a:latin typeface="Malgun Gothic"/>
+                <a:ea typeface="Malgun Gothic"/>
+                <a:cs typeface="Malgun Gothic"/>
+              </a:defRPr>
+            </a:lvl3pPr>
+            <a:lvl4pPr algn="ctr">
+              <a:defRPr sz="2025" b="1">
+                <a:solidFill>
+                  <a:srgbClr val="17212B"/>
+                </a:solidFill>
+                <a:latin typeface="Malgun Gothic"/>
+                <a:ea typeface="Malgun Gothic"/>
+                <a:cs typeface="Malgun Gothic"/>
+              </a:defRPr>
+            </a:lvl4pPr>
+            <a:lvl5pPr algn="ctr">
+              <a:defRPr sz="2025" b="1">
+                <a:solidFill>
+                  <a:srgbClr val="17212B"/>
+                </a:solidFill>
+                <a:latin typeface="Malgun Gothic"/>
+                <a:ea typeface="Malgun Gothic"/>
+                <a:cs typeface="Malgun Gothic"/>
+              </a:defRPr>
+            </a:lvl5pPr>
+            <a:lvl6pPr algn="ctr">
+              <a:defRPr sz="2025" b="1">
+                <a:solidFill>
+                  <a:srgbClr val="17212B"/>
+                </a:solidFill>
+                <a:latin typeface="Malgun Gothic"/>
+                <a:ea typeface="Malgun Gothic"/>
+                <a:cs typeface="Malgun Gothic"/>
+              </a:defRPr>
+            </a:lvl6pPr>
+            <a:lvl7pPr algn="ctr">
+              <a:defRPr sz="2025" b="1">
+                <a:solidFill>
+                  <a:srgbClr val="17212B"/>
+                </a:solidFill>
+                <a:latin typeface="Malgun Gothic"/>
+                <a:ea typeface="Malgun Gothic"/>
+                <a:cs typeface="Malgun Gothic"/>
+              </a:defRPr>
+            </a:lvl7pPr>
+            <a:lvl8pPr algn="ctr">
+              <a:defRPr sz="2025" b="1">
+                <a:solidFill>
+                  <a:srgbClr val="17212B"/>
+                </a:solidFill>
+                <a:latin typeface="Malgun Gothic"/>
+                <a:ea typeface="Malgun Gothic"/>
+                <a:cs typeface="Malgun Gothic"/>
+              </a:defRPr>
+            </a:lvl8pPr>
+            <a:lvl9pPr algn="ctr">
+              <a:defRPr sz="2025" b="1">
+                <a:solidFill>
+                  <a:srgbClr val="17212B"/>
+                </a:solidFill>
+                <a:latin typeface="Malgun Gothic"/>
+                <a:ea typeface="Malgun Gothic"/>
+                <a:cs typeface="Malgun Gothic"/>
+              </a:defRPr>
+            </a:lvl9pPr>
+          </a:lstStyle>
+          <a:p xmlns:a="http://schemas.openxmlformats.org/drawingml/2006/main">
+            <a:pPr algn="ctr">
+              <a:defRPr sz="2025" b="1">
+                <a:solidFill>
+                  <a:srgbClr val="17212B"/>
+                </a:solidFill>
+                <a:latin typeface="Malgun Gothic"/>
+                <a:ea typeface="Malgun Gothic"/>
+                <a:cs typeface="Malgun Gothic"/>
+              </a:defRPr>
+            </a:pPr>
+            <a:r>
+              <a:rPr sz="2025" b="1">
+                <a:solidFill>
+                  <a:srgbClr val="17212B"/>
+                </a:solidFill>
+                <a:latin typeface="Malgun Gothic"/>
+                <a:ea typeface="Malgun Gothic"/>
+                <a:cs typeface="Malgun Gothic"/>
+              </a:rPr>
+              <a:t>모듈 A</a:t>
+            </a:r>
+          </a:p>
+        </p:txBody>
+      </p:sp>
+      <p:sp>
+        <p:nvSpPr>
+          <p:cNvPr id="14" name="">
+            <a:extLst xmlns:a="http://schemas.openxmlformats.org/drawingml/2006/main">
+              <a:ext uri="{FF2B5EF4-FFF2-40B4-BE49-F238E27FC236}">
+                <a16:creationId xmlns:a16="http://schemas.microsoft.com/office/drawing/2014/main" id="{2C1BEE11-6DB5-4F72-9974-DADE626BE46E}"/>
+              </a:ext>
+            </a:extLst>
+          </p:cNvPr>
+          <p:cNvSpPr>
+            <a:spLocks xmlns:a="http://schemas.openxmlformats.org/drawingml/2006/main" noGrp="1"/>
+          </p:cNvSpPr>
+          <p:nvPr/>
+        </p:nvSpPr>
+        <p:spPr>
+          <a:xfrm xmlns:a="http://schemas.openxmlformats.org/drawingml/2006/main">
+            <a:off x="3638550" y="3562350"/>
+            <a:ext cx="1733550" cy="685800"/>
+          </a:xfrm>
+          <a:prstGeom xmlns:a="http://schemas.openxmlformats.org/drawingml/2006/main" prst="rect">
+            <a:avLst/>
+          </a:prstGeom>
+          <a:solidFill xmlns:a="http://schemas.openxmlformats.org/drawingml/2006/main">
+            <a:srgbClr val="FFFFFF"/>
+          </a:solidFill>
+          <a:ln xmlns:a="http://schemas.openxmlformats.org/drawingml/2006/main" w="19050">
+            <a:solidFill>
+              <a:srgbClr val="0B6172"/>
+            </a:solidFill>
+            <a:prstDash val="solid"/>
+          </a:ln>
+        </p:spPr>
+      </p:sp>
+      <p:sp>
+        <p:nvSpPr>
+          <p:cNvPr id="15" name="모듈 B">
+            <a:extLst xmlns:a="http://schemas.openxmlformats.org/drawingml/2006/main">
+              <a:ext uri="{FF2B5EF4-FFF2-40B4-BE49-F238E27FC236}">
+                <a16:creationId xmlns:a16="http://schemas.microsoft.com/office/drawing/2014/main" id="{8CA5E858-6DE9-42FA-8841-D5F95A5ABA57}"/>
+              </a:ext>
+            </a:extLst>
+          </p:cNvPr>
+          <p:cNvSpPr>
+            <a:spLocks xmlns:a="http://schemas.openxmlformats.org/drawingml/2006/main" noGrp="1"/>
+          </p:cNvSpPr>
+          <p:nvPr/>
+        </p:nvSpPr>
+        <p:spPr>
+          <a:xfrm xmlns:a="http://schemas.openxmlformats.org/drawingml/2006/main">
+            <a:off x="3752850" y="3724275"/>
+            <a:ext cx="1504950" cy="342900"/>
+          </a:xfrm>
+          <a:prstGeom xmlns:a="http://schemas.openxmlformats.org/drawingml/2006/main" prst="rect">
+            <a:avLst/>
+          </a:prstGeom>
+          <a:noFill xmlns:a="http://schemas.openxmlformats.org/drawingml/2006/main"/>
+          <a:ln xmlns:a="http://schemas.openxmlformats.org/drawingml/2006/main" w="0">
+            <a:noFill/>
+          </a:ln>
+        </p:spPr>
+        <p:txBody>
+          <a:bodyPr xmlns:a="http://schemas.openxmlformats.org/drawingml/2006/main" wrap="none" lIns="0" tIns="0" rIns="0" bIns="0" anchor="ctr">
+            <a:noAutofit/>
+          </a:bodyPr>
+          <a:lstStyle xmlns:a="http://schemas.openxmlformats.org/drawingml/2006/main">
+            <a:defPPr algn="ctr">
+              <a:defRPr sz="2025" b="1">
+                <a:solidFill>
+                  <a:srgbClr val="17212B"/>
+                </a:solidFill>
+                <a:latin typeface="Malgun Gothic"/>
+                <a:ea typeface="Malgun Gothic"/>
+                <a:cs typeface="Malgun Gothic"/>
+              </a:defRPr>
+            </a:defPPr>
+            <a:lvl1pPr algn="ctr">
+              <a:defRPr sz="2025" b="1">
+                <a:solidFill>
+                  <a:srgbClr val="17212B"/>
+                </a:solidFill>
+                <a:latin typeface="Malgun Gothic"/>
+                <a:ea typeface="Malgun Gothic"/>
+                <a:cs typeface="Malgun Gothic"/>
+              </a:defRPr>
+            </a:lvl1pPr>
+            <a:lvl2pPr algn="ctr">
+              <a:defRPr sz="2025" b="1">
+                <a:solidFill>
+                  <a:srgbClr val="17212B"/>
+                </a:solidFill>
+                <a:latin typeface="Malgun Gothic"/>
+                <a:ea typeface="Malgun Gothic"/>
+                <a:cs typeface="Malgun Gothic"/>
+              </a:defRPr>
+            </a:lvl2pPr>
+            <a:lvl3pPr algn="ctr">
+              <a:defRPr sz="2025" b="1">
+                <a:solidFill>
+                  <a:srgbClr val="17212B"/>
+                </a:solidFill>
+                <a:latin typeface="Malgun Gothic"/>
+                <a:ea typeface="Malgun Gothic"/>
+                <a:cs typeface="Malgun Gothic"/>
+              </a:defRPr>
+            </a:lvl3pPr>
+            <a:lvl4pPr algn="ctr">
+              <a:defRPr sz="2025" b="1">
+                <a:solidFill>
+                  <a:srgbClr val="17212B"/>
+                </a:solidFill>
+                <a:latin typeface="Malgun Gothic"/>
+                <a:ea typeface="Malgun Gothic"/>
+                <a:cs typeface="Malgun Gothic"/>
+              </a:defRPr>
+            </a:lvl4pPr>
+            <a:lvl5pPr algn="ctr">
+              <a:defRPr sz="2025" b="1">
+                <a:solidFill>
+                  <a:srgbClr val="17212B"/>
+                </a:solidFill>
+                <a:latin typeface="Malgun Gothic"/>
+                <a:ea typeface="Malgun Gothic"/>
+                <a:cs typeface="Malgun Gothic"/>
+              </a:defRPr>
+            </a:lvl5pPr>
+            <a:lvl6pPr algn="ctr">
+              <a:defRPr sz="2025" b="1">
+                <a:solidFill>
+                  <a:srgbClr val="17212B"/>
+                </a:solidFill>
+                <a:latin typeface="Malgun Gothic"/>
+                <a:ea typeface="Malgun Gothic"/>
+                <a:cs typeface="Malgun Gothic"/>
+              </a:defRPr>
+            </a:lvl6pPr>
+            <a:lvl7pPr algn="ctr">
+              <a:defRPr sz="2025" b="1">
+                <a:solidFill>
+                  <a:srgbClr val="17212B"/>
+                </a:solidFill>
+                <a:latin typeface="Malgun Gothic"/>
+                <a:ea typeface="Malgun Gothic"/>
+                <a:cs typeface="Malgun Gothic"/>
+              </a:defRPr>
+            </a:lvl7pPr>
+            <a:lvl8pPr algn="ctr">
+              <a:defRPr sz="2025" b="1">
+                <a:solidFill>
+                  <a:srgbClr val="17212B"/>
+                </a:solidFill>
+                <a:latin typeface="Malgun Gothic"/>
+                <a:ea typeface="Malgun Gothic"/>
+                <a:cs typeface="Malgun Gothic"/>
+              </a:defRPr>
+            </a:lvl8pPr>
+            <a:lvl9pPr algn="ctr">
+              <a:defRPr sz="2025" b="1">
+                <a:solidFill>
+                  <a:srgbClr val="17212B"/>
+                </a:solidFill>
+                <a:latin typeface="Malgun Gothic"/>
+                <a:ea typeface="Malgun Gothic"/>
+                <a:cs typeface="Malgun Gothic"/>
+              </a:defRPr>
+            </a:lvl9pPr>
+          </a:lstStyle>
+          <a:p xmlns:a="http://schemas.openxmlformats.org/drawingml/2006/main">
+            <a:pPr algn="ctr">
+              <a:defRPr sz="2025" b="1">
+                <a:solidFill>
+                  <a:srgbClr val="17212B"/>
+                </a:solidFill>
+                <a:latin typeface="Malgun Gothic"/>
+                <a:ea typeface="Malgun Gothic"/>
+                <a:cs typeface="Malgun Gothic"/>
+              </a:defRPr>
+            </a:pPr>
+            <a:r>
+              <a:rPr sz="2025" b="1">
+                <a:solidFill>
+                  <a:srgbClr val="17212B"/>
+                </a:solidFill>
+                <a:latin typeface="Malgun Gothic"/>
+                <a:ea typeface="Malgun Gothic"/>
+                <a:cs typeface="Malgun Gothic"/>
+              </a:rPr>
+              <a:t>모듈 B</a:t>
+            </a:r>
+          </a:p>
+        </p:txBody>
+      </p:sp>
+      <p:sp>
+        <p:nvSpPr>
+          <p:cNvPr id="16" name="">
+            <a:extLst xmlns:a="http://schemas.openxmlformats.org/drawingml/2006/main">
+              <a:ext uri="{FF2B5EF4-FFF2-40B4-BE49-F238E27FC236}">
+                <a16:creationId xmlns:a16="http://schemas.microsoft.com/office/drawing/2014/main" id="{60BD696B-4EC4-4A2A-B685-9B90B69A8315}"/>
+              </a:ext>
+            </a:extLst>
+          </p:cNvPr>
+          <p:cNvSpPr>
+            <a:spLocks xmlns:a="http://schemas.openxmlformats.org/drawingml/2006/main" noGrp="1"/>
+          </p:cNvSpPr>
+          <p:nvPr/>
+        </p:nvSpPr>
+        <p:spPr>
+          <a:xfrm xmlns:a="http://schemas.openxmlformats.org/drawingml/2006/main">
+            <a:off x="2752725" y="3781425"/>
+            <a:ext cx="666750" cy="228600"/>
+          </a:xfrm>
+          <a:prstGeom xmlns:a="http://schemas.openxmlformats.org/drawingml/2006/main" prst="rightArrow">
+            <a:avLst/>
+          </a:prstGeom>
+          <a:solidFill xmlns:a="http://schemas.openxmlformats.org/drawingml/2006/main">
+            <a:srgbClr val="0B6172"/>
+          </a:solidFill>
+          <a:ln xmlns:a="http://schemas.openxmlformats.org/drawingml/2006/main" w="0">
+            <a:noFill/>
+          </a:ln>
+        </p:spPr>
+      </p:sp>
+      <p:sp>
+        <p:nvSpPr>
+          <p:cNvPr id="17" name="+ 통합 테스트 · 모듈 연결까지">
+            <a:extLst xmlns:a="http://schemas.openxmlformats.org/drawingml/2006/main">
+              <a:ext uri="{FF2B5EF4-FFF2-40B4-BE49-F238E27FC236}">
+                <a16:creationId xmlns:a16="http://schemas.microsoft.com/office/drawing/2014/main" id="{D35B3C86-64CD-4AFB-96E7-4D2AFC45722A}"/>
+              </a:ext>
+            </a:extLst>
+          </p:cNvPr>
+          <p:cNvSpPr>
+            <a:spLocks xmlns:a="http://schemas.openxmlformats.org/drawingml/2006/main" noGrp="1"/>
+          </p:cNvSpPr>
+          <p:nvPr/>
+        </p:nvSpPr>
+        <p:spPr>
+          <a:xfrm xmlns:a="http://schemas.openxmlformats.org/drawingml/2006/main">
+            <a:off x="609600" y="4648200"/>
+            <a:ext cx="4953000" cy="381000"/>
           </a:xfrm>
           <a:prstGeom xmlns:a="http://schemas.openxmlformats.org/drawingml/2006/main" prst="rect">
             <a:avLst/>
@@ -37057,7 +37039,7 @@
           </a:bodyPr>
           <a:lstStyle xmlns:a="http://schemas.openxmlformats.org/drawingml/2006/main">
             <a:defPPr algn="l">
-              <a:defRPr sz="2550" b="1">
+              <a:defRPr sz="2100" b="1">
                 <a:solidFill>
                   <a:srgbClr val="0B6172"/>
                 </a:solidFill>
@@ -37067,7 +37049,7 @@
               </a:defRPr>
             </a:defPPr>
             <a:lvl1pPr algn="l">
-              <a:defRPr sz="2550" b="1">
+              <a:defRPr sz="2100" b="1">
                 <a:solidFill>
                   <a:srgbClr val="0B6172"/>
                 </a:solidFill>
@@ -37077,7 +37059,7 @@
               </a:defRPr>
             </a:lvl1pPr>
             <a:lvl2pPr algn="l">
-              <a:defRPr sz="2550" b="1">
+              <a:defRPr sz="2100" b="1">
                 <a:solidFill>
                   <a:srgbClr val="0B6172"/>
                 </a:solidFill>
@@ -37087,7 +37069,7 @@
               </a:defRPr>
             </a:lvl2pPr>
             <a:lvl3pPr algn="l">
-              <a:defRPr sz="2550" b="1">
+              <a:defRPr sz="2100" b="1">
                 <a:solidFill>
                   <a:srgbClr val="0B6172"/>
                 </a:solidFill>
@@ -37097,7 +37079,7 @@
               </a:defRPr>
             </a:lvl3pPr>
             <a:lvl4pPr algn="l">
-              <a:defRPr sz="2550" b="1">
+              <a:defRPr sz="2100" b="1">
                 <a:solidFill>
                   <a:srgbClr val="0B6172"/>
                 </a:solidFill>
@@ -37107,7 +37089,7 @@
               </a:defRPr>
             </a:lvl4pPr>
             <a:lvl5pPr algn="l">
-              <a:defRPr sz="2550" b="1">
+              <a:defRPr sz="2100" b="1">
                 <a:solidFill>
                   <a:srgbClr val="0B6172"/>
                 </a:solidFill>
@@ -37117,7 +37099,7 @@
               </a:defRPr>
             </a:lvl5pPr>
             <a:lvl6pPr algn="l">
-              <a:defRPr sz="2550" b="1">
+              <a:defRPr sz="2100" b="1">
                 <a:solidFill>
                   <a:srgbClr val="0B6172"/>
                 </a:solidFill>
@@ -37127,7 +37109,7 @@
               </a:defRPr>
             </a:lvl6pPr>
             <a:lvl7pPr algn="l">
-              <a:defRPr sz="2550" b="1">
+              <a:defRPr sz="2100" b="1">
                 <a:solidFill>
                   <a:srgbClr val="0B6172"/>
                 </a:solidFill>
@@ -37137,7 +37119,7 @@
               </a:defRPr>
             </a:lvl7pPr>
             <a:lvl8pPr algn="l">
-              <a:defRPr sz="2550" b="1">
+              <a:defRPr sz="2100" b="1">
                 <a:solidFill>
                   <a:srgbClr val="0B6172"/>
                 </a:solidFill>
@@ -37147,7 +37129,7 @@
               </a:defRPr>
             </a:lvl8pPr>
             <a:lvl9pPr algn="l">
-              <a:defRPr sz="2550" b="1">
+              <a:defRPr sz="2100" b="1">
                 <a:solidFill>
                   <a:srgbClr val="0B6172"/>
                 </a:solidFill>
@@ -37159,7 +37141,7 @@
           </a:lstStyle>
           <a:p xmlns:a="http://schemas.openxmlformats.org/drawingml/2006/main">
             <a:pPr algn="l">
-              <a:defRPr sz="2550" b="1">
+              <a:defRPr sz="2100" b="1">
                 <a:solidFill>
                   <a:srgbClr val="0B6172"/>
                 </a:solidFill>
@@ -37169,7 +37151,7 @@
               </a:defRPr>
             </a:pPr>
             <a:r>
-              <a:rPr sz="2550" b="1">
+              <a:rPr sz="2100" b="1">
                 <a:solidFill>
                   <a:srgbClr val="0B6172"/>
                 </a:solidFill>
@@ -37177,17 +37159,17 @@
                 <a:ea typeface="Malgun Gothic"/>
                 <a:cs typeface="Malgun Gothic"/>
               </a:rPr>
-              <a:t>+ 통합 테스트</a:t>
+              <a:t>+ 통합 테스트 · 모듈 연결까지</a:t>
             </a:r>
           </a:p>
         </p:txBody>
       </p:sp>
       <p:sp>
         <p:nvSpPr>
-          <p:cNvPr id="16" name="">
+          <p:cNvPr id="18" name="">
             <a:extLst xmlns:a="http://schemas.openxmlformats.org/drawingml/2006/main">
               <a:ext uri="{FF2B5EF4-FFF2-40B4-BE49-F238E27FC236}">
-                <a16:creationId xmlns:a16="http://schemas.microsoft.com/office/drawing/2014/main" id="{34EAF42C-0A6D-466B-9F67-8124E6EC2E5C}"/>
+                <a16:creationId xmlns:a16="http://schemas.microsoft.com/office/drawing/2014/main" id="{C3CCAFD8-577D-4E19-B597-7A424CA1B76E}"/>
               </a:ext>
             </a:extLst>
           </p:cNvPr>
@@ -37198,8 +37180,420 @@
         </p:nvSpPr>
         <p:spPr>
           <a:xfrm xmlns:a="http://schemas.openxmlformats.org/drawingml/2006/main">
-            <a:off x="6705600" y="4048125"/>
-            <a:ext cx="4876800" cy="742950"/>
+            <a:off x="6896100" y="3562350"/>
+            <a:ext cx="1733550" cy="685800"/>
+          </a:xfrm>
+          <a:prstGeom xmlns:a="http://schemas.openxmlformats.org/drawingml/2006/main" prst="rect">
+            <a:avLst/>
+          </a:prstGeom>
+          <a:solidFill xmlns:a="http://schemas.openxmlformats.org/drawingml/2006/main">
+            <a:srgbClr val="FFFFFF"/>
+          </a:solidFill>
+          <a:ln xmlns:a="http://schemas.openxmlformats.org/drawingml/2006/main" w="19050">
+            <a:solidFill>
+              <a:srgbClr val="0B6172"/>
+            </a:solidFill>
+            <a:prstDash val="solid"/>
+          </a:ln>
+        </p:spPr>
+      </p:sp>
+      <p:sp>
+        <p:nvSpPr>
+          <p:cNvPr id="19" name="모듈 A">
+            <a:extLst xmlns:a="http://schemas.openxmlformats.org/drawingml/2006/main">
+              <a:ext uri="{FF2B5EF4-FFF2-40B4-BE49-F238E27FC236}">
+                <a16:creationId xmlns:a16="http://schemas.microsoft.com/office/drawing/2014/main" id="{19DFB1F3-2E82-491F-A840-64545596CE3F}"/>
+              </a:ext>
+            </a:extLst>
+          </p:cNvPr>
+          <p:cNvSpPr>
+            <a:spLocks xmlns:a="http://schemas.openxmlformats.org/drawingml/2006/main" noGrp="1"/>
+          </p:cNvSpPr>
+          <p:nvPr/>
+        </p:nvSpPr>
+        <p:spPr>
+          <a:xfrm xmlns:a="http://schemas.openxmlformats.org/drawingml/2006/main">
+            <a:off x="7010400" y="3724275"/>
+            <a:ext cx="1504950" cy="342900"/>
+          </a:xfrm>
+          <a:prstGeom xmlns:a="http://schemas.openxmlformats.org/drawingml/2006/main" prst="rect">
+            <a:avLst/>
+          </a:prstGeom>
+          <a:noFill xmlns:a="http://schemas.openxmlformats.org/drawingml/2006/main"/>
+          <a:ln xmlns:a="http://schemas.openxmlformats.org/drawingml/2006/main" w="0">
+            <a:noFill/>
+          </a:ln>
+        </p:spPr>
+        <p:txBody>
+          <a:bodyPr xmlns:a="http://schemas.openxmlformats.org/drawingml/2006/main" wrap="none" lIns="0" tIns="0" rIns="0" bIns="0" anchor="ctr">
+            <a:noAutofit/>
+          </a:bodyPr>
+          <a:lstStyle xmlns:a="http://schemas.openxmlformats.org/drawingml/2006/main">
+            <a:defPPr algn="ctr">
+              <a:defRPr sz="2025" b="1">
+                <a:solidFill>
+                  <a:srgbClr val="17212B"/>
+                </a:solidFill>
+                <a:latin typeface="Malgun Gothic"/>
+                <a:ea typeface="Malgun Gothic"/>
+                <a:cs typeface="Malgun Gothic"/>
+              </a:defRPr>
+            </a:defPPr>
+            <a:lvl1pPr algn="ctr">
+              <a:defRPr sz="2025" b="1">
+                <a:solidFill>
+                  <a:srgbClr val="17212B"/>
+                </a:solidFill>
+                <a:latin typeface="Malgun Gothic"/>
+                <a:ea typeface="Malgun Gothic"/>
+                <a:cs typeface="Malgun Gothic"/>
+              </a:defRPr>
+            </a:lvl1pPr>
+            <a:lvl2pPr algn="ctr">
+              <a:defRPr sz="2025" b="1">
+                <a:solidFill>
+                  <a:srgbClr val="17212B"/>
+                </a:solidFill>
+                <a:latin typeface="Malgun Gothic"/>
+                <a:ea typeface="Malgun Gothic"/>
+                <a:cs typeface="Malgun Gothic"/>
+              </a:defRPr>
+            </a:lvl2pPr>
+            <a:lvl3pPr algn="ctr">
+              <a:defRPr sz="2025" b="1">
+                <a:solidFill>
+                  <a:srgbClr val="17212B"/>
+                </a:solidFill>
+                <a:latin typeface="Malgun Gothic"/>
+                <a:ea typeface="Malgun Gothic"/>
+                <a:cs typeface="Malgun Gothic"/>
+              </a:defRPr>
+            </a:lvl3pPr>
+            <a:lvl4pPr algn="ctr">
+              <a:defRPr sz="2025" b="1">
+                <a:solidFill>
+                  <a:srgbClr val="17212B"/>
+                </a:solidFill>
+                <a:latin typeface="Malgun Gothic"/>
+                <a:ea typeface="Malgun Gothic"/>
+                <a:cs typeface="Malgun Gothic"/>
+              </a:defRPr>
+            </a:lvl4pPr>
+            <a:lvl5pPr algn="ctr">
+              <a:defRPr sz="2025" b="1">
+                <a:solidFill>
+                  <a:srgbClr val="17212B"/>
+                </a:solidFill>
+                <a:latin typeface="Malgun Gothic"/>
+                <a:ea typeface="Malgun Gothic"/>
+                <a:cs typeface="Malgun Gothic"/>
+              </a:defRPr>
+            </a:lvl5pPr>
+            <a:lvl6pPr algn="ctr">
+              <a:defRPr sz="2025" b="1">
+                <a:solidFill>
+                  <a:srgbClr val="17212B"/>
+                </a:solidFill>
+                <a:latin typeface="Malgun Gothic"/>
+                <a:ea typeface="Malgun Gothic"/>
+                <a:cs typeface="Malgun Gothic"/>
+              </a:defRPr>
+            </a:lvl6pPr>
+            <a:lvl7pPr algn="ctr">
+              <a:defRPr sz="2025" b="1">
+                <a:solidFill>
+                  <a:srgbClr val="17212B"/>
+                </a:solidFill>
+                <a:latin typeface="Malgun Gothic"/>
+                <a:ea typeface="Malgun Gothic"/>
+                <a:cs typeface="Malgun Gothic"/>
+              </a:defRPr>
+            </a:lvl7pPr>
+            <a:lvl8pPr algn="ctr">
+              <a:defRPr sz="2025" b="1">
+                <a:solidFill>
+                  <a:srgbClr val="17212B"/>
+                </a:solidFill>
+                <a:latin typeface="Malgun Gothic"/>
+                <a:ea typeface="Malgun Gothic"/>
+                <a:cs typeface="Malgun Gothic"/>
+              </a:defRPr>
+            </a:lvl8pPr>
+            <a:lvl9pPr algn="ctr">
+              <a:defRPr sz="2025" b="1">
+                <a:solidFill>
+                  <a:srgbClr val="17212B"/>
+                </a:solidFill>
+                <a:latin typeface="Malgun Gothic"/>
+                <a:ea typeface="Malgun Gothic"/>
+                <a:cs typeface="Malgun Gothic"/>
+              </a:defRPr>
+            </a:lvl9pPr>
+          </a:lstStyle>
+          <a:p xmlns:a="http://schemas.openxmlformats.org/drawingml/2006/main">
+            <a:pPr algn="ctr">
+              <a:defRPr sz="2025" b="1">
+                <a:solidFill>
+                  <a:srgbClr val="17212B"/>
+                </a:solidFill>
+                <a:latin typeface="Malgun Gothic"/>
+                <a:ea typeface="Malgun Gothic"/>
+                <a:cs typeface="Malgun Gothic"/>
+              </a:defRPr>
+            </a:pPr>
+            <a:r>
+              <a:rPr sz="2025" b="1">
+                <a:solidFill>
+                  <a:srgbClr val="17212B"/>
+                </a:solidFill>
+                <a:latin typeface="Malgun Gothic"/>
+                <a:ea typeface="Malgun Gothic"/>
+                <a:cs typeface="Malgun Gothic"/>
+              </a:rPr>
+              <a:t>모듈 A</a:t>
+            </a:r>
+          </a:p>
+        </p:txBody>
+      </p:sp>
+      <p:sp>
+        <p:nvSpPr>
+          <p:cNvPr id="20" name="">
+            <a:extLst xmlns:a="http://schemas.openxmlformats.org/drawingml/2006/main">
+              <a:ext uri="{FF2B5EF4-FFF2-40B4-BE49-F238E27FC236}">
+                <a16:creationId xmlns:a16="http://schemas.microsoft.com/office/drawing/2014/main" id="{82CC63C4-6413-4B28-8113-52E69C24D478}"/>
+              </a:ext>
+            </a:extLst>
+          </p:cNvPr>
+          <p:cNvSpPr>
+            <a:spLocks xmlns:a="http://schemas.openxmlformats.org/drawingml/2006/main" noGrp="1"/>
+          </p:cNvSpPr>
+          <p:nvPr/>
+        </p:nvSpPr>
+        <p:spPr>
+          <a:xfrm xmlns:a="http://schemas.openxmlformats.org/drawingml/2006/main">
+            <a:off x="9658350" y="3562350"/>
+            <a:ext cx="1733550" cy="685800"/>
+          </a:xfrm>
+          <a:prstGeom xmlns:a="http://schemas.openxmlformats.org/drawingml/2006/main" prst="rect">
+            <a:avLst/>
+          </a:prstGeom>
+          <a:solidFill xmlns:a="http://schemas.openxmlformats.org/drawingml/2006/main">
+            <a:srgbClr val="FFFFFF"/>
+          </a:solidFill>
+          <a:ln xmlns:a="http://schemas.openxmlformats.org/drawingml/2006/main" w="19050">
+            <a:solidFill>
+              <a:srgbClr val="0B6172"/>
+            </a:solidFill>
+            <a:prstDash val="solid"/>
+          </a:ln>
+        </p:spPr>
+      </p:sp>
+      <p:sp>
+        <p:nvSpPr>
+          <p:cNvPr id="21" name="모듈 B">
+            <a:extLst xmlns:a="http://schemas.openxmlformats.org/drawingml/2006/main">
+              <a:ext uri="{FF2B5EF4-FFF2-40B4-BE49-F238E27FC236}">
+                <a16:creationId xmlns:a16="http://schemas.microsoft.com/office/drawing/2014/main" id="{FE9BA10E-F410-4B59-B409-2E6C52298C72}"/>
+              </a:ext>
+            </a:extLst>
+          </p:cNvPr>
+          <p:cNvSpPr>
+            <a:spLocks xmlns:a="http://schemas.openxmlformats.org/drawingml/2006/main" noGrp="1"/>
+          </p:cNvSpPr>
+          <p:nvPr/>
+        </p:nvSpPr>
+        <p:spPr>
+          <a:xfrm xmlns:a="http://schemas.openxmlformats.org/drawingml/2006/main">
+            <a:off x="9772650" y="3724275"/>
+            <a:ext cx="1504950" cy="342900"/>
+          </a:xfrm>
+          <a:prstGeom xmlns:a="http://schemas.openxmlformats.org/drawingml/2006/main" prst="rect">
+            <a:avLst/>
+          </a:prstGeom>
+          <a:noFill xmlns:a="http://schemas.openxmlformats.org/drawingml/2006/main"/>
+          <a:ln xmlns:a="http://schemas.openxmlformats.org/drawingml/2006/main" w="0">
+            <a:noFill/>
+          </a:ln>
+        </p:spPr>
+        <p:txBody>
+          <a:bodyPr xmlns:a="http://schemas.openxmlformats.org/drawingml/2006/main" wrap="none" lIns="0" tIns="0" rIns="0" bIns="0" anchor="ctr">
+            <a:noAutofit/>
+          </a:bodyPr>
+          <a:lstStyle xmlns:a="http://schemas.openxmlformats.org/drawingml/2006/main">
+            <a:defPPr algn="ctr">
+              <a:defRPr sz="2025" b="1">
+                <a:solidFill>
+                  <a:srgbClr val="17212B"/>
+                </a:solidFill>
+                <a:latin typeface="Malgun Gothic"/>
+                <a:ea typeface="Malgun Gothic"/>
+                <a:cs typeface="Malgun Gothic"/>
+              </a:defRPr>
+            </a:defPPr>
+            <a:lvl1pPr algn="ctr">
+              <a:defRPr sz="2025" b="1">
+                <a:solidFill>
+                  <a:srgbClr val="17212B"/>
+                </a:solidFill>
+                <a:latin typeface="Malgun Gothic"/>
+                <a:ea typeface="Malgun Gothic"/>
+                <a:cs typeface="Malgun Gothic"/>
+              </a:defRPr>
+            </a:lvl1pPr>
+            <a:lvl2pPr algn="ctr">
+              <a:defRPr sz="2025" b="1">
+                <a:solidFill>
+                  <a:srgbClr val="17212B"/>
+                </a:solidFill>
+                <a:latin typeface="Malgun Gothic"/>
+                <a:ea typeface="Malgun Gothic"/>
+                <a:cs typeface="Malgun Gothic"/>
+              </a:defRPr>
+            </a:lvl2pPr>
+            <a:lvl3pPr algn="ctr">
+              <a:defRPr sz="2025" b="1">
+                <a:solidFill>
+                  <a:srgbClr val="17212B"/>
+                </a:solidFill>
+                <a:latin typeface="Malgun Gothic"/>
+                <a:ea typeface="Malgun Gothic"/>
+                <a:cs typeface="Malgun Gothic"/>
+              </a:defRPr>
+            </a:lvl3pPr>
+            <a:lvl4pPr algn="ctr">
+              <a:defRPr sz="2025" b="1">
+                <a:solidFill>
+                  <a:srgbClr val="17212B"/>
+                </a:solidFill>
+                <a:latin typeface="Malgun Gothic"/>
+                <a:ea typeface="Malgun Gothic"/>
+                <a:cs typeface="Malgun Gothic"/>
+              </a:defRPr>
+            </a:lvl4pPr>
+            <a:lvl5pPr algn="ctr">
+              <a:defRPr sz="2025" b="1">
+                <a:solidFill>
+                  <a:srgbClr val="17212B"/>
+                </a:solidFill>
+                <a:latin typeface="Malgun Gothic"/>
+                <a:ea typeface="Malgun Gothic"/>
+                <a:cs typeface="Malgun Gothic"/>
+              </a:defRPr>
+            </a:lvl5pPr>
+            <a:lvl6pPr algn="ctr">
+              <a:defRPr sz="2025" b="1">
+                <a:solidFill>
+                  <a:srgbClr val="17212B"/>
+                </a:solidFill>
+                <a:latin typeface="Malgun Gothic"/>
+                <a:ea typeface="Malgun Gothic"/>
+                <a:cs typeface="Malgun Gothic"/>
+              </a:defRPr>
+            </a:lvl6pPr>
+            <a:lvl7pPr algn="ctr">
+              <a:defRPr sz="2025" b="1">
+                <a:solidFill>
+                  <a:srgbClr val="17212B"/>
+                </a:solidFill>
+                <a:latin typeface="Malgun Gothic"/>
+                <a:ea typeface="Malgun Gothic"/>
+                <a:cs typeface="Malgun Gothic"/>
+              </a:defRPr>
+            </a:lvl7pPr>
+            <a:lvl8pPr algn="ctr">
+              <a:defRPr sz="2025" b="1">
+                <a:solidFill>
+                  <a:srgbClr val="17212B"/>
+                </a:solidFill>
+                <a:latin typeface="Malgun Gothic"/>
+                <a:ea typeface="Malgun Gothic"/>
+                <a:cs typeface="Malgun Gothic"/>
+              </a:defRPr>
+            </a:lvl8pPr>
+            <a:lvl9pPr algn="ctr">
+              <a:defRPr sz="2025" b="1">
+                <a:solidFill>
+                  <a:srgbClr val="17212B"/>
+                </a:solidFill>
+                <a:latin typeface="Malgun Gothic"/>
+                <a:ea typeface="Malgun Gothic"/>
+                <a:cs typeface="Malgun Gothic"/>
+              </a:defRPr>
+            </a:lvl9pPr>
+          </a:lstStyle>
+          <a:p xmlns:a="http://schemas.openxmlformats.org/drawingml/2006/main">
+            <a:pPr algn="ctr">
+              <a:defRPr sz="2025" b="1">
+                <a:solidFill>
+                  <a:srgbClr val="17212B"/>
+                </a:solidFill>
+                <a:latin typeface="Malgun Gothic"/>
+                <a:ea typeface="Malgun Gothic"/>
+                <a:cs typeface="Malgun Gothic"/>
+              </a:defRPr>
+            </a:pPr>
+            <a:r>
+              <a:rPr sz="2025" b="1">
+                <a:solidFill>
+                  <a:srgbClr val="17212B"/>
+                </a:solidFill>
+                <a:latin typeface="Malgun Gothic"/>
+                <a:ea typeface="Malgun Gothic"/>
+                <a:cs typeface="Malgun Gothic"/>
+              </a:rPr>
+              <a:t>모듈 B</a:t>
+            </a:r>
+          </a:p>
+        </p:txBody>
+      </p:sp>
+      <p:sp>
+        <p:nvSpPr>
+          <p:cNvPr id="22" name="">
+            <a:extLst xmlns:a="http://schemas.openxmlformats.org/drawingml/2006/main">
+              <a:ext uri="{FF2B5EF4-FFF2-40B4-BE49-F238E27FC236}">
+                <a16:creationId xmlns:a16="http://schemas.microsoft.com/office/drawing/2014/main" id="{F3407476-4BC8-41A6-866E-F40E6D771A19}"/>
+              </a:ext>
+            </a:extLst>
+          </p:cNvPr>
+          <p:cNvSpPr>
+            <a:spLocks xmlns:a="http://schemas.openxmlformats.org/drawingml/2006/main" noGrp="1"/>
+          </p:cNvSpPr>
+          <p:nvPr/>
+        </p:nvSpPr>
+        <p:spPr>
+          <a:xfrm xmlns:a="http://schemas.openxmlformats.org/drawingml/2006/main">
+            <a:off x="8810625" y="3781425"/>
+            <a:ext cx="647700" cy="228600"/>
+          </a:xfrm>
+          <a:prstGeom xmlns:a="http://schemas.openxmlformats.org/drawingml/2006/main" prst="rightArrow">
+            <a:avLst/>
+          </a:prstGeom>
+          <a:solidFill xmlns:a="http://schemas.openxmlformats.org/drawingml/2006/main">
+            <a:srgbClr val="4D5A68"/>
+          </a:solidFill>
+          <a:ln xmlns:a="http://schemas.openxmlformats.org/drawingml/2006/main" w="0">
+            <a:noFill/>
+          </a:ln>
+        </p:spPr>
+      </p:sp>
+      <p:sp>
+        <p:nvSpPr>
+          <p:cNvPr id="23" name="">
+            <a:extLst xmlns:a="http://schemas.openxmlformats.org/drawingml/2006/main">
+              <a:ext uri="{FF2B5EF4-FFF2-40B4-BE49-F238E27FC236}">
+                <a16:creationId xmlns:a16="http://schemas.microsoft.com/office/drawing/2014/main" id="{4E55528F-23E8-48F6-9773-ACF275137A02}"/>
+              </a:ext>
+            </a:extLst>
+          </p:cNvPr>
+          <p:cNvSpPr>
+            <a:spLocks xmlns:a="http://schemas.openxmlformats.org/drawingml/2006/main" noGrp="1"/>
+          </p:cNvSpPr>
+          <p:nvPr/>
+        </p:nvSpPr>
+        <p:spPr>
+          <a:xfrm xmlns:a="http://schemas.openxmlformats.org/drawingml/2006/main">
+            <a:off x="6705600" y="4572000"/>
+            <a:ext cx="4876800" cy="495300"/>
           </a:xfrm>
           <a:prstGeom xmlns:a="http://schemas.openxmlformats.org/drawingml/2006/main" prst="rect">
             <a:avLst/>
@@ -37215,10 +37609,10 @@
       </p:sp>
       <p:sp>
         <p:nvSpPr>
-          <p:cNvPr id="17" name="단위 테스트만 지시">
+          <p:cNvPr id="24" name="단위 테스트만 지시">
             <a:extLst xmlns:a="http://schemas.openxmlformats.org/drawingml/2006/main">
               <a:ext uri="{FF2B5EF4-FFF2-40B4-BE49-F238E27FC236}">
-                <a16:creationId xmlns:a16="http://schemas.microsoft.com/office/drawing/2014/main" id="{D10C59EC-F9AF-412F-AC45-400041930C3B}"/>
+                <a16:creationId xmlns:a16="http://schemas.microsoft.com/office/drawing/2014/main" id="{5FD9A012-281F-4C0A-BCE5-42565349CCD2}"/>
               </a:ext>
             </a:extLst>
           </p:cNvPr>
@@ -37229,8 +37623,8 @@
         </p:nvSpPr>
         <p:spPr>
           <a:xfrm xmlns:a="http://schemas.openxmlformats.org/drawingml/2006/main">
-            <a:off x="6934200" y="4200525"/>
-            <a:ext cx="4419600" cy="419100"/>
+            <a:off x="6934200" y="4638675"/>
+            <a:ext cx="4419600" cy="361950"/>
           </a:xfrm>
           <a:prstGeom xmlns:a="http://schemas.openxmlformats.org/drawingml/2006/main" prst="rect">
             <a:avLst/>
@@ -37246,7 +37640,7 @@
           </a:bodyPr>
           <a:lstStyle xmlns:a="http://schemas.openxmlformats.org/drawingml/2006/main">
             <a:defPPr algn="l">
-              <a:defRPr sz="2250" b="0">
+              <a:defRPr sz="2175" b="1">
                 <a:solidFill>
                   <a:srgbClr val="805400"/>
                 </a:solidFill>
@@ -37256,7 +37650,7 @@
               </a:defRPr>
             </a:defPPr>
             <a:lvl1pPr algn="l">
-              <a:defRPr sz="2250" b="0">
+              <a:defRPr sz="2175" b="1">
                 <a:solidFill>
                   <a:srgbClr val="805400"/>
                 </a:solidFill>
@@ -37266,7 +37660,7 @@
               </a:defRPr>
             </a:lvl1pPr>
             <a:lvl2pPr algn="l">
-              <a:defRPr sz="2250" b="0">
+              <a:defRPr sz="2175" b="1">
                 <a:solidFill>
                   <a:srgbClr val="805400"/>
                 </a:solidFill>
@@ -37276,7 +37670,7 @@
               </a:defRPr>
             </a:lvl2pPr>
             <a:lvl3pPr algn="l">
-              <a:defRPr sz="2250" b="0">
+              <a:defRPr sz="2175" b="1">
                 <a:solidFill>
                   <a:srgbClr val="805400"/>
                 </a:solidFill>
@@ -37286,7 +37680,7 @@
               </a:defRPr>
             </a:lvl3pPr>
             <a:lvl4pPr algn="l">
-              <a:defRPr sz="2250" b="0">
+              <a:defRPr sz="2175" b="1">
                 <a:solidFill>
                   <a:srgbClr val="805400"/>
                 </a:solidFill>
@@ -37296,7 +37690,7 @@
               </a:defRPr>
             </a:lvl4pPr>
             <a:lvl5pPr algn="l">
-              <a:defRPr sz="2250" b="0">
+              <a:defRPr sz="2175" b="1">
                 <a:solidFill>
                   <a:srgbClr val="805400"/>
                 </a:solidFill>
@@ -37306,7 +37700,7 @@
               </a:defRPr>
             </a:lvl5pPr>
             <a:lvl6pPr algn="l">
-              <a:defRPr sz="2250" b="0">
+              <a:defRPr sz="2175" b="1">
                 <a:solidFill>
                   <a:srgbClr val="805400"/>
                 </a:solidFill>
@@ -37316,7 +37710,7 @@
               </a:defRPr>
             </a:lvl6pPr>
             <a:lvl7pPr algn="l">
-              <a:defRPr sz="2250" b="0">
+              <a:defRPr sz="2175" b="1">
                 <a:solidFill>
                   <a:srgbClr val="805400"/>
                 </a:solidFill>
@@ -37326,7 +37720,7 @@
               </a:defRPr>
             </a:lvl7pPr>
             <a:lvl8pPr algn="l">
-              <a:defRPr sz="2250" b="0">
+              <a:defRPr sz="2175" b="1">
                 <a:solidFill>
                   <a:srgbClr val="805400"/>
                 </a:solidFill>
@@ -37336,7 +37730,7 @@
               </a:defRPr>
             </a:lvl8pPr>
             <a:lvl9pPr algn="l">
-              <a:defRPr sz="2250" b="0">
+              <a:defRPr sz="2175" b="1">
                 <a:solidFill>
                   <a:srgbClr val="805400"/>
                 </a:solidFill>
@@ -37348,7 +37742,7 @@
           </a:lstStyle>
           <a:p xmlns:a="http://schemas.openxmlformats.org/drawingml/2006/main">
             <a:pPr algn="l">
-              <a:defRPr sz="2250" b="0">
+              <a:defRPr sz="2175" b="1">
                 <a:solidFill>
                   <a:srgbClr val="805400"/>
                 </a:solidFill>
@@ -37358,7 +37752,7 @@
               </a:defRPr>
             </a:pPr>
             <a:r>
-              <a:rPr sz="2250" b="0">
+              <a:rPr sz="2175" b="1">
                 <a:solidFill>
                   <a:srgbClr val="805400"/>
                 </a:solidFill>
@@ -37373,10 +37767,10 @@
       </p:sp>
       <p:sp>
         <p:nvSpPr>
-          <p:cNvPr id="18" name="프로젝트의 기준이 바뀌었을 때, 재사용 지침도 함께 바뀌었을까?">
+          <p:cNvPr id="25" name="프로젝트의 기준이 바뀌었을 때, 재사용 지침도 함께 바뀌었을까?">
             <a:extLst xmlns:a="http://schemas.openxmlformats.org/drawingml/2006/main">
               <a:ext uri="{FF2B5EF4-FFF2-40B4-BE49-F238E27FC236}">
-                <a16:creationId xmlns:a16="http://schemas.microsoft.com/office/drawing/2014/main" id="{FFD08557-AE56-4B5A-826F-F4B5423062D0}"/>
+                <a16:creationId xmlns:a16="http://schemas.microsoft.com/office/drawing/2014/main" id="{465D3944-ABE5-4E30-BD07-277317FB71E3}"/>
               </a:ext>
             </a:extLst>
           </p:cNvPr>
@@ -37529,10 +37923,357 @@
           </a:p>
         </p:txBody>
       </p:sp>
+      <p:sp>
+        <p:nvSpPr>
+          <p:cNvPr id="26" name="">
+            <a:extLst xmlns:a="http://schemas.openxmlformats.org/drawingml/2006/main">
+              <a:ext uri="{FF2B5EF4-FFF2-40B4-BE49-F238E27FC236}">
+                <a16:creationId xmlns:a16="http://schemas.microsoft.com/office/drawing/2014/main" id="{EFF0B4D5-5F33-493E-AA70-85F123B4CE56}"/>
+              </a:ext>
+            </a:extLst>
+          </p:cNvPr>
+          <p:cNvSpPr>
+            <a:spLocks xmlns:a="http://schemas.openxmlformats.org/drawingml/2006/main" noGrp="1"/>
+          </p:cNvSpPr>
+          <p:nvPr/>
+        </p:nvSpPr>
+        <p:spPr>
+          <a:xfrm xmlns:a="http://schemas.openxmlformats.org/drawingml/2006/main">
+            <a:off x="609600" y="5829300"/>
+            <a:ext cx="10972800" cy="0"/>
+          </a:xfrm>
+          <a:prstGeom xmlns:a="http://schemas.openxmlformats.org/drawingml/2006/main" prst="line">
+            <a:avLst/>
+          </a:prstGeom>
+          <a:noFill xmlns:a="http://schemas.openxmlformats.org/drawingml/2006/main"/>
+          <a:ln xmlns:a="http://schemas.openxmlformats.org/drawingml/2006/main" w="19050">
+            <a:solidFill>
+              <a:srgbClr val="805400"/>
+            </a:solidFill>
+            <a:prstDash val="dash"/>
+          </a:ln>
+        </p:spPr>
+      </p:sp>
+      <p:sp>
+        <p:nvSpPr>
+          <p:cNvPr id="27" name="DEMO-04A  |  가상 설정 · 실제 Repository 변경 이력이 아님">
+            <a:extLst xmlns:a="http://schemas.openxmlformats.org/drawingml/2006/main">
+              <a:ext uri="{FF2B5EF4-FFF2-40B4-BE49-F238E27FC236}">
+                <a16:creationId xmlns:a16="http://schemas.microsoft.com/office/drawing/2014/main" id="{285CD928-1A76-4E6A-BF8F-93D4C79031F3}"/>
+              </a:ext>
+            </a:extLst>
+          </p:cNvPr>
+          <p:cNvSpPr>
+            <a:spLocks xmlns:a="http://schemas.openxmlformats.org/drawingml/2006/main" noGrp="1"/>
+          </p:cNvSpPr>
+          <p:nvPr/>
+        </p:nvSpPr>
+        <p:spPr>
+          <a:xfrm xmlns:a="http://schemas.openxmlformats.org/drawingml/2006/main">
+            <a:off x="609600" y="5915025"/>
+            <a:ext cx="10972800" cy="257175"/>
+          </a:xfrm>
+          <a:prstGeom xmlns:a="http://schemas.openxmlformats.org/drawingml/2006/main" prst="rect">
+            <a:avLst/>
+          </a:prstGeom>
+          <a:noFill xmlns:a="http://schemas.openxmlformats.org/drawingml/2006/main"/>
+          <a:ln xmlns:a="http://schemas.openxmlformats.org/drawingml/2006/main" w="0">
+            <a:noFill/>
+          </a:ln>
+        </p:spPr>
+        <p:txBody>
+          <a:bodyPr xmlns:a="http://schemas.openxmlformats.org/drawingml/2006/main" wrap="none" lIns="0" tIns="0" rIns="0" bIns="0" anchor="ctr">
+            <a:noAutofit/>
+          </a:bodyPr>
+          <a:lstStyle xmlns:a="http://schemas.openxmlformats.org/drawingml/2006/main">
+            <a:defPPr algn="l">
+              <a:defRPr sz="1425" b="1">
+                <a:solidFill>
+                  <a:srgbClr val="805400"/>
+                </a:solidFill>
+                <a:latin typeface="Malgun Gothic"/>
+                <a:ea typeface="Malgun Gothic"/>
+                <a:cs typeface="Malgun Gothic"/>
+              </a:defRPr>
+            </a:defPPr>
+            <a:lvl1pPr algn="l">
+              <a:defRPr sz="1425" b="1">
+                <a:solidFill>
+                  <a:srgbClr val="805400"/>
+                </a:solidFill>
+                <a:latin typeface="Malgun Gothic"/>
+                <a:ea typeface="Malgun Gothic"/>
+                <a:cs typeface="Malgun Gothic"/>
+              </a:defRPr>
+            </a:lvl1pPr>
+            <a:lvl2pPr algn="l">
+              <a:defRPr sz="1425" b="1">
+                <a:solidFill>
+                  <a:srgbClr val="805400"/>
+                </a:solidFill>
+                <a:latin typeface="Malgun Gothic"/>
+                <a:ea typeface="Malgun Gothic"/>
+                <a:cs typeface="Malgun Gothic"/>
+              </a:defRPr>
+            </a:lvl2pPr>
+            <a:lvl3pPr algn="l">
+              <a:defRPr sz="1425" b="1">
+                <a:solidFill>
+                  <a:srgbClr val="805400"/>
+                </a:solidFill>
+                <a:latin typeface="Malgun Gothic"/>
+                <a:ea typeface="Malgun Gothic"/>
+                <a:cs typeface="Malgun Gothic"/>
+              </a:defRPr>
+            </a:lvl3pPr>
+            <a:lvl4pPr algn="l">
+              <a:defRPr sz="1425" b="1">
+                <a:solidFill>
+                  <a:srgbClr val="805400"/>
+                </a:solidFill>
+                <a:latin typeface="Malgun Gothic"/>
+                <a:ea typeface="Malgun Gothic"/>
+                <a:cs typeface="Malgun Gothic"/>
+              </a:defRPr>
+            </a:lvl4pPr>
+            <a:lvl5pPr algn="l">
+              <a:defRPr sz="1425" b="1">
+                <a:solidFill>
+                  <a:srgbClr val="805400"/>
+                </a:solidFill>
+                <a:latin typeface="Malgun Gothic"/>
+                <a:ea typeface="Malgun Gothic"/>
+                <a:cs typeface="Malgun Gothic"/>
+              </a:defRPr>
+            </a:lvl5pPr>
+            <a:lvl6pPr algn="l">
+              <a:defRPr sz="1425" b="1">
+                <a:solidFill>
+                  <a:srgbClr val="805400"/>
+                </a:solidFill>
+                <a:latin typeface="Malgun Gothic"/>
+                <a:ea typeface="Malgun Gothic"/>
+                <a:cs typeface="Malgun Gothic"/>
+              </a:defRPr>
+            </a:lvl6pPr>
+            <a:lvl7pPr algn="l">
+              <a:defRPr sz="1425" b="1">
+                <a:solidFill>
+                  <a:srgbClr val="805400"/>
+                </a:solidFill>
+                <a:latin typeface="Malgun Gothic"/>
+                <a:ea typeface="Malgun Gothic"/>
+                <a:cs typeface="Malgun Gothic"/>
+              </a:defRPr>
+            </a:lvl7pPr>
+            <a:lvl8pPr algn="l">
+              <a:defRPr sz="1425" b="1">
+                <a:solidFill>
+                  <a:srgbClr val="805400"/>
+                </a:solidFill>
+                <a:latin typeface="Malgun Gothic"/>
+                <a:ea typeface="Malgun Gothic"/>
+                <a:cs typeface="Malgun Gothic"/>
+              </a:defRPr>
+            </a:lvl8pPr>
+            <a:lvl9pPr algn="l">
+              <a:defRPr sz="1425" b="1">
+                <a:solidFill>
+                  <a:srgbClr val="805400"/>
+                </a:solidFill>
+                <a:latin typeface="Malgun Gothic"/>
+                <a:ea typeface="Malgun Gothic"/>
+                <a:cs typeface="Malgun Gothic"/>
+              </a:defRPr>
+            </a:lvl9pPr>
+          </a:lstStyle>
+          <a:p xmlns:a="http://schemas.openxmlformats.org/drawingml/2006/main">
+            <a:pPr algn="l">
+              <a:defRPr sz="1425" b="1">
+                <a:solidFill>
+                  <a:srgbClr val="805400"/>
+                </a:solidFill>
+                <a:latin typeface="Malgun Gothic"/>
+                <a:ea typeface="Malgun Gothic"/>
+                <a:cs typeface="Malgun Gothic"/>
+              </a:defRPr>
+            </a:pPr>
+            <a:r>
+              <a:rPr sz="1425" b="1">
+                <a:solidFill>
+                  <a:srgbClr val="805400"/>
+                </a:solidFill>
+                <a:latin typeface="Malgun Gothic"/>
+                <a:ea typeface="Malgun Gothic"/>
+                <a:cs typeface="Malgun Gothic"/>
+              </a:rPr>
+              <a:t>DEMO-04A  |  가상 설정 · 실제 Repository 변경 이력이 아님</a:t>
+            </a:r>
+          </a:p>
+        </p:txBody>
+      </p:sp>
+      <p:sp>
+        <p:nvSpPr>
+          <p:cNvPr id="28" name="두 지침의 범위 비교 · Agent 실행, 테스트 누락 또는 PASS / FAIL 결과를 뜻하지 않음">
+            <a:extLst xmlns:a="http://schemas.openxmlformats.org/drawingml/2006/main">
+              <a:ext uri="{FF2B5EF4-FFF2-40B4-BE49-F238E27FC236}">
+                <a16:creationId xmlns:a16="http://schemas.microsoft.com/office/drawing/2014/main" id="{7626DFFE-7507-4147-9D9C-7BBE306FC806}"/>
+              </a:ext>
+            </a:extLst>
+          </p:cNvPr>
+          <p:cNvSpPr>
+            <a:spLocks xmlns:a="http://schemas.openxmlformats.org/drawingml/2006/main" noGrp="1"/>
+          </p:cNvSpPr>
+          <p:nvPr/>
+        </p:nvSpPr>
+        <p:spPr>
+          <a:xfrm xmlns:a="http://schemas.openxmlformats.org/drawingml/2006/main">
+            <a:off x="609600" y="6191250"/>
+            <a:ext cx="10972800" cy="266700"/>
+          </a:xfrm>
+          <a:prstGeom xmlns:a="http://schemas.openxmlformats.org/drawingml/2006/main" prst="rect">
+            <a:avLst/>
+          </a:prstGeom>
+          <a:noFill xmlns:a="http://schemas.openxmlformats.org/drawingml/2006/main"/>
+          <a:ln xmlns:a="http://schemas.openxmlformats.org/drawingml/2006/main" w="0">
+            <a:noFill/>
+          </a:ln>
+        </p:spPr>
+        <p:txBody>
+          <a:bodyPr xmlns:a="http://schemas.openxmlformats.org/drawingml/2006/main" wrap="none" lIns="0" tIns="0" rIns="0" bIns="0" anchor="ctr">
+            <a:noAutofit/>
+          </a:bodyPr>
+          <a:lstStyle xmlns:a="http://schemas.openxmlformats.org/drawingml/2006/main">
+            <a:defPPr algn="l">
+              <a:defRPr sz="1425" b="0">
+                <a:solidFill>
+                  <a:srgbClr val="4D5A68"/>
+                </a:solidFill>
+                <a:latin typeface="Malgun Gothic"/>
+                <a:ea typeface="Malgun Gothic"/>
+                <a:cs typeface="Malgun Gothic"/>
+              </a:defRPr>
+            </a:defPPr>
+            <a:lvl1pPr algn="l">
+              <a:defRPr sz="1425" b="0">
+                <a:solidFill>
+                  <a:srgbClr val="4D5A68"/>
+                </a:solidFill>
+                <a:latin typeface="Malgun Gothic"/>
+                <a:ea typeface="Malgun Gothic"/>
+                <a:cs typeface="Malgun Gothic"/>
+              </a:defRPr>
+            </a:lvl1pPr>
+            <a:lvl2pPr algn="l">
+              <a:defRPr sz="1425" b="0">
+                <a:solidFill>
+                  <a:srgbClr val="4D5A68"/>
+                </a:solidFill>
+                <a:latin typeface="Malgun Gothic"/>
+                <a:ea typeface="Malgun Gothic"/>
+                <a:cs typeface="Malgun Gothic"/>
+              </a:defRPr>
+            </a:lvl2pPr>
+            <a:lvl3pPr algn="l">
+              <a:defRPr sz="1425" b="0">
+                <a:solidFill>
+                  <a:srgbClr val="4D5A68"/>
+                </a:solidFill>
+                <a:latin typeface="Malgun Gothic"/>
+                <a:ea typeface="Malgun Gothic"/>
+                <a:cs typeface="Malgun Gothic"/>
+              </a:defRPr>
+            </a:lvl3pPr>
+            <a:lvl4pPr algn="l">
+              <a:defRPr sz="1425" b="0">
+                <a:solidFill>
+                  <a:srgbClr val="4D5A68"/>
+                </a:solidFill>
+                <a:latin typeface="Malgun Gothic"/>
+                <a:ea typeface="Malgun Gothic"/>
+                <a:cs typeface="Malgun Gothic"/>
+              </a:defRPr>
+            </a:lvl4pPr>
+            <a:lvl5pPr algn="l">
+              <a:defRPr sz="1425" b="0">
+                <a:solidFill>
+                  <a:srgbClr val="4D5A68"/>
+                </a:solidFill>
+                <a:latin typeface="Malgun Gothic"/>
+                <a:ea typeface="Malgun Gothic"/>
+                <a:cs typeface="Malgun Gothic"/>
+              </a:defRPr>
+            </a:lvl5pPr>
+            <a:lvl6pPr algn="l">
+              <a:defRPr sz="1425" b="0">
+                <a:solidFill>
+                  <a:srgbClr val="4D5A68"/>
+                </a:solidFill>
+                <a:latin typeface="Malgun Gothic"/>
+                <a:ea typeface="Malgun Gothic"/>
+                <a:cs typeface="Malgun Gothic"/>
+              </a:defRPr>
+            </a:lvl6pPr>
+            <a:lvl7pPr algn="l">
+              <a:defRPr sz="1425" b="0">
+                <a:solidFill>
+                  <a:srgbClr val="4D5A68"/>
+                </a:solidFill>
+                <a:latin typeface="Malgun Gothic"/>
+                <a:ea typeface="Malgun Gothic"/>
+                <a:cs typeface="Malgun Gothic"/>
+              </a:defRPr>
+            </a:lvl7pPr>
+            <a:lvl8pPr algn="l">
+              <a:defRPr sz="1425" b="0">
+                <a:solidFill>
+                  <a:srgbClr val="4D5A68"/>
+                </a:solidFill>
+                <a:latin typeface="Malgun Gothic"/>
+                <a:ea typeface="Malgun Gothic"/>
+                <a:cs typeface="Malgun Gothic"/>
+              </a:defRPr>
+            </a:lvl8pPr>
+            <a:lvl9pPr algn="l">
+              <a:defRPr sz="1425" b="0">
+                <a:solidFill>
+                  <a:srgbClr val="4D5A68"/>
+                </a:solidFill>
+                <a:latin typeface="Malgun Gothic"/>
+                <a:ea typeface="Malgun Gothic"/>
+                <a:cs typeface="Malgun Gothic"/>
+              </a:defRPr>
+            </a:lvl9pPr>
+          </a:lstStyle>
+          <a:p xmlns:a="http://schemas.openxmlformats.org/drawingml/2006/main">
+            <a:pPr algn="l">
+              <a:defRPr sz="1425" b="0">
+                <a:solidFill>
+                  <a:srgbClr val="4D5A68"/>
+                </a:solidFill>
+                <a:latin typeface="Malgun Gothic"/>
+                <a:ea typeface="Malgun Gothic"/>
+                <a:cs typeface="Malgun Gothic"/>
+              </a:defRPr>
+            </a:pPr>
+            <a:r>
+              <a:rPr sz="1425" b="0">
+                <a:solidFill>
+                  <a:srgbClr val="4D5A68"/>
+                </a:solidFill>
+                <a:latin typeface="Malgun Gothic"/>
+                <a:ea typeface="Malgun Gothic"/>
+                <a:cs typeface="Malgun Gothic"/>
+              </a:rPr>
+              <a:t>두 지침의 범위 비교 · Agent 실행, 테스트 누락 또는 PASS / FAIL 결과를 뜻하지 않음</a:t>
+            </a:r>
+          </a:p>
+        </p:txBody>
+      </p:sp>
     </p:spTree>
     <p:extLst>
       <p:ext uri="{BB962C8B-B14F-4D97-AF65-F5344CB8AC3E}">
-        <p14:creationId xmlns:p14="http://schemas.microsoft.com/office/powerpoint/2010/main" val="587500346"/>
+        <p14:creationId xmlns:p14="http://schemas.microsoft.com/office/powerpoint/2010/main" val="1330650917"/>
       </p:ext>
     </p:extLst>
   </p:cSld>
@@ -37563,7 +38304,7 @@
           <p:cNvPr id="15" name="ACT 4 · CONCEPTUAL / 가상 사례">
             <a:extLst xmlns:a="http://schemas.openxmlformats.org/drawingml/2006/main">
               <a:ext uri="{FF2B5EF4-FFF2-40B4-BE49-F238E27FC236}">
-                <a16:creationId xmlns:a16="http://schemas.microsoft.com/office/drawing/2014/main" id="{A95229B5-A4B4-4935-9B56-505B506F136D}"/>
+                <a16:creationId xmlns:a16="http://schemas.microsoft.com/office/drawing/2014/main" id="{6A573A74-1D22-4A8B-AFAC-5BDB05910A75}"/>
               </a:ext>
             </a:extLst>
           </p:cNvPr>
@@ -37721,7 +38462,7 @@
           <p:cNvPr id="2" name="S58">
             <a:extLst xmlns:a="http://schemas.openxmlformats.org/drawingml/2006/main">
               <a:ext uri="{FF2B5EF4-FFF2-40B4-BE49-F238E27FC236}">
-                <a16:creationId xmlns:a16="http://schemas.microsoft.com/office/drawing/2014/main" id="{7B597993-10B9-4738-86F6-F5C91050F1E6}"/>
+                <a16:creationId xmlns:a16="http://schemas.microsoft.com/office/drawing/2014/main" id="{31B56C98-6F6A-4BB2-A233-891DA78AB3C0}"/>
               </a:ext>
             </a:extLst>
           </p:cNvPr>
@@ -37879,7 +38620,7 @@
           <p:cNvPr id="3" name="Task 해결과 System 문제는 다르다">
             <a:extLst xmlns:a="http://schemas.openxmlformats.org/drawingml/2006/main">
               <a:ext uri="{FF2B5EF4-FFF2-40B4-BE49-F238E27FC236}">
-                <a16:creationId xmlns:a16="http://schemas.microsoft.com/office/drawing/2014/main" id="{7DDB6603-F5A6-49BF-BD25-CC71BD41F1FE}"/>
+                <a16:creationId xmlns:a16="http://schemas.microsoft.com/office/drawing/2014/main" id="{CB97D7DF-46CE-4688-9CC5-1E385AED3D65}"/>
               </a:ext>
             </a:extLst>
           </p:cNvPr>
@@ -38037,7 +38778,7 @@
           <p:cNvPr id="4" name="">
             <a:extLst xmlns:a="http://schemas.openxmlformats.org/drawingml/2006/main">
               <a:ext uri="{FF2B5EF4-FFF2-40B4-BE49-F238E27FC236}">
-                <a16:creationId xmlns:a16="http://schemas.microsoft.com/office/drawing/2014/main" id="{E990D72F-C3DF-4837-A767-22E5579566B8}"/>
+                <a16:creationId xmlns:a16="http://schemas.microsoft.com/office/drawing/2014/main" id="{235A27DB-F571-4081-B5E0-575049B0CD52}"/>
               </a:ext>
             </a:extLst>
           </p:cNvPr>
@@ -38068,7 +38809,7 @@
           <p:cNvPr id="5" name="DEMO-04A · 이번 요청과 재사용 지침의 범위 비교">
             <a:extLst xmlns:a="http://schemas.openxmlformats.org/drawingml/2006/main">
               <a:ext uri="{FF2B5EF4-FFF2-40B4-BE49-F238E27FC236}">
-                <a16:creationId xmlns:a16="http://schemas.microsoft.com/office/drawing/2014/main" id="{D095A335-776B-4F2C-B8B8-272FD01BAF7B}"/>
+                <a16:creationId xmlns:a16="http://schemas.microsoft.com/office/drawing/2014/main" id="{747AD0A6-BB64-4DFE-AB68-5F9218E227F3}"/>
               </a:ext>
             </a:extLst>
           </p:cNvPr>
@@ -38226,7 +38967,7 @@
           <p:cNvPr id="6" name="아래는 가능한 대응이다. 실제 실행·복구 성공·검증 누락을 관찰한 결과가 아니다.">
             <a:extLst xmlns:a="http://schemas.openxmlformats.org/drawingml/2006/main">
               <a:ext uri="{FF2B5EF4-FFF2-40B4-BE49-F238E27FC236}">
-                <a16:creationId xmlns:a16="http://schemas.microsoft.com/office/drawing/2014/main" id="{970C4B44-0963-462C-9CFB-689E389A5F5C}"/>
+                <a16:creationId xmlns:a16="http://schemas.microsoft.com/office/drawing/2014/main" id="{CA0DE306-E558-4766-A3CF-A0D69BFF9E7D}"/>
               </a:ext>
             </a:extLst>
           </p:cNvPr>
@@ -38384,7 +39125,7 @@
           <p:cNvPr id="7" name="이번 요청에 “통합 테스트도 확인해 줘”를 더한다면?">
             <a:extLst xmlns:a="http://schemas.openxmlformats.org/drawingml/2006/main">
               <a:ext uri="{FF2B5EF4-FFF2-40B4-BE49-F238E27FC236}">
-                <a16:creationId xmlns:a16="http://schemas.microsoft.com/office/drawing/2014/main" id="{703870D6-BE1A-42A5-862E-B2B7894B302F}"/>
+                <a16:creationId xmlns:a16="http://schemas.microsoft.com/office/drawing/2014/main" id="{91C0F5C3-0EB5-42E7-BB25-C29162978C6F}"/>
               </a:ext>
             </a:extLst>
           </p:cNvPr>
@@ -38542,7 +39283,7 @@
           <p:cNvPr id="8" name="이번 Task">
             <a:extLst xmlns:a="http://schemas.openxmlformats.org/drawingml/2006/main">
               <a:ext uri="{FF2B5EF4-FFF2-40B4-BE49-F238E27FC236}">
-                <a16:creationId xmlns:a16="http://schemas.microsoft.com/office/drawing/2014/main" id="{56D2ECB3-1D2A-4F4B-8C4B-89CE1B5672FC}"/>
+                <a16:creationId xmlns:a16="http://schemas.microsoft.com/office/drawing/2014/main" id="{C3F8E155-EC3C-4928-A6BF-2C1FC2122788}"/>
               </a:ext>
             </a:extLst>
           </p:cNvPr>
@@ -38700,7 +39441,7 @@
           <p:cNvPr id="9" name="다음 Task가 읽을 Workflow">
             <a:extLst xmlns:a="http://schemas.openxmlformats.org/drawingml/2006/main">
               <a:ext uri="{FF2B5EF4-FFF2-40B4-BE49-F238E27FC236}">
-                <a16:creationId xmlns:a16="http://schemas.microsoft.com/office/drawing/2014/main" id="{9A1FF277-CA68-4F46-AE47-26A61A8D8F4D}"/>
+                <a16:creationId xmlns:a16="http://schemas.microsoft.com/office/drawing/2014/main" id="{A133555C-0B35-4179-83A4-C7FF99105264}"/>
               </a:ext>
             </a:extLst>
           </p:cNvPr>
@@ -38858,7 +39599,7 @@
           <p:cNvPr id="10" name="">
             <a:extLst xmlns:a="http://schemas.openxmlformats.org/drawingml/2006/main">
               <a:ext uri="{FF2B5EF4-FFF2-40B4-BE49-F238E27FC236}">
-                <a16:creationId xmlns:a16="http://schemas.microsoft.com/office/drawing/2014/main" id="{506BE2AE-92FA-4D67-947E-221DE2D7985C}"/>
+                <a16:creationId xmlns:a16="http://schemas.microsoft.com/office/drawing/2014/main" id="{F485737B-E3D4-4EA4-9225-BD7882AAC3C2}"/>
               </a:ext>
             </a:extLst>
           </p:cNvPr>
@@ -38889,7 +39630,7 @@
           <p:cNvPr id="11" name="">
             <a:extLst xmlns:a="http://schemas.openxmlformats.org/drawingml/2006/main">
               <a:ext uri="{FF2B5EF4-FFF2-40B4-BE49-F238E27FC236}">
-                <a16:creationId xmlns:a16="http://schemas.microsoft.com/office/drawing/2014/main" id="{793A4FA7-F335-439A-A47B-0CDA2C0C1709}"/>
+                <a16:creationId xmlns:a16="http://schemas.microsoft.com/office/drawing/2014/main" id="{B32F8946-850F-4DEE-BB47-CA482F4FE054}"/>
               </a:ext>
             </a:extLst>
           </p:cNvPr>
@@ -38920,7 +39661,7 @@
           <p:cNvPr id="12" name="단위 + 통합 테스트를&#10;확인하도록 요청 가능">
             <a:extLst xmlns:a="http://schemas.openxmlformats.org/drawingml/2006/main">
               <a:ext uri="{FF2B5EF4-FFF2-40B4-BE49-F238E27FC236}">
-                <a16:creationId xmlns:a16="http://schemas.microsoft.com/office/drawing/2014/main" id="{2EBAD7D6-39BB-4604-8A04-66EADDA5C5C9}"/>
+                <a16:creationId xmlns:a16="http://schemas.microsoft.com/office/drawing/2014/main" id="{D7A71459-B7B9-4C94-B597-1E5575505BE1}"/>
               </a:ext>
             </a:extLst>
           </p:cNvPr>
@@ -39101,7 +39842,7 @@
           <p:cNvPr id="13" name="여전히&#10;단위 테스트만 지시">
             <a:extLst xmlns:a="http://schemas.openxmlformats.org/drawingml/2006/main">
               <a:ext uri="{FF2B5EF4-FFF2-40B4-BE49-F238E27FC236}">
-                <a16:creationId xmlns:a16="http://schemas.microsoft.com/office/drawing/2014/main" id="{83895100-BFA4-4B12-B36A-798266859D01}"/>
+                <a16:creationId xmlns:a16="http://schemas.microsoft.com/office/drawing/2014/main" id="{6AFFA6AE-0CDF-4882-B24E-F2B0F4015AA3}"/>
               </a:ext>
             </a:extLst>
           </p:cNvPr>
@@ -39282,7 +40023,7 @@
           <p:cNvPr id="14" name="이번 답을 보정해도, 재사용 절차는 그대로일 수 있다.">
             <a:extLst xmlns:a="http://schemas.openxmlformats.org/drawingml/2006/main">
               <a:ext uri="{FF2B5EF4-FFF2-40B4-BE49-F238E27FC236}">
-                <a16:creationId xmlns:a16="http://schemas.microsoft.com/office/drawing/2014/main" id="{8AF0D0BD-25A3-45A2-B261-B9DDF9A631F0}"/>
+                <a16:creationId xmlns:a16="http://schemas.microsoft.com/office/drawing/2014/main" id="{4737060C-F64E-42F6-B5FE-D39C1E249506}"/>
               </a:ext>
             </a:extLst>
           </p:cNvPr>
@@ -39438,7 +40179,7 @@
     </p:spTree>
     <p:extLst>
       <p:ext uri="{BB962C8B-B14F-4D97-AF65-F5344CB8AC3E}">
-        <p14:creationId xmlns:p14="http://schemas.microsoft.com/office/powerpoint/2010/main" val="1662563015"/>
+        <p14:creationId xmlns:p14="http://schemas.microsoft.com/office/powerpoint/2010/main" val="211968302"/>
       </p:ext>
     </p:extLst>
   </p:cSld>
@@ -39469,7 +40210,7 @@
           <p:cNvPr id="18" name="ACT 4 · CONCEPTUAL / 대응 범위 비교">
             <a:extLst xmlns:a="http://schemas.openxmlformats.org/drawingml/2006/main">
               <a:ext uri="{FF2B5EF4-FFF2-40B4-BE49-F238E27FC236}">
-                <a16:creationId xmlns:a16="http://schemas.microsoft.com/office/drawing/2014/main" id="{B8EAA1DD-0B51-425D-93E9-5D2F2AA794E5}"/>
+                <a16:creationId xmlns:a16="http://schemas.microsoft.com/office/drawing/2014/main" id="{A6F5CD11-3B44-4719-BC8F-6BC6235F3C24}"/>
               </a:ext>
             </a:extLst>
           </p:cNvPr>
@@ -39627,7 +40368,7 @@
           <p:cNvPr id="2" name="S59">
             <a:extLst xmlns:a="http://schemas.openxmlformats.org/drawingml/2006/main">
               <a:ext uri="{FF2B5EF4-FFF2-40B4-BE49-F238E27FC236}">
-                <a16:creationId xmlns:a16="http://schemas.microsoft.com/office/drawing/2014/main" id="{82833E5D-9C8D-4F32-9C4D-89A8E7703F79}"/>
+                <a16:creationId xmlns:a16="http://schemas.microsoft.com/office/drawing/2014/main" id="{E3F81CC9-4238-456A-91AD-C6BFB5B7204B}"/>
               </a:ext>
             </a:extLst>
           </p:cNvPr>
@@ -39785,7 +40526,7 @@
           <p:cNvPr id="3" name="원인에 맞는 Layer를 고르기">
             <a:extLst xmlns:a="http://schemas.openxmlformats.org/drawingml/2006/main">
               <a:ext uri="{FF2B5EF4-FFF2-40B4-BE49-F238E27FC236}">
-                <a16:creationId xmlns:a16="http://schemas.microsoft.com/office/drawing/2014/main" id="{D298B89A-72FD-4356-9FA2-3B53C85279CD}"/>
+                <a16:creationId xmlns:a16="http://schemas.microsoft.com/office/drawing/2014/main" id="{582E68E1-39C7-439C-B6B2-4773CC8B4DD1}"/>
               </a:ext>
             </a:extLst>
           </p:cNvPr>
@@ -39943,7 +40684,7 @@
           <p:cNvPr id="4" name="">
             <a:extLst xmlns:a="http://schemas.openxmlformats.org/drawingml/2006/main">
               <a:ext uri="{FF2B5EF4-FFF2-40B4-BE49-F238E27FC236}">
-                <a16:creationId xmlns:a16="http://schemas.microsoft.com/office/drawing/2014/main" id="{5B9D62EE-6F1D-470D-AEE6-B929556D38E5}"/>
+                <a16:creationId xmlns:a16="http://schemas.microsoft.com/office/drawing/2014/main" id="{1BA53CA2-D8D3-4536-83C0-FF35E3398CDD}"/>
               </a:ext>
             </a:extLst>
           </p:cNvPr>
@@ -39974,7 +40715,7 @@
           <p:cNvPr id="5" name="DEMO-04A · DEMO-11 · 가상 사례의 선택지">
             <a:extLst xmlns:a="http://schemas.openxmlformats.org/drawingml/2006/main">
               <a:ext uri="{FF2B5EF4-FFF2-40B4-BE49-F238E27FC236}">
-                <a16:creationId xmlns:a16="http://schemas.microsoft.com/office/drawing/2014/main" id="{0D4E96FA-C050-43BE-B209-9CA33A042BE4}"/>
+                <a16:creationId xmlns:a16="http://schemas.microsoft.com/office/drawing/2014/main" id="{C4D6A558-8073-4668-804C-0EB4924DF732}"/>
               </a:ext>
             </a:extLst>
           </p:cNvPr>
@@ -40132,7 +40873,7 @@
           <p:cNvPr id="6" name="Workflow가 원인으로 확인된 경우의 판단이며, 모든 문제의 정답은 아니다.">
             <a:extLst xmlns:a="http://schemas.openxmlformats.org/drawingml/2006/main">
               <a:ext uri="{FF2B5EF4-FFF2-40B4-BE49-F238E27FC236}">
-                <a16:creationId xmlns:a16="http://schemas.microsoft.com/office/drawing/2014/main" id="{C579A15D-5125-49FE-A2F9-C7AE7765A3A3}"/>
+                <a16:creationId xmlns:a16="http://schemas.microsoft.com/office/drawing/2014/main" id="{3E8038F1-3B69-4F0A-BE1C-24F500F3E654}"/>
               </a:ext>
             </a:extLst>
           </p:cNvPr>
@@ -40290,7 +41031,7 @@
           <p:cNvPr id="7" name="무엇을 바꾸면 다음 작업에도 반영될까?">
             <a:extLst xmlns:a="http://schemas.openxmlformats.org/drawingml/2006/main">
               <a:ext uri="{FF2B5EF4-FFF2-40B4-BE49-F238E27FC236}">
-                <a16:creationId xmlns:a16="http://schemas.microsoft.com/office/drawing/2014/main" id="{BA8A0B05-E23A-4897-9F53-F10ED816D456}"/>
+                <a16:creationId xmlns:a16="http://schemas.microsoft.com/office/drawing/2014/main" id="{E884FE70-6D44-4600-BEFE-E11DC443FEE7}"/>
               </a:ext>
             </a:extLst>
           </p:cNvPr>
@@ -40448,7 +41189,7 @@
           <p:cNvPr id="8" name="">
             <a:extLst xmlns:a="http://schemas.openxmlformats.org/drawingml/2006/main">
               <a:ext uri="{FF2B5EF4-FFF2-40B4-BE49-F238E27FC236}">
-                <a16:creationId xmlns:a16="http://schemas.microsoft.com/office/drawing/2014/main" id="{AF9AA6B4-8443-4290-908F-4479F4F39135}"/>
+                <a16:creationId xmlns:a16="http://schemas.microsoft.com/office/drawing/2014/main" id="{439455CA-7560-4A0E-92CF-9C6C10BB4B0A}"/>
               </a:ext>
             </a:extLst>
           </p:cNvPr>
@@ -40479,7 +41220,7 @@
           <p:cNvPr id="9" name="이번 Prompt 보정">
             <a:extLst xmlns:a="http://schemas.openxmlformats.org/drawingml/2006/main">
               <a:ext uri="{FF2B5EF4-FFF2-40B4-BE49-F238E27FC236}">
-                <a16:creationId xmlns:a16="http://schemas.microsoft.com/office/drawing/2014/main" id="{71896001-93EF-4DAA-905F-EB1C4FC2CE67}"/>
+                <a16:creationId xmlns:a16="http://schemas.microsoft.com/office/drawing/2014/main" id="{C9804D06-111C-4A05-8E74-0B8807A03EDC}"/>
               </a:ext>
             </a:extLst>
           </p:cNvPr>
@@ -40637,7 +41378,7 @@
           <p:cNvPr id="10" name="현재 Task의 요청 범위를 넓힌다">
             <a:extLst xmlns:a="http://schemas.openxmlformats.org/drawingml/2006/main">
               <a:ext uri="{FF2B5EF4-FFF2-40B4-BE49-F238E27FC236}">
-                <a16:creationId xmlns:a16="http://schemas.microsoft.com/office/drawing/2014/main" id="{606C35C4-D6C1-467C-BE4D-1673BECBE43E}"/>
+                <a16:creationId xmlns:a16="http://schemas.microsoft.com/office/drawing/2014/main" id="{23335579-90C0-4432-AFB4-7652EA8DDAD8}"/>
               </a:ext>
             </a:extLst>
           </p:cNvPr>
@@ -40795,7 +41536,7 @@
           <p:cNvPr id="11" name="">
             <a:extLst xmlns:a="http://schemas.openxmlformats.org/drawingml/2006/main">
               <a:ext uri="{FF2B5EF4-FFF2-40B4-BE49-F238E27FC236}">
-                <a16:creationId xmlns:a16="http://schemas.microsoft.com/office/drawing/2014/main" id="{D2106E99-A5FF-490C-AA13-111B2D00FB00}"/>
+                <a16:creationId xmlns:a16="http://schemas.microsoft.com/office/drawing/2014/main" id="{876D5D1A-BA5F-43C7-B31B-C0A0517E74FE}"/>
               </a:ext>
             </a:extLst>
           </p:cNvPr>
@@ -40826,7 +41567,7 @@
           <p:cNvPr id="12" name="전역 규칙 추가">
             <a:extLst xmlns:a="http://schemas.openxmlformats.org/drawingml/2006/main">
               <a:ext uri="{FF2B5EF4-FFF2-40B4-BE49-F238E27FC236}">
-                <a16:creationId xmlns:a16="http://schemas.microsoft.com/office/drawing/2014/main" id="{EDAD358B-B4B9-4D30-8460-F0ED80F45FCB}"/>
+                <a16:creationId xmlns:a16="http://schemas.microsoft.com/office/drawing/2014/main" id="{7E667364-46BB-49C1-A8A0-CCE8F8F6A7E7}"/>
               </a:ext>
             </a:extLst>
           </p:cNvPr>
@@ -40984,7 +41725,7 @@
           <p:cNvPr id="13" name="다른 지침과 중복·충돌할 수 있다">
             <a:extLst xmlns:a="http://schemas.openxmlformats.org/drawingml/2006/main">
               <a:ext uri="{FF2B5EF4-FFF2-40B4-BE49-F238E27FC236}">
-                <a16:creationId xmlns:a16="http://schemas.microsoft.com/office/drawing/2014/main" id="{5CD7552A-E995-447B-BCC1-C584305998C8}"/>
+                <a16:creationId xmlns:a16="http://schemas.microsoft.com/office/drawing/2014/main" id="{F11038BF-E908-457F-AC76-2F37FE535BC4}"/>
               </a:ext>
             </a:extLst>
           </p:cNvPr>
@@ -41142,7 +41883,7 @@
           <p:cNvPr id="14" name="">
             <a:extLst xmlns:a="http://schemas.openxmlformats.org/drawingml/2006/main">
               <a:ext uri="{FF2B5EF4-FFF2-40B4-BE49-F238E27FC236}">
-                <a16:creationId xmlns:a16="http://schemas.microsoft.com/office/drawing/2014/main" id="{843EC50F-A16B-4ABF-8B99-9D202B60ADA9}"/>
+                <a16:creationId xmlns:a16="http://schemas.microsoft.com/office/drawing/2014/main" id="{75470971-5B4A-4C54-802C-3772BDFFA76C}"/>
               </a:ext>
             </a:extLst>
           </p:cNvPr>
@@ -41173,7 +41914,7 @@
           <p:cNvPr id="15" name="원인인 Workflow 갱신">
             <a:extLst xmlns:a="http://schemas.openxmlformats.org/drawingml/2006/main">
               <a:ext uri="{FF2B5EF4-FFF2-40B4-BE49-F238E27FC236}">
-                <a16:creationId xmlns:a16="http://schemas.microsoft.com/office/drawing/2014/main" id="{2D3BF4A5-5D84-416E-AB18-3D25D028B4C9}"/>
+                <a16:creationId xmlns:a16="http://schemas.microsoft.com/office/drawing/2014/main" id="{601169CD-9D77-454A-B1D0-56CC62050114}"/>
               </a:ext>
             </a:extLst>
           </p:cNvPr>
@@ -41331,7 +42072,7 @@
           <p:cNvPr id="16" name="다음 Task가 재사용할 절차를 바꾼다">
             <a:extLst xmlns:a="http://schemas.openxmlformats.org/drawingml/2006/main">
               <a:ext uri="{FF2B5EF4-FFF2-40B4-BE49-F238E27FC236}">
-                <a16:creationId xmlns:a16="http://schemas.microsoft.com/office/drawing/2014/main" id="{D5FE95C9-054A-4945-8C15-48989ECBC8D7}"/>
+                <a16:creationId xmlns:a16="http://schemas.microsoft.com/office/drawing/2014/main" id="{252B9B41-EA50-4566-B15F-EC5258F47FEA}"/>
               </a:ext>
             </a:extLst>
           </p:cNvPr>
@@ -41489,7 +42230,7 @@
           <p:cNvPr id="17" name="선택 기준: 원인이 있는 곳과 변경할 곳이 맞는가?">
             <a:extLst xmlns:a="http://schemas.openxmlformats.org/drawingml/2006/main">
               <a:ext uri="{FF2B5EF4-FFF2-40B4-BE49-F238E27FC236}">
-                <a16:creationId xmlns:a16="http://schemas.microsoft.com/office/drawing/2014/main" id="{56D847C8-F04B-4FD4-97B4-4F95296D6867}"/>
+                <a16:creationId xmlns:a16="http://schemas.microsoft.com/office/drawing/2014/main" id="{014EA4BB-5F94-4375-BAC9-32B7CAC66928}"/>
               </a:ext>
             </a:extLst>
           </p:cNvPr>
@@ -41645,7 +42386,7 @@
     </p:spTree>
     <p:extLst>
       <p:ext uri="{BB962C8B-B14F-4D97-AF65-F5344CB8AC3E}">
-        <p14:creationId xmlns:p14="http://schemas.microsoft.com/office/powerpoint/2010/main" val="234179483"/>
+        <p14:creationId xmlns:p14="http://schemas.microsoft.com/office/powerpoint/2010/main" val="2072535407"/>
       </p:ext>
     </p:extLst>
   </p:cSld>
@@ -41676,7 +42417,7 @@
           <p:cNvPr id="22" name="ACT 4 · CONCEPTUAL / 원인 후보">
             <a:extLst xmlns:a="http://schemas.openxmlformats.org/drawingml/2006/main">
               <a:ext uri="{FF2B5EF4-FFF2-40B4-BE49-F238E27FC236}">
-                <a16:creationId xmlns:a16="http://schemas.microsoft.com/office/drawing/2014/main" id="{CD1BB30A-DC07-4BD1-AA5E-EB2B6D712B29}"/>
+                <a16:creationId xmlns:a16="http://schemas.microsoft.com/office/drawing/2014/main" id="{5E003B09-0375-4102-82F2-64D4104C0220}"/>
               </a:ext>
             </a:extLst>
           </p:cNvPr>
@@ -41834,7 +42575,7 @@
           <p:cNvPr id="2" name="S60">
             <a:extLst xmlns:a="http://schemas.openxmlformats.org/drawingml/2006/main">
               <a:ext uri="{FF2B5EF4-FFF2-40B4-BE49-F238E27FC236}">
-                <a16:creationId xmlns:a16="http://schemas.microsoft.com/office/drawing/2014/main" id="{9EA36383-6CF0-4136-964E-AE8DEA1183EA}"/>
+                <a16:creationId xmlns:a16="http://schemas.microsoft.com/office/drawing/2014/main" id="{0E4BA81A-DDD3-4ADD-8907-A0C53B1EA087}"/>
               </a:ext>
             </a:extLst>
           </p:cNvPr>
@@ -41992,7 +42733,7 @@
           <p:cNvPr id="3" name="실패 지점과 원인 Layer 구분하기">
             <a:extLst xmlns:a="http://schemas.openxmlformats.org/drawingml/2006/main">
               <a:ext uri="{FF2B5EF4-FFF2-40B4-BE49-F238E27FC236}">
-                <a16:creationId xmlns:a16="http://schemas.microsoft.com/office/drawing/2014/main" id="{97848FCE-695C-4599-89DE-34D292DCA4FB}"/>
+                <a16:creationId xmlns:a16="http://schemas.microsoft.com/office/drawing/2014/main" id="{593101AD-05C7-4168-BF24-9E76A6FC9769}"/>
               </a:ext>
             </a:extLst>
           </p:cNvPr>
@@ -42150,7 +42891,7 @@
           <p:cNvPr id="4" name="">
             <a:extLst xmlns:a="http://schemas.openxmlformats.org/drawingml/2006/main">
               <a:ext uri="{FF2B5EF4-FFF2-40B4-BE49-F238E27FC236}">
-                <a16:creationId xmlns:a16="http://schemas.microsoft.com/office/drawing/2014/main" id="{D3E7A5FC-1FD0-4A03-82BE-B74981B4E38E}"/>
+                <a16:creationId xmlns:a16="http://schemas.microsoft.com/office/drawing/2014/main" id="{99F75E17-EA42-4615-B049-366F4F766B43}"/>
               </a:ext>
             </a:extLst>
           </p:cNvPr>
@@ -42181,7 +42922,7 @@
           <p:cNvPr id="5" name="DEMO-11 · 원인을 찾기 위한 교육용 관점">
             <a:extLst xmlns:a="http://schemas.openxmlformats.org/drawingml/2006/main">
               <a:ext uri="{FF2B5EF4-FFF2-40B4-BE49-F238E27FC236}">
-                <a16:creationId xmlns:a16="http://schemas.microsoft.com/office/drawing/2014/main" id="{73BB9592-7225-462F-B7CC-388DF2CCA16A}"/>
+                <a16:creationId xmlns:a16="http://schemas.microsoft.com/office/drawing/2014/main" id="{BCECF3EB-9ECB-43F7-BC8B-30E77BBF0E5F}"/>
               </a:ext>
             </a:extLst>
           </p:cNvPr>
@@ -42339,7 +43080,7 @@
           <p:cNvPr id="6" name="가능한 원인 후보이며, 증상만으로 한 원인을 확정하지 않는다.">
             <a:extLst xmlns:a="http://schemas.openxmlformats.org/drawingml/2006/main">
               <a:ext uri="{FF2B5EF4-FFF2-40B4-BE49-F238E27FC236}">
-                <a16:creationId xmlns:a16="http://schemas.microsoft.com/office/drawing/2014/main" id="{552292F9-1E41-4156-B0DE-B17B30217088}"/>
+                <a16:creationId xmlns:a16="http://schemas.microsoft.com/office/drawing/2014/main" id="{3D09A099-B094-4F3E-AFA7-654FEC76F5D4}"/>
               </a:ext>
             </a:extLst>
           </p:cNvPr>
@@ -42497,7 +43238,7 @@
           <p:cNvPr id="7" name="“요청한 검증이 충분한가?”">
             <a:extLst xmlns:a="http://schemas.openxmlformats.org/drawingml/2006/main">
               <a:ext uri="{FF2B5EF4-FFF2-40B4-BE49-F238E27FC236}">
-                <a16:creationId xmlns:a16="http://schemas.microsoft.com/office/drawing/2014/main" id="{99B2F1A4-3FDB-4525-863C-4D03D26CC2C0}"/>
+                <a16:creationId xmlns:a16="http://schemas.microsoft.com/office/drawing/2014/main" id="{09173D5D-3736-42E3-A70A-F0BF706C3290}"/>
               </a:ext>
             </a:extLst>
           </p:cNvPr>
@@ -42655,7 +43396,7 @@
           <p:cNvPr id="8" name="증상에서 바로 결론으로 가지 않는다">
             <a:extLst xmlns:a="http://schemas.openxmlformats.org/drawingml/2006/main">
               <a:ext uri="{FF2B5EF4-FFF2-40B4-BE49-F238E27FC236}">
-                <a16:creationId xmlns:a16="http://schemas.microsoft.com/office/drawing/2014/main" id="{56EB54E1-A539-4DB2-9E1E-3FCED71B5BAD}"/>
+                <a16:creationId xmlns:a16="http://schemas.microsoft.com/office/drawing/2014/main" id="{C3F2F963-F6A4-4D9C-933B-1F60F87940C3}"/>
               </a:ext>
             </a:extLst>
           </p:cNvPr>
@@ -42813,7 +43554,7 @@
           <p:cNvPr id="9" name="">
             <a:extLst xmlns:a="http://schemas.openxmlformats.org/drawingml/2006/main">
               <a:ext uri="{FF2B5EF4-FFF2-40B4-BE49-F238E27FC236}">
-                <a16:creationId xmlns:a16="http://schemas.microsoft.com/office/drawing/2014/main" id="{9CA3231C-5B15-4CD4-9A3D-31072FC15DFF}"/>
+                <a16:creationId xmlns:a16="http://schemas.microsoft.com/office/drawing/2014/main" id="{10ED57DC-E575-4A79-9531-743C994DE51E}"/>
               </a:ext>
             </a:extLst>
           </p:cNvPr>
@@ -42844,7 +43585,7 @@
           <p:cNvPr id="10" name="Context">
             <a:extLst xmlns:a="http://schemas.openxmlformats.org/drawingml/2006/main">
               <a:ext uri="{FF2B5EF4-FFF2-40B4-BE49-F238E27FC236}">
-                <a16:creationId xmlns:a16="http://schemas.microsoft.com/office/drawing/2014/main" id="{7688491C-B17F-41DF-8CC7-05719792098A}"/>
+                <a16:creationId xmlns:a16="http://schemas.microsoft.com/office/drawing/2014/main" id="{F47AB6FA-7262-4D53-87FB-33D81414BFC5}"/>
               </a:ext>
             </a:extLst>
           </p:cNvPr>
@@ -43002,7 +43743,7 @@
           <p:cNvPr id="11" name="현재 기준이 맞는가?">
             <a:extLst xmlns:a="http://schemas.openxmlformats.org/drawingml/2006/main">
               <a:ext uri="{FF2B5EF4-FFF2-40B4-BE49-F238E27FC236}">
-                <a16:creationId xmlns:a16="http://schemas.microsoft.com/office/drawing/2014/main" id="{A4F378B8-981E-4C58-B383-3D57F2DC201F}"/>
+                <a16:creationId xmlns:a16="http://schemas.microsoft.com/office/drawing/2014/main" id="{87876860-1665-49AB-81C2-574F19711F4A}"/>
               </a:ext>
             </a:extLst>
           </p:cNvPr>
@@ -43160,7 +43901,7 @@
           <p:cNvPr id="12" name="">
             <a:extLst xmlns:a="http://schemas.openxmlformats.org/drawingml/2006/main">
               <a:ext uri="{FF2B5EF4-FFF2-40B4-BE49-F238E27FC236}">
-                <a16:creationId xmlns:a16="http://schemas.microsoft.com/office/drawing/2014/main" id="{6FEA7543-DFDD-4FA8-9C3E-20811588BF16}"/>
+                <a16:creationId xmlns:a16="http://schemas.microsoft.com/office/drawing/2014/main" id="{7083FF59-B55E-46C6-A4DF-88ACC0EC37F0}"/>
               </a:ext>
             </a:extLst>
           </p:cNvPr>
@@ -43191,7 +43932,7 @@
           <p:cNvPr id="13" name="Workflow">
             <a:extLst xmlns:a="http://schemas.openxmlformats.org/drawingml/2006/main">
               <a:ext uri="{FF2B5EF4-FFF2-40B4-BE49-F238E27FC236}">
-                <a16:creationId xmlns:a16="http://schemas.microsoft.com/office/drawing/2014/main" id="{184D951C-0E2B-47CF-954B-C4FD2B38043B}"/>
+                <a16:creationId xmlns:a16="http://schemas.microsoft.com/office/drawing/2014/main" id="{D53B59E9-8275-4C1A-B3A6-2DE008A2B94E}"/>
               </a:ext>
             </a:extLst>
           </p:cNvPr>
@@ -43349,7 +44090,7 @@
           <p:cNvPr id="14" name="어떤 절차를 지시하는가?">
             <a:extLst xmlns:a="http://schemas.openxmlformats.org/drawingml/2006/main">
               <a:ext uri="{FF2B5EF4-FFF2-40B4-BE49-F238E27FC236}">
-                <a16:creationId xmlns:a16="http://schemas.microsoft.com/office/drawing/2014/main" id="{FD67965A-A217-43A3-AF4A-D36ABA69A3A2}"/>
+                <a16:creationId xmlns:a16="http://schemas.microsoft.com/office/drawing/2014/main" id="{54D95E0A-03BF-4B89-8A6A-F9DA6845B3F1}"/>
               </a:ext>
             </a:extLst>
           </p:cNvPr>
@@ -43507,7 +44248,7 @@
           <p:cNvPr id="15" name="">
             <a:extLst xmlns:a="http://schemas.openxmlformats.org/drawingml/2006/main">
               <a:ext uri="{FF2B5EF4-FFF2-40B4-BE49-F238E27FC236}">
-                <a16:creationId xmlns:a16="http://schemas.microsoft.com/office/drawing/2014/main" id="{79ABFBDC-F9DF-43E6-90CB-68FDED1C838F}"/>
+                <a16:creationId xmlns:a16="http://schemas.microsoft.com/office/drawing/2014/main" id="{E0C20C98-697E-41CF-8C01-E63C3BAB304E}"/>
               </a:ext>
             </a:extLst>
           </p:cNvPr>
@@ -43538,7 +44279,7 @@
           <p:cNvPr id="16" name="환경 · 권한">
             <a:extLst xmlns:a="http://schemas.openxmlformats.org/drawingml/2006/main">
               <a:ext uri="{FF2B5EF4-FFF2-40B4-BE49-F238E27FC236}">
-                <a16:creationId xmlns:a16="http://schemas.microsoft.com/office/drawing/2014/main" id="{F3208D20-E90A-4288-95D6-FDB7DADBABFA}"/>
+                <a16:creationId xmlns:a16="http://schemas.microsoft.com/office/drawing/2014/main" id="{C737E78C-8A41-4419-A8EB-6A247D8BB38D}"/>
               </a:ext>
             </a:extLst>
           </p:cNvPr>
@@ -43696,7 +44437,7 @@
           <p:cNvPr id="17" name="실행 조건이 맞는가?">
             <a:extLst xmlns:a="http://schemas.openxmlformats.org/drawingml/2006/main">
               <a:ext uri="{FF2B5EF4-FFF2-40B4-BE49-F238E27FC236}">
-                <a16:creationId xmlns:a16="http://schemas.microsoft.com/office/drawing/2014/main" id="{942DC9DE-D8CE-4FD0-A618-36655C608B45}"/>
+                <a16:creationId xmlns:a16="http://schemas.microsoft.com/office/drawing/2014/main" id="{ADDCF304-3978-4039-9EA4-67B300C3F128}"/>
               </a:ext>
             </a:extLst>
           </p:cNvPr>
@@ -43854,7 +44595,7 @@
           <p:cNvPr id="18" name="">
             <a:extLst xmlns:a="http://schemas.openxmlformats.org/drawingml/2006/main">
               <a:ext uri="{FF2B5EF4-FFF2-40B4-BE49-F238E27FC236}">
-                <a16:creationId xmlns:a16="http://schemas.microsoft.com/office/drawing/2014/main" id="{C5A11B5C-7B3D-491B-8AA4-6765B8D5C3A8}"/>
+                <a16:creationId xmlns:a16="http://schemas.microsoft.com/office/drawing/2014/main" id="{6C297327-B8DC-4A84-A6CC-26CA8D0610A8}"/>
               </a:ext>
             </a:extLst>
           </p:cNvPr>
@@ -43885,7 +44626,7 @@
           <p:cNvPr id="19" name="제품 코드">
             <a:extLst xmlns:a="http://schemas.openxmlformats.org/drawingml/2006/main">
               <a:ext uri="{FF2B5EF4-FFF2-40B4-BE49-F238E27FC236}">
-                <a16:creationId xmlns:a16="http://schemas.microsoft.com/office/drawing/2014/main" id="{BB782E89-3409-4E5F-9DCD-E211FF1D74FB}"/>
+                <a16:creationId xmlns:a16="http://schemas.microsoft.com/office/drawing/2014/main" id="{3D311A04-2CAB-42CB-AEA9-C16614E275F1}"/>
               </a:ext>
             </a:extLst>
           </p:cNvPr>
@@ -44043,7 +44784,7 @@
           <p:cNvPr id="20" name="동작 자체의 문제인가?">
             <a:extLst xmlns:a="http://schemas.openxmlformats.org/drawingml/2006/main">
               <a:ext uri="{FF2B5EF4-FFF2-40B4-BE49-F238E27FC236}">
-                <a16:creationId xmlns:a16="http://schemas.microsoft.com/office/drawing/2014/main" id="{C4F75C14-B789-415D-A0E3-016FB560D4F4}"/>
+                <a16:creationId xmlns:a16="http://schemas.microsoft.com/office/drawing/2014/main" id="{5C2F2B07-2D3E-48B6-A290-1DC208177892}"/>
               </a:ext>
             </a:extLst>
           </p:cNvPr>
@@ -44201,7 +44942,7 @@
           <p:cNvPr id="21" name="확인할 기록부터 찾는다">
             <a:extLst xmlns:a="http://schemas.openxmlformats.org/drawingml/2006/main">
               <a:ext uri="{FF2B5EF4-FFF2-40B4-BE49-F238E27FC236}">
-                <a16:creationId xmlns:a16="http://schemas.microsoft.com/office/drawing/2014/main" id="{55DB406C-2229-44ED-84B9-BF2FDDB51026}"/>
+                <a16:creationId xmlns:a16="http://schemas.microsoft.com/office/drawing/2014/main" id="{8E61243F-82EE-43C2-BC63-2E283A41F134}"/>
               </a:ext>
             </a:extLst>
           </p:cNvPr>
@@ -44357,7 +45098,7 @@
     </p:spTree>
     <p:extLst>
       <p:ext uri="{BB962C8B-B14F-4D97-AF65-F5344CB8AC3E}">
-        <p14:creationId xmlns:p14="http://schemas.microsoft.com/office/powerpoint/2010/main" val="543056541"/>
+        <p14:creationId xmlns:p14="http://schemas.microsoft.com/office/powerpoint/2010/main" val="2102518803"/>
       </p:ext>
     </p:extLst>
   </p:cSld>
@@ -44388,7 +45129,7 @@
           <p:cNvPr id="14" name="ACT 4 · CONCEPTUAL / 가정과 추론">
             <a:extLst xmlns:a="http://schemas.openxmlformats.org/drawingml/2006/main">
               <a:ext uri="{FF2B5EF4-FFF2-40B4-BE49-F238E27FC236}">
-                <a16:creationId xmlns:a16="http://schemas.microsoft.com/office/drawing/2014/main" id="{76FF5CC0-5719-4D16-BFF1-A0A905675FC4}"/>
+                <a16:creationId xmlns:a16="http://schemas.microsoft.com/office/drawing/2014/main" id="{BEEC0963-DAEF-4EC6-BA8D-FD1198085C15}"/>
               </a:ext>
             </a:extLst>
           </p:cNvPr>
@@ -44546,7 +45287,7 @@
           <p:cNvPr id="2" name="S61">
             <a:extLst xmlns:a="http://schemas.openxmlformats.org/drawingml/2006/main">
               <a:ext uri="{FF2B5EF4-FFF2-40B4-BE49-F238E27FC236}">
-                <a16:creationId xmlns:a16="http://schemas.microsoft.com/office/drawing/2014/main" id="{60E7D2CA-92D9-41D3-871E-765AE988E3A4}"/>
+                <a16:creationId xmlns:a16="http://schemas.microsoft.com/office/drawing/2014/main" id="{6C986250-EC02-4C90-AD64-7F0A0C281E13}"/>
               </a:ext>
             </a:extLst>
           </p:cNvPr>
@@ -44704,7 +45445,7 @@
           <p:cNvPr id="3" name="먼저 관찰하고, 그다음 가설을 세운다">
             <a:extLst xmlns:a="http://schemas.openxmlformats.org/drawingml/2006/main">
               <a:ext uri="{FF2B5EF4-FFF2-40B4-BE49-F238E27FC236}">
-                <a16:creationId xmlns:a16="http://schemas.microsoft.com/office/drawing/2014/main" id="{05C9A514-F053-4D78-BD0A-BC243016110C}"/>
+                <a16:creationId xmlns:a16="http://schemas.microsoft.com/office/drawing/2014/main" id="{D7BFE349-AFE2-4B13-9E77-69B8CD69AB5A}"/>
               </a:ext>
             </a:extLst>
           </p:cNvPr>
@@ -44862,7 +45603,7 @@
           <p:cNvPr id="4" name="">
             <a:extLst xmlns:a="http://schemas.openxmlformats.org/drawingml/2006/main">
               <a:ext uri="{FF2B5EF4-FFF2-40B4-BE49-F238E27FC236}">
-                <a16:creationId xmlns:a16="http://schemas.microsoft.com/office/drawing/2014/main" id="{B9EE2C5B-DC51-4C51-8103-FC67B7C76711}"/>
+                <a16:creationId xmlns:a16="http://schemas.microsoft.com/office/drawing/2014/main" id="{8FE509B0-0C1E-44EB-B7C0-296E276F2840}"/>
               </a:ext>
             </a:extLst>
           </p:cNvPr>
@@ -44893,7 +45634,7 @@
           <p:cNvPr id="5" name="DEMO-04A · 구성된 사례의 전제와 원인 가설">
             <a:extLst xmlns:a="http://schemas.openxmlformats.org/drawingml/2006/main">
               <a:ext uri="{FF2B5EF4-FFF2-40B4-BE49-F238E27FC236}">
-                <a16:creationId xmlns:a16="http://schemas.microsoft.com/office/drawing/2014/main" id="{13C9E8F5-3E91-4389-8739-418F5E45B079}"/>
+                <a16:creationId xmlns:a16="http://schemas.microsoft.com/office/drawing/2014/main" id="{A4EC35A0-2BF6-4CA6-940D-26EFE499CD3D}"/>
               </a:ext>
             </a:extLst>
           </p:cNvPr>
@@ -45051,7 +45792,7 @@
           <p:cNvPr id="6" name="가상 설정을 실제 Trial 관찰로 표현하지 않는다. 실행 결과는 아직 없다.">
             <a:extLst xmlns:a="http://schemas.openxmlformats.org/drawingml/2006/main">
               <a:ext uri="{FF2B5EF4-FFF2-40B4-BE49-F238E27FC236}">
-                <a16:creationId xmlns:a16="http://schemas.microsoft.com/office/drawing/2014/main" id="{DD23BE9A-3A12-4D0E-B596-67C20DB0890E}"/>
+                <a16:creationId xmlns:a16="http://schemas.microsoft.com/office/drawing/2014/main" id="{17B1F976-E884-40C1-83A1-C962509BF061}"/>
               </a:ext>
             </a:extLst>
           </p:cNvPr>
@@ -45209,7 +45950,7 @@
           <p:cNvPr id="7" name="사례에 주어진 정보">
             <a:extLst xmlns:a="http://schemas.openxmlformats.org/drawingml/2006/main">
               <a:ext uri="{FF2B5EF4-FFF2-40B4-BE49-F238E27FC236}">
-                <a16:creationId xmlns:a16="http://schemas.microsoft.com/office/drawing/2014/main" id="{8035D89E-295D-4A01-95D2-A55AB4275CC2}"/>
+                <a16:creationId xmlns:a16="http://schemas.microsoft.com/office/drawing/2014/main" id="{FF378455-F168-4761-833C-5E13C9D4A89B}"/>
               </a:ext>
             </a:extLst>
           </p:cNvPr>
@@ -45367,7 +46108,7 @@
           <p:cNvPr id="8" name="확인해야 할 가설">
             <a:extLst xmlns:a="http://schemas.openxmlformats.org/drawingml/2006/main">
               <a:ext uri="{FF2B5EF4-FFF2-40B4-BE49-F238E27FC236}">
-                <a16:creationId xmlns:a16="http://schemas.microsoft.com/office/drawing/2014/main" id="{E0977B98-B842-4010-93E6-2DDF86C47F98}"/>
+                <a16:creationId xmlns:a16="http://schemas.microsoft.com/office/drawing/2014/main" id="{6475E228-9442-479C-A95C-31E7EC3C7F0D}"/>
               </a:ext>
             </a:extLst>
           </p:cNvPr>
@@ -45525,7 +46266,7 @@
           <p:cNvPr id="9" name="">
             <a:extLst xmlns:a="http://schemas.openxmlformats.org/drawingml/2006/main">
               <a:ext uri="{FF2B5EF4-FFF2-40B4-BE49-F238E27FC236}">
-                <a16:creationId xmlns:a16="http://schemas.microsoft.com/office/drawing/2014/main" id="{A2AE628E-FFC2-45CB-A53C-8C506F675807}"/>
+                <a16:creationId xmlns:a16="http://schemas.microsoft.com/office/drawing/2014/main" id="{C071C7D3-5686-4726-9314-65A9951642FB}"/>
               </a:ext>
             </a:extLst>
           </p:cNvPr>
@@ -45556,7 +46297,7 @@
           <p:cNvPr id="10" name="">
             <a:extLst xmlns:a="http://schemas.openxmlformats.org/drawingml/2006/main">
               <a:ext uri="{FF2B5EF4-FFF2-40B4-BE49-F238E27FC236}">
-                <a16:creationId xmlns:a16="http://schemas.microsoft.com/office/drawing/2014/main" id="{F1DA93EB-406C-41AE-B68B-97B232F594A6}"/>
+                <a16:creationId xmlns:a16="http://schemas.microsoft.com/office/drawing/2014/main" id="{AD9EE696-3496-49B8-9FBF-52B3A6F715F2}"/>
               </a:ext>
             </a:extLst>
           </p:cNvPr>
@@ -45587,7 +46328,7 @@
           <p:cNvPr id="11" name="현재 기준: 단위 + 통합&#10;재사용 지침: 단위만">
             <a:extLst xmlns:a="http://schemas.openxmlformats.org/drawingml/2006/main">
               <a:ext uri="{FF2B5EF4-FFF2-40B4-BE49-F238E27FC236}">
-                <a16:creationId xmlns:a16="http://schemas.microsoft.com/office/drawing/2014/main" id="{435A186A-AE9E-4E48-A7C8-AAA2C096E136}"/>
+                <a16:creationId xmlns:a16="http://schemas.microsoft.com/office/drawing/2014/main" id="{0DAF0873-1827-4CC4-842D-AC43FB55804B}"/>
               </a:ext>
             </a:extLst>
           </p:cNvPr>
@@ -45768,7 +46509,7 @@
           <p:cNvPr id="12" name="오래된 Workflow가&#10;문제의 원인일 수 있다">
             <a:extLst xmlns:a="http://schemas.openxmlformats.org/drawingml/2006/main">
               <a:ext uri="{FF2B5EF4-FFF2-40B4-BE49-F238E27FC236}">
-                <a16:creationId xmlns:a16="http://schemas.microsoft.com/office/drawing/2014/main" id="{4F307774-A9CC-409B-9EF8-BBB902C79817}"/>
+                <a16:creationId xmlns:a16="http://schemas.microsoft.com/office/drawing/2014/main" id="{8CF2DB56-CDEB-4A13-AF57-9E129A2CFC79}"/>
               </a:ext>
             </a:extLst>
           </p:cNvPr>
@@ -45949,7 +46690,7 @@
           <p:cNvPr id="13" name="실행 경로와 실제로 읽은 지침을 대조해야 원인을 판단할 수 있다.">
             <a:extLst xmlns:a="http://schemas.openxmlformats.org/drawingml/2006/main">
               <a:ext uri="{FF2B5EF4-FFF2-40B4-BE49-F238E27FC236}">
-                <a16:creationId xmlns:a16="http://schemas.microsoft.com/office/drawing/2014/main" id="{28F0FF9E-8EB7-47D7-82B1-D6F9E4B3FA26}"/>
+                <a16:creationId xmlns:a16="http://schemas.microsoft.com/office/drawing/2014/main" id="{7A4076E0-C1F8-4927-A89F-B5BB95544B05}"/>
               </a:ext>
             </a:extLst>
           </p:cNvPr>
@@ -46105,7 +46846,7 @@
     </p:spTree>
     <p:extLst>
       <p:ext uri="{BB962C8B-B14F-4D97-AF65-F5344CB8AC3E}">
-        <p14:creationId xmlns:p14="http://schemas.microsoft.com/office/powerpoint/2010/main" val="1818459010"/>
+        <p14:creationId xmlns:p14="http://schemas.microsoft.com/office/powerpoint/2010/main" val="524885554"/>
       </p:ext>
     </p:extLst>
   </p:cSld>
@@ -46136,7 +46877,7 @@
           <p:cNvPr id="16" name="ACT 4 · CONCEPTUAL / 원인에 맞는 수정">
             <a:extLst xmlns:a="http://schemas.openxmlformats.org/drawingml/2006/main">
               <a:ext uri="{FF2B5EF4-FFF2-40B4-BE49-F238E27FC236}">
-                <a16:creationId xmlns:a16="http://schemas.microsoft.com/office/drawing/2014/main" id="{1D730BE7-B4BC-4F7B-BBC3-2507AB0707B4}"/>
+                <a16:creationId xmlns:a16="http://schemas.microsoft.com/office/drawing/2014/main" id="{937B49A2-3CE5-4FE2-8D5C-8DFCB4E78B77}"/>
               </a:ext>
             </a:extLst>
           </p:cNvPr>
@@ -46294,7 +47035,7 @@
           <p:cNvPr id="2" name="S62">
             <a:extLst xmlns:a="http://schemas.openxmlformats.org/drawingml/2006/main">
               <a:ext uri="{FF2B5EF4-FFF2-40B4-BE49-F238E27FC236}">
-                <a16:creationId xmlns:a16="http://schemas.microsoft.com/office/drawing/2014/main" id="{2E3B158D-44C5-4902-A1AE-3F285399B1DF}"/>
+                <a16:creationId xmlns:a16="http://schemas.microsoft.com/office/drawing/2014/main" id="{30D18ED8-1815-4949-9299-EB69387A23E2}"/>
               </a:ext>
             </a:extLst>
           </p:cNvPr>
@@ -46452,7 +47193,7 @@
           <p:cNvPr id="3" name="Cause가 지지하는 최소 변경">
             <a:extLst xmlns:a="http://schemas.openxmlformats.org/drawingml/2006/main">
               <a:ext uri="{FF2B5EF4-FFF2-40B4-BE49-F238E27FC236}">
-                <a16:creationId xmlns:a16="http://schemas.microsoft.com/office/drawing/2014/main" id="{F44B45B5-6DC7-47BB-BE6F-77FECCF8C1B8}"/>
+                <a16:creationId xmlns:a16="http://schemas.microsoft.com/office/drawing/2014/main" id="{9F616374-B0B0-462D-BF2D-4E4A03D62C89}"/>
               </a:ext>
             </a:extLst>
           </p:cNvPr>
@@ -46610,7 +47351,7 @@
           <p:cNvPr id="4" name="">
             <a:extLst xmlns:a="http://schemas.openxmlformats.org/drawingml/2006/main">
               <a:ext uri="{FF2B5EF4-FFF2-40B4-BE49-F238E27FC236}">
-                <a16:creationId xmlns:a16="http://schemas.microsoft.com/office/drawing/2014/main" id="{5619DF39-FBCE-492A-BE08-89691F694894}"/>
+                <a16:creationId xmlns:a16="http://schemas.microsoft.com/office/drawing/2014/main" id="{F271DA12-2936-4381-8929-4E82E9BC334B}"/>
               </a:ext>
             </a:extLst>
           </p:cNvPr>
@@ -46641,7 +47382,7 @@
           <p:cNvPr id="5" name="DEMO-04A · 원인이 확인됐다고 가정한 변경 설계">
             <a:extLst xmlns:a="http://schemas.openxmlformats.org/drawingml/2006/main">
               <a:ext uri="{FF2B5EF4-FFF2-40B4-BE49-F238E27FC236}">
-                <a16:creationId xmlns:a16="http://schemas.microsoft.com/office/drawing/2014/main" id="{F6D26239-A845-4505-8DD5-0FD96F6D2ACE}"/>
+                <a16:creationId xmlns:a16="http://schemas.microsoft.com/office/drawing/2014/main" id="{C627BDB5-388F-4968-83F2-1056EC84DB30}"/>
               </a:ext>
             </a:extLst>
           </p:cNvPr>
@@ -46799,7 +47540,7 @@
           <p:cNvPr id="6" name="실제 코드·Skill 수정 또는 실행 결과가 아니다. 관련 없는 규칙은 임의로 바꾸지 않는다.">
             <a:extLst xmlns:a="http://schemas.openxmlformats.org/drawingml/2006/main">
               <a:ext uri="{FF2B5EF4-FFF2-40B4-BE49-F238E27FC236}">
-                <a16:creationId xmlns:a16="http://schemas.microsoft.com/office/drawing/2014/main" id="{D24E1902-9F26-40FA-ACF1-301614B2F672}"/>
+                <a16:creationId xmlns:a16="http://schemas.microsoft.com/office/drawing/2014/main" id="{25FE4A66-D3E9-4EEA-843A-BA873997C179}"/>
               </a:ext>
             </a:extLst>
           </p:cNvPr>
@@ -46957,7 +47698,7 @@
           <p:cNvPr id="7" name="Workflow가 원인으로 확인됐다면">
             <a:extLst xmlns:a="http://schemas.openxmlformats.org/drawingml/2006/main">
               <a:ext uri="{FF2B5EF4-FFF2-40B4-BE49-F238E27FC236}">
-                <a16:creationId xmlns:a16="http://schemas.microsoft.com/office/drawing/2014/main" id="{9B2B4093-7B79-4FA8-8A46-70C2821A4D8F}"/>
+                <a16:creationId xmlns:a16="http://schemas.microsoft.com/office/drawing/2014/main" id="{C9731DEC-4F34-4F6E-853A-A1535784B6B6}"/>
               </a:ext>
             </a:extLst>
           </p:cNvPr>
@@ -47115,7 +47856,7 @@
           <p:cNvPr id="8" name="기존 재사용 지침">
             <a:extLst xmlns:a="http://schemas.openxmlformats.org/drawingml/2006/main">
               <a:ext uri="{FF2B5EF4-FFF2-40B4-BE49-F238E27FC236}">
-                <a16:creationId xmlns:a16="http://schemas.microsoft.com/office/drawing/2014/main" id="{1A7BF349-31CB-43F3-9292-4750744BCF6B}"/>
+                <a16:creationId xmlns:a16="http://schemas.microsoft.com/office/drawing/2014/main" id="{6A023AD3-3ABE-47AF-90BF-F967730A1542}"/>
               </a:ext>
             </a:extLst>
           </p:cNvPr>
@@ -47273,7 +48014,7 @@
           <p:cNvPr id="9" name="갱신할 지침">
             <a:extLst xmlns:a="http://schemas.openxmlformats.org/drawingml/2006/main">
               <a:ext uri="{FF2B5EF4-FFF2-40B4-BE49-F238E27FC236}">
-                <a16:creationId xmlns:a16="http://schemas.microsoft.com/office/drawing/2014/main" id="{D9A06DCF-D784-4904-A66A-EDA7CCF38693}"/>
+                <a16:creationId xmlns:a16="http://schemas.microsoft.com/office/drawing/2014/main" id="{EE70CFA7-68DF-4FF4-AD77-6637A9931BCA}"/>
               </a:ext>
             </a:extLst>
           </p:cNvPr>
@@ -47431,7 +48172,7 @@
           <p:cNvPr id="10" name="">
             <a:extLst xmlns:a="http://schemas.openxmlformats.org/drawingml/2006/main">
               <a:ext uri="{FF2B5EF4-FFF2-40B4-BE49-F238E27FC236}">
-                <a16:creationId xmlns:a16="http://schemas.microsoft.com/office/drawing/2014/main" id="{6A41ED7E-EE70-405E-8196-5CC92A0BB0C5}"/>
+                <a16:creationId xmlns:a16="http://schemas.microsoft.com/office/drawing/2014/main" id="{82F925BB-00FC-4CD6-938E-D961C8EE127D}"/>
               </a:ext>
             </a:extLst>
           </p:cNvPr>
@@ -47462,7 +48203,7 @@
           <p:cNvPr id="11" name="">
             <a:extLst xmlns:a="http://schemas.openxmlformats.org/drawingml/2006/main">
               <a:ext uri="{FF2B5EF4-FFF2-40B4-BE49-F238E27FC236}">
-                <a16:creationId xmlns:a16="http://schemas.microsoft.com/office/drawing/2014/main" id="{24A04920-FC2F-46CA-B750-98A7C5CB7DE3}"/>
+                <a16:creationId xmlns:a16="http://schemas.microsoft.com/office/drawing/2014/main" id="{57FEAB29-7B3F-4722-B49A-36F9BC1B35A6}"/>
               </a:ext>
             </a:extLst>
           </p:cNvPr>
@@ -47493,7 +48234,7 @@
           <p:cNvPr id="12" name="단위 테스트를 확인">
             <a:extLst xmlns:a="http://schemas.openxmlformats.org/drawingml/2006/main">
               <a:ext uri="{FF2B5EF4-FFF2-40B4-BE49-F238E27FC236}">
-                <a16:creationId xmlns:a16="http://schemas.microsoft.com/office/drawing/2014/main" id="{0E081CFA-557F-434F-8618-6AA1DD44B5E7}"/>
+                <a16:creationId xmlns:a16="http://schemas.microsoft.com/office/drawing/2014/main" id="{3FFC6186-6353-4A06-8133-FC0DC97A1AC0}"/>
               </a:ext>
             </a:extLst>
           </p:cNvPr>
@@ -47651,7 +48392,7 @@
           <p:cNvPr id="13" name="">
             <a:extLst xmlns:a="http://schemas.openxmlformats.org/drawingml/2006/main">
               <a:ext uri="{FF2B5EF4-FFF2-40B4-BE49-F238E27FC236}">
-                <a16:creationId xmlns:a16="http://schemas.microsoft.com/office/drawing/2014/main" id="{0F95FD08-E29B-430F-9EA6-969F821C3173}"/>
+                <a16:creationId xmlns:a16="http://schemas.microsoft.com/office/drawing/2014/main" id="{95E68AA5-903A-4F9E-9B2E-8E22FB7C6FE0}"/>
               </a:ext>
             </a:extLst>
           </p:cNvPr>
@@ -47681,7 +48422,7 @@
           <p:cNvPr id="14" name="단위 + 통합 테스트 확인">
             <a:extLst xmlns:a="http://schemas.openxmlformats.org/drawingml/2006/main">
               <a:ext uri="{FF2B5EF4-FFF2-40B4-BE49-F238E27FC236}">
-                <a16:creationId xmlns:a16="http://schemas.microsoft.com/office/drawing/2014/main" id="{EFE9F8A2-874C-4AAE-8537-5A475157A3FD}"/>
+                <a16:creationId xmlns:a16="http://schemas.microsoft.com/office/drawing/2014/main" id="{57C6E49C-F1F9-486E-8113-B921F686584B}"/>
               </a:ext>
             </a:extLst>
           </p:cNvPr>
@@ -47839,7 +48580,7 @@
           <p:cNvPr id="15" name="원인이 뒷받침하는 범위까지 바꾼다.">
             <a:extLst xmlns:a="http://schemas.openxmlformats.org/drawingml/2006/main">
               <a:ext uri="{FF2B5EF4-FFF2-40B4-BE49-F238E27FC236}">
-                <a16:creationId xmlns:a16="http://schemas.microsoft.com/office/drawing/2014/main" id="{5923C2B3-7B52-4FD5-90EF-A0BBB9327076}"/>
+                <a16:creationId xmlns:a16="http://schemas.microsoft.com/office/drawing/2014/main" id="{3BE5DF8E-4530-4D9B-9469-2EF6E1D950C6}"/>
               </a:ext>
             </a:extLst>
           </p:cNvPr>
@@ -47995,7 +48736,7 @@
     </p:spTree>
     <p:extLst>
       <p:ext uri="{BB962C8B-B14F-4D97-AF65-F5344CB8AC3E}">
-        <p14:creationId xmlns:p14="http://schemas.microsoft.com/office/powerpoint/2010/main" val="1717575251"/>
+        <p14:creationId xmlns:p14="http://schemas.microsoft.com/office/powerpoint/2010/main" val="1774240790"/>
       </p:ext>
     </p:extLst>
   </p:cSld>
@@ -48026,7 +48767,7 @@
           <p:cNvPr id="14" name="ACT 4 · CONCEPTUAL / 평가 범위">
             <a:extLst xmlns:a="http://schemas.openxmlformats.org/drawingml/2006/main">
               <a:ext uri="{FF2B5EF4-FFF2-40B4-BE49-F238E27FC236}">
-                <a16:creationId xmlns:a16="http://schemas.microsoft.com/office/drawing/2014/main" id="{2F8CFFDD-C763-4576-8206-E2295E1F474D}"/>
+                <a16:creationId xmlns:a16="http://schemas.microsoft.com/office/drawing/2014/main" id="{AE38D34F-69CB-4837-AAF9-29F7C92DBD25}"/>
               </a:ext>
             </a:extLst>
           </p:cNvPr>
@@ -48184,7 +48925,7 @@
           <p:cNvPr id="2" name="S63">
             <a:extLst xmlns:a="http://schemas.openxmlformats.org/drawingml/2006/main">
               <a:ext uri="{FF2B5EF4-FFF2-40B4-BE49-F238E27FC236}">
-                <a16:creationId xmlns:a16="http://schemas.microsoft.com/office/drawing/2014/main" id="{E943949B-4F86-4BE0-84AB-F6F43683DFB3}"/>
+                <a16:creationId xmlns:a16="http://schemas.microsoft.com/office/drawing/2014/main" id="{88BA1745-DDCE-46CB-900F-858B06FD565A}"/>
               </a:ext>
             </a:extLst>
           </p:cNvPr>
@@ -48342,7 +49083,7 @@
           <p:cNvPr id="3" name="같은 Task의 재실행만으로 충분할까?">
             <a:extLst xmlns:a="http://schemas.openxmlformats.org/drawingml/2006/main">
               <a:ext uri="{FF2B5EF4-FFF2-40B4-BE49-F238E27FC236}">
-                <a16:creationId xmlns:a16="http://schemas.microsoft.com/office/drawing/2014/main" id="{51432A99-DAD2-4110-9FF5-49FBBC50FA90}"/>
+                <a16:creationId xmlns:a16="http://schemas.microsoft.com/office/drawing/2014/main" id="{B3E940BA-F1C2-48CD-B24D-A1D60D5CA162}"/>
               </a:ext>
             </a:extLst>
           </p:cNvPr>
@@ -48500,7 +49241,7 @@
           <p:cNvPr id="4" name="">
             <a:extLst xmlns:a="http://schemas.openxmlformats.org/drawingml/2006/main">
               <a:ext uri="{FF2B5EF4-FFF2-40B4-BE49-F238E27FC236}">
-                <a16:creationId xmlns:a16="http://schemas.microsoft.com/office/drawing/2014/main" id="{3FA7AF29-7E1F-47BA-B765-9E5C9D7D0580}"/>
+                <a16:creationId xmlns:a16="http://schemas.microsoft.com/office/drawing/2014/main" id="{E78683B2-BAF5-4E35-9DFA-D71479F64A7D}"/>
               </a:ext>
             </a:extLst>
           </p:cNvPr>
@@ -48531,7 +49272,7 @@
           <p:cNvPr id="5" name="DEMO-04A · 변경 후 확인할 질문을 설계한 도식">
             <a:extLst xmlns:a="http://schemas.openxmlformats.org/drawingml/2006/main">
               <a:ext uri="{FF2B5EF4-FFF2-40B4-BE49-F238E27FC236}">
-                <a16:creationId xmlns:a16="http://schemas.microsoft.com/office/drawing/2014/main" id="{07F1F22C-7563-4326-A092-FABE761F11AD}"/>
+                <a16:creationId xmlns:a16="http://schemas.microsoft.com/office/drawing/2014/main" id="{9643B169-EF6F-4E87-89A2-CC5F11DADEAE}"/>
               </a:ext>
             </a:extLst>
           </p:cNvPr>
@@ -48689,7 +49430,7 @@
           <p:cNvPr id="6" name="재실행·회귀 테스트 결과는 없다. 두 검증 질문을 구분하는 가상 사례다.">
             <a:extLst xmlns:a="http://schemas.openxmlformats.org/drawingml/2006/main">
               <a:ext uri="{FF2B5EF4-FFF2-40B4-BE49-F238E27FC236}">
-                <a16:creationId xmlns:a16="http://schemas.microsoft.com/office/drawing/2014/main" id="{6ADB5E85-D0B5-4593-B90C-3DED3A0E6DCD}"/>
+                <a16:creationId xmlns:a16="http://schemas.microsoft.com/office/drawing/2014/main" id="{02915B70-71C9-4800-BD75-425FAC876080}"/>
               </a:ext>
             </a:extLst>
           </p:cNvPr>
@@ -48847,7 +49588,7 @@
           <p:cNvPr id="7" name="이번 작업을 다시 확인">
             <a:extLst xmlns:a="http://schemas.openxmlformats.org/drawingml/2006/main">
               <a:ext uri="{FF2B5EF4-FFF2-40B4-BE49-F238E27FC236}">
-                <a16:creationId xmlns:a16="http://schemas.microsoft.com/office/drawing/2014/main" id="{3AE6B2E1-7FF2-4944-B6E8-2351D0DD6828}"/>
+                <a16:creationId xmlns:a16="http://schemas.microsoft.com/office/drawing/2014/main" id="{13612AED-7799-44A6-A036-47B556791E81}"/>
               </a:ext>
             </a:extLst>
           </p:cNvPr>
@@ -49005,7 +49746,7 @@
           <p:cNvPr id="8" name="다른 작업도 확인">
             <a:extLst xmlns:a="http://schemas.openxmlformats.org/drawingml/2006/main">
               <a:ext uri="{FF2B5EF4-FFF2-40B4-BE49-F238E27FC236}">
-                <a16:creationId xmlns:a16="http://schemas.microsoft.com/office/drawing/2014/main" id="{2BA47B7C-676A-4794-82B6-EAA773F653F9}"/>
+                <a16:creationId xmlns:a16="http://schemas.microsoft.com/office/drawing/2014/main" id="{0E01D446-9D98-406E-A7CC-D543BA2CE89C}"/>
               </a:ext>
             </a:extLst>
           </p:cNvPr>
@@ -49163,7 +49904,7 @@
           <p:cNvPr id="9" name="">
             <a:extLst xmlns:a="http://schemas.openxmlformats.org/drawingml/2006/main">
               <a:ext uri="{FF2B5EF4-FFF2-40B4-BE49-F238E27FC236}">
-                <a16:creationId xmlns:a16="http://schemas.microsoft.com/office/drawing/2014/main" id="{DD3CDFE0-B39B-47B1-AD41-029F1A1598BF}"/>
+                <a16:creationId xmlns:a16="http://schemas.microsoft.com/office/drawing/2014/main" id="{BA313BA4-2209-4242-9749-B6DD99855B58}"/>
               </a:ext>
             </a:extLst>
           </p:cNvPr>
@@ -49194,7 +49935,7 @@
           <p:cNvPr id="10" name="">
             <a:extLst xmlns:a="http://schemas.openxmlformats.org/drawingml/2006/main">
               <a:ext uri="{FF2B5EF4-FFF2-40B4-BE49-F238E27FC236}">
-                <a16:creationId xmlns:a16="http://schemas.microsoft.com/office/drawing/2014/main" id="{28285F5B-2A5F-40BA-8E92-D4CE00845722}"/>
+                <a16:creationId xmlns:a16="http://schemas.microsoft.com/office/drawing/2014/main" id="{B836DE0D-9F82-4BC1-A5F6-B1634CC0B001}"/>
               </a:ext>
             </a:extLst>
           </p:cNvPr>
@@ -49225,7 +49966,7 @@
           <p:cNvPr id="11" name="요청했던 검증 범위를&#10;이제 다루는가?">
             <a:extLst xmlns:a="http://schemas.openxmlformats.org/drawingml/2006/main">
               <a:ext uri="{FF2B5EF4-FFF2-40B4-BE49-F238E27FC236}">
-                <a16:creationId xmlns:a16="http://schemas.microsoft.com/office/drawing/2014/main" id="{9698596F-B11C-4C04-88FF-6677A317A4A2}"/>
+                <a16:creationId xmlns:a16="http://schemas.microsoft.com/office/drawing/2014/main" id="{3718A1F7-9DB4-4F34-8C62-EF1681133414}"/>
               </a:ext>
             </a:extLst>
           </p:cNvPr>
@@ -49406,7 +50147,7 @@
           <p:cNvPr id="12" name="바뀐 지침이 다른 작업을&#10;방해하지 않는가?">
             <a:extLst xmlns:a="http://schemas.openxmlformats.org/drawingml/2006/main">
               <a:ext uri="{FF2B5EF4-FFF2-40B4-BE49-F238E27FC236}">
-                <a16:creationId xmlns:a16="http://schemas.microsoft.com/office/drawing/2014/main" id="{257EDBCD-AE80-4E5C-BE9A-DF63CB285738}"/>
+                <a16:creationId xmlns:a16="http://schemas.microsoft.com/office/drawing/2014/main" id="{3FDBEE55-401E-419A-BF88-83FBF19F523A}"/>
               </a:ext>
             </a:extLst>
           </p:cNvPr>
@@ -49587,7 +50328,7 @@
           <p:cNvPr id="13" name="확인할 범위가 다르므로, 두 질문이 모두 필요하다.">
             <a:extLst xmlns:a="http://schemas.openxmlformats.org/drawingml/2006/main">
               <a:ext uri="{FF2B5EF4-FFF2-40B4-BE49-F238E27FC236}">
-                <a16:creationId xmlns:a16="http://schemas.microsoft.com/office/drawing/2014/main" id="{B6768A34-03AE-4EB7-8068-35823FCB6849}"/>
+                <a16:creationId xmlns:a16="http://schemas.microsoft.com/office/drawing/2014/main" id="{F8C74596-2665-486B-A599-31C78F689316}"/>
               </a:ext>
             </a:extLst>
           </p:cNvPr>
@@ -49743,7 +50484,7 @@
     </p:spTree>
     <p:extLst>
       <p:ext uri="{BB962C8B-B14F-4D97-AF65-F5344CB8AC3E}">
-        <p14:creationId xmlns:p14="http://schemas.microsoft.com/office/powerpoint/2010/main" val="1664038353"/>
+        <p14:creationId xmlns:p14="http://schemas.microsoft.com/office/powerpoint/2010/main" val="1199312995"/>
       </p:ext>
     </p:extLst>
   </p:cSld>
